--- a/docs/presentation/Bursary-Bridge_Presentation.pptx
+++ b/docs/presentation/Bursary-Bridge_Presentation.pptx
@@ -512,9 +512,9 @@
             <a:r>
               <a:rPr lang="en-US" dirty="0"/>
               <a:t>CPP Mchunu — 0:20.
-Greet, give the project title in one line, introduce the four of us by name only (the numbers are on the slide — do not read them out).
-Key point: say in one sentence what Bursary-Bridge is — it matches South African students to bursaries they qualify for, and helps funders administer the applications.
-Terminology: "matching", "funding organisations". Then move straight to the background.</a:t>
+Say hello, give the project name in one line, and introduce the four of us by name only. Do not read the student numbers out.
+Main point: say in one sentence what Bursary-Bridge does. It matches South African students to bursaries they qualify for, and helps companies handle the applications they get.
+Words to use: matching, bursary, funder. Then move straight on to the background.</a:t>
             </a:r>
             <a:endParaRPr lang="en-US" dirty="0"/>
           </a:p>
@@ -603,9 +603,9 @@
             <a:r>
               <a:rPr lang="en-US" dirty="0"/>
               <a:t>SP Tshazi — 0:17.
-Three sentences, no more — one per block. Then stop and move to the live system.
-Key point: this slide exists to hand over to the demonstration, which carries 30 of the 100 marks. Have the system already running and signed in before you begin.
-Do not introduce anything new here.</a:t>
+Three sentences, one per block, then stop and move to the live system.
+Main point: this slide exists to hand over to the demo, which carries 30 of the 100 marks. Have the system open and signed in before you start.
+Do not add anything new here.</a:t>
             </a:r>
             <a:endParaRPr lang="en-US" dirty="0"/>
           </a:p>
@@ -694,10 +694,9 @@
             <a:r>
               <a:rPr lang="en-US" dirty="0"/>
               <a:t>CPP Mchunu — 0:25.
-Explain: for most of these students the deciding question is financial, not academic. NSFAS answers it for one group and is well signposted. Everything outside it is the problem.
-Key point: the second source is not badly organised — it is not organised at all. Three channels, all publishing a page of text written for a human reader.
-Terminology: "funding organisations", "means-tested", "the missing middle".
-Do not read the three channels out one by one — name them and move on.</a:t>
+Explain that for most of these students the big question is money, not marks. NSFAS answers it for one group and is easy to find. Everything outside NSFAS is the problem.
+Main point: the other bursaries are not badly organised, they are not organised at all. Three different places, all just writing it out as a page for a person to read.
+Do not read the three places out one by one. Name them and move on.</a:t>
             </a:r>
             <a:endParaRPr lang="en-US" dirty="0"/>
           </a:p>
@@ -786,10 +785,9 @@
             <a:r>
               <a:rPr lang="en-US" dirty="0"/>
               <a:t>CPP Mchunu — 0:26.
-Walk the chain across the top once, quickly. Then give the two sides.
-Key point: the evidence strip at the bottom is what lifts this from an opinion to a finding — say the numbers. A student faces exactly that field, without a pipeline to reject the unclear listings on their behalf.
-Terminology: "resolved to a named funder, a closing date and a source page".
-Hand over to Nsibande.</a:t>
+Walk across the top row once, quickly. Then give the two sides underneath.
+Main point: the dark strip at the bottom is what turns this from an opinion into a finding, so say the numbers. A student faces exactly this, with nothing to filter out the unclear ones for them.
+Then hand over to Nsibande.</a:t>
             </a:r>
             <a:endParaRPr lang="en-US" dirty="0"/>
           </a:p>
@@ -878,10 +876,9 @@
             <a:r>
               <a:rPr lang="en-US" dirty="0"/>
               <a:t>A Nsibande — 0:40.
-Read the goal once, properly — it is a rubric line on its own. Then say there are ten measurable objectives and that these are the ones that shaped the build.
-Key point: objective 1 is the hinge. Everything else depends on eligibility being data rather than prose, because nothing can evaluate a sentence.
-Terminology: "typed, machine-evaluable criteria", "provenance".
-Do not read all six out. Name two or three and let the slide carry the rest.</a:t>
+Read the goal out properly. It is marked on its own. Then say we set ten measurable objectives, and these are the ones that shaped what we built.
+Main point: the first one is the key. Everything else depends on the rules being stored as data instead of sentences, because a computer cannot check a sentence.
+Do not read all six out. Name two or three and let the slide do the rest.</a:t>
             </a:r>
             <a:endParaRPr lang="en-US" dirty="0"/>
           </a:p>
@@ -970,10 +967,9 @@
             <a:r>
               <a:rPr lang="en-US" dirty="0"/>
               <a:t>A Nsibande — 0:44.
-This is the conceptual slide — give it room. A student states their circumstances once. A funder states its criteria once, as structured data rather than prose. The system uses the two together.
-Key point: it is a two-sided platform. Most of what exists solves one side only.
-Terminology: "structured eligibility criteria", "audit record".
-Hand over to Bikile.</a:t>
+This is the main idea slide, so give it room. A student fills in their details once. A company enters its rules once, in boxes instead of sentences. The system uses the two together.
+Main point: it works for both sides. Most things that already exist only help one side.
+Then hand over to Bikile.</a:t>
             </a:r>
             <a:endParaRPr lang="en-US" dirty="0"/>
           </a:p>
@@ -1062,9 +1058,8 @@
             <a:r>
               <a:rPr lang="en-US" dirty="0"/>
               <a:t>KN Bikile — 0:30.
-Do not read the technology names out. Explain the shape: presentation is separated from a service layer, which is separated from pure domain modules that carry matching and eligibility.
-Key point: the domain modules hold no database access, which is why the matching and eligibility rules can be tested directly. And authorisation happens at the top of every server-side entry point — the guard returns the identifiers that scope every query, so an authorisation failure gives a missing record rather than a leaked one.
-Terminology: "layered", "domain modules", "guard".</a:t>
+Do not read the technology names out. Explain the shape instead: what the user sees is kept separate from the working parts, and those are kept separate from the matching rules.
+Main point: the matching rules do not touch the database, which is why we can test them directly. And we check who is allowed to see what at the top of every request, so if someone is not allowed, they get nothing back rather than another persons data.</a:t>
             </a:r>
             <a:endParaRPr lang="en-US" dirty="0"/>
           </a:p>
@@ -1153,10 +1148,9 @@
             <a:r>
               <a:rPr lang="en-US" dirty="0"/>
               <a:t>KN Bikile — 0:47.
-Do not read twelve items aloud. Walk the student column as a journey — profile, matches, apply — then the funder column as a journey — publish, receive, review, select.
-Key point: bulk intake exists because funders also receive applications outside our system. Duplicates are flagged for a person to decide, never merged automatically, and nothing is imported until someone confirms it.
-Terminology: "structured fields, not prose", "audit record", "duplicate detection".
-Hand over to Tshazi.</a:t>
+Do not read twelve items out. Walk the student column as a story: profile, matches, apply. Then the company column as a story: advertise, receive, review, choose.
+Main point: uploading many forms at once exists because companies also get applications by email. Possible duplicates are flagged for a person to decide on, and nothing is saved until somebody confirms it.
+Then hand over to Tshazi.</a:t>
             </a:r>
             <a:endParaRPr lang="en-US" dirty="0"/>
           </a:p>
@@ -1245,9 +1239,9 @@
             <a:r>
               <a:rPr lang="en-US" dirty="0"/>
               <a:t>SP Tshazi — 0:40.
-The sharpest technical point in the project. One profile, two separate evaluations.
-Eligibility is a verdict against the criteria the funder published: eligible, not eligible, or pending verification. The match score is how well the profile fits, as a percentage, with the reason for each criterion returned alongside it.
-Key point: they are kept apart deliberately, so a high score never implies a qualification the student does not hold. And a criterion we cannot evaluate takes a partial weight and is reported — it is never treated as a failure, because that would hide an opportunity the student might well qualify for.
+This is the strongest technical point in the project. One profile, two separate questions.
+Do they qualify? That is checked against the rules the company published, and the answer is qualifies, does not qualify, or we need more information. How well do they fit? That is a score out of 100, with the reason for each rule shown next to it.
+Main point: we keep these apart on purpose, so a high score never suggests a student qualifies when they do not. And if we cannot check a rule, it still counts partly and we say so. We never just mark it failed, because that would hide a bursary the student might actually get.
 Expect a question here. Answer it yourself.</a:t>
             </a:r>
             <a:endParaRPr lang="en-US" dirty="0"/>
@@ -1337,10 +1331,9 @@
             <a:r>
               <a:rPr lang="en-US" dirty="0"/>
               <a:t>SP Tshazi — 0:25.
-Do not explain what Scrum is — the examiner knows. Explain why this project needed it: we could not know the criteria funders use before examining what they publish, so the data model had to keep changing. Waterfall would have fixed it too early.
-Key point on value: the reasons attached to each score are information the current process never returns to a student.
-Terminology: "product backlog", "working increment", "product owner".
-Keep this brisk — it is the shortest slot.</a:t>
+Do not explain what Scrum is. The examiner knows. Explain why this project needed it: we could not know what rules companies use until we looked at what they publish, so the design kept changing. Waterfall would have locked it in too early.
+Main point on value: telling a student why they scored what they did is something the current way never gives back.
+Keep this quick. It is the shortest slot.</a:t>
             </a:r>
             <a:endParaRPr lang="en-US" dirty="0"/>
           </a:p>
@@ -2230,7 +2223,7 @@
                 <a:ea typeface="Cambria" pitchFamily="34" charset="-122"/>
                 <a:cs typeface="Cambria" pitchFamily="34" charset="-120"/>
               </a:rPr>
-              <a:t>From here, the system itself</a:t>
+              <a:t>Now let us show you the system</a:t>
             </a:r>
             <a:endParaRPr lang="en-US" sz="3100" dirty="0"/>
           </a:p>
@@ -2338,7 +2331,7 @@
                 <a:ea typeface="Calibri" pitchFamily="34" charset="-122"/>
                 <a:cs typeface="Calibri" pitchFamily="34" charset="-120"/>
               </a:rPr>
-              <a:t>Bursary discovery and application are fragmented and manual, on both sides.</a:t>
+              <a:t>Finding and applying for bursaries is scattered and done by hand, for students and companies alike.</a:t>
             </a:r>
             <a:endParaRPr lang="en-US" sz="1300" dirty="0"/>
           </a:p>
@@ -2446,7 +2439,7 @@
                 <a:ea typeface="Calibri" pitchFamily="34" charset="-122"/>
                 <a:cs typeface="Calibri" pitchFamily="34" charset="-120"/>
               </a:rPr>
-              <a:t>Criteria held as data, circumstances held once, and the two used together to decide, explain and administer the fit.</a:t>
+              <a:t>Bursary rules stored as data, student details stored once, and the two matched together, with reasons.</a:t>
             </a:r>
             <a:endParaRPr lang="en-US" sz="1300" dirty="0"/>
           </a:p>
@@ -2512,7 +2505,7 @@
                 <a:ea typeface="Calibri" pitchFamily="34" charset="-122"/>
                 <a:cs typeface="Calibri" pitchFamily="34" charset="-120"/>
               </a:rPr>
-              <a:t>THE DEMONSTRATION</a:t>
+              <a:t>THE DEMO</a:t>
             </a:r>
             <a:endParaRPr lang="en-US" sz="1200" dirty="0"/>
           </a:p>
@@ -2554,7 +2547,7 @@
                 <a:ea typeface="Calibri" pitchFamily="34" charset="-122"/>
                 <a:cs typeface="Calibri" pitchFamily="34" charset="-120"/>
               </a:rPr>
-              <a:t>The student journey through matching and application, and the funder journey through review and selection.</a:t>
+              <a:t>A student finding and applying for a bursary, and a company reviewing and choosing.</a:t>
             </a:r>
             <a:endParaRPr lang="en-US" sz="1300" dirty="0"/>
           </a:p>
@@ -2735,7 +2728,7 @@
                 <a:ea typeface="Calibri" pitchFamily="34" charset="-122"/>
                 <a:cs typeface="Calibri" pitchFamily="34" charset="-120"/>
               </a:rPr>
-              <a:t>Who needs funding, and where the funding is published</a:t>
+              <a:t>Who needs money to study, and where bursaries are advertised</a:t>
             </a:r>
             <a:endParaRPr lang="en-US" sz="1250" dirty="0"/>
           </a:p>
@@ -2843,7 +2836,7 @@
                 <a:ea typeface="Calibri" pitchFamily="34" charset="-122"/>
                 <a:cs typeface="Calibri" pitchFamily="34" charset="-120"/>
               </a:rPr>
-              <a:t>students in South African higher education, 2023</a:t>
+              <a:t>students in South African universities and colleges, 2023</a:t>
             </a:r>
             <a:endParaRPr lang="en-US" sz="1350" dirty="0"/>
           </a:p>
@@ -2909,7 +2902,7 @@
                 <a:ea typeface="Calibri" pitchFamily="34" charset="-122"/>
                 <a:cs typeface="Calibri" pitchFamily="34" charset="-120"/>
               </a:rPr>
-              <a:t>NSFAS — one structured door</a:t>
+              <a:t>NSFAS — one clear place to apply</a:t>
             </a:r>
             <a:endParaRPr lang="en-US" sz="1450" dirty="0"/>
           </a:p>
@@ -2952,7 +2945,7 @@
                 <a:ea typeface="Calibri" pitchFamily="34" charset="-122"/>
                 <a:cs typeface="Calibri" pitchFamily="34" charset="-120"/>
               </a:rPr>
-              <a:t>Means-tested at R350 000 household income</a:t>
+              <a:t>For families earning under R350 000 a year</a:t>
             </a:r>
             <a:endParaRPr lang="en-US" sz="1250" dirty="0"/>
           </a:p>
@@ -2973,7 +2966,7 @@
                 <a:ea typeface="Calibri" pitchFamily="34" charset="-122"/>
                 <a:cs typeface="Calibri" pitchFamily="34" charset="-120"/>
               </a:rPr>
-              <a:t>One applicant, one application, one published set of rules</a:t>
+              <a:t>One application, one set of rules, clearly published</a:t>
             </a:r>
             <a:endParaRPr lang="en-US" sz="1250" dirty="0"/>
           </a:p>
@@ -2994,7 +2987,7 @@
                 <a:ea typeface="Calibri" pitchFamily="34" charset="-122"/>
                 <a:cs typeface="Calibri" pitchFamily="34" charset="-120"/>
               </a:rPr>
-              <a:t>The "missing middle" is directed to a loan, not a bursary</a:t>
+              <a:t>Families earning a little more only get a loan, not a bursary</a:t>
             </a:r>
             <a:endParaRPr lang="en-US" sz="1250" dirty="0"/>
           </a:p>
@@ -3033,7 +3026,7 @@
                 <a:ea typeface="Calibri" pitchFamily="34" charset="-122"/>
                 <a:cs typeface="Calibri" pitchFamily="34" charset="-120"/>
               </a:rPr>
-              <a:t>Everything else is published as pages of prose</a:t>
+              <a:t>Every other bursary is spread across many websites</a:t>
             </a:r>
             <a:endParaRPr lang="en-US" sz="1500" dirty="0"/>
           </a:p>
@@ -3117,7 +3110,7 @@
                 <a:ea typeface="Calibri" pitchFamily="34" charset="-122"/>
                 <a:cs typeface="Calibri" pitchFamily="34" charset="-120"/>
               </a:rPr>
-              <a:t>Aggregator websites</a:t>
+              <a:t>Bursary listing websites</a:t>
             </a:r>
             <a:endParaRPr lang="en-US" sz="1350" dirty="0"/>
           </a:p>
@@ -3156,7 +3149,7 @@
                 <a:ea typeface="Calibri" pitchFamily="34" charset="-122"/>
                 <a:cs typeface="Calibri" pitchFamily="34" charset="-120"/>
               </a:rPr>
-              <a:t>Listings grouped as editorial articles</a:t>
+              <a:t>Bursaries written up as articles</a:t>
             </a:r>
             <a:endParaRPr lang="en-US" sz="1200" dirty="0"/>
           </a:p>
@@ -3240,7 +3233,7 @@
                 <a:ea typeface="Calibri" pitchFamily="34" charset="-122"/>
                 <a:cs typeface="Calibri" pitchFamily="34" charset="-120"/>
               </a:rPr>
-              <a:t>Funder websites</a:t>
+              <a:t>Company websites</a:t>
             </a:r>
             <a:endParaRPr lang="en-US" sz="1350" dirty="0"/>
           </a:p>
@@ -3279,7 +3272,7 @@
                 <a:ea typeface="Calibri" pitchFamily="34" charset="-122"/>
                 <a:cs typeface="Calibri" pitchFamily="34" charset="-120"/>
               </a:rPr>
-              <a:t>Careers or CSI pages, often a downloadable PDF</a:t>
+              <a:t>On a careers page, often a PDF to download</a:t>
             </a:r>
             <a:endParaRPr lang="en-US" sz="1200" dirty="0"/>
           </a:p>
@@ -3363,7 +3356,7 @@
                 <a:ea typeface="Calibri" pitchFamily="34" charset="-122"/>
                 <a:cs typeface="Calibri" pitchFamily="34" charset="-120"/>
               </a:rPr>
-              <a:t>Financial aid offices</a:t>
+              <a:t>University aid offices</a:t>
             </a:r>
             <a:endParaRPr lang="en-US" sz="1350" dirty="0"/>
           </a:p>
@@ -3402,7 +3395,7 @@
                 <a:ea typeface="Calibri" pitchFamily="34" charset="-122"/>
                 <a:cs typeface="Calibri" pitchFamily="34" charset="-120"/>
               </a:rPr>
-              <a:t>Notice boards, email lists, campus portals</a:t>
+              <a:t>Notice boards, emails and campus portals</a:t>
             </a:r>
             <a:endParaRPr lang="en-US" sz="1200" dirty="0"/>
           </a:p>
@@ -3468,7 +3461,7 @@
                 <a:ea typeface="Calibri" pitchFamily="34" charset="-122"/>
                 <a:cs typeface="Calibri" pitchFamily="34" charset="-120"/>
               </a:rPr>
-              <a:t>No register. No shared application process.</a:t>
+              <a:t>No single list. No shared application form.</a:t>
             </a:r>
             <a:endParaRPr lang="en-US" sz="1350" dirty="0"/>
           </a:p>
@@ -3571,7 +3564,7 @@
                 <a:ea typeface="Calibri" pitchFamily="34" charset="-122"/>
                 <a:cs typeface="Calibri" pitchFamily="34" charset="-120"/>
               </a:rPr>
-              <a:t>Discovery, assessment and application are manual at every step</a:t>
+              <a:t>Every step is done by hand</a:t>
             </a:r>
             <a:endParaRPr lang="en-US" sz="1250" dirty="0"/>
           </a:p>
@@ -3618,7 +3611,7 @@
                 <a:ea typeface="Calibri" pitchFamily="34" charset="-122"/>
                 <a:cs typeface="Calibri" pitchFamily="34" charset="-120"/>
               </a:rPr>
-              <a:t>Multiple</a:t>
+              <a:t>Bursaries in</a:t>
             </a:r>
             <a:endParaRPr lang="en-US" sz="1200" dirty="0"/>
           </a:p>
@@ -3635,7 +3628,7 @@
                 <a:ea typeface="Calibri" pitchFamily="34" charset="-122"/>
                 <a:cs typeface="Calibri" pitchFamily="34" charset="-120"/>
               </a:rPr>
-              <a:t>sources</a:t>
+              <a:t>many places</a:t>
             </a:r>
             <a:endParaRPr lang="en-US" sz="1200" dirty="0"/>
           </a:p>
@@ -3707,7 +3700,7 @@
                 <a:ea typeface="Calibri" pitchFamily="34" charset="-122"/>
                 <a:cs typeface="Calibri" pitchFamily="34" charset="-120"/>
               </a:rPr>
-              <a:t>Criteria written</a:t>
+              <a:t>Rules written as</a:t>
             </a:r>
             <a:endParaRPr lang="en-US" sz="1200" dirty="0"/>
           </a:p>
@@ -3724,7 +3717,7 @@
                 <a:ea typeface="Calibri" pitchFamily="34" charset="-122"/>
                 <a:cs typeface="Calibri" pitchFamily="34" charset="-120"/>
               </a:rPr>
-              <a:t>as prose</a:t>
+              <a:t>sentences</a:t>
             </a:r>
             <a:endParaRPr lang="en-US" sz="1200" dirty="0"/>
           </a:p>
@@ -3796,7 +3789,7 @@
                 <a:ea typeface="Calibri" pitchFamily="34" charset="-122"/>
                 <a:cs typeface="Calibri" pitchFamily="34" charset="-120"/>
               </a:rPr>
-              <a:t>Manual</a:t>
+              <a:t>Student must</a:t>
             </a:r>
             <a:endParaRPr lang="en-US" sz="1200" dirty="0"/>
           </a:p>
@@ -3813,7 +3806,7 @@
                 <a:ea typeface="Calibri" pitchFamily="34" charset="-122"/>
                 <a:cs typeface="Calibri" pitchFamily="34" charset="-120"/>
               </a:rPr>
-              <a:t>interpretation</a:t>
+              <a:t>read and judge</a:t>
             </a:r>
             <a:endParaRPr lang="en-US" sz="1200" dirty="0"/>
           </a:p>
@@ -3885,7 +3878,7 @@
                 <a:ea typeface="Calibri" pitchFamily="34" charset="-122"/>
                 <a:cs typeface="Calibri" pitchFamily="34" charset="-120"/>
               </a:rPr>
-              <a:t>Repeated</a:t>
+              <a:t>Same details</a:t>
             </a:r>
             <a:endParaRPr lang="en-US" sz="1200" dirty="0"/>
           </a:p>
@@ -3902,7 +3895,7 @@
                 <a:ea typeface="Calibri" pitchFamily="34" charset="-122"/>
                 <a:cs typeface="Calibri" pitchFamily="34" charset="-120"/>
               </a:rPr>
-              <a:t>data entry</a:t>
+              <a:t>typed again</a:t>
             </a:r>
             <a:endParaRPr lang="en-US" sz="1200" dirty="0"/>
           </a:p>
@@ -3974,7 +3967,7 @@
                 <a:ea typeface="Calibri" pitchFamily="34" charset="-122"/>
                 <a:cs typeface="Calibri" pitchFamily="34" charset="-120"/>
               </a:rPr>
-              <a:t>Separate</a:t>
+              <a:t>A different form</a:t>
             </a:r>
             <a:endParaRPr lang="en-US" sz="1200" dirty="0"/>
           </a:p>
@@ -3991,7 +3984,7 @@
                 <a:ea typeface="Calibri" pitchFamily="34" charset="-122"/>
                 <a:cs typeface="Calibri" pitchFamily="34" charset="-120"/>
               </a:rPr>
-              <a:t>application forms</a:t>
+              <a:t>every time</a:t>
             </a:r>
             <a:endParaRPr lang="en-US" sz="1200" dirty="0"/>
           </a:p>
@@ -4100,7 +4093,7 @@
                 <a:ea typeface="Calibri" pitchFamily="34" charset="-122"/>
                 <a:cs typeface="Calibri" pitchFamily="34" charset="-120"/>
               </a:rPr>
-              <a:t>Eligibility judged by reading, so it is easy to get wrong</a:t>
+              <a:t>They must read and decide if they qualify, which is easy to get wrong</a:t>
             </a:r>
             <a:endParaRPr lang="en-US" sz="1250" dirty="0"/>
           </a:p>
@@ -4121,7 +4114,7 @@
                 <a:ea typeface="Calibri" pitchFamily="34" charset="-122"/>
                 <a:cs typeface="Calibri" pitchFamily="34" charset="-120"/>
               </a:rPr>
-              <a:t>Effort spent on applications they could never win</a:t>
+              <a:t>Time wasted on bursaries they never qualified for</a:t>
             </a:r>
             <a:endParaRPr lang="en-US" sz="1250" dirty="0"/>
           </a:p>
@@ -4142,7 +4135,7 @@
                 <a:ea typeface="Calibri" pitchFamily="34" charset="-122"/>
                 <a:cs typeface="Calibri" pitchFamily="34" charset="-120"/>
               </a:rPr>
-              <a:t>The same details rewritten on every form</a:t>
+              <a:t>The same details written out again on every form</a:t>
             </a:r>
             <a:endParaRPr lang="en-US" sz="1250" dirty="0"/>
           </a:p>
@@ -4208,7 +4201,7 @@
                 <a:ea typeface="Calibri" pitchFamily="34" charset="-122"/>
                 <a:cs typeface="Calibri" pitchFamily="34" charset="-120"/>
               </a:rPr>
-              <a:t>For funding organisations</a:t>
+              <a:t>For companies that give bursaries</a:t>
             </a:r>
             <a:endParaRPr lang="en-US" sz="1450" dirty="0"/>
           </a:p>
@@ -4251,7 +4244,7 @@
                 <a:ea typeface="Calibri" pitchFamily="34" charset="-122"/>
                 <a:cs typeface="Calibri" pitchFamily="34" charset="-120"/>
               </a:rPr>
-              <a:t>Applications arrive as email attachments, in any shape</a:t>
+              <a:t>Applications arrive by email, all in different formats</a:t>
             </a:r>
             <a:endParaRPr lang="en-US" sz="1250" dirty="0"/>
           </a:p>
@@ -4272,7 +4265,7 @@
                 <a:ea typeface="Calibri" pitchFamily="34" charset="-122"/>
                 <a:cs typeface="Calibri" pitchFamily="34" charset="-120"/>
               </a:rPr>
-              <a:t>Screening is manual, so it is slow and inconsistent</a:t>
+              <a:t>Checking is done by hand, so it is slow and uneven</a:t>
             </a:r>
             <a:endParaRPr lang="en-US" sz="1250" dirty="0"/>
           </a:p>
@@ -4293,7 +4286,7 @@
                 <a:ea typeface="Calibri" pitchFamily="34" charset="-122"/>
                 <a:cs typeface="Calibri" pitchFamily="34" charset="-120"/>
               </a:rPr>
-              <a:t>No structured record of why an applicant was set aside</a:t>
+              <a:t>No clear record of why someone was turned down</a:t>
             </a:r>
             <a:endParaRPr lang="en-US" sz="1250" dirty="0"/>
           </a:p>
@@ -4379,7 +4372,7 @@
                 <a:ea typeface="Calibri" pitchFamily="34" charset="-122"/>
                 <a:cs typeface="Calibri" pitchFamily="34" charset="-120"/>
               </a:rPr>
-              <a:t>13 category pages crawled on the largest South African aggregator — only </a:t>
+              <a:t>We checked 13 pages on South Africa’s biggest bursary website. Only </a:t>
             </a:r>
             <a:pPr indent="0" marL="0">
               <a:lnSpc>
@@ -4396,7 +4389,7 @@
                 <a:ea typeface="Calibri" pitchFamily="34" charset="-122"/>
                 <a:cs typeface="Calibri" pitchFamily="34" charset="-120"/>
               </a:rPr>
-              <a:t>189 listings</a:t>
+              <a:t>189 bursaries</a:t>
             </a:r>
             <a:pPr indent="0" marL="0">
               <a:lnSpc>
@@ -4413,7 +4406,7 @@
                 <a:ea typeface="Calibri" pitchFamily="34" charset="-122"/>
                 <a:cs typeface="Calibri" pitchFamily="34" charset="-120"/>
               </a:rPr>
-              <a:t> could be resolved to a named funder, a closing date and a source page. The rest were refused rather than guessed at.</a:t>
+              <a:t> clearly showed who gives them, the closing date, and where the information came from. We left out the rest instead of guessing.</a:t>
             </a:r>
             <a:endParaRPr lang="en-US" sz="1300" dirty="0"/>
           </a:p>
@@ -4585,7 +4578,7 @@
                 <a:ea typeface="Calibri" pitchFamily="34" charset="-122"/>
                 <a:cs typeface="Calibri" pitchFamily="34" charset="-120"/>
               </a:rPr>
-              <a:t>Automatically match South African students to the funding they are eligible for, explain the reason behind every match, and give funding organisations one structured platform to publish programmes and administer applications.</a:t>
+              <a:t>Match South African students to bursaries they qualify for, show the reason for every match, and give companies one place to advertise bursaries and manage the applications they get.</a:t>
             </a:r>
             <a:endParaRPr lang="en-US" sz="1400" dirty="0"/>
           </a:p>
@@ -4669,7 +4662,7 @@
                 <a:ea typeface="Calibri" pitchFamily="34" charset="-122"/>
                 <a:cs typeface="Calibri" pitchFamily="34" charset="-120"/>
               </a:rPr>
-              <a:t>Structured criteria</a:t>
+              <a:t>Clear rules, not sentences</a:t>
             </a:r>
             <a:endParaRPr lang="en-US" sz="1400" dirty="0"/>
           </a:p>
@@ -4711,7 +4704,7 @@
                 <a:ea typeface="Calibri" pitchFamily="34" charset="-122"/>
                 <a:cs typeface="Calibri" pitchFamily="34" charset="-120"/>
               </a:rPr>
-              <a:t>Model eligibility as typed, machine-evaluable data rather than free text</a:t>
+              <a:t>Store what a bursary needs as data the computer can actually check</a:t>
             </a:r>
             <a:endParaRPr lang="en-US" sz="1200" dirty="0"/>
           </a:p>
@@ -4795,7 +4788,7 @@
                 <a:ea typeface="Calibri" pitchFamily="34" charset="-122"/>
                 <a:cs typeface="Calibri" pitchFamily="34" charset="-120"/>
               </a:rPr>
-              <a:t>Explainable matching</a:t>
+              <a:t>Matching that explains itself</a:t>
             </a:r>
             <a:endParaRPr lang="en-US" sz="1400" dirty="0"/>
           </a:p>
@@ -4837,7 +4830,7 @@
                 <a:ea typeface="Calibri" pitchFamily="34" charset="-122"/>
                 <a:cs typeface="Calibri" pitchFamily="34" charset="-120"/>
               </a:rPr>
-              <a:t>A weighted algorithm that returns met / not met / cannot evaluate per criterion</a:t>
+              <a:t>For every rule, show: met, not met, or we need more information</a:t>
             </a:r>
             <a:endParaRPr lang="en-US" sz="1200" dirty="0"/>
           </a:p>
@@ -4921,7 +4914,7 @@
                 <a:ea typeface="Calibri" pitchFamily="34" charset="-122"/>
                 <a:cs typeface="Calibri" pitchFamily="34" charset="-120"/>
               </a:rPr>
-              <a:t>Student side</a:t>
+              <a:t>The student side</a:t>
             </a:r>
             <a:endParaRPr lang="en-US" sz="1400" dirty="0"/>
           </a:p>
@@ -4963,7 +4956,7 @@
                 <a:ea typeface="Calibri" pitchFamily="34" charset="-122"/>
                 <a:cs typeface="Calibri" pitchFamily="34" charset="-120"/>
               </a:rPr>
-              <a:t>Profile, ranked matches with reasons, full directory, application workflow</a:t>
+              <a:t>One profile, a ranked list of bursaries with reasons, and applying online</a:t>
             </a:r>
             <a:endParaRPr lang="en-US" sz="1200" dirty="0"/>
           </a:p>
@@ -5047,7 +5040,7 @@
                 <a:ea typeface="Calibri" pitchFamily="34" charset="-122"/>
                 <a:cs typeface="Calibri" pitchFamily="34" charset="-120"/>
               </a:rPr>
-              <a:t>Organisation side</a:t>
+              <a:t>The company side</a:t>
             </a:r>
             <a:endParaRPr lang="en-US" sz="1400" dirty="0"/>
           </a:p>
@@ -5089,7 +5082,7 @@
                 <a:ea typeface="Calibri" pitchFamily="34" charset="-122"/>
                 <a:cs typeface="Calibri" pitchFamily="34" charset="-120"/>
               </a:rPr>
-              <a:t>Programme publication, applicant review, shortlisting and selection</a:t>
+              <a:t>Advertise a bursary, review applicants, shortlist and choose</a:t>
             </a:r>
             <a:endParaRPr lang="en-US" sz="1200" dirty="0"/>
           </a:p>
@@ -5173,7 +5166,7 @@
                 <a:ea typeface="Calibri" pitchFamily="34" charset="-122"/>
                 <a:cs typeface="Calibri" pitchFamily="34" charset="-120"/>
               </a:rPr>
-              <a:t>Ingestion with provenance</a:t>
+              <a:t>Collect real bursaries</a:t>
             </a:r>
             <a:endParaRPr lang="en-US" sz="1400" dirty="0"/>
           </a:p>
@@ -5215,7 +5208,7 @@
                 <a:ea typeface="Calibri" pitchFamily="34" charset="-122"/>
                 <a:cs typeface="Calibri" pitchFamily="34" charset="-120"/>
               </a:rPr>
-              <a:t>Import from named sources; record every source, reject what cannot be resolved</a:t>
+              <a:t>Save where each one came from, and skip any we cannot confirm</a:t>
             </a:r>
             <a:endParaRPr lang="en-US" sz="1200" dirty="0"/>
           </a:p>
@@ -5299,7 +5292,7 @@
                 <a:ea typeface="Calibri" pitchFamily="34" charset="-122"/>
                 <a:cs typeface="Calibri" pitchFamily="34" charset="-120"/>
               </a:rPr>
-              <a:t>Test and evaluate</a:t>
+              <a:t>Test everything</a:t>
             </a:r>
             <a:endParaRPr lang="en-US" sz="1400" dirty="0"/>
           </a:p>
@@ -5341,7 +5334,7 @@
                 <a:ea typeface="Calibri" pitchFamily="34" charset="-122"/>
                 <a:cs typeface="Calibri" pitchFamily="34" charset="-120"/>
               </a:rPr>
-              <a:t>Unit, integration and end-to-end tests; trace every requirement to its implementation</a:t>
+              <a:t>Automatic tests, and a check that every requirement was really built</a:t>
             </a:r>
             <a:endParaRPr lang="en-US" sz="1200" dirty="0"/>
           </a:p>
@@ -5444,7 +5437,7 @@
                 <a:ea typeface="Calibri" pitchFamily="34" charset="-122"/>
                 <a:cs typeface="Calibri" pitchFamily="34" charset="-120"/>
               </a:rPr>
-              <a:t>One structured record on each side, and a mechanism between them</a:t>
+              <a:t>One student profile, one set of bursary rules, and matching in between</a:t>
             </a:r>
             <a:endParaRPr lang="en-US" sz="1250" dirty="0"/>
           </a:p>
@@ -5596,7 +5589,7 @@
                 <a:ea typeface="Calibri" pitchFamily="34" charset="-122"/>
                 <a:cs typeface="Calibri" pitchFamily="34" charset="-120"/>
               </a:rPr>
-              <a:t>States their circumstances once</a:t>
+              <a:t>Fills in their details once</a:t>
             </a:r>
             <a:endParaRPr lang="en-US" sz="1250" dirty="0"/>
           </a:p>
@@ -5668,7 +5661,7 @@
                 <a:ea typeface="Calibri" pitchFamily="34" charset="-122"/>
                 <a:cs typeface="Calibri" pitchFamily="34" charset="-120"/>
               </a:rPr>
-              <a:t>Eligibility evaluated + weighted match</a:t>
+              <a:t>System checks the rules and scores the match</a:t>
             </a:r>
             <a:endParaRPr lang="en-US" sz="1250" dirty="0"/>
           </a:p>
@@ -5740,7 +5733,7 @@
                 <a:ea typeface="Calibri" pitchFamily="34" charset="-122"/>
                 <a:cs typeface="Calibri" pitchFamily="34" charset="-120"/>
               </a:rPr>
-              <a:t>Ranked opportunities, with reasons</a:t>
+              <a:t>Gets a ranked list, with reasons</a:t>
             </a:r>
             <a:endParaRPr lang="en-US" sz="1250" dirty="0"/>
           </a:p>
@@ -5812,7 +5805,7 @@
                 <a:ea typeface="Calibri" pitchFamily="34" charset="-122"/>
                 <a:cs typeface="Calibri" pitchFamily="34" charset="-120"/>
               </a:rPr>
-              <a:t>Applies using the profile already held</a:t>
+              <a:t>Applies using details already saved</a:t>
             </a:r>
             <a:endParaRPr lang="en-US" sz="1250" dirty="0"/>
           </a:p>
@@ -5851,7 +5844,7 @@
                 <a:ea typeface="Calibri" pitchFamily="34" charset="-122"/>
                 <a:cs typeface="Calibri" pitchFamily="34" charset="-120"/>
               </a:rPr>
-              <a:t>FUNDING ORGANISATIONS</a:t>
+              <a:t>COMPANIES GIVING BURSARIES</a:t>
             </a:r>
             <a:endParaRPr lang="en-US" sz="1200" dirty="0"/>
           </a:p>
@@ -5898,7 +5891,7 @@
                 <a:ea typeface="Calibri" pitchFamily="34" charset="-122"/>
                 <a:cs typeface="Calibri" pitchFamily="34" charset="-120"/>
               </a:rPr>
-              <a:t>Publishes a programme, criteria as fields</a:t>
+              <a:t>Advertises a bursary with clear rules</a:t>
             </a:r>
             <a:endParaRPr lang="en-US" sz="1250" dirty="0"/>
           </a:p>
@@ -5970,7 +5963,7 @@
                 <a:ea typeface="Calibri" pitchFamily="34" charset="-122"/>
                 <a:cs typeface="Calibri" pitchFamily="34" charset="-120"/>
               </a:rPr>
-              <a:t>Applications arrive as records</a:t>
+              <a:t>Applications arrive already organised</a:t>
             </a:r>
             <a:endParaRPr lang="en-US" sz="1250" dirty="0"/>
           </a:p>
@@ -6042,7 +6035,7 @@
                 <a:ea typeface="Calibri" pitchFamily="34" charset="-122"/>
                 <a:cs typeface="Calibri" pitchFamily="34" charset="-120"/>
               </a:rPr>
-              <a:t>Reviews against its own criteria</a:t>
+              <a:t>Checks applicants against its own rules</a:t>
             </a:r>
             <a:endParaRPr lang="en-US" sz="1250" dirty="0"/>
           </a:p>
@@ -6114,7 +6107,7 @@
                 <a:ea typeface="Calibri" pitchFamily="34" charset="-122"/>
                 <a:cs typeface="Calibri" pitchFamily="34" charset="-120"/>
               </a:rPr>
-              <a:t>Shortlists, selects, with an audit record</a:t>
+              <a:t>Shortlists and chooses, every step recorded</a:t>
             </a:r>
             <a:endParaRPr lang="en-US" sz="1250" dirty="0"/>
           </a:p>
@@ -6217,7 +6210,7 @@
                 <a:ea typeface="Calibri" pitchFamily="34" charset="-122"/>
                 <a:cs typeface="Calibri" pitchFamily="34" charset="-120"/>
               </a:rPr>
-              <a:t>A layered web application; the domain rules hold no database access</a:t>
+              <a:t>Built in layers, so each part can be tested on its own</a:t>
             </a:r>
             <a:endParaRPr lang="en-US" sz="1250" dirty="0"/>
           </a:p>
@@ -6283,7 +6276,7 @@
                 <a:ea typeface="Calibri" pitchFamily="34" charset="-122"/>
                 <a:cs typeface="Calibri" pitchFamily="34" charset="-120"/>
               </a:rPr>
-              <a:t>Presentation</a:t>
+              <a:t>What the user sees</a:t>
             </a:r>
             <a:endParaRPr lang="en-US" sz="1450" dirty="0"/>
           </a:p>
@@ -6413,7 +6406,7 @@
                 <a:ea typeface="Calibri" pitchFamily="34" charset="-122"/>
                 <a:cs typeface="Calibri" pitchFamily="34" charset="-120"/>
               </a:rPr>
-              <a:t>Service layer</a:t>
+              <a:t>The working parts</a:t>
             </a:r>
             <a:endParaRPr lang="en-US" sz="1450" dirty="0"/>
           </a:p>
@@ -6452,7 +6445,7 @@
                 <a:ea typeface="Calibri" pitchFamily="34" charset="-122"/>
                 <a:cs typeface="Calibri" pitchFamily="34" charset="-120"/>
               </a:rPr>
-              <a:t>Read and write logic; authorisation guards scope every query</a:t>
+              <a:t>Saves and loads data, and checks who may see what</a:t>
             </a:r>
             <a:endParaRPr lang="en-US" sz="1150" dirty="0"/>
           </a:p>
@@ -6543,7 +6536,7 @@
                 <a:ea typeface="Calibri" pitchFamily="34" charset="-122"/>
                 <a:cs typeface="Calibri" pitchFamily="34" charset="-120"/>
               </a:rPr>
-              <a:t>Domain modules</a:t>
+              <a:t>The matching rules</a:t>
             </a:r>
             <a:endParaRPr lang="en-US" sz="1450" dirty="0"/>
           </a:p>
@@ -6582,7 +6575,7 @@
                 <a:ea typeface="Calibri" pitchFamily="34" charset="-122"/>
                 <a:cs typeface="Calibri" pitchFamily="34" charset="-120"/>
               </a:rPr>
-              <a:t>Matching  ·  Eligibility  —  pure, no database access, directly testable</a:t>
+              <a:t>Kept away from the database, so we can test them directly</a:t>
             </a:r>
             <a:endParaRPr lang="en-US" sz="1150" dirty="0"/>
           </a:p>
@@ -6673,7 +6666,7 @@
                 <a:ea typeface="Calibri" pitchFamily="34" charset="-122"/>
                 <a:cs typeface="Calibri" pitchFamily="34" charset="-120"/>
               </a:rPr>
-              <a:t>Data</a:t>
+              <a:t>Where data is kept</a:t>
             </a:r>
             <a:endParaRPr lang="en-US" sz="1450" dirty="0"/>
           </a:p>
@@ -6778,7 +6771,7 @@
                 <a:ea typeface="Calibri" pitchFamily="34" charset="-122"/>
                 <a:cs typeface="Calibri" pitchFamily="34" charset="-120"/>
               </a:rPr>
-              <a:t>Document processing</a:t>
+              <a:t>Reading PDF forms</a:t>
             </a:r>
             <a:endParaRPr lang="en-US" sz="1450" dirty="0"/>
           </a:p>
@@ -6908,7 +6901,7 @@
                 <a:ea typeface="Calibri" pitchFamily="34" charset="-122"/>
                 <a:cs typeface="Calibri" pitchFamily="34" charset="-120"/>
               </a:rPr>
-              <a:t>Validation and security</a:t>
+              <a:t>Checking and safety</a:t>
             </a:r>
             <a:endParaRPr lang="en-US" sz="1450" dirty="0"/>
           </a:p>
@@ -6951,7 +6944,7 @@
                 <a:ea typeface="Calibri" pitchFamily="34" charset="-122"/>
                 <a:cs typeface="Calibri" pitchFamily="34" charset="-120"/>
               </a:rPr>
-              <a:t>Zod — typed input validation</a:t>
+              <a:t>Zod — checks everything typed in</a:t>
             </a:r>
             <a:endParaRPr lang="en-US" sz="1250" dirty="0"/>
           </a:p>
@@ -6972,7 +6965,7 @@
                 <a:ea typeface="Calibri" pitchFamily="34" charset="-122"/>
                 <a:cs typeface="Calibri" pitchFamily="34" charset="-120"/>
               </a:rPr>
-              <a:t>bcryptjs — password hashing</a:t>
+              <a:t>bcryptjs — keeps passwords safe</a:t>
             </a:r>
             <a:endParaRPr lang="en-US" sz="1250" dirty="0"/>
           </a:p>
@@ -7184,7 +7177,7 @@
                 <a:ea typeface="Calibri" pitchFamily="34" charset="-122"/>
                 <a:cs typeface="Calibri" pitchFamily="34" charset="-120"/>
               </a:rPr>
-              <a:t>Both sides of the transaction, in one system</a:t>
+              <a:t>Both sides, in one system</a:t>
             </a:r>
             <a:endParaRPr lang="en-US" sz="1250" dirty="0"/>
           </a:p>
@@ -7223,7 +7216,7 @@
                 <a:ea typeface="Calibri" pitchFamily="34" charset="-122"/>
                 <a:cs typeface="Calibri" pitchFamily="34" charset="-120"/>
               </a:rPr>
-              <a:t>STUDENT SIDE</a:t>
+              <a:t>THE STUDENT SIDE</a:t>
             </a:r>
             <a:endParaRPr lang="en-US" sz="1200" dirty="0"/>
           </a:p>
@@ -7349,7 +7342,7 @@
                 <a:ea typeface="Calibri" pitchFamily="34" charset="-122"/>
                 <a:cs typeface="Calibri" pitchFamily="34" charset="-120"/>
               </a:rPr>
-              <a:t>Identity, academic record, subject results, household circumstances</a:t>
+              <a:t>Personal details, marks, subjects and family income</a:t>
             </a:r>
             <a:endParaRPr lang="en-US" sz="1150" dirty="0"/>
           </a:p>
@@ -7433,7 +7426,7 @@
                 <a:ea typeface="Calibri" pitchFamily="34" charset="-122"/>
                 <a:cs typeface="Calibri" pitchFamily="34" charset="-120"/>
               </a:rPr>
-              <a:t>Opportunity directory</a:t>
+              <a:t>List of all bursaries</a:t>
             </a:r>
             <a:endParaRPr lang="en-US" sz="1300" dirty="0"/>
           </a:p>
@@ -7475,7 +7468,7 @@
                 <a:ea typeface="Calibri" pitchFamily="34" charset="-122"/>
                 <a:cs typeface="Calibri" pitchFamily="34" charset="-120"/>
               </a:rPr>
-              <a:t>Every opportunity held, each showing its source page</a:t>
+              <a:t>Every bursary we hold, each showing where it came from</a:t>
             </a:r>
             <a:endParaRPr lang="en-US" sz="1150" dirty="0"/>
           </a:p>
@@ -7559,7 +7552,7 @@
                 <a:ea typeface="Calibri" pitchFamily="34" charset="-122"/>
                 <a:cs typeface="Calibri" pitchFamily="34" charset="-120"/>
               </a:rPr>
-              <a:t>Matching and eligibility</a:t>
+              <a:t>Matching</a:t>
             </a:r>
             <a:endParaRPr lang="en-US" sz="1300" dirty="0"/>
           </a:p>
@@ -7601,7 +7594,7 @@
                 <a:ea typeface="Calibri" pitchFamily="34" charset="-122"/>
                 <a:cs typeface="Calibri" pitchFamily="34" charset="-120"/>
               </a:rPr>
-              <a:t>Ranked results with the reason behind every score</a:t>
+              <a:t>A ranked list, with the reason behind every score</a:t>
             </a:r>
             <a:endParaRPr lang="en-US" sz="1150" dirty="0"/>
           </a:p>
@@ -7685,7 +7678,7 @@
                 <a:ea typeface="Calibri" pitchFamily="34" charset="-122"/>
                 <a:cs typeface="Calibri" pitchFamily="34" charset="-120"/>
               </a:rPr>
-              <a:t>Application workflow</a:t>
+              <a:t>Applying</a:t>
             </a:r>
             <a:endParaRPr lang="en-US" sz="1300" dirty="0"/>
           </a:p>
@@ -7727,7 +7720,7 @@
                 <a:ea typeface="Calibri" pitchFamily="34" charset="-122"/>
                 <a:cs typeface="Calibri" pitchFamily="34" charset="-120"/>
               </a:rPr>
-              <a:t>Apply from the stored profile; attach documents once; track status</a:t>
+              <a:t>Apply using saved details, attach documents once, then track progress</a:t>
             </a:r>
             <a:endParaRPr lang="en-US" sz="1150" dirty="0"/>
           </a:p>
@@ -7811,7 +7804,7 @@
                 <a:ea typeface="Calibri" pitchFamily="34" charset="-122"/>
                 <a:cs typeface="Calibri" pitchFamily="34" charset="-120"/>
               </a:rPr>
-              <a:t>Assisted PDF completion</a:t>
+              <a:t>Auto-Fill for PDF forms</a:t>
             </a:r>
             <a:endParaRPr lang="en-US" sz="1300" dirty="0"/>
           </a:p>
@@ -7853,7 +7846,7 @@
                 <a:ea typeface="Calibri" pitchFamily="34" charset="-122"/>
                 <a:cs typeface="Calibri" pitchFamily="34" charset="-120"/>
               </a:rPr>
-              <a:t>Forms filled from the profile, with a confidence level per field</a:t>
+              <a:t>Fills a form from the profile, and says how sure it is each time</a:t>
             </a:r>
             <a:endParaRPr lang="en-US" sz="1150" dirty="0"/>
           </a:p>
@@ -7937,7 +7930,7 @@
                 <a:ea typeface="Calibri" pitchFamily="34" charset="-122"/>
                 <a:cs typeface="Calibri" pitchFamily="34" charset="-120"/>
               </a:rPr>
-              <a:t>Motivational letter composer</a:t>
+              <a:t>Motivation letter helper</a:t>
             </a:r>
             <a:endParaRPr lang="en-US" sz="1300" dirty="0"/>
           </a:p>
@@ -7979,7 +7972,7 @@
                 <a:ea typeface="Calibri" pitchFamily="34" charset="-122"/>
                 <a:cs typeface="Calibri" pitchFamily="34" charset="-120"/>
               </a:rPr>
-              <a:t>Assembled from stated facts — no text is generated for the student</a:t>
+              <a:t>Built from what the student said — it never writes for them</a:t>
             </a:r>
             <a:endParaRPr lang="en-US" sz="1150" dirty="0"/>
           </a:p>
@@ -8018,7 +8011,7 @@
                 <a:ea typeface="Calibri" pitchFamily="34" charset="-122"/>
                 <a:cs typeface="Calibri" pitchFamily="34" charset="-120"/>
               </a:rPr>
-              <a:t>FUNDING ORGANISATION SIDE</a:t>
+              <a:t>THE COMPANY SIDE</a:t>
             </a:r>
             <a:endParaRPr lang="en-US" sz="1200" dirty="0"/>
           </a:p>
@@ -8102,7 +8095,7 @@
                 <a:ea typeface="Calibri" pitchFamily="34" charset="-122"/>
                 <a:cs typeface="Calibri" pitchFamily="34" charset="-120"/>
               </a:rPr>
-              <a:t>Organisation account</a:t>
+              <a:t>Company account</a:t>
             </a:r>
             <a:endParaRPr lang="en-US" sz="1300" dirty="0"/>
           </a:p>
@@ -8144,7 +8137,7 @@
                 <a:ea typeface="Calibri" pitchFamily="34" charset="-122"/>
                 <a:cs typeface="Calibri" pitchFamily="34" charset="-120"/>
               </a:rPr>
-              <a:t>Registration and organisation profile</a:t>
+              <a:t>Signing up, and the company details</a:t>
             </a:r>
             <a:endParaRPr lang="en-US" sz="1150" dirty="0"/>
           </a:p>
@@ -8228,7 +8221,7 @@
                 <a:ea typeface="Calibri" pitchFamily="34" charset="-122"/>
                 <a:cs typeface="Calibri" pitchFamily="34" charset="-120"/>
               </a:rPr>
-              <a:t>Programme publication</a:t>
+              <a:t>Advertise a bursary</a:t>
             </a:r>
             <a:endParaRPr lang="en-US" sz="1300" dirty="0"/>
           </a:p>
@@ -8270,7 +8263,7 @@
                 <a:ea typeface="Calibri" pitchFamily="34" charset="-122"/>
                 <a:cs typeface="Calibri" pitchFamily="34" charset="-120"/>
               </a:rPr>
-              <a:t>Eligibility criteria entered as structured fields, not prose</a:t>
+              <a:t>The rules are typed into boxes, not written as sentences</a:t>
             </a:r>
             <a:endParaRPr lang="en-US" sz="1150" dirty="0"/>
           </a:p>
@@ -8354,7 +8347,7 @@
                 <a:ea typeface="Calibri" pitchFamily="34" charset="-122"/>
                 <a:cs typeface="Calibri" pitchFamily="34" charset="-120"/>
               </a:rPr>
-              <a:t>Applicant review</a:t>
+              <a:t>Review applicants</a:t>
             </a:r>
             <a:endParaRPr lang="en-US" sz="1300" dirty="0"/>
           </a:p>
@@ -8396,7 +8389,7 @@
                 <a:ea typeface="Calibri" pitchFamily="34" charset="-122"/>
                 <a:cs typeface="Calibri" pitchFamily="34" charset="-120"/>
               </a:rPr>
-              <a:t>Applications as records, screened against the funder’s own criteria</a:t>
+              <a:t>Applications arrive organised, already checked against their rules</a:t>
             </a:r>
             <a:endParaRPr lang="en-US" sz="1150" dirty="0"/>
           </a:p>
@@ -8480,7 +8473,7 @@
                 <a:ea typeface="Calibri" pitchFamily="34" charset="-122"/>
                 <a:cs typeface="Calibri" pitchFamily="34" charset="-120"/>
               </a:rPr>
-              <a:t>Shortlisting and selection</a:t>
+              <a:t>Shortlist and choose</a:t>
             </a:r>
             <a:endParaRPr lang="en-US" sz="1300" dirty="0"/>
           </a:p>
@@ -8522,7 +8515,7 @@
                 <a:ea typeface="Calibri" pitchFamily="34" charset="-122"/>
                 <a:cs typeface="Calibri" pitchFamily="34" charset="-120"/>
               </a:rPr>
-              <a:t>Every step leaves an audit record</a:t>
+              <a:t>Every step is recorded</a:t>
             </a:r>
             <a:endParaRPr lang="en-US" sz="1150" dirty="0"/>
           </a:p>
@@ -8606,7 +8599,7 @@
                 <a:ea typeface="Calibri" pitchFamily="34" charset="-122"/>
                 <a:cs typeface="Calibri" pitchFamily="34" charset="-120"/>
               </a:rPr>
-              <a:t>Bulk application intake</a:t>
+              <a:t>Upload many forms at once</a:t>
             </a:r>
             <a:endParaRPr lang="en-US" sz="1300" dirty="0"/>
           </a:p>
@@ -8648,7 +8641,7 @@
                 <a:ea typeface="Calibri" pitchFamily="34" charset="-122"/>
                 <a:cs typeface="Calibri" pitchFamily="34" charset="-120"/>
               </a:rPr>
-              <a:t>Forms received by email, read and imported after review</a:t>
+              <a:t>Forms sent by email are read in, then checked before saving</a:t>
             </a:r>
             <a:endParaRPr lang="en-US" sz="1150" dirty="0"/>
           </a:p>
@@ -8732,7 +8725,7 @@
                 <a:ea typeface="Calibri" pitchFamily="34" charset="-122"/>
                 <a:cs typeface="Calibri" pitchFamily="34" charset="-120"/>
               </a:rPr>
-              <a:t>Duplicate detection</a:t>
+              <a:t>Spot duplicates</a:t>
             </a:r>
             <a:endParaRPr lang="en-US" sz="1300" dirty="0"/>
           </a:p>
@@ -8774,7 +8767,7 @@
                 <a:ea typeface="Calibri" pitchFamily="34" charset="-122"/>
                 <a:cs typeface="Calibri" pitchFamily="34" charset="-120"/>
               </a:rPr>
-              <a:t>Suspected duplicates flagged for a person, never merged automatically</a:t>
+              <a:t>Possible duplicates are flagged for a person to decide on</a:t>
             </a:r>
             <a:endParaRPr lang="en-US" sz="1150" dirty="0"/>
           </a:p>
@@ -8838,7 +8831,7 @@
                 <a:ea typeface="Cambria" pitchFamily="34" charset="-122"/>
                 <a:cs typeface="Cambria" pitchFamily="34" charset="-120"/>
               </a:rPr>
-              <a:t>Matching and Eligibility</a:t>
+              <a:t>Matching and Qualifying</a:t>
             </a:r>
             <a:endParaRPr lang="en-US" sz="3100" dirty="0"/>
           </a:p>
@@ -8877,7 +8870,7 @@
                 <a:ea typeface="Calibri" pitchFamily="34" charset="-122"/>
                 <a:cs typeface="Calibri" pitchFamily="34" charset="-120"/>
               </a:rPr>
-              <a:t>Related, but deliberately not the same thing</a:t>
+              <a:t>Two different questions, kept apart on purpose</a:t>
             </a:r>
             <a:endParaRPr lang="en-US" sz="1250" dirty="0"/>
           </a:p>
@@ -9032,7 +9025,7 @@
               <a:buNone/>
             </a:pPr>
             <a:r>
-              <a:rPr lang="en-US" sz="1350" b="1" dirty="0">
+              <a:rPr lang="en-US" sz="1450" b="1" dirty="0">
                 <a:solidFill>
                   <a:srgbClr val="0F5132"/>
                 </a:solidFill>
@@ -9040,9 +9033,9 @@
                 <a:ea typeface="Calibri" pitchFamily="34" charset="-122"/>
                 <a:cs typeface="Calibri" pitchFamily="34" charset="-120"/>
               </a:rPr>
-              <a:t>Rule-based eligibility evaluation</a:t>
-            </a:r>
-            <a:endParaRPr lang="en-US" sz="1350" dirty="0"/>
+              <a:t>Do they qualify?</a:t>
+            </a:r>
+            <a:endParaRPr lang="en-US" sz="1450" dirty="0"/>
           </a:p>
         </p:txBody>
       </p:sp>
@@ -9079,7 +9072,7 @@
               <a:buNone/>
             </a:pPr>
             <a:r>
-              <a:rPr lang="en-US" sz="1350" b="1" dirty="0">
+              <a:rPr lang="en-US" sz="1450" b="1" dirty="0">
                 <a:solidFill>
                   <a:srgbClr val="0F5132"/>
                 </a:solidFill>
@@ -9087,9 +9080,9 @@
                 <a:ea typeface="Calibri" pitchFamily="34" charset="-122"/>
                 <a:cs typeface="Calibri" pitchFamily="34" charset="-120"/>
               </a:rPr>
-              <a:t>Weighted criterion matching</a:t>
-            </a:r>
-            <a:endParaRPr lang="en-US" sz="1350" dirty="0"/>
+              <a:t>How well do they fit?</a:t>
+            </a:r>
+            <a:endParaRPr lang="en-US" sz="1450" dirty="0"/>
           </a:p>
         </p:txBody>
       </p:sp>
@@ -9184,7 +9177,7 @@
                 <a:ea typeface="Calibri" pitchFamily="34" charset="-122"/>
                 <a:cs typeface="Calibri" pitchFamily="34" charset="-120"/>
               </a:rPr>
-              <a:t>Eligible</a:t>
+              <a:t>Qualifies</a:t>
             </a:r>
             <a:endParaRPr lang="en-US" sz="1150" dirty="0"/>
           </a:p>
@@ -9231,7 +9224,7 @@
                 <a:ea typeface="Calibri" pitchFamily="34" charset="-122"/>
                 <a:cs typeface="Calibri" pitchFamily="34" charset="-120"/>
               </a:rPr>
-              <a:t>Not eligible</a:t>
+              <a:t>Does not qualify</a:t>
             </a:r>
             <a:endParaRPr lang="en-US" sz="1150" dirty="0"/>
           </a:p>
@@ -9278,7 +9271,7 @@
                 <a:ea typeface="Calibri" pitchFamily="34" charset="-122"/>
                 <a:cs typeface="Calibri" pitchFamily="34" charset="-120"/>
               </a:rPr>
-              <a:t>Pending verification</a:t>
+              <a:t>Need more info</a:t>
             </a:r>
             <a:endParaRPr lang="en-US" sz="1150" dirty="0"/>
           </a:p>
@@ -9344,7 +9337,7 @@
                 <a:ea typeface="Calibri" pitchFamily="34" charset="-122"/>
                 <a:cs typeface="Calibri" pitchFamily="34" charset="-120"/>
               </a:rPr>
-              <a:t>Match score, as a percentage, with per-criterion reasons</a:t>
+              <a:t>A match score out of 100, with a reason for every rule</a:t>
             </a:r>
             <a:endParaRPr lang="en-US" sz="1250" dirty="0"/>
           </a:p>
@@ -9410,7 +9403,7 @@
                 <a:ea typeface="Calibri" pitchFamily="34" charset="-122"/>
                 <a:cs typeface="Calibri" pitchFamily="34" charset="-120"/>
               </a:rPr>
-              <a:t>A criterion that cannot be evaluated</a:t>
+              <a:t>When we cannot check a rule</a:t>
             </a:r>
             <a:endParaRPr lang="en-US" sz="1450" dirty="0"/>
           </a:p>
@@ -9453,7 +9446,7 @@
                 <a:ea typeface="Calibri" pitchFamily="34" charset="-122"/>
                 <a:cs typeface="Calibri" pitchFamily="34" charset="-120"/>
               </a:rPr>
-              <a:t>Contributes a defined partial weight to the score</a:t>
+              <a:t>It still counts towards the score, but only partly</a:t>
             </a:r>
             <a:endParaRPr lang="en-US" sz="1250" dirty="0"/>
           </a:p>
@@ -9474,7 +9467,7 @@
                 <a:ea typeface="Calibri" pitchFamily="34" charset="-122"/>
                 <a:cs typeface="Calibri" pitchFamily="34" charset="-120"/>
               </a:rPr>
-              <a:t>Reported as needing verification — never silently failed</a:t>
+              <a:t>We say so clearly. We never just mark it as failed</a:t>
             </a:r>
             <a:endParaRPr lang="en-US" sz="1250" dirty="0"/>
           </a:p>
@@ -9540,7 +9533,7 @@
                 <a:ea typeface="Calibri" pitchFamily="34" charset="-122"/>
                 <a:cs typeface="Calibri" pitchFamily="34" charset="-120"/>
               </a:rPr>
-              <a:t>Criteria used</a:t>
+              <a:t>What we compare</a:t>
             </a:r>
             <a:endParaRPr lang="en-US" sz="1450" dirty="0"/>
           </a:p>
@@ -9583,7 +9576,7 @@
                 <a:ea typeface="Calibri" pitchFamily="34" charset="-122"/>
                 <a:cs typeface="Calibri" pitchFamily="34" charset="-120"/>
               </a:rPr>
-              <a:t>Field of study · Institution · Academic performance</a:t>
+              <a:t>Course · University · Marks</a:t>
             </a:r>
             <a:endParaRPr lang="en-US" sz="1250" dirty="0"/>
           </a:p>
@@ -9604,7 +9597,7 @@
                 <a:ea typeface="Calibri" pitchFamily="34" charset="-122"/>
                 <a:cs typeface="Calibri" pitchFamily="34" charset="-120"/>
               </a:rPr>
-              <a:t>Subject requirements · Household circumstances · Demographics</a:t>
+              <a:t>Subjects needed · Family income · Background</a:t>
             </a:r>
             <a:endParaRPr lang="en-US" sz="1250" dirty="0"/>
           </a:p>
@@ -9670,7 +9663,7 @@
                 <a:ea typeface="Calibri" pitchFamily="34" charset="-122"/>
                 <a:cs typeface="Calibri" pitchFamily="34" charset="-120"/>
               </a:rPr>
-              <a:t>A high match score never implies a qualification the student does not hold.</a:t>
+              <a:t>A high score does not mean they qualify. We check that separately.</a:t>
             </a:r>
             <a:endParaRPr lang="en-US" sz="1350" dirty="0"/>
           </a:p>
@@ -9884,7 +9877,7 @@
                 <a:ea typeface="Calibri" pitchFamily="34" charset="-122"/>
                 <a:cs typeface="Calibri" pitchFamily="34" charset="-120"/>
               </a:rPr>
-              <a:t>Product backlog</a:t>
+              <a:t>A list of work</a:t>
             </a:r>
             <a:endParaRPr lang="en-US" sz="1300" dirty="0"/>
           </a:p>
@@ -9923,7 +9916,7 @@
                 <a:ea typeface="Calibri" pitchFamily="34" charset="-122"/>
                 <a:cs typeface="Calibri" pitchFamily="34" charset="-120"/>
               </a:rPr>
-              <a:t>Requirements re-ordered at the start of each sprint</a:t>
+              <a:t>We put the most important things first before each sprint</a:t>
             </a:r>
             <a:endParaRPr lang="en-US" sz="1150" dirty="0"/>
           </a:p>
@@ -10007,7 +10000,7 @@
                 <a:ea typeface="Calibri" pitchFamily="34" charset="-122"/>
                 <a:cs typeface="Calibri" pitchFamily="34" charset="-120"/>
               </a:rPr>
-              <a:t>Fixed-length sprints</a:t>
+              <a:t>Short sprints</a:t>
             </a:r>
             <a:endParaRPr lang="en-US" sz="1300" dirty="0"/>
           </a:p>
@@ -10046,7 +10039,7 @@
                 <a:ea typeface="Calibri" pitchFamily="34" charset="-122"/>
                 <a:cs typeface="Calibri" pitchFamily="34" charset="-120"/>
               </a:rPr>
-              <a:t>Each produces a working increment of the system</a:t>
+              <a:t>Each one ends with a working part of the system</a:t>
             </a:r>
             <a:endParaRPr lang="en-US" sz="1150" dirty="0"/>
           </a:p>
@@ -10169,7 +10162,7 @@
                 <a:ea typeface="Calibri" pitchFamily="34" charset="-122"/>
                 <a:cs typeface="Calibri" pitchFamily="34" charset="-120"/>
               </a:rPr>
-              <a:t>The supervisor acts as product owner and directs what is built next</a:t>
+              <a:t>Our supervisor checks the work and says what to build next</a:t>
             </a:r>
             <a:endParaRPr lang="en-US" sz="1150" dirty="0"/>
           </a:p>
@@ -10253,7 +10246,7 @@
                 <a:ea typeface="Calibri" pitchFamily="34" charset="-122"/>
                 <a:cs typeface="Calibri" pitchFamily="34" charset="-120"/>
               </a:rPr>
-              <a:t>Retrospectives</a:t>
+              <a:t>Looking back</a:t>
             </a:r>
             <a:endParaRPr lang="en-US" sz="1300" dirty="0"/>
           </a:p>
@@ -10292,7 +10285,7 @@
                 <a:ea typeface="Calibri" pitchFamily="34" charset="-122"/>
                 <a:cs typeface="Calibri" pitchFamily="34" charset="-120"/>
               </a:rPr>
-              <a:t>The team adjusts how it works between sprints</a:t>
+              <a:t>After each sprint we agree how to work better</a:t>
             </a:r>
             <a:endParaRPr lang="en-US" sz="1150" dirty="0"/>
           </a:p>
@@ -10401,7 +10394,7 @@
                 <a:ea typeface="Calibri" pitchFamily="34" charset="-122"/>
                 <a:cs typeface="Calibri" pitchFamily="34" charset="-120"/>
               </a:rPr>
-              <a:t>The criteria funders use were not known upfront — the data model had to keep changing</a:t>
+              <a:t>We did not know what rules companies use until we looked, so the design kept changing</a:t>
             </a:r>
             <a:endParaRPr lang="en-US" sz="1200" dirty="0"/>
           </a:p>
@@ -10576,7 +10569,7 @@
                 <a:ea typeface="Calibri" pitchFamily="34" charset="-122"/>
                 <a:cs typeface="Calibri" pitchFamily="34" charset="-120"/>
               </a:rPr>
-              <a:t>Search is replaced by matching</a:t>
+              <a:t>No more searching. The system finds the matches</a:t>
             </a:r>
             <a:endParaRPr lang="en-US" sz="1250" dirty="0"/>
           </a:p>
@@ -10597,7 +10590,7 @@
                 <a:ea typeface="Calibri" pitchFamily="34" charset="-122"/>
                 <a:cs typeface="Calibri" pitchFamily="34" charset="-120"/>
               </a:rPr>
-              <a:t>The same details entered once, not on every form</a:t>
+              <a:t>Details typed once, not on every form</a:t>
             </a:r>
             <a:endParaRPr lang="en-US" sz="1250" dirty="0"/>
           </a:p>
@@ -10618,7 +10611,7 @@
                 <a:ea typeface="Calibri" pitchFamily="34" charset="-122"/>
                 <a:cs typeface="Calibri" pitchFamily="34" charset="-120"/>
               </a:rPr>
-              <a:t>Reasons behind each score show what would improve it</a:t>
+              <a:t>They see why they scored what they did, and how to improve</a:t>
             </a:r>
             <a:endParaRPr lang="en-US" sz="1250" dirty="0"/>
           </a:p>
@@ -10684,7 +10677,7 @@
                 <a:ea typeface="Calibri" pitchFamily="34" charset="-122"/>
                 <a:cs typeface="Calibri" pitchFamily="34" charset="-120"/>
               </a:rPr>
-              <a:t>For funding organisations</a:t>
+              <a:t>For companies that give bursaries</a:t>
             </a:r>
             <a:endParaRPr lang="en-US" sz="1450" dirty="0"/>
           </a:p>
@@ -10727,7 +10720,7 @@
                 <a:ea typeface="Calibri" pitchFamily="34" charset="-122"/>
                 <a:cs typeface="Calibri" pitchFamily="34" charset="-120"/>
               </a:rPr>
-              <a:t>Structured publication of programmes and criteria</a:t>
+              <a:t>Advertise a bursary with clear rules</a:t>
             </a:r>
             <a:endParaRPr lang="en-US" sz="1250" dirty="0"/>
           </a:p>
@@ -10748,7 +10741,7 @@
                 <a:ea typeface="Calibri" pitchFamily="34" charset="-122"/>
                 <a:cs typeface="Calibri" pitchFamily="34" charset="-120"/>
               </a:rPr>
-              <a:t>Applications as records, screened against their own rules</a:t>
+              <a:t>Applications arrive organised and already checked</a:t>
             </a:r>
             <a:endParaRPr lang="en-US" sz="1250" dirty="0"/>
           </a:p>
@@ -10769,7 +10762,7 @@
                 <a:ea typeface="Calibri" pitchFamily="34" charset="-122"/>
                 <a:cs typeface="Calibri" pitchFamily="34" charset="-120"/>
               </a:rPr>
-              <a:t>Auditable review, shortlisting and selection</a:t>
+              <a:t>Review, shortlist and choose, with every step recorded</a:t>
             </a:r>
             <a:endParaRPr lang="en-US" sz="1250" dirty="0"/>
           </a:p>

--- a/docs/presentation/Bursary-Bridge_Presentation.pptx
+++ b/docs/presentation/Bursary-Bridge_Presentation.pptx
@@ -15,9 +15,10 @@
     <p:sldId id="263" r:id="rId9"/>
     <p:sldId id="264" r:id="rId10"/>
     <p:sldId id="265" r:id="rId11"/>
+    <p:sldId id="266" r:id="rId12"/>
   </p:sldIdLst>
   <p:notesMasterIdLst>
-    <p:notesMasterId r:id="rId12"/>
+    <p:notesMasterId r:id="rId13"/>
   </p:notesMasterIdLst>
   <p:sldSz cx="12192000" cy="6858000"/>
   <p:notesSz cx="6858000" cy="12192000"/>
@@ -602,10 +603,10 @@
           <a:p>
             <a:r>
               <a:rPr lang="en-US" dirty="0"/>
-              <a:t>SP Tshazi — 0:17.
-Three sentences, one per block, then stop and move to the live system.
-Main point: this slide exists to hand over to the demo, which carries 30 of the 100 marks. Have the system open and signed in before you start.
-Do not add anything new here.</a:t>
+              <a:t>SP Tshazi — 0:22.
+Give one side then the other. Do not read all six lines.
+Main point is the strip at the bottom: the reasons. Right now a student who is turned down is told nothing, so they make the same mistake next year. Our system tells them which rule they missed.
+Keep this quick and move to the close.</a:t>
             </a:r>
             <a:endParaRPr lang="en-US" dirty="0"/>
           </a:p>
@@ -629,6 +630,97 @@
             <a:fld id="{F7021451-1387-4CA6-816F-3879F97B5CBC}" type="slidenum">
               <a:rPr lang="en-US"/>
               <a:t>10</a:t>
+            </a:fld>
+            <a:endParaRPr lang="en-US"/>
+          </a:p>
+        </p:txBody>
+      </p:sp>
+    </p:spTree>
+    <p:extLst>
+      <p:ext uri="{BB962C8B-B14F-4D97-AF65-F5344CB8AC3E}">
+        <p14:creationId xmlns:p14="http://schemas.microsoft.com/office/powerpoint/2010/main" val="1024086991"/>
+      </p:ext>
+    </p:extLst>
+  </p:cSld>
+  <p:clrMapOvr>
+    <a:masterClrMapping/>
+  </p:clrMapOvr>
+</p:notes>
+</file>
+
+<file path=ppt/notesSlides/notesSlide11.xml><?xml version="1.0" encoding="utf-8"?>
+<p:notes xmlns:a="http://schemas.openxmlformats.org/drawingml/2006/main" xmlns:r="http://schemas.openxmlformats.org/officeDocument/2006/relationships" xmlns:p="http://schemas.openxmlformats.org/presentationml/2006/main">
+  <p:cSld>
+    <p:spTree>
+      <p:nvGrpSpPr>
+        <p:cNvPr id="1" name=""/>
+        <p:cNvGrpSpPr/>
+        <p:nvPr/>
+      </p:nvGrpSpPr>
+      <p:grpSpPr>
+        <a:xfrm>
+          <a:off x="0" y="0"/>
+          <a:ext cx="0" cy="0"/>
+          <a:chOff x="0" y="0"/>
+          <a:chExt cx="0" cy="0"/>
+        </a:xfrm>
+      </p:grpSpPr>
+      <p:sp>
+        <p:nvSpPr>
+          <p:cNvPr id="2" name="Slide Image Placeholder 1"/>
+          <p:cNvSpPr>
+            <a:spLocks noGrp="1" noRot="1" noChangeAspect="1"/>
+          </p:cNvSpPr>
+          <p:nvPr>
+            <p:ph type="sldImg"/>
+          </p:nvPr>
+        </p:nvSpPr>
+        <p:spPr/>
+      </p:sp>
+      <p:sp>
+        <p:nvSpPr>
+          <p:cNvPr id="3" name="Notes Placeholder 2"/>
+          <p:cNvSpPr>
+            <a:spLocks noGrp="1"/>
+          </p:cNvSpPr>
+          <p:nvPr>
+            <p:ph type="body" idx="1"/>
+          </p:nvPr>
+        </p:nvSpPr>
+        <p:spPr/>
+        <p:txBody>
+          <a:bodyPr/>
+          <a:lstStyle/>
+          <a:p>
+            <a:r>
+              <a:rPr lang="en-US" dirty="0"/>
+              <a:t>SP Tshazi — 0:17.
+Three sentences, one per block, then stop and move to the live system.
+Main point: this slide exists to hand over to the demo, which carries 30 of the 100 marks. Have the system open and signed in before you start.
+Do not add anything new here.</a:t>
+            </a:r>
+            <a:endParaRPr lang="en-US" dirty="0"/>
+          </a:p>
+        </p:txBody>
+      </p:sp>
+      <p:sp>
+        <p:nvSpPr>
+          <p:cNvPr id="4" name="Slide Number Placeholder 3"/>
+          <p:cNvSpPr>
+            <a:spLocks noGrp="1"/>
+          </p:cNvSpPr>
+          <p:nvPr>
+            <p:ph type="sldNum" sz="quarter" idx="10"/>
+          </p:nvPr>
+        </p:nvSpPr>
+        <p:spPr/>
+        <p:txBody>
+          <a:bodyPr/>
+          <a:lstStyle/>
+          <a:p>
+            <a:fld id="{F7021451-1387-4CA6-816F-3879F97B5CBC}" type="slidenum">
+              <a:rPr lang="en-US"/>
+              <a:t>11</a:t>
             </a:fld>
             <a:endParaRPr lang="en-US"/>
           </a:p>
@@ -693,7 +785,7 @@
           <a:p>
             <a:r>
               <a:rPr lang="en-US" dirty="0"/>
-              <a:t>CPP Mchunu — 0:25.
+              <a:t>CPP Mchunu — 0:24.
 Explain that for most of these students the big question is money, not marks. NSFAS answers it for one group and is easy to find. Everything outside NSFAS is the problem.
 Main point: the other bursaries are not badly organised, they are not organised at all. Three different places, all just writing it out as a page for a person to read.
 Do not read the three places out one by one. Name them and move on.</a:t>
@@ -875,7 +967,7 @@
           <a:p>
             <a:r>
               <a:rPr lang="en-US" dirty="0"/>
-              <a:t>A Nsibande — 0:40.
+              <a:t>A Nsibande — 0:28.
 Read the goal out properly. It is marked on its own. Then say we set ten measurable objectives, and these are the ones that shaped what we built.
 Main point: the first one is the key. Everything else depends on the rules being stored as data instead of sentences, because a computer cannot check a sentence.
 Do not read all six out. Name two or three and let the slide do the rest.</a:t>
@@ -966,7 +1058,7 @@
           <a:p>
             <a:r>
               <a:rPr lang="en-US" dirty="0"/>
-              <a:t>A Nsibande — 0:44.
+              <a:t>A Nsibande — 0:28.
 This is the main idea slide, so give it room. A student fills in their details once. A company enters its rules once, in boxes instead of sentences. The system uses the two together.
 Main point: it works for both sides. Most things that already exist only help one side.
 Then hand over to Bikile.</a:t>
@@ -1057,9 +1149,11 @@
           <a:p>
             <a:r>
               <a:rPr lang="en-US" dirty="0"/>
-              <a:t>KN Bikile — 0:30.
-Do not read the technology names out. Explain the shape instead: what the user sees is kept separate from the working parts, and those are kept separate from the matching rules.
-Main point: the matching rules do not touch the database, which is why we can test them directly. And we check who is allowed to see what at the top of every request, so if someone is not allowed, they get nothing back rather than another persons data.</a:t>
+              <a:t>A Nsibande — 0:24.
+Do not explain what Scrum is. The examiner knows it. Walk the cycle once, quickly, and say the sprint length you actually used.
+Main point: say why this project needed it. We could not know what rules companies use until we looked at what they publish, so the design had to keep changing. Waterfall fixes the design before you start, which would have locked in a wrong guess.
+Step 5 matters: our supervisor is the one who checked each sprint and said what to build next.
+The books are on the slide so the examiner can see them. Do not read them out.</a:t>
             </a:r>
             <a:endParaRPr lang="en-US" dirty="0"/>
           </a:p>
@@ -1147,10 +1241,10 @@
           <a:p>
             <a:r>
               <a:rPr lang="en-US" dirty="0"/>
-              <a:t>KN Bikile — 0:47.
-Do not read twelve items out. Walk the student column as a story: profile, matches, apply. Then the company column as a story: advertise, receive, review, choose.
-Main point: uploading many forms at once exists because companies also get applications by email. Possible duplicates are flagged for a person to decide on, and nothing is saved until somebody confirms it.
-Then hand over to Tshazi.</a:t>
+              <a:t>KN Bikile — 0:26.
+Walk the four boxes left to right, as one request. Somebody opens a page, we check who they are and what they may see, then we fetch the right data.
+Main point: step 2 happens first, before anything is read. If you are not allowed to see something, you get nothing back rather than another persons data. And the matching rules sit on their own, away from the database, which is why we can test them directly.
+Do not read the technology names out. They are there for the examiner to see.</a:t>
             </a:r>
             <a:endParaRPr lang="en-US" dirty="0"/>
           </a:p>
@@ -1238,11 +1332,10 @@
           <a:p>
             <a:r>
               <a:rPr lang="en-US" dirty="0"/>
-              <a:t>SP Tshazi — 0:40.
-This is the strongest technical point in the project. One profile, two separate questions.
-Do they qualify? That is checked against the rules the company published, and the answer is qualifies, does not qualify, or we need more information. How well do they fit? That is a score out of 100, with the reason for each rule shown next to it.
-Main point: we keep these apart on purpose, so a high score never suggests a student qualifies when they do not. And if we cannot check a rule, it still counts partly and we say so. We never just mark it failed, because that would hide a bursary the student might actually get.
-Expect a question here. Answer it yourself.</a:t>
+              <a:t>KN Bikile — 0:42.
+Do not read twelve items out. Walk the student column as a story: profile, matches, apply. Then the company column as a story: advertise, receive, review, choose.
+Main point: uploading many forms at once exists because companies also get applications by email. Possible duplicates are flagged for a person to decide on, and nothing is saved until somebody confirms it.
+Then hand over to Tshazi.</a:t>
             </a:r>
             <a:endParaRPr lang="en-US" dirty="0"/>
           </a:p>
@@ -1330,10 +1423,11 @@
           <a:p>
             <a:r>
               <a:rPr lang="en-US" dirty="0"/>
-              <a:t>SP Tshazi — 0:25.
-Do not explain what Scrum is. The examiner knows. Explain why this project needed it: we could not know what rules companies use until we looked at what they publish, so the design kept changing. Waterfall would have locked it in too early.
-Main point on value: telling a student why they scored what they did is something the current way never gives back.
-Keep this quick. It is the shortest slot.</a:t>
+              <a:t>SP Tshazi — 0:36.
+This is the strongest technical point in the project. One profile, two separate questions.
+Do they qualify? That is checked against the rules the company published, and the answer is qualifies, does not qualify, or we need more information. How well do they fit? That is a score out of 100, with the reason for each rule shown next to it.
+Main point: we keep these apart on purpose, so a high score never suggests a student qualifies when they do not. And if we cannot check a rule, it still counts partly and we say so. We never just mark it failed, because that would hide a bursary the student might actually get.
+Expect a question here. Answer it yourself.</a:t>
             </a:r>
             <a:endParaRPr lang="en-US" dirty="0"/>
           </a:p>
@@ -2169,6 +2263,1063 @@
 <file path=ppt/slides/slide10.xml><?xml version="1.0" encoding="utf-8"?>
 <p:sld xmlns:a="http://schemas.openxmlformats.org/drawingml/2006/main" xmlns:r="http://schemas.openxmlformats.org/officeDocument/2006/relationships" xmlns:p="http://schemas.openxmlformats.org/presentationml/2006/main">
   <p:cSld name="Slide 10">
+    <p:spTree>
+      <p:nvGrpSpPr>
+        <p:cNvPr id="1" name=""/>
+        <p:cNvGrpSpPr/>
+        <p:nvPr/>
+      </p:nvGrpSpPr>
+      <p:grpSpPr>
+        <a:xfrm>
+          <a:off x="0" y="0"/>
+          <a:ext cx="0" cy="0"/>
+          <a:chOff x="0" y="0"/>
+          <a:chExt cx="0" cy="0"/>
+        </a:xfrm>
+      </p:grpSpPr>
+      <p:sp>
+        <p:nvSpPr>
+          <p:cNvPr id="2" name="Text 0"/>
+          <p:cNvSpPr txBox="1"/>
+          <p:nvPr/>
+        </p:nvSpPr>
+        <p:spPr>
+          <a:xfrm>
+            <a:off x="566928" y="365760"/>
+            <a:ext cx="11027664" cy="658368"/>
+          </a:xfrm>
+          <a:prstGeom prst="rect">
+            <a:avLst/>
+          </a:prstGeom>
+          <a:noFill/>
+          <a:ln/>
+        </p:spPr>
+        <p:txBody>
+          <a:bodyPr wrap="square" lIns="0" tIns="0" rIns="0" bIns="0" rtlCol="0" anchor="ctr"/>
+          <a:lstStyle/>
+          <a:p>
+            <a:pPr indent="0" marL="0">
+              <a:buNone/>
+            </a:pPr>
+            <a:r>
+              <a:rPr lang="en-US" sz="3100" b="1" dirty="0">
+                <a:solidFill>
+                  <a:srgbClr val="0F5132"/>
+                </a:solidFill>
+                <a:latin typeface="Cambria" pitchFamily="34" charset="0"/>
+                <a:ea typeface="Cambria" pitchFamily="34" charset="-122"/>
+                <a:cs typeface="Cambria" pitchFamily="34" charset="-120"/>
+              </a:rPr>
+              <a:t>Project Value</a:t>
+            </a:r>
+            <a:endParaRPr lang="en-US" sz="3100" dirty="0"/>
+          </a:p>
+        </p:txBody>
+      </p:sp>
+      <p:sp>
+        <p:nvSpPr>
+          <p:cNvPr id="3" name="Text 1"/>
+          <p:cNvSpPr txBox="1"/>
+          <p:nvPr/>
+        </p:nvSpPr>
+        <p:spPr>
+          <a:xfrm>
+            <a:off x="566928" y="987552"/>
+            <a:ext cx="11027664" cy="292608"/>
+          </a:xfrm>
+          <a:prstGeom prst="rect">
+            <a:avLst/>
+          </a:prstGeom>
+          <a:noFill/>
+          <a:ln/>
+        </p:spPr>
+        <p:txBody>
+          <a:bodyPr wrap="square" lIns="0" tIns="0" rIns="0" bIns="0" rtlCol="0" anchor="ctr"/>
+          <a:lstStyle/>
+          <a:p>
+            <a:pPr indent="0" marL="0">
+              <a:buNone/>
+            </a:pPr>
+            <a:r>
+              <a:rPr lang="en-US" sz="1250" spc="60" kern="0" dirty="0">
+                <a:solidFill>
+                  <a:srgbClr val="5E6B64"/>
+                </a:solidFill>
+                <a:latin typeface="Calibri" pitchFamily="34" charset="0"/>
+                <a:ea typeface="Calibri" pitchFamily="34" charset="-122"/>
+                <a:cs typeface="Calibri" pitchFamily="34" charset="-120"/>
+              </a:rPr>
+              <a:t>What changes for the people who use it</a:t>
+            </a:r>
+            <a:endParaRPr lang="en-US" sz="1250" dirty="0"/>
+          </a:p>
+        </p:txBody>
+      </p:sp>
+      <p:sp>
+        <p:nvSpPr>
+          <p:cNvPr id="4" name="Shape 2"/>
+          <p:cNvSpPr/>
+          <p:nvPr/>
+        </p:nvSpPr>
+        <p:spPr>
+          <a:xfrm>
+            <a:off x="566928" y="1298448"/>
+            <a:ext cx="5513832" cy="603504"/>
+          </a:xfrm>
+          <a:prstGeom prst="roundRect">
+            <a:avLst>
+              <a:gd name="adj" fmla="val 12121"/>
+            </a:avLst>
+          </a:prstGeom>
+          <a:solidFill>
+            <a:srgbClr val="0F5132"/>
+          </a:solidFill>
+          <a:ln w="12700">
+            <a:solidFill>
+              <a:srgbClr val="0F5132"/>
+            </a:solidFill>
+            <a:prstDash val="solid"/>
+          </a:ln>
+        </p:spPr>
+      </p:sp>
+      <p:sp>
+        <p:nvSpPr>
+          <p:cNvPr id="5" name="Text 3"/>
+          <p:cNvSpPr txBox="1"/>
+          <p:nvPr/>
+        </p:nvSpPr>
+        <p:spPr>
+          <a:xfrm>
+            <a:off x="566928" y="1298448"/>
+            <a:ext cx="5513832" cy="603504"/>
+          </a:xfrm>
+          <a:prstGeom prst="rect">
+            <a:avLst/>
+          </a:prstGeom>
+          <a:noFill/>
+          <a:ln/>
+        </p:spPr>
+        <p:txBody>
+          <a:bodyPr wrap="square" lIns="0" tIns="0" rIns="0" bIns="0" rtlCol="0" anchor="ctr"/>
+          <a:lstStyle/>
+          <a:p>
+            <a:pPr algn="ctr" indent="0" marL="0">
+              <a:buNone/>
+            </a:pPr>
+            <a:r>
+              <a:rPr lang="en-US" sz="1400" b="1" spc="120" kern="0" dirty="0">
+                <a:solidFill>
+                  <a:srgbClr val="FFFFFF"/>
+                </a:solidFill>
+                <a:latin typeface="Calibri" pitchFamily="34" charset="0"/>
+                <a:ea typeface="Calibri" pitchFamily="34" charset="-122"/>
+                <a:cs typeface="Calibri" pitchFamily="34" charset="-120"/>
+              </a:rPr>
+              <a:t>FOR STUDENTS</a:t>
+            </a:r>
+            <a:endParaRPr lang="en-US" sz="1400" dirty="0"/>
+          </a:p>
+        </p:txBody>
+      </p:sp>
+      <p:sp>
+        <p:nvSpPr>
+          <p:cNvPr id="6" name="Shape 4"/>
+          <p:cNvSpPr/>
+          <p:nvPr/>
+        </p:nvSpPr>
+        <p:spPr>
+          <a:xfrm>
+            <a:off x="6446520" y="1298448"/>
+            <a:ext cx="5513832" cy="603504"/>
+          </a:xfrm>
+          <a:prstGeom prst="roundRect">
+            <a:avLst>
+              <a:gd name="adj" fmla="val 12121"/>
+            </a:avLst>
+          </a:prstGeom>
+          <a:solidFill>
+            <a:srgbClr val="C08A2E"/>
+          </a:solidFill>
+          <a:ln w="12700">
+            <a:solidFill>
+              <a:srgbClr val="C08A2E"/>
+            </a:solidFill>
+            <a:prstDash val="solid"/>
+          </a:ln>
+        </p:spPr>
+      </p:sp>
+      <p:sp>
+        <p:nvSpPr>
+          <p:cNvPr id="7" name="Text 5"/>
+          <p:cNvSpPr txBox="1"/>
+          <p:nvPr/>
+        </p:nvSpPr>
+        <p:spPr>
+          <a:xfrm>
+            <a:off x="6446520" y="1298448"/>
+            <a:ext cx="5513832" cy="603504"/>
+          </a:xfrm>
+          <a:prstGeom prst="rect">
+            <a:avLst/>
+          </a:prstGeom>
+          <a:noFill/>
+          <a:ln/>
+        </p:spPr>
+        <p:txBody>
+          <a:bodyPr wrap="square" lIns="0" tIns="0" rIns="0" bIns="0" rtlCol="0" anchor="ctr"/>
+          <a:lstStyle/>
+          <a:p>
+            <a:pPr algn="ctr" indent="0" marL="0">
+              <a:buNone/>
+            </a:pPr>
+            <a:r>
+              <a:rPr lang="en-US" sz="1400" b="1" spc="120" kern="0" dirty="0">
+                <a:solidFill>
+                  <a:srgbClr val="2A1D05"/>
+                </a:solidFill>
+                <a:latin typeface="Calibri" pitchFamily="34" charset="0"/>
+                <a:ea typeface="Calibri" pitchFamily="34" charset="-122"/>
+                <a:cs typeface="Calibri" pitchFamily="34" charset="-120"/>
+              </a:rPr>
+              <a:t>FOR COMPANIES</a:t>
+            </a:r>
+            <a:endParaRPr lang="en-US" sz="1400" dirty="0"/>
+          </a:p>
+        </p:txBody>
+      </p:sp>
+      <p:sp>
+        <p:nvSpPr>
+          <p:cNvPr id="8" name="Text 6"/>
+          <p:cNvSpPr txBox="1"/>
+          <p:nvPr/>
+        </p:nvSpPr>
+        <p:spPr>
+          <a:xfrm>
+            <a:off x="566928" y="2176272"/>
+            <a:ext cx="292608" cy="292608"/>
+          </a:xfrm>
+          <a:prstGeom prst="ellipse">
+            <a:avLst/>
+          </a:prstGeom>
+          <a:solidFill>
+            <a:srgbClr val="0F5132"/>
+          </a:solidFill>
+          <a:ln>
+            <a:solidFill>
+              <a:srgbClr val="0F5132"/>
+            </a:solidFill>
+          </a:ln>
+        </p:spPr>
+        <p:txBody>
+          <a:bodyPr wrap="square" lIns="0" tIns="0" rIns="0" bIns="0" rtlCol="0" anchor="ctr"/>
+          <a:lstStyle/>
+          <a:p>
+            <a:pPr algn="ctr" indent="0" marL="0">
+              <a:buNone/>
+            </a:pPr>
+            <a:r>
+              <a:rPr lang="en-US" sz="1200" b="1" dirty="0">
+                <a:solidFill>
+                  <a:srgbClr val="FFFFFF"/>
+                </a:solidFill>
+                <a:latin typeface="Calibri" pitchFamily="34" charset="0"/>
+                <a:ea typeface="Calibri" pitchFamily="34" charset="-122"/>
+                <a:cs typeface="Calibri" pitchFamily="34" charset="-120"/>
+              </a:rPr>
+              <a:t>1</a:t>
+            </a:r>
+            <a:endParaRPr lang="en-US" sz="1200" dirty="0"/>
+          </a:p>
+        </p:txBody>
+      </p:sp>
+      <p:sp>
+        <p:nvSpPr>
+          <p:cNvPr id="9" name="Text 7"/>
+          <p:cNvSpPr txBox="1"/>
+          <p:nvPr/>
+        </p:nvSpPr>
+        <p:spPr>
+          <a:xfrm>
+            <a:off x="987552" y="2157984"/>
+            <a:ext cx="5093208" cy="292608"/>
+          </a:xfrm>
+          <a:prstGeom prst="rect">
+            <a:avLst/>
+          </a:prstGeom>
+          <a:noFill/>
+          <a:ln/>
+        </p:spPr>
+        <p:txBody>
+          <a:bodyPr wrap="square" lIns="0" tIns="0" rIns="0" bIns="0" rtlCol="0" anchor="ctr"/>
+          <a:lstStyle/>
+          <a:p>
+            <a:pPr indent="0" marL="0">
+              <a:buNone/>
+            </a:pPr>
+            <a:r>
+              <a:rPr lang="en-US" sz="1400" b="1" dirty="0">
+                <a:solidFill>
+                  <a:srgbClr val="0F5132"/>
+                </a:solidFill>
+                <a:latin typeface="Calibri" pitchFamily="34" charset="0"/>
+                <a:ea typeface="Calibri" pitchFamily="34" charset="-122"/>
+                <a:cs typeface="Calibri" pitchFamily="34" charset="-120"/>
+              </a:rPr>
+              <a:t>No more searching</a:t>
+            </a:r>
+            <a:endParaRPr lang="en-US" sz="1400" dirty="0"/>
+          </a:p>
+        </p:txBody>
+      </p:sp>
+      <p:sp>
+        <p:nvSpPr>
+          <p:cNvPr id="10" name="Text 8"/>
+          <p:cNvSpPr txBox="1"/>
+          <p:nvPr/>
+        </p:nvSpPr>
+        <p:spPr>
+          <a:xfrm>
+            <a:off x="987552" y="2468880"/>
+            <a:ext cx="5093208" cy="512064"/>
+          </a:xfrm>
+          <a:prstGeom prst="rect">
+            <a:avLst/>
+          </a:prstGeom>
+          <a:noFill/>
+          <a:ln/>
+        </p:spPr>
+        <p:txBody>
+          <a:bodyPr wrap="square" lIns="0" tIns="0" rIns="0" bIns="0" rtlCol="0" anchor="ctr"/>
+          <a:lstStyle/>
+          <a:p>
+            <a:pPr indent="0" marL="0">
+              <a:lnSpc>
+                <a:spcPct val="112000"/>
+              </a:lnSpc>
+              <a:buNone/>
+            </a:pPr>
+            <a:r>
+              <a:rPr lang="en-US" sz="1250" dirty="0">
+                <a:solidFill>
+                  <a:srgbClr val="5E6B64"/>
+                </a:solidFill>
+                <a:latin typeface="Calibri" pitchFamily="34" charset="0"/>
+                <a:ea typeface="Calibri" pitchFamily="34" charset="-122"/>
+                <a:cs typeface="Calibri" pitchFamily="34" charset="-120"/>
+              </a:rPr>
+              <a:t>The system finds the bursaries that fit them</a:t>
+            </a:r>
+            <a:endParaRPr lang="en-US" sz="1250" dirty="0"/>
+          </a:p>
+        </p:txBody>
+      </p:sp>
+      <p:sp>
+        <p:nvSpPr>
+          <p:cNvPr id="11" name="Text 9"/>
+          <p:cNvSpPr txBox="1"/>
+          <p:nvPr/>
+        </p:nvSpPr>
+        <p:spPr>
+          <a:xfrm>
+            <a:off x="566928" y="3346704"/>
+            <a:ext cx="292608" cy="292608"/>
+          </a:xfrm>
+          <a:prstGeom prst="ellipse">
+            <a:avLst/>
+          </a:prstGeom>
+          <a:solidFill>
+            <a:srgbClr val="0F5132"/>
+          </a:solidFill>
+          <a:ln>
+            <a:solidFill>
+              <a:srgbClr val="0F5132"/>
+            </a:solidFill>
+          </a:ln>
+        </p:spPr>
+        <p:txBody>
+          <a:bodyPr wrap="square" lIns="0" tIns="0" rIns="0" bIns="0" rtlCol="0" anchor="ctr"/>
+          <a:lstStyle/>
+          <a:p>
+            <a:pPr algn="ctr" indent="0" marL="0">
+              <a:buNone/>
+            </a:pPr>
+            <a:r>
+              <a:rPr lang="en-US" sz="1200" b="1" dirty="0">
+                <a:solidFill>
+                  <a:srgbClr val="FFFFFF"/>
+                </a:solidFill>
+                <a:latin typeface="Calibri" pitchFamily="34" charset="0"/>
+                <a:ea typeface="Calibri" pitchFamily="34" charset="-122"/>
+                <a:cs typeface="Calibri" pitchFamily="34" charset="-120"/>
+              </a:rPr>
+              <a:t>2</a:t>
+            </a:r>
+            <a:endParaRPr lang="en-US" sz="1200" dirty="0"/>
+          </a:p>
+        </p:txBody>
+      </p:sp>
+      <p:sp>
+        <p:nvSpPr>
+          <p:cNvPr id="12" name="Text 10"/>
+          <p:cNvSpPr txBox="1"/>
+          <p:nvPr/>
+        </p:nvSpPr>
+        <p:spPr>
+          <a:xfrm>
+            <a:off x="987552" y="3328416"/>
+            <a:ext cx="5093208" cy="292608"/>
+          </a:xfrm>
+          <a:prstGeom prst="rect">
+            <a:avLst/>
+          </a:prstGeom>
+          <a:noFill/>
+          <a:ln/>
+        </p:spPr>
+        <p:txBody>
+          <a:bodyPr wrap="square" lIns="0" tIns="0" rIns="0" bIns="0" rtlCol="0" anchor="ctr"/>
+          <a:lstStyle/>
+          <a:p>
+            <a:pPr indent="0" marL="0">
+              <a:buNone/>
+            </a:pPr>
+            <a:r>
+              <a:rPr lang="en-US" sz="1400" b="1" dirty="0">
+                <a:solidFill>
+                  <a:srgbClr val="0F5132"/>
+                </a:solidFill>
+                <a:latin typeface="Calibri" pitchFamily="34" charset="0"/>
+                <a:ea typeface="Calibri" pitchFamily="34" charset="-122"/>
+                <a:cs typeface="Calibri" pitchFamily="34" charset="-120"/>
+              </a:rPr>
+              <a:t>Details typed once</a:t>
+            </a:r>
+            <a:endParaRPr lang="en-US" sz="1400" dirty="0"/>
+          </a:p>
+        </p:txBody>
+      </p:sp>
+      <p:sp>
+        <p:nvSpPr>
+          <p:cNvPr id="13" name="Text 11"/>
+          <p:cNvSpPr txBox="1"/>
+          <p:nvPr/>
+        </p:nvSpPr>
+        <p:spPr>
+          <a:xfrm>
+            <a:off x="987552" y="3639312"/>
+            <a:ext cx="5093208" cy="512064"/>
+          </a:xfrm>
+          <a:prstGeom prst="rect">
+            <a:avLst/>
+          </a:prstGeom>
+          <a:noFill/>
+          <a:ln/>
+        </p:spPr>
+        <p:txBody>
+          <a:bodyPr wrap="square" lIns="0" tIns="0" rIns="0" bIns="0" rtlCol="0" anchor="ctr"/>
+          <a:lstStyle/>
+          <a:p>
+            <a:pPr indent="0" marL="0">
+              <a:lnSpc>
+                <a:spcPct val="112000"/>
+              </a:lnSpc>
+              <a:buNone/>
+            </a:pPr>
+            <a:r>
+              <a:rPr lang="en-US" sz="1250" dirty="0">
+                <a:solidFill>
+                  <a:srgbClr val="5E6B64"/>
+                </a:solidFill>
+                <a:latin typeface="Calibri" pitchFamily="34" charset="0"/>
+                <a:ea typeface="Calibri" pitchFamily="34" charset="-122"/>
+                <a:cs typeface="Calibri" pitchFamily="34" charset="-120"/>
+              </a:rPr>
+              <a:t>Not again on every single form</a:t>
+            </a:r>
+            <a:endParaRPr lang="en-US" sz="1250" dirty="0"/>
+          </a:p>
+        </p:txBody>
+      </p:sp>
+      <p:sp>
+        <p:nvSpPr>
+          <p:cNvPr id="14" name="Text 12"/>
+          <p:cNvSpPr txBox="1"/>
+          <p:nvPr/>
+        </p:nvSpPr>
+        <p:spPr>
+          <a:xfrm>
+            <a:off x="566928" y="4517136"/>
+            <a:ext cx="292608" cy="292608"/>
+          </a:xfrm>
+          <a:prstGeom prst="ellipse">
+            <a:avLst/>
+          </a:prstGeom>
+          <a:solidFill>
+            <a:srgbClr val="0F5132"/>
+          </a:solidFill>
+          <a:ln>
+            <a:solidFill>
+              <a:srgbClr val="0F5132"/>
+            </a:solidFill>
+          </a:ln>
+        </p:spPr>
+        <p:txBody>
+          <a:bodyPr wrap="square" lIns="0" tIns="0" rIns="0" bIns="0" rtlCol="0" anchor="ctr"/>
+          <a:lstStyle/>
+          <a:p>
+            <a:pPr algn="ctr" indent="0" marL="0">
+              <a:buNone/>
+            </a:pPr>
+            <a:r>
+              <a:rPr lang="en-US" sz="1200" b="1" dirty="0">
+                <a:solidFill>
+                  <a:srgbClr val="FFFFFF"/>
+                </a:solidFill>
+                <a:latin typeface="Calibri" pitchFamily="34" charset="0"/>
+                <a:ea typeface="Calibri" pitchFamily="34" charset="-122"/>
+                <a:cs typeface="Calibri" pitchFamily="34" charset="-120"/>
+              </a:rPr>
+              <a:t>3</a:t>
+            </a:r>
+            <a:endParaRPr lang="en-US" sz="1200" dirty="0"/>
+          </a:p>
+        </p:txBody>
+      </p:sp>
+      <p:sp>
+        <p:nvSpPr>
+          <p:cNvPr id="15" name="Text 13"/>
+          <p:cNvSpPr txBox="1"/>
+          <p:nvPr/>
+        </p:nvSpPr>
+        <p:spPr>
+          <a:xfrm>
+            <a:off x="987552" y="4498848"/>
+            <a:ext cx="5093208" cy="292608"/>
+          </a:xfrm>
+          <a:prstGeom prst="rect">
+            <a:avLst/>
+          </a:prstGeom>
+          <a:noFill/>
+          <a:ln/>
+        </p:spPr>
+        <p:txBody>
+          <a:bodyPr wrap="square" lIns="0" tIns="0" rIns="0" bIns="0" rtlCol="0" anchor="ctr"/>
+          <a:lstStyle/>
+          <a:p>
+            <a:pPr indent="0" marL="0">
+              <a:buNone/>
+            </a:pPr>
+            <a:r>
+              <a:rPr lang="en-US" sz="1400" b="1" dirty="0">
+                <a:solidFill>
+                  <a:srgbClr val="0F5132"/>
+                </a:solidFill>
+                <a:latin typeface="Calibri" pitchFamily="34" charset="0"/>
+                <a:ea typeface="Calibri" pitchFamily="34" charset="-122"/>
+                <a:cs typeface="Calibri" pitchFamily="34" charset="-120"/>
+              </a:rPr>
+              <a:t>They see the reasons</a:t>
+            </a:r>
+            <a:endParaRPr lang="en-US" sz="1400" dirty="0"/>
+          </a:p>
+        </p:txBody>
+      </p:sp>
+      <p:sp>
+        <p:nvSpPr>
+          <p:cNvPr id="16" name="Text 14"/>
+          <p:cNvSpPr txBox="1"/>
+          <p:nvPr/>
+        </p:nvSpPr>
+        <p:spPr>
+          <a:xfrm>
+            <a:off x="987552" y="4809744"/>
+            <a:ext cx="5093208" cy="512064"/>
+          </a:xfrm>
+          <a:prstGeom prst="rect">
+            <a:avLst/>
+          </a:prstGeom>
+          <a:noFill/>
+          <a:ln/>
+        </p:spPr>
+        <p:txBody>
+          <a:bodyPr wrap="square" lIns="0" tIns="0" rIns="0" bIns="0" rtlCol="0" anchor="ctr"/>
+          <a:lstStyle/>
+          <a:p>
+            <a:pPr indent="0" marL="0">
+              <a:lnSpc>
+                <a:spcPct val="112000"/>
+              </a:lnSpc>
+              <a:buNone/>
+            </a:pPr>
+            <a:r>
+              <a:rPr lang="en-US" sz="1250" dirty="0">
+                <a:solidFill>
+                  <a:srgbClr val="5E6B64"/>
+                </a:solidFill>
+                <a:latin typeface="Calibri" pitchFamily="34" charset="0"/>
+                <a:ea typeface="Calibri" pitchFamily="34" charset="-122"/>
+                <a:cs typeface="Calibri" pitchFamily="34" charset="-120"/>
+              </a:rPr>
+              <a:t>So they know what would improve their chances</a:t>
+            </a:r>
+            <a:endParaRPr lang="en-US" sz="1250" dirty="0"/>
+          </a:p>
+        </p:txBody>
+      </p:sp>
+      <p:sp>
+        <p:nvSpPr>
+          <p:cNvPr id="17" name="Text 15"/>
+          <p:cNvSpPr txBox="1"/>
+          <p:nvPr/>
+        </p:nvSpPr>
+        <p:spPr>
+          <a:xfrm>
+            <a:off x="6446520" y="2176272"/>
+            <a:ext cx="292608" cy="292608"/>
+          </a:xfrm>
+          <a:prstGeom prst="ellipse">
+            <a:avLst/>
+          </a:prstGeom>
+          <a:solidFill>
+            <a:srgbClr val="0F5132"/>
+          </a:solidFill>
+          <a:ln>
+            <a:solidFill>
+              <a:srgbClr val="0F5132"/>
+            </a:solidFill>
+          </a:ln>
+        </p:spPr>
+        <p:txBody>
+          <a:bodyPr wrap="square" lIns="0" tIns="0" rIns="0" bIns="0" rtlCol="0" anchor="ctr"/>
+          <a:lstStyle/>
+          <a:p>
+            <a:pPr algn="ctr" indent="0" marL="0">
+              <a:buNone/>
+            </a:pPr>
+            <a:r>
+              <a:rPr lang="en-US" sz="1200" b="1" dirty="0">
+                <a:solidFill>
+                  <a:srgbClr val="FFFFFF"/>
+                </a:solidFill>
+                <a:latin typeface="Calibri" pitchFamily="34" charset="0"/>
+                <a:ea typeface="Calibri" pitchFamily="34" charset="-122"/>
+                <a:cs typeface="Calibri" pitchFamily="34" charset="-120"/>
+              </a:rPr>
+              <a:t>1</a:t>
+            </a:r>
+            <a:endParaRPr lang="en-US" sz="1200" dirty="0"/>
+          </a:p>
+        </p:txBody>
+      </p:sp>
+      <p:sp>
+        <p:nvSpPr>
+          <p:cNvPr id="18" name="Text 16"/>
+          <p:cNvSpPr txBox="1"/>
+          <p:nvPr/>
+        </p:nvSpPr>
+        <p:spPr>
+          <a:xfrm>
+            <a:off x="6867144" y="2157984"/>
+            <a:ext cx="5093208" cy="292608"/>
+          </a:xfrm>
+          <a:prstGeom prst="rect">
+            <a:avLst/>
+          </a:prstGeom>
+          <a:noFill/>
+          <a:ln/>
+        </p:spPr>
+        <p:txBody>
+          <a:bodyPr wrap="square" lIns="0" tIns="0" rIns="0" bIns="0" rtlCol="0" anchor="ctr"/>
+          <a:lstStyle/>
+          <a:p>
+            <a:pPr indent="0" marL="0">
+              <a:buNone/>
+            </a:pPr>
+            <a:r>
+              <a:rPr lang="en-US" sz="1400" b="1" dirty="0">
+                <a:solidFill>
+                  <a:srgbClr val="0F5132"/>
+                </a:solidFill>
+                <a:latin typeface="Calibri" pitchFamily="34" charset="0"/>
+                <a:ea typeface="Calibri" pitchFamily="34" charset="-122"/>
+                <a:cs typeface="Calibri" pitchFamily="34" charset="-120"/>
+              </a:rPr>
+              <a:t>Clear rules</a:t>
+            </a:r>
+            <a:endParaRPr lang="en-US" sz="1400" dirty="0"/>
+          </a:p>
+        </p:txBody>
+      </p:sp>
+      <p:sp>
+        <p:nvSpPr>
+          <p:cNvPr id="19" name="Text 17"/>
+          <p:cNvSpPr txBox="1"/>
+          <p:nvPr/>
+        </p:nvSpPr>
+        <p:spPr>
+          <a:xfrm>
+            <a:off x="6867144" y="2468880"/>
+            <a:ext cx="5093208" cy="512064"/>
+          </a:xfrm>
+          <a:prstGeom prst="rect">
+            <a:avLst/>
+          </a:prstGeom>
+          <a:noFill/>
+          <a:ln/>
+        </p:spPr>
+        <p:txBody>
+          <a:bodyPr wrap="square" lIns="0" tIns="0" rIns="0" bIns="0" rtlCol="0" anchor="ctr"/>
+          <a:lstStyle/>
+          <a:p>
+            <a:pPr indent="0" marL="0">
+              <a:lnSpc>
+                <a:spcPct val="112000"/>
+              </a:lnSpc>
+              <a:buNone/>
+            </a:pPr>
+            <a:r>
+              <a:rPr lang="en-US" sz="1250" dirty="0">
+                <a:solidFill>
+                  <a:srgbClr val="5E6B64"/>
+                </a:solidFill>
+                <a:latin typeface="Calibri" pitchFamily="34" charset="0"/>
+                <a:ea typeface="Calibri" pitchFamily="34" charset="-122"/>
+                <a:cs typeface="Calibri" pitchFamily="34" charset="-120"/>
+              </a:rPr>
+              <a:t>Set the requirements once, in boxes</a:t>
+            </a:r>
+            <a:endParaRPr lang="en-US" sz="1250" dirty="0"/>
+          </a:p>
+        </p:txBody>
+      </p:sp>
+      <p:sp>
+        <p:nvSpPr>
+          <p:cNvPr id="20" name="Text 18"/>
+          <p:cNvSpPr txBox="1"/>
+          <p:nvPr/>
+        </p:nvSpPr>
+        <p:spPr>
+          <a:xfrm>
+            <a:off x="6446520" y="3346704"/>
+            <a:ext cx="292608" cy="292608"/>
+          </a:xfrm>
+          <a:prstGeom prst="ellipse">
+            <a:avLst/>
+          </a:prstGeom>
+          <a:solidFill>
+            <a:srgbClr val="0F5132"/>
+          </a:solidFill>
+          <a:ln>
+            <a:solidFill>
+              <a:srgbClr val="0F5132"/>
+            </a:solidFill>
+          </a:ln>
+        </p:spPr>
+        <p:txBody>
+          <a:bodyPr wrap="square" lIns="0" tIns="0" rIns="0" bIns="0" rtlCol="0" anchor="ctr"/>
+          <a:lstStyle/>
+          <a:p>
+            <a:pPr algn="ctr" indent="0" marL="0">
+              <a:buNone/>
+            </a:pPr>
+            <a:r>
+              <a:rPr lang="en-US" sz="1200" b="1" dirty="0">
+                <a:solidFill>
+                  <a:srgbClr val="FFFFFF"/>
+                </a:solidFill>
+                <a:latin typeface="Calibri" pitchFamily="34" charset="0"/>
+                <a:ea typeface="Calibri" pitchFamily="34" charset="-122"/>
+                <a:cs typeface="Calibri" pitchFamily="34" charset="-120"/>
+              </a:rPr>
+              <a:t>2</a:t>
+            </a:r>
+            <a:endParaRPr lang="en-US" sz="1200" dirty="0"/>
+          </a:p>
+        </p:txBody>
+      </p:sp>
+      <p:sp>
+        <p:nvSpPr>
+          <p:cNvPr id="21" name="Text 19"/>
+          <p:cNvSpPr txBox="1"/>
+          <p:nvPr/>
+        </p:nvSpPr>
+        <p:spPr>
+          <a:xfrm>
+            <a:off x="6867144" y="3328416"/>
+            <a:ext cx="5093208" cy="292608"/>
+          </a:xfrm>
+          <a:prstGeom prst="rect">
+            <a:avLst/>
+          </a:prstGeom>
+          <a:noFill/>
+          <a:ln/>
+        </p:spPr>
+        <p:txBody>
+          <a:bodyPr wrap="square" lIns="0" tIns="0" rIns="0" bIns="0" rtlCol="0" anchor="ctr"/>
+          <a:lstStyle/>
+          <a:p>
+            <a:pPr indent="0" marL="0">
+              <a:buNone/>
+            </a:pPr>
+            <a:r>
+              <a:rPr lang="en-US" sz="1400" b="1" dirty="0">
+                <a:solidFill>
+                  <a:srgbClr val="0F5132"/>
+                </a:solidFill>
+                <a:latin typeface="Calibri" pitchFamily="34" charset="0"/>
+                <a:ea typeface="Calibri" pitchFamily="34" charset="-122"/>
+                <a:cs typeface="Calibri" pitchFamily="34" charset="-120"/>
+              </a:rPr>
+              <a:t>Applications arrive sorted</a:t>
+            </a:r>
+            <a:endParaRPr lang="en-US" sz="1400" dirty="0"/>
+          </a:p>
+        </p:txBody>
+      </p:sp>
+      <p:sp>
+        <p:nvSpPr>
+          <p:cNvPr id="22" name="Text 20"/>
+          <p:cNvSpPr txBox="1"/>
+          <p:nvPr/>
+        </p:nvSpPr>
+        <p:spPr>
+          <a:xfrm>
+            <a:off x="6867144" y="3639312"/>
+            <a:ext cx="5093208" cy="512064"/>
+          </a:xfrm>
+          <a:prstGeom prst="rect">
+            <a:avLst/>
+          </a:prstGeom>
+          <a:noFill/>
+          <a:ln/>
+        </p:spPr>
+        <p:txBody>
+          <a:bodyPr wrap="square" lIns="0" tIns="0" rIns="0" bIns="0" rtlCol="0" anchor="ctr"/>
+          <a:lstStyle/>
+          <a:p>
+            <a:pPr indent="0" marL="0">
+              <a:lnSpc>
+                <a:spcPct val="112000"/>
+              </a:lnSpc>
+              <a:buNone/>
+            </a:pPr>
+            <a:r>
+              <a:rPr lang="en-US" sz="1250" dirty="0">
+                <a:solidFill>
+                  <a:srgbClr val="5E6B64"/>
+                </a:solidFill>
+                <a:latin typeface="Calibri" pitchFamily="34" charset="0"/>
+                <a:ea typeface="Calibri" pitchFamily="34" charset="-122"/>
+                <a:cs typeface="Calibri" pitchFamily="34" charset="-120"/>
+              </a:rPr>
+              <a:t>Already checked against their own rules</a:t>
+            </a:r>
+            <a:endParaRPr lang="en-US" sz="1250" dirty="0"/>
+          </a:p>
+        </p:txBody>
+      </p:sp>
+      <p:sp>
+        <p:nvSpPr>
+          <p:cNvPr id="23" name="Text 21"/>
+          <p:cNvSpPr txBox="1"/>
+          <p:nvPr/>
+        </p:nvSpPr>
+        <p:spPr>
+          <a:xfrm>
+            <a:off x="6446520" y="4517136"/>
+            <a:ext cx="292608" cy="292608"/>
+          </a:xfrm>
+          <a:prstGeom prst="ellipse">
+            <a:avLst/>
+          </a:prstGeom>
+          <a:solidFill>
+            <a:srgbClr val="0F5132"/>
+          </a:solidFill>
+          <a:ln>
+            <a:solidFill>
+              <a:srgbClr val="0F5132"/>
+            </a:solidFill>
+          </a:ln>
+        </p:spPr>
+        <p:txBody>
+          <a:bodyPr wrap="square" lIns="0" tIns="0" rIns="0" bIns="0" rtlCol="0" anchor="ctr"/>
+          <a:lstStyle/>
+          <a:p>
+            <a:pPr algn="ctr" indent="0" marL="0">
+              <a:buNone/>
+            </a:pPr>
+            <a:r>
+              <a:rPr lang="en-US" sz="1200" b="1" dirty="0">
+                <a:solidFill>
+                  <a:srgbClr val="FFFFFF"/>
+                </a:solidFill>
+                <a:latin typeface="Calibri" pitchFamily="34" charset="0"/>
+                <a:ea typeface="Calibri" pitchFamily="34" charset="-122"/>
+                <a:cs typeface="Calibri" pitchFamily="34" charset="-120"/>
+              </a:rPr>
+              <a:t>3</a:t>
+            </a:r>
+            <a:endParaRPr lang="en-US" sz="1200" dirty="0"/>
+          </a:p>
+        </p:txBody>
+      </p:sp>
+      <p:sp>
+        <p:nvSpPr>
+          <p:cNvPr id="24" name="Text 22"/>
+          <p:cNvSpPr txBox="1"/>
+          <p:nvPr/>
+        </p:nvSpPr>
+        <p:spPr>
+          <a:xfrm>
+            <a:off x="6867144" y="4498848"/>
+            <a:ext cx="5093208" cy="292608"/>
+          </a:xfrm>
+          <a:prstGeom prst="rect">
+            <a:avLst/>
+          </a:prstGeom>
+          <a:noFill/>
+          <a:ln/>
+        </p:spPr>
+        <p:txBody>
+          <a:bodyPr wrap="square" lIns="0" tIns="0" rIns="0" bIns="0" rtlCol="0" anchor="ctr"/>
+          <a:lstStyle/>
+          <a:p>
+            <a:pPr indent="0" marL="0">
+              <a:buNone/>
+            </a:pPr>
+            <a:r>
+              <a:rPr lang="en-US" sz="1400" b="1" dirty="0">
+                <a:solidFill>
+                  <a:srgbClr val="0F5132"/>
+                </a:solidFill>
+                <a:latin typeface="Calibri" pitchFamily="34" charset="0"/>
+                <a:ea typeface="Calibri" pitchFamily="34" charset="-122"/>
+                <a:cs typeface="Calibri" pitchFamily="34" charset="-120"/>
+              </a:rPr>
+              <a:t>Every step recorded</a:t>
+            </a:r>
+            <a:endParaRPr lang="en-US" sz="1400" dirty="0"/>
+          </a:p>
+        </p:txBody>
+      </p:sp>
+      <p:sp>
+        <p:nvSpPr>
+          <p:cNvPr id="25" name="Text 23"/>
+          <p:cNvSpPr txBox="1"/>
+          <p:nvPr/>
+        </p:nvSpPr>
+        <p:spPr>
+          <a:xfrm>
+            <a:off x="6867144" y="4809744"/>
+            <a:ext cx="5093208" cy="512064"/>
+          </a:xfrm>
+          <a:prstGeom prst="rect">
+            <a:avLst/>
+          </a:prstGeom>
+          <a:noFill/>
+          <a:ln/>
+        </p:spPr>
+        <p:txBody>
+          <a:bodyPr wrap="square" lIns="0" tIns="0" rIns="0" bIns="0" rtlCol="0" anchor="ctr"/>
+          <a:lstStyle/>
+          <a:p>
+            <a:pPr indent="0" marL="0">
+              <a:lnSpc>
+                <a:spcPct val="112000"/>
+              </a:lnSpc>
+              <a:buNone/>
+            </a:pPr>
+            <a:r>
+              <a:rPr lang="en-US" sz="1250" dirty="0">
+                <a:solidFill>
+                  <a:srgbClr val="5E6B64"/>
+                </a:solidFill>
+                <a:latin typeface="Calibri" pitchFamily="34" charset="0"/>
+                <a:ea typeface="Calibri" pitchFamily="34" charset="-122"/>
+                <a:cs typeface="Calibri" pitchFamily="34" charset="-120"/>
+              </a:rPr>
+              <a:t>They can show why each decision was made</a:t>
+            </a:r>
+            <a:endParaRPr lang="en-US" sz="1250" dirty="0"/>
+          </a:p>
+        </p:txBody>
+      </p:sp>
+      <p:sp>
+        <p:nvSpPr>
+          <p:cNvPr id="26" name="Shape 24"/>
+          <p:cNvSpPr/>
+          <p:nvPr/>
+        </p:nvSpPr>
+        <p:spPr>
+          <a:xfrm>
+            <a:off x="566928" y="5705856"/>
+            <a:ext cx="11027664" cy="658368"/>
+          </a:xfrm>
+          <a:prstGeom prst="roundRect">
+            <a:avLst>
+              <a:gd name="adj" fmla="val 11111"/>
+            </a:avLst>
+          </a:prstGeom>
+          <a:solidFill>
+            <a:srgbClr val="EDF3EF"/>
+          </a:solidFill>
+          <a:ln w="12700">
+            <a:solidFill>
+              <a:srgbClr val="EDF3EF"/>
+            </a:solidFill>
+            <a:prstDash val="solid"/>
+          </a:ln>
+        </p:spPr>
+      </p:sp>
+      <p:sp>
+        <p:nvSpPr>
+          <p:cNvPr id="27" name="Text 25"/>
+          <p:cNvSpPr txBox="1"/>
+          <p:nvPr/>
+        </p:nvSpPr>
+        <p:spPr>
+          <a:xfrm>
+            <a:off x="566928" y="5705856"/>
+            <a:ext cx="11027664" cy="658368"/>
+          </a:xfrm>
+          <a:prstGeom prst="rect">
+            <a:avLst/>
+          </a:prstGeom>
+          <a:noFill/>
+          <a:ln/>
+        </p:spPr>
+        <p:txBody>
+          <a:bodyPr wrap="square" lIns="0" tIns="0" rIns="0" bIns="0" rtlCol="0" anchor="ctr"/>
+          <a:lstStyle/>
+          <a:p>
+            <a:pPr algn="ctr" indent="0" marL="0">
+              <a:buNone/>
+            </a:pPr>
+            <a:r>
+              <a:rPr lang="en-US" sz="1300" b="1" dirty="0">
+                <a:solidFill>
+                  <a:srgbClr val="0F5132"/>
+                </a:solidFill>
+                <a:latin typeface="Calibri" pitchFamily="34" charset="0"/>
+                <a:ea typeface="Calibri" pitchFamily="34" charset="-122"/>
+                <a:cs typeface="Calibri" pitchFamily="34" charset="-120"/>
+              </a:rPr>
+              <a:t>Telling a student why they scored what they did is something the current way never gives back.</a:t>
+            </a:r>
+            <a:endParaRPr lang="en-US" sz="1300" dirty="0"/>
+          </a:p>
+        </p:txBody>
+      </p:sp>
+    </p:spTree>
+  </p:cSld>
+  <p:clrMapOvr>
+    <a:masterClrMapping/>
+  </p:clrMapOvr>
+</p:sld>
+</file>
+
+<file path=ppt/slides/slide11.xml><?xml version="1.0" encoding="utf-8"?>
+<p:sld xmlns:a="http://schemas.openxmlformats.org/drawingml/2006/main" xmlns:r="http://schemas.openxmlformats.org/officeDocument/2006/relationships" xmlns:p="http://schemas.openxmlformats.org/presentationml/2006/main">
+  <p:cSld name="Slide 11">
     <p:bg>
       <p:bgPr>
         <a:solidFill>
@@ -4637,20 +5788,23 @@
         </p:nvSpPr>
         <p:spPr>
           <a:xfrm>
-            <a:off x="987552" y="2615184"/>
-            <a:ext cx="5093208" cy="274320"/>
-          </a:xfrm>
-          <a:prstGeom prst="rect">
-            <a:avLst/>
-          </a:prstGeom>
-          <a:noFill/>
-          <a:ln/>
-        </p:spPr>
-        <p:txBody>
-          <a:bodyPr wrap="square" lIns="0" tIns="0" rIns="0" bIns="0" rtlCol="0" anchor="ctr"/>
-          <a:lstStyle/>
-          <a:p>
-            <a:pPr indent="0" marL="0">
+            <a:off x="987552" y="2596896"/>
+            <a:ext cx="5093208" cy="877824"/>
+          </a:xfrm>
+          <a:prstGeom prst="rect">
+            <a:avLst/>
+          </a:prstGeom>
+          <a:noFill/>
+          <a:ln/>
+        </p:spPr>
+        <p:txBody>
+          <a:bodyPr wrap="square" lIns="0" tIns="0" rIns="0" bIns="0" rtlCol="0" anchor="t"/>
+          <a:lstStyle/>
+          <a:p>
+            <a:pPr indent="0" marL="0">
+              <a:lnSpc>
+                <a:spcPct val="116000"/>
+              </a:lnSpc>
               <a:buNone/>
             </a:pPr>
             <a:r>
@@ -4662,7 +5816,24 @@
                 <a:ea typeface="Calibri" pitchFamily="34" charset="-122"/>
                 <a:cs typeface="Calibri" pitchFamily="34" charset="-120"/>
               </a:rPr>
-              <a:t>Clear rules, not sentences</a:t>
+              <a:t>DESIGN  </a:t>
+            </a:r>
+            <a:pPr indent="0" marL="0">
+              <a:lnSpc>
+                <a:spcPct val="116000"/>
+              </a:lnSpc>
+              <a:buNone/>
+            </a:pPr>
+            <a:r>
+              <a:rPr lang="en-US" sz="1250" dirty="0">
+                <a:solidFill>
+                  <a:srgbClr val="16211C"/>
+                </a:solidFill>
+                <a:latin typeface="Calibri" pitchFamily="34" charset="0"/>
+                <a:ea typeface="Calibri" pitchFamily="34" charset="-122"/>
+                <a:cs typeface="Calibri" pitchFamily="34" charset="-120"/>
+              </a:rPr>
+              <a:t>a database that stores what a bursary needs as rules a computer can check</a:t>
             </a:r>
             <a:endParaRPr lang="en-US" sz="1400" dirty="0"/>
           </a:p>
@@ -4671,48 +5842,6 @@
       <p:sp>
         <p:nvSpPr>
           <p:cNvPr id="8" name="Text 6"/>
-          <p:cNvSpPr txBox="1"/>
-          <p:nvPr/>
-        </p:nvSpPr>
-        <p:spPr>
-          <a:xfrm>
-            <a:off x="987552" y="2907792"/>
-            <a:ext cx="5093208" cy="566928"/>
-          </a:xfrm>
-          <a:prstGeom prst="rect">
-            <a:avLst/>
-          </a:prstGeom>
-          <a:noFill/>
-          <a:ln/>
-        </p:spPr>
-        <p:txBody>
-          <a:bodyPr wrap="square" lIns="0" tIns="0" rIns="0" bIns="0" rtlCol="0" anchor="ctr"/>
-          <a:lstStyle/>
-          <a:p>
-            <a:pPr indent="0" marL="0">
-              <a:lnSpc>
-                <a:spcPct val="112000"/>
-              </a:lnSpc>
-              <a:buNone/>
-            </a:pPr>
-            <a:r>
-              <a:rPr lang="en-US" sz="1200" dirty="0">
-                <a:solidFill>
-                  <a:srgbClr val="5E6B64"/>
-                </a:solidFill>
-                <a:latin typeface="Calibri" pitchFamily="34" charset="0"/>
-                <a:ea typeface="Calibri" pitchFamily="34" charset="-122"/>
-                <a:cs typeface="Calibri" pitchFamily="34" charset="-120"/>
-              </a:rPr>
-              <a:t>Store what a bursary needs as data the computer can actually check</a:t>
-            </a:r>
-            <a:endParaRPr lang="en-US" sz="1200" dirty="0"/>
-          </a:p>
-        </p:txBody>
-      </p:sp>
-      <p:sp>
-        <p:nvSpPr>
-          <p:cNvPr id="9" name="Text 7"/>
           <p:cNvSpPr txBox="1"/>
           <p:nvPr/>
         </p:nvSpPr>
@@ -4757,88 +5886,66 @@
       </p:sp>
       <p:sp>
         <p:nvSpPr>
+          <p:cNvPr id="9" name="Text 7"/>
+          <p:cNvSpPr txBox="1"/>
+          <p:nvPr/>
+        </p:nvSpPr>
+        <p:spPr>
+          <a:xfrm>
+            <a:off x="6867144" y="2596896"/>
+            <a:ext cx="5093208" cy="877824"/>
+          </a:xfrm>
+          <a:prstGeom prst="rect">
+            <a:avLst/>
+          </a:prstGeom>
+          <a:noFill/>
+          <a:ln/>
+        </p:spPr>
+        <p:txBody>
+          <a:bodyPr wrap="square" lIns="0" tIns="0" rIns="0" bIns="0" rtlCol="0" anchor="t"/>
+          <a:lstStyle/>
+          <a:p>
+            <a:pPr indent="0" marL="0">
+              <a:lnSpc>
+                <a:spcPct val="116000"/>
+              </a:lnSpc>
+              <a:buNone/>
+            </a:pPr>
+            <a:r>
+              <a:rPr lang="en-US" sz="1400" b="1" dirty="0">
+                <a:solidFill>
+                  <a:srgbClr val="0F5132"/>
+                </a:solidFill>
+                <a:latin typeface="Calibri" pitchFamily="34" charset="0"/>
+                <a:ea typeface="Calibri" pitchFamily="34" charset="-122"/>
+                <a:cs typeface="Calibri" pitchFamily="34" charset="-120"/>
+              </a:rPr>
+              <a:t>BUILD  </a:t>
+            </a:r>
+            <a:pPr indent="0" marL="0">
+              <a:lnSpc>
+                <a:spcPct val="116000"/>
+              </a:lnSpc>
+              <a:buNone/>
+            </a:pPr>
+            <a:r>
+              <a:rPr lang="en-US" sz="1250" dirty="0">
+                <a:solidFill>
+                  <a:srgbClr val="16211C"/>
+                </a:solidFill>
+                <a:latin typeface="Calibri" pitchFamily="34" charset="0"/>
+                <a:ea typeface="Calibri" pitchFamily="34" charset="-122"/>
+                <a:cs typeface="Calibri" pitchFamily="34" charset="-120"/>
+              </a:rPr>
+              <a:t>a matching engine that gives a score and the reason for every rule</a:t>
+            </a:r>
+            <a:endParaRPr lang="en-US" sz="1400" dirty="0"/>
+          </a:p>
+        </p:txBody>
+      </p:sp>
+      <p:sp>
+        <p:nvSpPr>
           <p:cNvPr id="10" name="Text 8"/>
-          <p:cNvSpPr txBox="1"/>
-          <p:nvPr/>
-        </p:nvSpPr>
-        <p:spPr>
-          <a:xfrm>
-            <a:off x="6867144" y="2615184"/>
-            <a:ext cx="5093208" cy="274320"/>
-          </a:xfrm>
-          <a:prstGeom prst="rect">
-            <a:avLst/>
-          </a:prstGeom>
-          <a:noFill/>
-          <a:ln/>
-        </p:spPr>
-        <p:txBody>
-          <a:bodyPr wrap="square" lIns="0" tIns="0" rIns="0" bIns="0" rtlCol="0" anchor="ctr"/>
-          <a:lstStyle/>
-          <a:p>
-            <a:pPr indent="0" marL="0">
-              <a:buNone/>
-            </a:pPr>
-            <a:r>
-              <a:rPr lang="en-US" sz="1400" b="1" dirty="0">
-                <a:solidFill>
-                  <a:srgbClr val="0F5132"/>
-                </a:solidFill>
-                <a:latin typeface="Calibri" pitchFamily="34" charset="0"/>
-                <a:ea typeface="Calibri" pitchFamily="34" charset="-122"/>
-                <a:cs typeface="Calibri" pitchFamily="34" charset="-120"/>
-              </a:rPr>
-              <a:t>Matching that explains itself</a:t>
-            </a:r>
-            <a:endParaRPr lang="en-US" sz="1400" dirty="0"/>
-          </a:p>
-        </p:txBody>
-      </p:sp>
-      <p:sp>
-        <p:nvSpPr>
-          <p:cNvPr id="11" name="Text 9"/>
-          <p:cNvSpPr txBox="1"/>
-          <p:nvPr/>
-        </p:nvSpPr>
-        <p:spPr>
-          <a:xfrm>
-            <a:off x="6867144" y="2907792"/>
-            <a:ext cx="5093208" cy="566928"/>
-          </a:xfrm>
-          <a:prstGeom prst="rect">
-            <a:avLst/>
-          </a:prstGeom>
-          <a:noFill/>
-          <a:ln/>
-        </p:spPr>
-        <p:txBody>
-          <a:bodyPr wrap="square" lIns="0" tIns="0" rIns="0" bIns="0" rtlCol="0" anchor="ctr"/>
-          <a:lstStyle/>
-          <a:p>
-            <a:pPr indent="0" marL="0">
-              <a:lnSpc>
-                <a:spcPct val="112000"/>
-              </a:lnSpc>
-              <a:buNone/>
-            </a:pPr>
-            <a:r>
-              <a:rPr lang="en-US" sz="1200" dirty="0">
-                <a:solidFill>
-                  <a:srgbClr val="5E6B64"/>
-                </a:solidFill>
-                <a:latin typeface="Calibri" pitchFamily="34" charset="0"/>
-                <a:ea typeface="Calibri" pitchFamily="34" charset="-122"/>
-                <a:cs typeface="Calibri" pitchFamily="34" charset="-120"/>
-              </a:rPr>
-              <a:t>For every rule, show: met, not met, or we need more information</a:t>
-            </a:r>
-            <a:endParaRPr lang="en-US" sz="1200" dirty="0"/>
-          </a:p>
-        </p:txBody>
-      </p:sp>
-      <p:sp>
-        <p:nvSpPr>
-          <p:cNvPr id="12" name="Text 10"/>
           <p:cNvSpPr txBox="1"/>
           <p:nvPr/>
         </p:nvSpPr>
@@ -4883,26 +5990,29 @@
       </p:sp>
       <p:sp>
         <p:nvSpPr>
-          <p:cNvPr id="13" name="Text 11"/>
-          <p:cNvSpPr txBox="1"/>
-          <p:nvPr/>
-        </p:nvSpPr>
-        <p:spPr>
-          <a:xfrm>
-            <a:off x="987552" y="3877056"/>
-            <a:ext cx="5093208" cy="274320"/>
-          </a:xfrm>
-          <a:prstGeom prst="rect">
-            <a:avLst/>
-          </a:prstGeom>
-          <a:noFill/>
-          <a:ln/>
-        </p:spPr>
-        <p:txBody>
-          <a:bodyPr wrap="square" lIns="0" tIns="0" rIns="0" bIns="0" rtlCol="0" anchor="ctr"/>
-          <a:lstStyle/>
-          <a:p>
-            <a:pPr indent="0" marL="0">
+          <p:cNvPr id="11" name="Text 9"/>
+          <p:cNvSpPr txBox="1"/>
+          <p:nvPr/>
+        </p:nvSpPr>
+        <p:spPr>
+          <a:xfrm>
+            <a:off x="987552" y="3858768"/>
+            <a:ext cx="5093208" cy="877824"/>
+          </a:xfrm>
+          <a:prstGeom prst="rect">
+            <a:avLst/>
+          </a:prstGeom>
+          <a:noFill/>
+          <a:ln/>
+        </p:spPr>
+        <p:txBody>
+          <a:bodyPr wrap="square" lIns="0" tIns="0" rIns="0" bIns="0" rtlCol="0" anchor="t"/>
+          <a:lstStyle/>
+          <a:p>
+            <a:pPr indent="0" marL="0">
+              <a:lnSpc>
+                <a:spcPct val="116000"/>
+              </a:lnSpc>
               <a:buNone/>
             </a:pPr>
             <a:r>
@@ -4914,7 +6024,24 @@
                 <a:ea typeface="Calibri" pitchFamily="34" charset="-122"/>
                 <a:cs typeface="Calibri" pitchFamily="34" charset="-120"/>
               </a:rPr>
-              <a:t>The student side</a:t>
+              <a:t>DEVELOP  </a:t>
+            </a:r>
+            <a:pPr indent="0" marL="0">
+              <a:lnSpc>
+                <a:spcPct val="116000"/>
+              </a:lnSpc>
+              <a:buNone/>
+            </a:pPr>
+            <a:r>
+              <a:rPr lang="en-US" sz="1250" dirty="0">
+                <a:solidFill>
+                  <a:srgbClr val="16211C"/>
+                </a:solidFill>
+                <a:latin typeface="Calibri" pitchFamily="34" charset="0"/>
+                <a:ea typeface="Calibri" pitchFamily="34" charset="-122"/>
+                <a:cs typeface="Calibri" pitchFamily="34" charset="-120"/>
+              </a:rPr>
+              <a:t>the student side: one profile, ranked bursaries, and applying online</a:t>
             </a:r>
             <a:endParaRPr lang="en-US" sz="1400" dirty="0"/>
           </a:p>
@@ -4922,49 +6049,7 @@
       </p:sp>
       <p:sp>
         <p:nvSpPr>
-          <p:cNvPr id="14" name="Text 12"/>
-          <p:cNvSpPr txBox="1"/>
-          <p:nvPr/>
-        </p:nvSpPr>
-        <p:spPr>
-          <a:xfrm>
-            <a:off x="987552" y="4169664"/>
-            <a:ext cx="5093208" cy="566928"/>
-          </a:xfrm>
-          <a:prstGeom prst="rect">
-            <a:avLst/>
-          </a:prstGeom>
-          <a:noFill/>
-          <a:ln/>
-        </p:spPr>
-        <p:txBody>
-          <a:bodyPr wrap="square" lIns="0" tIns="0" rIns="0" bIns="0" rtlCol="0" anchor="ctr"/>
-          <a:lstStyle/>
-          <a:p>
-            <a:pPr indent="0" marL="0">
-              <a:lnSpc>
-                <a:spcPct val="112000"/>
-              </a:lnSpc>
-              <a:buNone/>
-            </a:pPr>
-            <a:r>
-              <a:rPr lang="en-US" sz="1200" dirty="0">
-                <a:solidFill>
-                  <a:srgbClr val="5E6B64"/>
-                </a:solidFill>
-                <a:latin typeface="Calibri" pitchFamily="34" charset="0"/>
-                <a:ea typeface="Calibri" pitchFamily="34" charset="-122"/>
-                <a:cs typeface="Calibri" pitchFamily="34" charset="-120"/>
-              </a:rPr>
-              <a:t>One profile, a ranked list of bursaries with reasons, and applying online</a:t>
-            </a:r>
-            <a:endParaRPr lang="en-US" sz="1200" dirty="0"/>
-          </a:p>
-        </p:txBody>
-      </p:sp>
-      <p:sp>
-        <p:nvSpPr>
-          <p:cNvPr id="15" name="Text 13"/>
+          <p:cNvPr id="12" name="Text 10"/>
           <p:cNvSpPr txBox="1"/>
           <p:nvPr/>
         </p:nvSpPr>
@@ -5009,26 +6094,29 @@
       </p:sp>
       <p:sp>
         <p:nvSpPr>
-          <p:cNvPr id="16" name="Text 14"/>
-          <p:cNvSpPr txBox="1"/>
-          <p:nvPr/>
-        </p:nvSpPr>
-        <p:spPr>
-          <a:xfrm>
-            <a:off x="6867144" y="3877056"/>
-            <a:ext cx="5093208" cy="274320"/>
-          </a:xfrm>
-          <a:prstGeom prst="rect">
-            <a:avLst/>
-          </a:prstGeom>
-          <a:noFill/>
-          <a:ln/>
-        </p:spPr>
-        <p:txBody>
-          <a:bodyPr wrap="square" lIns="0" tIns="0" rIns="0" bIns="0" rtlCol="0" anchor="ctr"/>
-          <a:lstStyle/>
-          <a:p>
-            <a:pPr indent="0" marL="0">
+          <p:cNvPr id="13" name="Text 11"/>
+          <p:cNvSpPr txBox="1"/>
+          <p:nvPr/>
+        </p:nvSpPr>
+        <p:spPr>
+          <a:xfrm>
+            <a:off x="6867144" y="3858768"/>
+            <a:ext cx="5093208" cy="877824"/>
+          </a:xfrm>
+          <a:prstGeom prst="rect">
+            <a:avLst/>
+          </a:prstGeom>
+          <a:noFill/>
+          <a:ln/>
+        </p:spPr>
+        <p:txBody>
+          <a:bodyPr wrap="square" lIns="0" tIns="0" rIns="0" bIns="0" rtlCol="0" anchor="t"/>
+          <a:lstStyle/>
+          <a:p>
+            <a:pPr indent="0" marL="0">
+              <a:lnSpc>
+                <a:spcPct val="116000"/>
+              </a:lnSpc>
               <a:buNone/>
             </a:pPr>
             <a:r>
@@ -5040,7 +6128,24 @@
                 <a:ea typeface="Calibri" pitchFamily="34" charset="-122"/>
                 <a:cs typeface="Calibri" pitchFamily="34" charset="-120"/>
               </a:rPr>
-              <a:t>The company side</a:t>
+              <a:t>DEVELOP  </a:t>
+            </a:r>
+            <a:pPr indent="0" marL="0">
+              <a:lnSpc>
+                <a:spcPct val="116000"/>
+              </a:lnSpc>
+              <a:buNone/>
+            </a:pPr>
+            <a:r>
+              <a:rPr lang="en-US" sz="1250" dirty="0">
+                <a:solidFill>
+                  <a:srgbClr val="16211C"/>
+                </a:solidFill>
+                <a:latin typeface="Calibri" pitchFamily="34" charset="0"/>
+                <a:ea typeface="Calibri" pitchFamily="34" charset="-122"/>
+                <a:cs typeface="Calibri" pitchFamily="34" charset="-120"/>
+              </a:rPr>
+              <a:t>the company side: advertise a bursary, review, shortlist and choose</a:t>
             </a:r>
             <a:endParaRPr lang="en-US" sz="1400" dirty="0"/>
           </a:p>
@@ -5048,49 +6153,7 @@
       </p:sp>
       <p:sp>
         <p:nvSpPr>
-          <p:cNvPr id="17" name="Text 15"/>
-          <p:cNvSpPr txBox="1"/>
-          <p:nvPr/>
-        </p:nvSpPr>
-        <p:spPr>
-          <a:xfrm>
-            <a:off x="6867144" y="4169664"/>
-            <a:ext cx="5093208" cy="566928"/>
-          </a:xfrm>
-          <a:prstGeom prst="rect">
-            <a:avLst/>
-          </a:prstGeom>
-          <a:noFill/>
-          <a:ln/>
-        </p:spPr>
-        <p:txBody>
-          <a:bodyPr wrap="square" lIns="0" tIns="0" rIns="0" bIns="0" rtlCol="0" anchor="ctr"/>
-          <a:lstStyle/>
-          <a:p>
-            <a:pPr indent="0" marL="0">
-              <a:lnSpc>
-                <a:spcPct val="112000"/>
-              </a:lnSpc>
-              <a:buNone/>
-            </a:pPr>
-            <a:r>
-              <a:rPr lang="en-US" sz="1200" dirty="0">
-                <a:solidFill>
-                  <a:srgbClr val="5E6B64"/>
-                </a:solidFill>
-                <a:latin typeface="Calibri" pitchFamily="34" charset="0"/>
-                <a:ea typeface="Calibri" pitchFamily="34" charset="-122"/>
-                <a:cs typeface="Calibri" pitchFamily="34" charset="-120"/>
-              </a:rPr>
-              <a:t>Advertise a bursary, review applicants, shortlist and choose</a:t>
-            </a:r>
-            <a:endParaRPr lang="en-US" sz="1200" dirty="0"/>
-          </a:p>
-        </p:txBody>
-      </p:sp>
-      <p:sp>
-        <p:nvSpPr>
-          <p:cNvPr id="18" name="Text 16"/>
+          <p:cNvPr id="14" name="Text 12"/>
           <p:cNvSpPr txBox="1"/>
           <p:nvPr/>
         </p:nvSpPr>
@@ -5135,26 +6198,29 @@
       </p:sp>
       <p:sp>
         <p:nvSpPr>
-          <p:cNvPr id="19" name="Text 17"/>
-          <p:cNvSpPr txBox="1"/>
-          <p:nvPr/>
-        </p:nvSpPr>
-        <p:spPr>
-          <a:xfrm>
-            <a:off x="987552" y="5138928"/>
-            <a:ext cx="5093208" cy="274320"/>
-          </a:xfrm>
-          <a:prstGeom prst="rect">
-            <a:avLst/>
-          </a:prstGeom>
-          <a:noFill/>
-          <a:ln/>
-        </p:spPr>
-        <p:txBody>
-          <a:bodyPr wrap="square" lIns="0" tIns="0" rIns="0" bIns="0" rtlCol="0" anchor="ctr"/>
-          <a:lstStyle/>
-          <a:p>
-            <a:pPr indent="0" marL="0">
+          <p:cNvPr id="15" name="Text 13"/>
+          <p:cNvSpPr txBox="1"/>
+          <p:nvPr/>
+        </p:nvSpPr>
+        <p:spPr>
+          <a:xfrm>
+            <a:off x="987552" y="5120640"/>
+            <a:ext cx="5093208" cy="877824"/>
+          </a:xfrm>
+          <a:prstGeom prst="rect">
+            <a:avLst/>
+          </a:prstGeom>
+          <a:noFill/>
+          <a:ln/>
+        </p:spPr>
+        <p:txBody>
+          <a:bodyPr wrap="square" lIns="0" tIns="0" rIns="0" bIns="0" rtlCol="0" anchor="t"/>
+          <a:lstStyle/>
+          <a:p>
+            <a:pPr indent="0" marL="0">
+              <a:lnSpc>
+                <a:spcPct val="116000"/>
+              </a:lnSpc>
               <a:buNone/>
             </a:pPr>
             <a:r>
@@ -5166,7 +6232,24 @@
                 <a:ea typeface="Calibri" pitchFamily="34" charset="-122"/>
                 <a:cs typeface="Calibri" pitchFamily="34" charset="-120"/>
               </a:rPr>
-              <a:t>Collect real bursaries</a:t>
+              <a:t>COLLECT  </a:t>
+            </a:r>
+            <a:pPr indent="0" marL="0">
+              <a:lnSpc>
+                <a:spcPct val="116000"/>
+              </a:lnSpc>
+              <a:buNone/>
+            </a:pPr>
+            <a:r>
+              <a:rPr lang="en-US" sz="1250" dirty="0">
+                <a:solidFill>
+                  <a:srgbClr val="16211C"/>
+                </a:solidFill>
+                <a:latin typeface="Calibri" pitchFamily="34" charset="0"/>
+                <a:ea typeface="Calibri" pitchFamily="34" charset="-122"/>
+                <a:cs typeface="Calibri" pitchFamily="34" charset="-120"/>
+              </a:rPr>
+              <a:t>real bursaries from named websites, saving where each one came from</a:t>
             </a:r>
             <a:endParaRPr lang="en-US" sz="1400" dirty="0"/>
           </a:p>
@@ -5174,49 +6257,7 @@
       </p:sp>
       <p:sp>
         <p:nvSpPr>
-          <p:cNvPr id="20" name="Text 18"/>
-          <p:cNvSpPr txBox="1"/>
-          <p:nvPr/>
-        </p:nvSpPr>
-        <p:spPr>
-          <a:xfrm>
-            <a:off x="987552" y="5431536"/>
-            <a:ext cx="5093208" cy="566928"/>
-          </a:xfrm>
-          <a:prstGeom prst="rect">
-            <a:avLst/>
-          </a:prstGeom>
-          <a:noFill/>
-          <a:ln/>
-        </p:spPr>
-        <p:txBody>
-          <a:bodyPr wrap="square" lIns="0" tIns="0" rIns="0" bIns="0" rtlCol="0" anchor="ctr"/>
-          <a:lstStyle/>
-          <a:p>
-            <a:pPr indent="0" marL="0">
-              <a:lnSpc>
-                <a:spcPct val="112000"/>
-              </a:lnSpc>
-              <a:buNone/>
-            </a:pPr>
-            <a:r>
-              <a:rPr lang="en-US" sz="1200" dirty="0">
-                <a:solidFill>
-                  <a:srgbClr val="5E6B64"/>
-                </a:solidFill>
-                <a:latin typeface="Calibri" pitchFamily="34" charset="0"/>
-                <a:ea typeface="Calibri" pitchFamily="34" charset="-122"/>
-                <a:cs typeface="Calibri" pitchFamily="34" charset="-120"/>
-              </a:rPr>
-              <a:t>Save where each one came from, and skip any we cannot confirm</a:t>
-            </a:r>
-            <a:endParaRPr lang="en-US" sz="1200" dirty="0"/>
-          </a:p>
-        </p:txBody>
-      </p:sp>
-      <p:sp>
-        <p:nvSpPr>
-          <p:cNvPr id="21" name="Text 19"/>
+          <p:cNvPr id="16" name="Text 14"/>
           <p:cNvSpPr txBox="1"/>
           <p:nvPr/>
         </p:nvSpPr>
@@ -5261,26 +6302,29 @@
       </p:sp>
       <p:sp>
         <p:nvSpPr>
-          <p:cNvPr id="22" name="Text 20"/>
-          <p:cNvSpPr txBox="1"/>
-          <p:nvPr/>
-        </p:nvSpPr>
-        <p:spPr>
-          <a:xfrm>
-            <a:off x="6867144" y="5138928"/>
-            <a:ext cx="5093208" cy="274320"/>
-          </a:xfrm>
-          <a:prstGeom prst="rect">
-            <a:avLst/>
-          </a:prstGeom>
-          <a:noFill/>
-          <a:ln/>
-        </p:spPr>
-        <p:txBody>
-          <a:bodyPr wrap="square" lIns="0" tIns="0" rIns="0" bIns="0" rtlCol="0" anchor="ctr"/>
-          <a:lstStyle/>
-          <a:p>
-            <a:pPr indent="0" marL="0">
+          <p:cNvPr id="17" name="Text 15"/>
+          <p:cNvSpPr txBox="1"/>
+          <p:nvPr/>
+        </p:nvSpPr>
+        <p:spPr>
+          <a:xfrm>
+            <a:off x="6867144" y="5120640"/>
+            <a:ext cx="5093208" cy="877824"/>
+          </a:xfrm>
+          <a:prstGeom prst="rect">
+            <a:avLst/>
+          </a:prstGeom>
+          <a:noFill/>
+          <a:ln/>
+        </p:spPr>
+        <p:txBody>
+          <a:bodyPr wrap="square" lIns="0" tIns="0" rIns="0" bIns="0" rtlCol="0" anchor="t"/>
+          <a:lstStyle/>
+          <a:p>
+            <a:pPr indent="0" marL="0">
+              <a:lnSpc>
+                <a:spcPct val="116000"/>
+              </a:lnSpc>
               <a:buNone/>
             </a:pPr>
             <a:r>
@@ -5292,51 +6336,26 @@
                 <a:ea typeface="Calibri" pitchFamily="34" charset="-122"/>
                 <a:cs typeface="Calibri" pitchFamily="34" charset="-120"/>
               </a:rPr>
-              <a:t>Test everything</a:t>
+              <a:t>TEST  </a:t>
+            </a:r>
+            <a:pPr indent="0" marL="0">
+              <a:lnSpc>
+                <a:spcPct val="116000"/>
+              </a:lnSpc>
+              <a:buNone/>
+            </a:pPr>
+            <a:r>
+              <a:rPr lang="en-US" sz="1250" dirty="0">
+                <a:solidFill>
+                  <a:srgbClr val="16211C"/>
+                </a:solidFill>
+                <a:latin typeface="Calibri" pitchFamily="34" charset="0"/>
+                <a:ea typeface="Calibri" pitchFamily="34" charset="-122"/>
+                <a:cs typeface="Calibri" pitchFamily="34" charset="-120"/>
+              </a:rPr>
+              <a:t>the whole system, and check every requirement was really built</a:t>
             </a:r>
             <a:endParaRPr lang="en-US" sz="1400" dirty="0"/>
-          </a:p>
-        </p:txBody>
-      </p:sp>
-      <p:sp>
-        <p:nvSpPr>
-          <p:cNvPr id="23" name="Text 21"/>
-          <p:cNvSpPr txBox="1"/>
-          <p:nvPr/>
-        </p:nvSpPr>
-        <p:spPr>
-          <a:xfrm>
-            <a:off x="6867144" y="5431536"/>
-            <a:ext cx="5093208" cy="566928"/>
-          </a:xfrm>
-          <a:prstGeom prst="rect">
-            <a:avLst/>
-          </a:prstGeom>
-          <a:noFill/>
-          <a:ln/>
-        </p:spPr>
-        <p:txBody>
-          <a:bodyPr wrap="square" lIns="0" tIns="0" rIns="0" bIns="0" rtlCol="0" anchor="ctr"/>
-          <a:lstStyle/>
-          <a:p>
-            <a:pPr indent="0" marL="0">
-              <a:lnSpc>
-                <a:spcPct val="112000"/>
-              </a:lnSpc>
-              <a:buNone/>
-            </a:pPr>
-            <a:r>
-              <a:rPr lang="en-US" sz="1200" dirty="0">
-                <a:solidFill>
-                  <a:srgbClr val="5E6B64"/>
-                </a:solidFill>
-                <a:latin typeface="Calibri" pitchFamily="34" charset="0"/>
-                <a:ea typeface="Calibri" pitchFamily="34" charset="-122"/>
-                <a:cs typeface="Calibri" pitchFamily="34" charset="-120"/>
-              </a:rPr>
-              <a:t>Automatic tests, and a check that every requirement was really built</a:t>
-            </a:r>
-            <a:endParaRPr lang="en-US" sz="1200" dirty="0"/>
           </a:p>
         </p:txBody>
       </p:sp>
@@ -6171,7 +7190,7 @@
                 <a:ea typeface="Cambria" pitchFamily="34" charset="-122"/>
                 <a:cs typeface="Cambria" pitchFamily="34" charset="-120"/>
               </a:rPr>
-              <a:t>System Architecture</a:t>
+              <a:t>Methodology — Agile with Scrum</a:t>
             </a:r>
             <a:endParaRPr lang="en-US" sz="3100" dirty="0"/>
           </a:p>
@@ -6210,7 +7229,7 @@
                 <a:ea typeface="Calibri" pitchFamily="34" charset="-122"/>
                 <a:cs typeface="Calibri" pitchFamily="34" charset="-120"/>
               </a:rPr>
-              <a:t>Built in layers, so each part can be tested on its own</a:t>
+              <a:t>The same short cycle, repeated until the system was finished</a:t>
             </a:r>
             <a:endParaRPr lang="en-US" sz="1250" dirty="0"/>
           </a:p>
@@ -6224,12 +7243,12 @@
         </p:nvSpPr>
         <p:spPr>
           <a:xfrm>
-            <a:off x="566928" y="1572768"/>
-            <a:ext cx="6858000" cy="841248"/>
+            <a:off x="566928" y="1609344"/>
+            <a:ext cx="2048256" cy="1572768"/>
           </a:xfrm>
           <a:prstGeom prst="roundRect">
             <a:avLst>
-              <a:gd name="adj" fmla="val 8696"/>
+              <a:gd name="adj" fmla="val 4651"/>
             </a:avLst>
           </a:prstGeom>
           <a:solidFill>
@@ -6251,24 +7270,69 @@
         </p:nvSpPr>
         <p:spPr>
           <a:xfrm>
-            <a:off x="822960" y="1691640"/>
-            <a:ext cx="6345936" cy="274320"/>
-          </a:xfrm>
-          <a:prstGeom prst="rect">
-            <a:avLst/>
-          </a:prstGeom>
-          <a:noFill/>
-          <a:ln/>
-        </p:spPr>
-        <p:txBody>
-          <a:bodyPr wrap="square" lIns="0" tIns="0" rIns="0" bIns="0" rtlCol="0" anchor="ctr"/>
-          <a:lstStyle/>
-          <a:p>
-            <a:pPr indent="0" marL="0">
-              <a:buNone/>
-            </a:pPr>
-            <a:r>
-              <a:rPr lang="en-US" sz="1450" b="1" dirty="0">
+            <a:off x="1435608" y="1773936"/>
+            <a:ext cx="310896" cy="310896"/>
+          </a:xfrm>
+          <a:prstGeom prst="ellipse">
+            <a:avLst/>
+          </a:prstGeom>
+          <a:solidFill>
+            <a:srgbClr val="0F5132"/>
+          </a:solidFill>
+          <a:ln>
+            <a:solidFill>
+              <a:srgbClr val="0F5132"/>
+            </a:solidFill>
+          </a:ln>
+        </p:spPr>
+        <p:txBody>
+          <a:bodyPr wrap="square" lIns="0" tIns="0" rIns="0" bIns="0" rtlCol="0" anchor="ctr"/>
+          <a:lstStyle/>
+          <a:p>
+            <a:pPr algn="ctr" indent="0" marL="0">
+              <a:buNone/>
+            </a:pPr>
+            <a:r>
+              <a:rPr lang="en-US" sz="1200" b="1" dirty="0">
+                <a:solidFill>
+                  <a:srgbClr val="FFFFFF"/>
+                </a:solidFill>
+                <a:latin typeface="Calibri" pitchFamily="34" charset="0"/>
+                <a:ea typeface="Calibri" pitchFamily="34" charset="-122"/>
+                <a:cs typeface="Calibri" pitchFamily="34" charset="-120"/>
+              </a:rPr>
+              <a:t>1</a:t>
+            </a:r>
+            <a:endParaRPr lang="en-US" sz="1200" dirty="0"/>
+          </a:p>
+        </p:txBody>
+      </p:sp>
+      <p:sp>
+        <p:nvSpPr>
+          <p:cNvPr id="6" name="Text 4"/>
+          <p:cNvSpPr txBox="1"/>
+          <p:nvPr/>
+        </p:nvSpPr>
+        <p:spPr>
+          <a:xfrm>
+            <a:off x="694944" y="2176272"/>
+            <a:ext cx="1792224" cy="310896"/>
+          </a:xfrm>
+          <a:prstGeom prst="rect">
+            <a:avLst/>
+          </a:prstGeom>
+          <a:noFill/>
+          <a:ln/>
+        </p:spPr>
+        <p:txBody>
+          <a:bodyPr wrap="square" lIns="0" tIns="0" rIns="0" bIns="0" rtlCol="0" anchor="ctr"/>
+          <a:lstStyle/>
+          <a:p>
+            <a:pPr algn="ctr" indent="0" marL="0">
+              <a:buNone/>
+            </a:pPr>
+            <a:r>
+              <a:rPr lang="en-US" sz="1350" b="1" dirty="0">
                 <a:solidFill>
                   <a:srgbClr val="0F5132"/>
                 </a:solidFill>
@@ -6276,38 +7340,41 @@
                 <a:ea typeface="Calibri" pitchFamily="34" charset="-122"/>
                 <a:cs typeface="Calibri" pitchFamily="34" charset="-120"/>
               </a:rPr>
-              <a:t>What the user sees</a:t>
-            </a:r>
-            <a:endParaRPr lang="en-US" sz="1450" dirty="0"/>
-          </a:p>
-        </p:txBody>
-      </p:sp>
-      <p:sp>
-        <p:nvSpPr>
-          <p:cNvPr id="6" name="Text 4"/>
-          <p:cNvSpPr txBox="1"/>
-          <p:nvPr/>
-        </p:nvSpPr>
-        <p:spPr>
-          <a:xfrm>
-            <a:off x="822960" y="1975104"/>
-            <a:ext cx="6345936" cy="310896"/>
-          </a:xfrm>
-          <a:prstGeom prst="rect">
-            <a:avLst/>
-          </a:prstGeom>
-          <a:noFill/>
-          <a:ln/>
-        </p:spPr>
-        <p:txBody>
-          <a:bodyPr wrap="square" lIns="0" tIns="0" rIns="0" bIns="0" rtlCol="0" anchor="ctr"/>
-          <a:lstStyle/>
-          <a:p>
-            <a:pPr indent="0" marL="0">
-              <a:buNone/>
-            </a:pPr>
-            <a:r>
-              <a:rPr lang="en-US" sz="1150" dirty="0">
+              <a:t>Backlog</a:t>
+            </a:r>
+            <a:endParaRPr lang="en-US" sz="1350" dirty="0"/>
+          </a:p>
+        </p:txBody>
+      </p:sp>
+      <p:sp>
+        <p:nvSpPr>
+          <p:cNvPr id="7" name="Text 5"/>
+          <p:cNvSpPr txBox="1"/>
+          <p:nvPr/>
+        </p:nvSpPr>
+        <p:spPr>
+          <a:xfrm>
+            <a:off x="694944" y="2487168"/>
+            <a:ext cx="1792224" cy="566928"/>
+          </a:xfrm>
+          <a:prstGeom prst="rect">
+            <a:avLst/>
+          </a:prstGeom>
+          <a:noFill/>
+          <a:ln/>
+        </p:spPr>
+        <p:txBody>
+          <a:bodyPr wrap="square" lIns="0" tIns="0" rIns="0" bIns="0" rtlCol="0" anchor="ctr"/>
+          <a:lstStyle/>
+          <a:p>
+            <a:pPr algn="ctr" indent="0" marL="0">
+              <a:lnSpc>
+                <a:spcPct val="110000"/>
+              </a:lnSpc>
+              <a:buNone/>
+            </a:pPr>
+            <a:r>
+              <a:rPr lang="en-US" sz="1100" dirty="0">
                 <a:solidFill>
                   <a:srgbClr val="5E6B64"/>
                 </a:solidFill>
@@ -6315,24 +7382,24 @@
                 <a:ea typeface="Calibri" pitchFamily="34" charset="-122"/>
                 <a:cs typeface="Calibri" pitchFamily="34" charset="-120"/>
               </a:rPr>
-              <a:t>Next.js  ·  React  ·  TypeScript  ·  Tailwind CSS</a:t>
-            </a:r>
-            <a:endParaRPr lang="en-US" sz="1150" dirty="0"/>
-          </a:p>
-        </p:txBody>
-      </p:sp>
-      <p:sp>
-        <p:nvSpPr>
-          <p:cNvPr id="7" name="Shape 5"/>
+              <a:t>All the work, most important first</a:t>
+            </a:r>
+            <a:endParaRPr lang="en-US" sz="1100" dirty="0"/>
+          </a:p>
+        </p:txBody>
+      </p:sp>
+      <p:sp>
+        <p:nvSpPr>
+          <p:cNvPr id="8" name="Shape 6"/>
           <p:cNvSpPr/>
           <p:nvPr/>
         </p:nvSpPr>
         <p:spPr>
           <a:xfrm>
-            <a:off x="3895344" y="2441448"/>
-            <a:ext cx="201168" cy="201168"/>
-          </a:xfrm>
-          <a:prstGeom prst="downArrow">
+            <a:off x="2624328" y="2304288"/>
+            <a:ext cx="237744" cy="182880"/>
+          </a:xfrm>
+          <a:prstGeom prst="rightArrow">
             <a:avLst/>
           </a:prstGeom>
           <a:solidFill>
@@ -6348,18 +7415,18 @@
       </p:sp>
       <p:sp>
         <p:nvSpPr>
-          <p:cNvPr id="8" name="Shape 6"/>
+          <p:cNvPr id="9" name="Shape 7"/>
           <p:cNvSpPr/>
           <p:nvPr/>
         </p:nvSpPr>
         <p:spPr>
           <a:xfrm>
-            <a:off x="566928" y="2651760"/>
-            <a:ext cx="6858000" cy="841248"/>
+            <a:off x="2871216" y="1609344"/>
+            <a:ext cx="2048256" cy="1572768"/>
           </a:xfrm>
           <a:prstGeom prst="roundRect">
             <a:avLst>
-              <a:gd name="adj" fmla="val 8696"/>
+              <a:gd name="adj" fmla="val 4651"/>
             </a:avLst>
           </a:prstGeom>
           <a:solidFill>
@@ -6375,30 +7442,75 @@
       </p:sp>
       <p:sp>
         <p:nvSpPr>
-          <p:cNvPr id="9" name="Text 7"/>
-          <p:cNvSpPr txBox="1"/>
-          <p:nvPr/>
-        </p:nvSpPr>
-        <p:spPr>
-          <a:xfrm>
-            <a:off x="822960" y="2770632"/>
-            <a:ext cx="6345936" cy="274320"/>
-          </a:xfrm>
-          <a:prstGeom prst="rect">
-            <a:avLst/>
-          </a:prstGeom>
-          <a:noFill/>
-          <a:ln/>
-        </p:spPr>
-        <p:txBody>
-          <a:bodyPr wrap="square" lIns="0" tIns="0" rIns="0" bIns="0" rtlCol="0" anchor="ctr"/>
-          <a:lstStyle/>
-          <a:p>
-            <a:pPr indent="0" marL="0">
-              <a:buNone/>
-            </a:pPr>
-            <a:r>
-              <a:rPr lang="en-US" sz="1450" b="1" dirty="0">
+          <p:cNvPr id="10" name="Text 8"/>
+          <p:cNvSpPr txBox="1"/>
+          <p:nvPr/>
+        </p:nvSpPr>
+        <p:spPr>
+          <a:xfrm>
+            <a:off x="3739896" y="1773936"/>
+            <a:ext cx="310896" cy="310896"/>
+          </a:xfrm>
+          <a:prstGeom prst="ellipse">
+            <a:avLst/>
+          </a:prstGeom>
+          <a:solidFill>
+            <a:srgbClr val="0F5132"/>
+          </a:solidFill>
+          <a:ln>
+            <a:solidFill>
+              <a:srgbClr val="0F5132"/>
+            </a:solidFill>
+          </a:ln>
+        </p:spPr>
+        <p:txBody>
+          <a:bodyPr wrap="square" lIns="0" tIns="0" rIns="0" bIns="0" rtlCol="0" anchor="ctr"/>
+          <a:lstStyle/>
+          <a:p>
+            <a:pPr algn="ctr" indent="0" marL="0">
+              <a:buNone/>
+            </a:pPr>
+            <a:r>
+              <a:rPr lang="en-US" sz="1200" b="1" dirty="0">
+                <a:solidFill>
+                  <a:srgbClr val="FFFFFF"/>
+                </a:solidFill>
+                <a:latin typeface="Calibri" pitchFamily="34" charset="0"/>
+                <a:ea typeface="Calibri" pitchFamily="34" charset="-122"/>
+                <a:cs typeface="Calibri" pitchFamily="34" charset="-120"/>
+              </a:rPr>
+              <a:t>2</a:t>
+            </a:r>
+            <a:endParaRPr lang="en-US" sz="1200" dirty="0"/>
+          </a:p>
+        </p:txBody>
+      </p:sp>
+      <p:sp>
+        <p:nvSpPr>
+          <p:cNvPr id="11" name="Text 9"/>
+          <p:cNvSpPr txBox="1"/>
+          <p:nvPr/>
+        </p:nvSpPr>
+        <p:spPr>
+          <a:xfrm>
+            <a:off x="2999232" y="2176272"/>
+            <a:ext cx="1792224" cy="310896"/>
+          </a:xfrm>
+          <a:prstGeom prst="rect">
+            <a:avLst/>
+          </a:prstGeom>
+          <a:noFill/>
+          <a:ln/>
+        </p:spPr>
+        <p:txBody>
+          <a:bodyPr wrap="square" lIns="0" tIns="0" rIns="0" bIns="0" rtlCol="0" anchor="ctr"/>
+          <a:lstStyle/>
+          <a:p>
+            <a:pPr algn="ctr" indent="0" marL="0">
+              <a:buNone/>
+            </a:pPr>
+            <a:r>
+              <a:rPr lang="en-US" sz="1350" b="1" dirty="0">
                 <a:solidFill>
                   <a:srgbClr val="0F5132"/>
                 </a:solidFill>
@@ -6406,38 +7518,41 @@
                 <a:ea typeface="Calibri" pitchFamily="34" charset="-122"/>
                 <a:cs typeface="Calibri" pitchFamily="34" charset="-120"/>
               </a:rPr>
-              <a:t>The working parts</a:t>
-            </a:r>
-            <a:endParaRPr lang="en-US" sz="1450" dirty="0"/>
-          </a:p>
-        </p:txBody>
-      </p:sp>
-      <p:sp>
-        <p:nvSpPr>
-          <p:cNvPr id="10" name="Text 8"/>
-          <p:cNvSpPr txBox="1"/>
-          <p:nvPr/>
-        </p:nvSpPr>
-        <p:spPr>
-          <a:xfrm>
-            <a:off x="822960" y="3054096"/>
-            <a:ext cx="6345936" cy="310896"/>
-          </a:xfrm>
-          <a:prstGeom prst="rect">
-            <a:avLst/>
-          </a:prstGeom>
-          <a:noFill/>
-          <a:ln/>
-        </p:spPr>
-        <p:txBody>
-          <a:bodyPr wrap="square" lIns="0" tIns="0" rIns="0" bIns="0" rtlCol="0" anchor="ctr"/>
-          <a:lstStyle/>
-          <a:p>
-            <a:pPr indent="0" marL="0">
-              <a:buNone/>
-            </a:pPr>
-            <a:r>
-              <a:rPr lang="en-US" sz="1150" dirty="0">
+              <a:t>Sprint planning</a:t>
+            </a:r>
+            <a:endParaRPr lang="en-US" sz="1350" dirty="0"/>
+          </a:p>
+        </p:txBody>
+      </p:sp>
+      <p:sp>
+        <p:nvSpPr>
+          <p:cNvPr id="12" name="Text 10"/>
+          <p:cNvSpPr txBox="1"/>
+          <p:nvPr/>
+        </p:nvSpPr>
+        <p:spPr>
+          <a:xfrm>
+            <a:off x="2999232" y="2487168"/>
+            <a:ext cx="1792224" cy="566928"/>
+          </a:xfrm>
+          <a:prstGeom prst="rect">
+            <a:avLst/>
+          </a:prstGeom>
+          <a:noFill/>
+          <a:ln/>
+        </p:spPr>
+        <p:txBody>
+          <a:bodyPr wrap="square" lIns="0" tIns="0" rIns="0" bIns="0" rtlCol="0" anchor="ctr"/>
+          <a:lstStyle/>
+          <a:p>
+            <a:pPr algn="ctr" indent="0" marL="0">
+              <a:lnSpc>
+                <a:spcPct val="110000"/>
+              </a:lnSpc>
+              <a:buNone/>
+            </a:pPr>
+            <a:r>
+              <a:rPr lang="en-US" sz="1100" dirty="0">
                 <a:solidFill>
                   <a:srgbClr val="5E6B64"/>
                 </a:solidFill>
@@ -6445,24 +7560,24 @@
                 <a:ea typeface="Calibri" pitchFamily="34" charset="-122"/>
                 <a:cs typeface="Calibri" pitchFamily="34" charset="-120"/>
               </a:rPr>
-              <a:t>Saves and loads data, and checks who may see what</a:t>
-            </a:r>
-            <a:endParaRPr lang="en-US" sz="1150" dirty="0"/>
-          </a:p>
-        </p:txBody>
-      </p:sp>
-      <p:sp>
-        <p:nvSpPr>
-          <p:cNvPr id="11" name="Shape 9"/>
+              <a:t>Choose what to build next</a:t>
+            </a:r>
+            <a:endParaRPr lang="en-US" sz="1100" dirty="0"/>
+          </a:p>
+        </p:txBody>
+      </p:sp>
+      <p:sp>
+        <p:nvSpPr>
+          <p:cNvPr id="13" name="Shape 11"/>
           <p:cNvSpPr/>
           <p:nvPr/>
         </p:nvSpPr>
         <p:spPr>
           <a:xfrm>
-            <a:off x="3895344" y="3520440"/>
-            <a:ext cx="201168" cy="201168"/>
-          </a:xfrm>
-          <a:prstGeom prst="downArrow">
+            <a:off x="4928616" y="2304288"/>
+            <a:ext cx="237744" cy="182880"/>
+          </a:xfrm>
+          <a:prstGeom prst="rightArrow">
             <a:avLst/>
           </a:prstGeom>
           <a:solidFill>
@@ -6478,18 +7593,374 @@
       </p:sp>
       <p:sp>
         <p:nvSpPr>
-          <p:cNvPr id="12" name="Shape 10"/>
+          <p:cNvPr id="14" name="Shape 12"/>
           <p:cNvSpPr/>
           <p:nvPr/>
         </p:nvSpPr>
         <p:spPr>
           <a:xfrm>
-            <a:off x="566928" y="3730752"/>
-            <a:ext cx="6858000" cy="841248"/>
+            <a:off x="5175504" y="1609344"/>
+            <a:ext cx="2048256" cy="1572768"/>
           </a:xfrm>
           <a:prstGeom prst="roundRect">
             <a:avLst>
-              <a:gd name="adj" fmla="val 8696"/>
+              <a:gd name="adj" fmla="val 4651"/>
+            </a:avLst>
+          </a:prstGeom>
+          <a:solidFill>
+            <a:srgbClr val="EDF3EF"/>
+          </a:solidFill>
+          <a:ln w="12700">
+            <a:solidFill>
+              <a:srgbClr val="EDF3EF"/>
+            </a:solidFill>
+            <a:prstDash val="solid"/>
+          </a:ln>
+        </p:spPr>
+      </p:sp>
+      <p:sp>
+        <p:nvSpPr>
+          <p:cNvPr id="15" name="Text 13"/>
+          <p:cNvSpPr txBox="1"/>
+          <p:nvPr/>
+        </p:nvSpPr>
+        <p:spPr>
+          <a:xfrm>
+            <a:off x="6044184" y="1773936"/>
+            <a:ext cx="310896" cy="310896"/>
+          </a:xfrm>
+          <a:prstGeom prst="ellipse">
+            <a:avLst/>
+          </a:prstGeom>
+          <a:solidFill>
+            <a:srgbClr val="0F5132"/>
+          </a:solidFill>
+          <a:ln>
+            <a:solidFill>
+              <a:srgbClr val="0F5132"/>
+            </a:solidFill>
+          </a:ln>
+        </p:spPr>
+        <p:txBody>
+          <a:bodyPr wrap="square" lIns="0" tIns="0" rIns="0" bIns="0" rtlCol="0" anchor="ctr"/>
+          <a:lstStyle/>
+          <a:p>
+            <a:pPr algn="ctr" indent="0" marL="0">
+              <a:buNone/>
+            </a:pPr>
+            <a:r>
+              <a:rPr lang="en-US" sz="1200" b="1" dirty="0">
+                <a:solidFill>
+                  <a:srgbClr val="FFFFFF"/>
+                </a:solidFill>
+                <a:latin typeface="Calibri" pitchFamily="34" charset="0"/>
+                <a:ea typeface="Calibri" pitchFamily="34" charset="-122"/>
+                <a:cs typeface="Calibri" pitchFamily="34" charset="-120"/>
+              </a:rPr>
+              <a:t>3</a:t>
+            </a:r>
+            <a:endParaRPr lang="en-US" sz="1200" dirty="0"/>
+          </a:p>
+        </p:txBody>
+      </p:sp>
+      <p:sp>
+        <p:nvSpPr>
+          <p:cNvPr id="16" name="Text 14"/>
+          <p:cNvSpPr txBox="1"/>
+          <p:nvPr/>
+        </p:nvSpPr>
+        <p:spPr>
+          <a:xfrm>
+            <a:off x="5303520" y="2176272"/>
+            <a:ext cx="1792224" cy="310896"/>
+          </a:xfrm>
+          <a:prstGeom prst="rect">
+            <a:avLst/>
+          </a:prstGeom>
+          <a:noFill/>
+          <a:ln/>
+        </p:spPr>
+        <p:txBody>
+          <a:bodyPr wrap="square" lIns="0" tIns="0" rIns="0" bIns="0" rtlCol="0" anchor="ctr"/>
+          <a:lstStyle/>
+          <a:p>
+            <a:pPr algn="ctr" indent="0" marL="0">
+              <a:buNone/>
+            </a:pPr>
+            <a:r>
+              <a:rPr lang="en-US" sz="1350" b="1" dirty="0">
+                <a:solidFill>
+                  <a:srgbClr val="0F5132"/>
+                </a:solidFill>
+                <a:latin typeface="Calibri" pitchFamily="34" charset="0"/>
+                <a:ea typeface="Calibri" pitchFamily="34" charset="-122"/>
+                <a:cs typeface="Calibri" pitchFamily="34" charset="-120"/>
+              </a:rPr>
+              <a:t>Build and test</a:t>
+            </a:r>
+            <a:endParaRPr lang="en-US" sz="1350" dirty="0"/>
+          </a:p>
+        </p:txBody>
+      </p:sp>
+      <p:sp>
+        <p:nvSpPr>
+          <p:cNvPr id="17" name="Text 15"/>
+          <p:cNvSpPr txBox="1"/>
+          <p:nvPr/>
+        </p:nvSpPr>
+        <p:spPr>
+          <a:xfrm>
+            <a:off x="5303520" y="2487168"/>
+            <a:ext cx="1792224" cy="566928"/>
+          </a:xfrm>
+          <a:prstGeom prst="rect">
+            <a:avLst/>
+          </a:prstGeom>
+          <a:noFill/>
+          <a:ln/>
+        </p:spPr>
+        <p:txBody>
+          <a:bodyPr wrap="square" lIns="0" tIns="0" rIns="0" bIns="0" rtlCol="0" anchor="ctr"/>
+          <a:lstStyle/>
+          <a:p>
+            <a:pPr algn="ctr" indent="0" marL="0">
+              <a:lnSpc>
+                <a:spcPct val="110000"/>
+              </a:lnSpc>
+              <a:buNone/>
+            </a:pPr>
+            <a:r>
+              <a:rPr lang="en-US" sz="1100" dirty="0">
+                <a:solidFill>
+                  <a:srgbClr val="5E6B64"/>
+                </a:solidFill>
+                <a:latin typeface="Calibri" pitchFamily="34" charset="0"/>
+                <a:ea typeface="Calibri" pitchFamily="34" charset="-122"/>
+                <a:cs typeface="Calibri" pitchFamily="34" charset="-120"/>
+              </a:rPr>
+              <a:t>One short sprint</a:t>
+            </a:r>
+            <a:endParaRPr lang="en-US" sz="1100" dirty="0"/>
+          </a:p>
+        </p:txBody>
+      </p:sp>
+      <p:sp>
+        <p:nvSpPr>
+          <p:cNvPr id="18" name="Shape 16"/>
+          <p:cNvSpPr/>
+          <p:nvPr/>
+        </p:nvSpPr>
+        <p:spPr>
+          <a:xfrm>
+            <a:off x="7232904" y="2304288"/>
+            <a:ext cx="237744" cy="182880"/>
+          </a:xfrm>
+          <a:prstGeom prst="rightArrow">
+            <a:avLst/>
+          </a:prstGeom>
+          <a:solidFill>
+            <a:srgbClr val="9DBFA8"/>
+          </a:solidFill>
+          <a:ln w="12700">
+            <a:solidFill>
+              <a:srgbClr val="9DBFA8"/>
+            </a:solidFill>
+            <a:prstDash val="solid"/>
+          </a:ln>
+        </p:spPr>
+      </p:sp>
+      <p:sp>
+        <p:nvSpPr>
+          <p:cNvPr id="19" name="Shape 17"/>
+          <p:cNvSpPr/>
+          <p:nvPr/>
+        </p:nvSpPr>
+        <p:spPr>
+          <a:xfrm>
+            <a:off x="7479792" y="1609344"/>
+            <a:ext cx="2048256" cy="1572768"/>
+          </a:xfrm>
+          <a:prstGeom prst="roundRect">
+            <a:avLst>
+              <a:gd name="adj" fmla="val 4651"/>
+            </a:avLst>
+          </a:prstGeom>
+          <a:solidFill>
+            <a:srgbClr val="EDF3EF"/>
+          </a:solidFill>
+          <a:ln w="12700">
+            <a:solidFill>
+              <a:srgbClr val="EDF3EF"/>
+            </a:solidFill>
+            <a:prstDash val="solid"/>
+          </a:ln>
+        </p:spPr>
+      </p:sp>
+      <p:sp>
+        <p:nvSpPr>
+          <p:cNvPr id="20" name="Text 18"/>
+          <p:cNvSpPr txBox="1"/>
+          <p:nvPr/>
+        </p:nvSpPr>
+        <p:spPr>
+          <a:xfrm>
+            <a:off x="8348472" y="1773936"/>
+            <a:ext cx="310896" cy="310896"/>
+          </a:xfrm>
+          <a:prstGeom prst="ellipse">
+            <a:avLst/>
+          </a:prstGeom>
+          <a:solidFill>
+            <a:srgbClr val="0F5132"/>
+          </a:solidFill>
+          <a:ln>
+            <a:solidFill>
+              <a:srgbClr val="0F5132"/>
+            </a:solidFill>
+          </a:ln>
+        </p:spPr>
+        <p:txBody>
+          <a:bodyPr wrap="square" lIns="0" tIns="0" rIns="0" bIns="0" rtlCol="0" anchor="ctr"/>
+          <a:lstStyle/>
+          <a:p>
+            <a:pPr algn="ctr" indent="0" marL="0">
+              <a:buNone/>
+            </a:pPr>
+            <a:r>
+              <a:rPr lang="en-US" sz="1200" b="1" dirty="0">
+                <a:solidFill>
+                  <a:srgbClr val="FFFFFF"/>
+                </a:solidFill>
+                <a:latin typeface="Calibri" pitchFamily="34" charset="0"/>
+                <a:ea typeface="Calibri" pitchFamily="34" charset="-122"/>
+                <a:cs typeface="Calibri" pitchFamily="34" charset="-120"/>
+              </a:rPr>
+              <a:t>4</a:t>
+            </a:r>
+            <a:endParaRPr lang="en-US" sz="1200" dirty="0"/>
+          </a:p>
+        </p:txBody>
+      </p:sp>
+      <p:sp>
+        <p:nvSpPr>
+          <p:cNvPr id="21" name="Text 19"/>
+          <p:cNvSpPr txBox="1"/>
+          <p:nvPr/>
+        </p:nvSpPr>
+        <p:spPr>
+          <a:xfrm>
+            <a:off x="7607808" y="2176272"/>
+            <a:ext cx="1792224" cy="310896"/>
+          </a:xfrm>
+          <a:prstGeom prst="rect">
+            <a:avLst/>
+          </a:prstGeom>
+          <a:noFill/>
+          <a:ln/>
+        </p:spPr>
+        <p:txBody>
+          <a:bodyPr wrap="square" lIns="0" tIns="0" rIns="0" bIns="0" rtlCol="0" anchor="ctr"/>
+          <a:lstStyle/>
+          <a:p>
+            <a:pPr algn="ctr" indent="0" marL="0">
+              <a:buNone/>
+            </a:pPr>
+            <a:r>
+              <a:rPr lang="en-US" sz="1350" b="1" dirty="0">
+                <a:solidFill>
+                  <a:srgbClr val="0F5132"/>
+                </a:solidFill>
+                <a:latin typeface="Calibri" pitchFamily="34" charset="0"/>
+                <a:ea typeface="Calibri" pitchFamily="34" charset="-122"/>
+                <a:cs typeface="Calibri" pitchFamily="34" charset="-120"/>
+              </a:rPr>
+              <a:t>Working part</a:t>
+            </a:r>
+            <a:endParaRPr lang="en-US" sz="1350" dirty="0"/>
+          </a:p>
+        </p:txBody>
+      </p:sp>
+      <p:sp>
+        <p:nvSpPr>
+          <p:cNvPr id="22" name="Text 20"/>
+          <p:cNvSpPr txBox="1"/>
+          <p:nvPr/>
+        </p:nvSpPr>
+        <p:spPr>
+          <a:xfrm>
+            <a:off x="7607808" y="2487168"/>
+            <a:ext cx="1792224" cy="566928"/>
+          </a:xfrm>
+          <a:prstGeom prst="rect">
+            <a:avLst/>
+          </a:prstGeom>
+          <a:noFill/>
+          <a:ln/>
+        </p:spPr>
+        <p:txBody>
+          <a:bodyPr wrap="square" lIns="0" tIns="0" rIns="0" bIns="0" rtlCol="0" anchor="ctr"/>
+          <a:lstStyle/>
+          <a:p>
+            <a:pPr algn="ctr" indent="0" marL="0">
+              <a:lnSpc>
+                <a:spcPct val="110000"/>
+              </a:lnSpc>
+              <a:buNone/>
+            </a:pPr>
+            <a:r>
+              <a:rPr lang="en-US" sz="1100" dirty="0">
+                <a:solidFill>
+                  <a:srgbClr val="5E6B64"/>
+                </a:solidFill>
+                <a:latin typeface="Calibri" pitchFamily="34" charset="0"/>
+                <a:ea typeface="Calibri" pitchFamily="34" charset="-122"/>
+                <a:cs typeface="Calibri" pitchFamily="34" charset="-120"/>
+              </a:rPr>
+              <a:t>Something that actually runs</a:t>
+            </a:r>
+            <a:endParaRPr lang="en-US" sz="1100" dirty="0"/>
+          </a:p>
+        </p:txBody>
+      </p:sp>
+      <p:sp>
+        <p:nvSpPr>
+          <p:cNvPr id="23" name="Shape 21"/>
+          <p:cNvSpPr/>
+          <p:nvPr/>
+        </p:nvSpPr>
+        <p:spPr>
+          <a:xfrm>
+            <a:off x="9537192" y="2304288"/>
+            <a:ext cx="237744" cy="182880"/>
+          </a:xfrm>
+          <a:prstGeom prst="rightArrow">
+            <a:avLst/>
+          </a:prstGeom>
+          <a:solidFill>
+            <a:srgbClr val="9DBFA8"/>
+          </a:solidFill>
+          <a:ln w="12700">
+            <a:solidFill>
+              <a:srgbClr val="9DBFA8"/>
+            </a:solidFill>
+            <a:prstDash val="solid"/>
+          </a:ln>
+        </p:spPr>
+      </p:sp>
+      <p:sp>
+        <p:nvSpPr>
+          <p:cNvPr id="24" name="Shape 22"/>
+          <p:cNvSpPr/>
+          <p:nvPr/>
+        </p:nvSpPr>
+        <p:spPr>
+          <a:xfrm>
+            <a:off x="9784080" y="1609344"/>
+            <a:ext cx="2048256" cy="1572768"/>
+          </a:xfrm>
+          <a:prstGeom prst="roundRect">
+            <a:avLst>
+              <a:gd name="adj" fmla="val 4651"/>
             </a:avLst>
           </a:prstGeom>
           <a:solidFill>
@@ -6505,30 +7976,75 @@
       </p:sp>
       <p:sp>
         <p:nvSpPr>
-          <p:cNvPr id="13" name="Text 11"/>
-          <p:cNvSpPr txBox="1"/>
-          <p:nvPr/>
-        </p:nvSpPr>
-        <p:spPr>
-          <a:xfrm>
-            <a:off x="822960" y="3849624"/>
-            <a:ext cx="6345936" cy="274320"/>
-          </a:xfrm>
-          <a:prstGeom prst="rect">
-            <a:avLst/>
-          </a:prstGeom>
-          <a:noFill/>
-          <a:ln/>
-        </p:spPr>
-        <p:txBody>
-          <a:bodyPr wrap="square" lIns="0" tIns="0" rIns="0" bIns="0" rtlCol="0" anchor="ctr"/>
-          <a:lstStyle/>
-          <a:p>
-            <a:pPr indent="0" marL="0">
-              <a:buNone/>
-            </a:pPr>
-            <a:r>
-              <a:rPr lang="en-US" sz="1450" b="1" dirty="0">
+          <p:cNvPr id="25" name="Text 23"/>
+          <p:cNvSpPr txBox="1"/>
+          <p:nvPr/>
+        </p:nvSpPr>
+        <p:spPr>
+          <a:xfrm>
+            <a:off x="10652760" y="1773936"/>
+            <a:ext cx="310896" cy="310896"/>
+          </a:xfrm>
+          <a:prstGeom prst="ellipse">
+            <a:avLst/>
+          </a:prstGeom>
+          <a:solidFill>
+            <a:srgbClr val="FFFFFF"/>
+          </a:solidFill>
+          <a:ln>
+            <a:solidFill>
+              <a:srgbClr val="FFFFFF"/>
+            </a:solidFill>
+          </a:ln>
+        </p:spPr>
+        <p:txBody>
+          <a:bodyPr wrap="square" lIns="0" tIns="0" rIns="0" bIns="0" rtlCol="0" anchor="ctr"/>
+          <a:lstStyle/>
+          <a:p>
+            <a:pPr algn="ctr" indent="0" marL="0">
+              <a:buNone/>
+            </a:pPr>
+            <a:r>
+              <a:rPr lang="en-US" sz="1200" b="1" dirty="0">
+                <a:solidFill>
+                  <a:srgbClr val="0F5132"/>
+                </a:solidFill>
+                <a:latin typeface="Calibri" pitchFamily="34" charset="0"/>
+                <a:ea typeface="Calibri" pitchFamily="34" charset="-122"/>
+                <a:cs typeface="Calibri" pitchFamily="34" charset="-120"/>
+              </a:rPr>
+              <a:t>5</a:t>
+            </a:r>
+            <a:endParaRPr lang="en-US" sz="1200" dirty="0"/>
+          </a:p>
+        </p:txBody>
+      </p:sp>
+      <p:sp>
+        <p:nvSpPr>
+          <p:cNvPr id="26" name="Text 24"/>
+          <p:cNvSpPr txBox="1"/>
+          <p:nvPr/>
+        </p:nvSpPr>
+        <p:spPr>
+          <a:xfrm>
+            <a:off x="9912096" y="2176272"/>
+            <a:ext cx="1792224" cy="310896"/>
+          </a:xfrm>
+          <a:prstGeom prst="rect">
+            <a:avLst/>
+          </a:prstGeom>
+          <a:noFill/>
+          <a:ln/>
+        </p:spPr>
+        <p:txBody>
+          <a:bodyPr wrap="square" lIns="0" tIns="0" rIns="0" bIns="0" rtlCol="0" anchor="ctr"/>
+          <a:lstStyle/>
+          <a:p>
+            <a:pPr algn="ctr" indent="0" marL="0">
+              <a:buNone/>
+            </a:pPr>
+            <a:r>
+              <a:rPr lang="en-US" sz="1350" b="1" dirty="0">
                 <a:solidFill>
                   <a:srgbClr val="FFFFFF"/>
                 </a:solidFill>
@@ -6536,38 +8052,41 @@
                 <a:ea typeface="Calibri" pitchFamily="34" charset="-122"/>
                 <a:cs typeface="Calibri" pitchFamily="34" charset="-120"/>
               </a:rPr>
-              <a:t>The matching rules</a:t>
-            </a:r>
-            <a:endParaRPr lang="en-US" sz="1450" dirty="0"/>
-          </a:p>
-        </p:txBody>
-      </p:sp>
-      <p:sp>
-        <p:nvSpPr>
-          <p:cNvPr id="14" name="Text 12"/>
-          <p:cNvSpPr txBox="1"/>
-          <p:nvPr/>
-        </p:nvSpPr>
-        <p:spPr>
-          <a:xfrm>
-            <a:off x="822960" y="4133088"/>
-            <a:ext cx="6345936" cy="310896"/>
-          </a:xfrm>
-          <a:prstGeom prst="rect">
-            <a:avLst/>
-          </a:prstGeom>
-          <a:noFill/>
-          <a:ln/>
-        </p:spPr>
-        <p:txBody>
-          <a:bodyPr wrap="square" lIns="0" tIns="0" rIns="0" bIns="0" rtlCol="0" anchor="ctr"/>
-          <a:lstStyle/>
-          <a:p>
-            <a:pPr indent="0" marL="0">
-              <a:buNone/>
-            </a:pPr>
-            <a:r>
-              <a:rPr lang="en-US" sz="1150" dirty="0">
+              <a:t>Review and look back</a:t>
+            </a:r>
+            <a:endParaRPr lang="en-US" sz="1350" dirty="0"/>
+          </a:p>
+        </p:txBody>
+      </p:sp>
+      <p:sp>
+        <p:nvSpPr>
+          <p:cNvPr id="27" name="Text 25"/>
+          <p:cNvSpPr txBox="1"/>
+          <p:nvPr/>
+        </p:nvSpPr>
+        <p:spPr>
+          <a:xfrm>
+            <a:off x="9912096" y="2487168"/>
+            <a:ext cx="1792224" cy="566928"/>
+          </a:xfrm>
+          <a:prstGeom prst="rect">
+            <a:avLst/>
+          </a:prstGeom>
+          <a:noFill/>
+          <a:ln/>
+        </p:spPr>
+        <p:txBody>
+          <a:bodyPr wrap="square" lIns="0" tIns="0" rIns="0" bIns="0" rtlCol="0" anchor="ctr"/>
+          <a:lstStyle/>
+          <a:p>
+            <a:pPr algn="ctr" indent="0" marL="0">
+              <a:lnSpc>
+                <a:spcPct val="110000"/>
+              </a:lnSpc>
+              <a:buNone/>
+            </a:pPr>
+            <a:r>
+              <a:rPr lang="en-US" sz="1100" dirty="0">
                 <a:solidFill>
                   <a:srgbClr val="9DBFA8"/>
                 </a:solidFill>
@@ -6575,24 +8094,70 @@
                 <a:ea typeface="Calibri" pitchFamily="34" charset="-122"/>
                 <a:cs typeface="Calibri" pitchFamily="34" charset="-120"/>
               </a:rPr>
-              <a:t>Kept away from the database, so we can test them directly</a:t>
-            </a:r>
-            <a:endParaRPr lang="en-US" sz="1150" dirty="0"/>
-          </a:p>
-        </p:txBody>
-      </p:sp>
-      <p:sp>
-        <p:nvSpPr>
-          <p:cNvPr id="15" name="Shape 13"/>
+              <a:t>Supervisor checks it; we improve</a:t>
+            </a:r>
+            <a:endParaRPr lang="en-US" sz="1100" dirty="0"/>
+          </a:p>
+        </p:txBody>
+      </p:sp>
+      <p:sp>
+        <p:nvSpPr>
+          <p:cNvPr id="28" name="Shape 26"/>
           <p:cNvSpPr/>
           <p:nvPr/>
         </p:nvSpPr>
         <p:spPr>
           <a:xfrm>
-            <a:off x="3895344" y="4599432"/>
-            <a:ext cx="201168" cy="201168"/>
-          </a:xfrm>
-          <a:prstGeom prst="downArrow">
+            <a:off x="932688" y="3566160"/>
+            <a:ext cx="10296144" cy="0"/>
+          </a:xfrm>
+          <a:prstGeom prst="line">
+            <a:avLst/>
+          </a:prstGeom>
+          <a:noFill/>
+          <a:ln w="25400">
+            <a:solidFill>
+              <a:srgbClr val="9DBFA8"/>
+            </a:solidFill>
+            <a:prstDash val="solid"/>
+          </a:ln>
+        </p:spPr>
+      </p:sp>
+      <p:sp>
+        <p:nvSpPr>
+          <p:cNvPr id="29" name="Shape 27"/>
+          <p:cNvSpPr/>
+          <p:nvPr/>
+        </p:nvSpPr>
+        <p:spPr>
+          <a:xfrm>
+            <a:off x="11228832" y="3255264"/>
+            <a:ext cx="0" cy="310896"/>
+          </a:xfrm>
+          <a:prstGeom prst="line">
+            <a:avLst/>
+          </a:prstGeom>
+          <a:noFill/>
+          <a:ln w="25400">
+            <a:solidFill>
+              <a:srgbClr val="9DBFA8"/>
+            </a:solidFill>
+            <a:prstDash val="solid"/>
+          </a:ln>
+        </p:spPr>
+      </p:sp>
+      <p:sp>
+        <p:nvSpPr>
+          <p:cNvPr id="30" name="Shape 28"/>
+          <p:cNvSpPr/>
+          <p:nvPr/>
+        </p:nvSpPr>
+        <p:spPr>
+          <a:xfrm>
+            <a:off x="832104" y="3200400"/>
+            <a:ext cx="201168" cy="384048"/>
+          </a:xfrm>
+          <a:prstGeom prst="upArrow">
             <a:avLst/>
           </a:prstGeom>
           <a:solidFill>
@@ -6608,18 +8173,57 @@
       </p:sp>
       <p:sp>
         <p:nvSpPr>
-          <p:cNvPr id="16" name="Shape 14"/>
+          <p:cNvPr id="31" name="Text 29"/>
+          <p:cNvSpPr txBox="1"/>
+          <p:nvPr/>
+        </p:nvSpPr>
+        <p:spPr>
+          <a:xfrm>
+            <a:off x="566928" y="3602736"/>
+            <a:ext cx="11027664" cy="310896"/>
+          </a:xfrm>
+          <a:prstGeom prst="rect">
+            <a:avLst/>
+          </a:prstGeom>
+          <a:noFill/>
+          <a:ln/>
+        </p:spPr>
+        <p:txBody>
+          <a:bodyPr wrap="square" lIns="0" tIns="0" rIns="0" bIns="0" rtlCol="0" anchor="ctr"/>
+          <a:lstStyle/>
+          <a:p>
+            <a:pPr algn="ctr" indent="0" marL="0">
+              <a:buNone/>
+            </a:pPr>
+            <a:r>
+              <a:rPr lang="en-US" sz="1200" b="1" dirty="0">
+                <a:solidFill>
+                  <a:srgbClr val="2C7A57"/>
+                </a:solidFill>
+                <a:latin typeface="Calibri" pitchFamily="34" charset="0"/>
+                <a:ea typeface="Calibri" pitchFamily="34" charset="-122"/>
+                <a:cs typeface="Calibri" pitchFamily="34" charset="-120"/>
+              </a:rPr>
+              <a:t>Repeat every sprint until the system is done</a:t>
+            </a:r>
+            <a:endParaRPr lang="en-US" sz="1200" dirty="0"/>
+          </a:p>
+        </p:txBody>
+      </p:sp>
+      <p:sp>
+        <p:nvSpPr>
+          <p:cNvPr id="32" name="Shape 30"/>
           <p:cNvSpPr/>
           <p:nvPr/>
         </p:nvSpPr>
         <p:spPr>
           <a:xfrm>
-            <a:off x="566928" y="4809744"/>
-            <a:ext cx="6858000" cy="841248"/>
+            <a:off x="566928" y="4078224"/>
+            <a:ext cx="5513832" cy="1207008"/>
           </a:xfrm>
           <a:prstGeom prst="roundRect">
             <a:avLst>
-              <a:gd name="adj" fmla="val 8696"/>
+              <a:gd name="adj" fmla="val 6818"/>
             </a:avLst>
           </a:prstGeom>
           <a:solidFill>
@@ -6635,14 +8239,14 @@
       </p:sp>
       <p:sp>
         <p:nvSpPr>
-          <p:cNvPr id="17" name="Text 15"/>
-          <p:cNvSpPr txBox="1"/>
-          <p:nvPr/>
-        </p:nvSpPr>
-        <p:spPr>
-          <a:xfrm>
-            <a:off x="822960" y="4928616"/>
-            <a:ext cx="6345936" cy="274320"/>
+          <p:cNvPr id="33" name="Text 31"/>
+          <p:cNvSpPr txBox="1"/>
+          <p:nvPr/>
+        </p:nvSpPr>
+        <p:spPr>
+          <a:xfrm>
+            <a:off x="804672" y="4242816"/>
+            <a:ext cx="5038344" cy="310896"/>
           </a:xfrm>
           <a:prstGeom prst="rect">
             <a:avLst/>
@@ -6666,7 +8270,7 @@
                 <a:ea typeface="Calibri" pitchFamily="34" charset="-122"/>
                 <a:cs typeface="Calibri" pitchFamily="34" charset="-120"/>
               </a:rPr>
-              <a:t>Where data is kept</a:t>
+              <a:t>Why we chose it</a:t>
             </a:r>
             <a:endParaRPr lang="en-US" sz="1450" dirty="0"/>
           </a:p>
@@ -6674,57 +8278,61 @@
       </p:sp>
       <p:sp>
         <p:nvSpPr>
-          <p:cNvPr id="18" name="Text 16"/>
-          <p:cNvSpPr txBox="1"/>
-          <p:nvPr/>
-        </p:nvSpPr>
-        <p:spPr>
-          <a:xfrm>
-            <a:off x="822960" y="5212080"/>
-            <a:ext cx="6345936" cy="310896"/>
-          </a:xfrm>
-          <a:prstGeom prst="rect">
-            <a:avLst/>
-          </a:prstGeom>
-          <a:noFill/>
-          <a:ln/>
-        </p:spPr>
-        <p:txBody>
-          <a:bodyPr wrap="square" lIns="0" tIns="0" rIns="0" bIns="0" rtlCol="0" anchor="ctr"/>
-          <a:lstStyle/>
-          <a:p>
-            <a:pPr indent="0" marL="0">
-              <a:buNone/>
-            </a:pPr>
-            <a:r>
-              <a:rPr lang="en-US" sz="1150" dirty="0">
-                <a:solidFill>
-                  <a:srgbClr val="5E6B64"/>
-                </a:solidFill>
-                <a:latin typeface="Calibri" pitchFamily="34" charset="0"/>
-                <a:ea typeface="Calibri" pitchFamily="34" charset="-122"/>
-                <a:cs typeface="Calibri" pitchFamily="34" charset="-120"/>
-              </a:rPr>
-              <a:t>PostgreSQL  ·  Prisma</a:t>
-            </a:r>
-            <a:endParaRPr lang="en-US" sz="1150" dirty="0"/>
-          </a:p>
-        </p:txBody>
-      </p:sp>
-      <p:sp>
-        <p:nvSpPr>
-          <p:cNvPr id="19" name="Shape 17"/>
+          <p:cNvPr id="34" name="Text 32"/>
+          <p:cNvSpPr txBox="1"/>
+          <p:nvPr/>
+        </p:nvSpPr>
+        <p:spPr>
+          <a:xfrm>
+            <a:off x="804672" y="4608576"/>
+            <a:ext cx="5038344" cy="512064"/>
+          </a:xfrm>
+          <a:prstGeom prst="rect">
+            <a:avLst/>
+          </a:prstGeom>
+          <a:noFill/>
+          <a:ln/>
+        </p:spPr>
+        <p:txBody>
+          <a:bodyPr wrap="square" lIns="0" tIns="0" rIns="0" bIns="0" rtlCol="0" anchor="t"/>
+          <a:lstStyle/>
+          <a:p>
+            <a:pPr marL="342900" indent="-342900">
+              <a:spcAft>
+                <a:spcPts val="500"/>
+              </a:spcAft>
+              <a:buSzPct val="100000"/>
+              <a:buChar char="•"/>
+            </a:pPr>
+            <a:r>
+              <a:rPr lang="en-US" sz="1200" dirty="0">
+                <a:solidFill>
+                  <a:srgbClr val="16211C"/>
+                </a:solidFill>
+                <a:latin typeface="Calibri" pitchFamily="34" charset="0"/>
+                <a:ea typeface="Calibri" pitchFamily="34" charset="-122"/>
+                <a:cs typeface="Calibri" pitchFamily="34" charset="-120"/>
+              </a:rPr>
+              <a:t>We did not know what rules companies use until we looked, so the design kept changing</a:t>
+            </a:r>
+            <a:endParaRPr lang="en-US" sz="1200" dirty="0"/>
+          </a:p>
+        </p:txBody>
+      </p:sp>
+      <p:sp>
+        <p:nvSpPr>
+          <p:cNvPr id="35" name="Shape 33"/>
           <p:cNvSpPr/>
           <p:nvPr/>
         </p:nvSpPr>
         <p:spPr>
           <a:xfrm>
-            <a:off x="7882128" y="1572768"/>
-            <a:ext cx="3712464" cy="1298448"/>
+            <a:off x="6446520" y="4078224"/>
+            <a:ext cx="5513832" cy="1207008"/>
           </a:xfrm>
           <a:prstGeom prst="roundRect">
             <a:avLst>
-              <a:gd name="adj" fmla="val 6338"/>
+              <a:gd name="adj" fmla="val 6818"/>
             </a:avLst>
           </a:prstGeom>
           <a:solidFill>
@@ -6740,14 +8348,14 @@
       </p:sp>
       <p:sp>
         <p:nvSpPr>
-          <p:cNvPr id="20" name="Text 18"/>
-          <p:cNvSpPr txBox="1"/>
-          <p:nvPr/>
-        </p:nvSpPr>
-        <p:spPr>
-          <a:xfrm>
-            <a:off x="8119872" y="1737360"/>
-            <a:ext cx="3236976" cy="310896"/>
+          <p:cNvPr id="36" name="Text 34"/>
+          <p:cNvSpPr txBox="1"/>
+          <p:nvPr/>
+        </p:nvSpPr>
+        <p:spPr>
+          <a:xfrm>
+            <a:off x="6684264" y="4242816"/>
+            <a:ext cx="5038344" cy="310896"/>
           </a:xfrm>
           <a:prstGeom prst="rect">
             <a:avLst/>
@@ -6771,7 +8379,7 @@
                 <a:ea typeface="Calibri" pitchFamily="34" charset="-122"/>
                 <a:cs typeface="Calibri" pitchFamily="34" charset="-120"/>
               </a:rPr>
-              <a:t>Reading PDF forms</a:t>
+              <a:t>Why not Waterfall</a:t>
             </a:r>
             <a:endParaRPr lang="en-US" sz="1450" dirty="0"/>
           </a:p>
@@ -6779,14 +8387,14 @@
       </p:sp>
       <p:sp>
         <p:nvSpPr>
-          <p:cNvPr id="21" name="Text 19"/>
-          <p:cNvSpPr txBox="1"/>
-          <p:nvPr/>
-        </p:nvSpPr>
-        <p:spPr>
-          <a:xfrm>
-            <a:off x="8119872" y="2103120"/>
-            <a:ext cx="3236976" cy="603504"/>
+          <p:cNvPr id="37" name="Text 35"/>
+          <p:cNvSpPr txBox="1"/>
+          <p:nvPr/>
+        </p:nvSpPr>
+        <p:spPr>
+          <a:xfrm>
+            <a:off x="6684264" y="4608576"/>
+            <a:ext cx="5038344" cy="512064"/>
           </a:xfrm>
           <a:prstGeom prst="rect">
             <a:avLst/>
@@ -6806,7 +8414,7 @@
               <a:buChar char="•"/>
             </a:pPr>
             <a:r>
-              <a:rPr lang="en-US" sz="1250" dirty="0">
+              <a:rPr lang="en-US" sz="1200" dirty="0">
                 <a:solidFill>
                   <a:srgbClr val="16211C"/>
                 </a:solidFill>
@@ -6814,55 +8422,34 @@
                 <a:ea typeface="Calibri" pitchFamily="34" charset="-122"/>
                 <a:cs typeface="Calibri" pitchFamily="34" charset="-120"/>
               </a:rPr>
-              <a:t>pdf-lib · pdfjs-dist</a:t>
-            </a:r>
-            <a:endParaRPr lang="en-US" sz="1250" dirty="0"/>
-          </a:p>
-          <a:p>
-            <a:pPr marL="342900" indent="-342900">
-              <a:spcAft>
-                <a:spcPts val="500"/>
-              </a:spcAft>
-              <a:buSzPct val="100000"/>
-              <a:buChar char="•"/>
-            </a:pPr>
-            <a:r>
-              <a:rPr lang="en-US" sz="1250" dirty="0">
-                <a:solidFill>
-                  <a:srgbClr val="16211C"/>
-                </a:solidFill>
-                <a:latin typeface="Calibri" pitchFamily="34" charset="0"/>
-                <a:ea typeface="Calibri" pitchFamily="34" charset="-122"/>
-                <a:cs typeface="Calibri" pitchFamily="34" charset="-120"/>
-              </a:rPr>
-              <a:t>JSZip · Cheerio</a:t>
-            </a:r>
-            <a:endParaRPr lang="en-US" sz="1250" dirty="0"/>
-          </a:p>
-        </p:txBody>
-      </p:sp>
-      <p:sp>
-        <p:nvSpPr>
-          <p:cNvPr id="22" name="Shape 20"/>
+              <a:t>It fixes the whole design before you start, and ours had to keep moving</a:t>
+            </a:r>
+            <a:endParaRPr lang="en-US" sz="1200" dirty="0"/>
+          </a:p>
+        </p:txBody>
+      </p:sp>
+      <p:sp>
+        <p:nvSpPr>
+          <p:cNvPr id="38" name="Shape 36"/>
           <p:cNvSpPr/>
           <p:nvPr/>
         </p:nvSpPr>
         <p:spPr>
           <a:xfrm>
-            <a:off x="7882128" y="3017520"/>
-            <a:ext cx="3712464" cy="1298448"/>
+            <a:off x="566928" y="5449824"/>
+            <a:ext cx="11027664" cy="987552"/>
           </a:xfrm>
           <a:prstGeom prst="roundRect">
             <a:avLst>
-              <a:gd name="adj" fmla="val 6338"/>
+              <a:gd name="adj" fmla="val 7407"/>
             </a:avLst>
           </a:prstGeom>
           <a:solidFill>
-            <a:srgbClr val="EDF3EF"/>
+            <a:srgbClr val="0B2E24"/>
           </a:solidFill>
           <a:ln w="12700">
             <a:solidFill>
-              <a:srgbClr val="EDF3EF"/>
+              <a:srgbClr val="0B2E24"/>
             </a:solidFill>
             <a:prstDash val="solid"/>
           </a:ln>
@@ -6870,213 +8457,102 @@
       </p:sp>
       <p:sp>
         <p:nvSpPr>
-          <p:cNvPr id="23" name="Text 21"/>
-          <p:cNvSpPr txBox="1"/>
-          <p:nvPr/>
-        </p:nvSpPr>
-        <p:spPr>
-          <a:xfrm>
-            <a:off x="8119872" y="3182112"/>
-            <a:ext cx="3236976" cy="310896"/>
-          </a:xfrm>
-          <a:prstGeom prst="rect">
-            <a:avLst/>
-          </a:prstGeom>
-          <a:noFill/>
-          <a:ln/>
-        </p:spPr>
-        <p:txBody>
-          <a:bodyPr wrap="square" lIns="0" tIns="0" rIns="0" bIns="0" rtlCol="0" anchor="ctr"/>
-          <a:lstStyle/>
-          <a:p>
-            <a:pPr indent="0" marL="0">
-              <a:buNone/>
-            </a:pPr>
-            <a:r>
-              <a:rPr lang="en-US" sz="1450" b="1" dirty="0">
-                <a:solidFill>
-                  <a:srgbClr val="0F5132"/>
-                </a:solidFill>
-                <a:latin typeface="Calibri" pitchFamily="34" charset="0"/>
-                <a:ea typeface="Calibri" pitchFamily="34" charset="-122"/>
-                <a:cs typeface="Calibri" pitchFamily="34" charset="-120"/>
-              </a:rPr>
-              <a:t>Checking and safety</a:t>
-            </a:r>
-            <a:endParaRPr lang="en-US" sz="1450" dirty="0"/>
-          </a:p>
-        </p:txBody>
-      </p:sp>
-      <p:sp>
-        <p:nvSpPr>
-          <p:cNvPr id="24" name="Text 22"/>
-          <p:cNvSpPr txBox="1"/>
-          <p:nvPr/>
-        </p:nvSpPr>
-        <p:spPr>
-          <a:xfrm>
-            <a:off x="8119872" y="3547872"/>
-            <a:ext cx="3236976" cy="603504"/>
-          </a:xfrm>
-          <a:prstGeom prst="rect">
-            <a:avLst/>
-          </a:prstGeom>
-          <a:noFill/>
-          <a:ln/>
-        </p:spPr>
-        <p:txBody>
-          <a:bodyPr wrap="square" lIns="0" tIns="0" rIns="0" bIns="0" rtlCol="0" anchor="t"/>
-          <a:lstStyle/>
-          <a:p>
-            <a:pPr marL="342900" indent="-342900">
-              <a:spcAft>
-                <a:spcPts val="500"/>
-              </a:spcAft>
-              <a:buSzPct val="100000"/>
-              <a:buChar char="•"/>
-            </a:pPr>
-            <a:r>
-              <a:rPr lang="en-US" sz="1250" dirty="0">
-                <a:solidFill>
-                  <a:srgbClr val="16211C"/>
-                </a:solidFill>
-                <a:latin typeface="Calibri" pitchFamily="34" charset="0"/>
-                <a:ea typeface="Calibri" pitchFamily="34" charset="-122"/>
-                <a:cs typeface="Calibri" pitchFamily="34" charset="-120"/>
-              </a:rPr>
-              <a:t>Zod — checks everything typed in</a:t>
-            </a:r>
-            <a:endParaRPr lang="en-US" sz="1250" dirty="0"/>
-          </a:p>
-          <a:p>
-            <a:pPr marL="342900" indent="-342900">
-              <a:spcAft>
-                <a:spcPts val="500"/>
-              </a:spcAft>
-              <a:buSzPct val="100000"/>
-              <a:buChar char="•"/>
-            </a:pPr>
-            <a:r>
-              <a:rPr lang="en-US" sz="1250" dirty="0">
-                <a:solidFill>
-                  <a:srgbClr val="16211C"/>
-                </a:solidFill>
-                <a:latin typeface="Calibri" pitchFamily="34" charset="0"/>
-                <a:ea typeface="Calibri" pitchFamily="34" charset="-122"/>
-                <a:cs typeface="Calibri" pitchFamily="34" charset="-120"/>
-              </a:rPr>
-              <a:t>bcryptjs — keeps passwords safe</a:t>
-            </a:r>
-            <a:endParaRPr lang="en-US" sz="1250" dirty="0"/>
-          </a:p>
-        </p:txBody>
-      </p:sp>
-      <p:sp>
-        <p:nvSpPr>
-          <p:cNvPr id="25" name="Shape 23"/>
-          <p:cNvSpPr/>
-          <p:nvPr/>
-        </p:nvSpPr>
-        <p:spPr>
-          <a:xfrm>
-            <a:off x="7882128" y="4462272"/>
-            <a:ext cx="3712464" cy="1188720"/>
-          </a:xfrm>
-          <a:prstGeom prst="roundRect">
-            <a:avLst>
-              <a:gd name="adj" fmla="val 6923"/>
-            </a:avLst>
-          </a:prstGeom>
-          <a:solidFill>
-            <a:srgbClr val="EDF3EF"/>
-          </a:solidFill>
-          <a:ln w="12700">
-            <a:solidFill>
-              <a:srgbClr val="EDF3EF"/>
-            </a:solidFill>
-            <a:prstDash val="solid"/>
-          </a:ln>
-        </p:spPr>
-      </p:sp>
-      <p:sp>
-        <p:nvSpPr>
-          <p:cNvPr id="26" name="Text 24"/>
-          <p:cNvSpPr txBox="1"/>
-          <p:nvPr/>
-        </p:nvSpPr>
-        <p:spPr>
-          <a:xfrm>
-            <a:off x="8119872" y="4626864"/>
-            <a:ext cx="3236976" cy="310896"/>
-          </a:xfrm>
-          <a:prstGeom prst="rect">
-            <a:avLst/>
-          </a:prstGeom>
-          <a:noFill/>
-          <a:ln/>
-        </p:spPr>
-        <p:txBody>
-          <a:bodyPr wrap="square" lIns="0" tIns="0" rIns="0" bIns="0" rtlCol="0" anchor="ctr"/>
-          <a:lstStyle/>
-          <a:p>
-            <a:pPr indent="0" marL="0">
-              <a:buNone/>
-            </a:pPr>
-            <a:r>
-              <a:rPr lang="en-US" sz="1450" b="1" dirty="0">
-                <a:solidFill>
-                  <a:srgbClr val="0F5132"/>
-                </a:solidFill>
-                <a:latin typeface="Calibri" pitchFamily="34" charset="0"/>
-                <a:ea typeface="Calibri" pitchFamily="34" charset="-122"/>
-                <a:cs typeface="Calibri" pitchFamily="34" charset="-120"/>
-              </a:rPr>
-              <a:t>Testing</a:t>
-            </a:r>
-            <a:endParaRPr lang="en-US" sz="1450" dirty="0"/>
-          </a:p>
-        </p:txBody>
-      </p:sp>
-      <p:sp>
-        <p:nvSpPr>
-          <p:cNvPr id="27" name="Text 25"/>
-          <p:cNvSpPr txBox="1"/>
-          <p:nvPr/>
-        </p:nvSpPr>
-        <p:spPr>
-          <a:xfrm>
-            <a:off x="8119872" y="4992624"/>
-            <a:ext cx="3236976" cy="493776"/>
-          </a:xfrm>
-          <a:prstGeom prst="rect">
-            <a:avLst/>
-          </a:prstGeom>
-          <a:noFill/>
-          <a:ln/>
-        </p:spPr>
-        <p:txBody>
-          <a:bodyPr wrap="square" lIns="0" tIns="0" rIns="0" bIns="0" rtlCol="0" anchor="t"/>
-          <a:lstStyle/>
-          <a:p>
-            <a:pPr marL="342900" indent="-342900">
-              <a:spcAft>
-                <a:spcPts val="500"/>
-              </a:spcAft>
-              <a:buSzPct val="100000"/>
-              <a:buChar char="•"/>
-            </a:pPr>
-            <a:r>
-              <a:rPr lang="en-US" sz="1250" dirty="0">
-                <a:solidFill>
-                  <a:srgbClr val="16211C"/>
-                </a:solidFill>
-                <a:latin typeface="Calibri" pitchFamily="34" charset="0"/>
-                <a:ea typeface="Calibri" pitchFamily="34" charset="-122"/>
-                <a:cs typeface="Calibri" pitchFamily="34" charset="-120"/>
-              </a:rPr>
-              <a:t>Playwright · Git</a:t>
-            </a:r>
-            <a:endParaRPr lang="en-US" sz="1250" dirty="0"/>
+          <p:cNvPr id="39" name="Text 37"/>
+          <p:cNvSpPr txBox="1"/>
+          <p:nvPr/>
+        </p:nvSpPr>
+        <p:spPr>
+          <a:xfrm>
+            <a:off x="841248" y="5559552"/>
+            <a:ext cx="1280160" cy="237744"/>
+          </a:xfrm>
+          <a:prstGeom prst="rect">
+            <a:avLst/>
+          </a:prstGeom>
+          <a:noFill/>
+          <a:ln/>
+        </p:spPr>
+        <p:txBody>
+          <a:bodyPr wrap="square" lIns="0" tIns="0" rIns="0" bIns="0" rtlCol="0" anchor="ctr"/>
+          <a:lstStyle/>
+          <a:p>
+            <a:pPr indent="0" marL="0">
+              <a:buNone/>
+            </a:pPr>
+            <a:r>
+              <a:rPr lang="en-US" sz="1000" b="1" spc="120" kern="0" dirty="0">
+                <a:solidFill>
+                  <a:srgbClr val="C08A2E"/>
+                </a:solidFill>
+                <a:latin typeface="Calibri" pitchFamily="34" charset="0"/>
+                <a:ea typeface="Calibri" pitchFamily="34" charset="-122"/>
+                <a:cs typeface="Calibri" pitchFamily="34" charset="-120"/>
+              </a:rPr>
+              <a:t>BASED ON</a:t>
+            </a:r>
+            <a:endParaRPr lang="en-US" sz="1000" dirty="0"/>
+          </a:p>
+        </p:txBody>
+      </p:sp>
+      <p:sp>
+        <p:nvSpPr>
+          <p:cNvPr id="40" name="Text 38"/>
+          <p:cNvSpPr txBox="1"/>
+          <p:nvPr/>
+        </p:nvSpPr>
+        <p:spPr>
+          <a:xfrm>
+            <a:off x="841248" y="5797296"/>
+            <a:ext cx="10479024" cy="566928"/>
+          </a:xfrm>
+          <a:prstGeom prst="rect">
+            <a:avLst/>
+          </a:prstGeom>
+          <a:noFill/>
+          <a:ln/>
+        </p:spPr>
+        <p:txBody>
+          <a:bodyPr wrap="square" lIns="0" tIns="0" rIns="0" bIns="0" rtlCol="0" anchor="ctr"/>
+          <a:lstStyle/>
+          <a:p>
+            <a:pPr indent="0" marL="0">
+              <a:lnSpc>
+                <a:spcPct val="120000"/>
+              </a:lnSpc>
+              <a:buNone/>
+            </a:pPr>
+            <a:r>
+              <a:rPr lang="en-US" sz="1050" dirty="0">
+                <a:solidFill>
+                  <a:srgbClr val="FFFFFF"/>
+                </a:solidFill>
+                <a:latin typeface="Calibri" pitchFamily="34" charset="0"/>
+                <a:ea typeface="Calibri" pitchFamily="34" charset="-122"/>
+                <a:cs typeface="Calibri" pitchFamily="34" charset="-120"/>
+              </a:rPr>
+              <a:t>K. Schwaber and J. Sutherland, The 2020 Scrum Guide   ·   K. Beck et al., Manifesto for Agile Software Development, 2001</a:t>
+            </a:r>
+            <a:endParaRPr lang="en-US" sz="1050" dirty="0"/>
+          </a:p>
+          <a:p>
+            <a:pPr indent="0" marL="0">
+              <a:lnSpc>
+                <a:spcPct val="120000"/>
+              </a:lnSpc>
+              <a:buNone/>
+            </a:pPr>
+            <a:r>
+              <a:rPr lang="en-US" sz="1050" dirty="0">
+                <a:solidFill>
+                  <a:srgbClr val="FFFFFF"/>
+                </a:solidFill>
+                <a:latin typeface="Calibri" pitchFamily="34" charset="0"/>
+                <a:ea typeface="Calibri" pitchFamily="34" charset="-122"/>
+                <a:cs typeface="Calibri" pitchFamily="34" charset="-120"/>
+              </a:rPr>
+              <a:t>I. Sommerville, Software Engineering, 10th ed., Pearson, 2016   ·   R. S. Pressman and B. R. Maxim, Software Engineering: A Practitioner’s Approach, 9th ed., McGraw-Hill, 2020</a:t>
+            </a:r>
+            <a:endParaRPr lang="en-US" sz="1050" dirty="0"/>
           </a:p>
         </p:txBody>
       </p:sp>
@@ -7138,7 +8614,7 @@
                 <a:ea typeface="Cambria" pitchFamily="34" charset="-122"/>
                 <a:cs typeface="Cambria" pitchFamily="34" charset="-120"/>
               </a:rPr>
-              <a:t>Key System Functionality</a:t>
+              <a:t>System Architecture</a:t>
             </a:r>
             <a:endParaRPr lang="en-US" sz="3100" dirty="0"/>
           </a:p>
@@ -7177,7 +8653,7 @@
                 <a:ea typeface="Calibri" pitchFamily="34" charset="-122"/>
                 <a:cs typeface="Calibri" pitchFamily="34" charset="-120"/>
               </a:rPr>
-              <a:t>Both sides, in one system</a:t>
+              <a:t>What happens when someone opens a page</a:t>
             </a:r>
             <a:endParaRPr lang="en-US" sz="1250" dirty="0"/>
           </a:p>
@@ -7185,42 +8661,30 @@
       </p:sp>
       <p:sp>
         <p:nvSpPr>
-          <p:cNvPr id="4" name="Text 2"/>
-          <p:cNvSpPr txBox="1"/>
-          <p:nvPr/>
-        </p:nvSpPr>
-        <p:spPr>
-          <a:xfrm>
-            <a:off x="566928" y="1517904"/>
-            <a:ext cx="5513832" cy="292608"/>
-          </a:xfrm>
-          <a:prstGeom prst="rect">
-            <a:avLst/>
-          </a:prstGeom>
-          <a:noFill/>
-          <a:ln/>
-        </p:spPr>
-        <p:txBody>
-          <a:bodyPr wrap="square" lIns="0" tIns="0" rIns="0" bIns="0" rtlCol="0" anchor="ctr"/>
-          <a:lstStyle/>
-          <a:p>
-            <a:pPr indent="0" marL="0">
-              <a:buNone/>
-            </a:pPr>
-            <a:r>
-              <a:rPr lang="en-US" sz="1200" b="1" spc="120" kern="0" dirty="0">
-                <a:solidFill>
-                  <a:srgbClr val="5E6B64"/>
-                </a:solidFill>
-                <a:latin typeface="Calibri" pitchFamily="34" charset="0"/>
-                <a:ea typeface="Calibri" pitchFamily="34" charset="-122"/>
-                <a:cs typeface="Calibri" pitchFamily="34" charset="-120"/>
-              </a:rPr>
-              <a:t>THE STUDENT SIDE</a:t>
-            </a:r>
-            <a:endParaRPr lang="en-US" sz="1200" dirty="0"/>
-          </a:p>
-        </p:txBody>
+          <p:cNvPr id="4" name="Shape 2"/>
+          <p:cNvSpPr/>
+          <p:nvPr/>
+        </p:nvSpPr>
+        <p:spPr>
+          <a:xfrm>
+            <a:off x="566928" y="1572768"/>
+            <a:ext cx="2468880" cy="1225296"/>
+          </a:xfrm>
+          <a:prstGeom prst="roundRect">
+            <a:avLst>
+              <a:gd name="adj" fmla="val 5970"/>
+            </a:avLst>
+          </a:prstGeom>
+          <a:solidFill>
+            <a:srgbClr val="EDF3EF"/>
+          </a:solidFill>
+          <a:ln w="12700">
+            <a:solidFill>
+              <a:srgbClr val="EDF3EF"/>
+            </a:solidFill>
+            <a:prstDash val="solid"/>
+          </a:ln>
+        </p:spPr>
       </p:sp>
       <p:sp>
         <p:nvSpPr>
@@ -7230,7 +8694,7 @@
         </p:nvSpPr>
         <p:spPr>
           <a:xfrm>
-            <a:off x="566928" y="1956816"/>
+            <a:off x="731520" y="1737360"/>
             <a:ext cx="274320" cy="274320"/>
           </a:xfrm>
           <a:prstGeom prst="ellipse">
@@ -7253,7 +8717,7 @@
               <a:buNone/>
             </a:pPr>
             <a:r>
-              <a:rPr lang="en-US" sz="1200" b="1" dirty="0">
+              <a:rPr lang="en-US" sz="1100" b="1" dirty="0">
                 <a:solidFill>
                   <a:srgbClr val="FFFFFF"/>
                 </a:solidFill>
@@ -7263,7 +8727,7 @@
               </a:rPr>
               <a:t>1</a:t>
             </a:r>
-            <a:endParaRPr lang="en-US" sz="1200" dirty="0"/>
+            <a:endParaRPr lang="en-US" sz="1100" dirty="0"/>
           </a:p>
         </p:txBody>
       </p:sp>
@@ -7275,24 +8739,24 @@
         </p:nvSpPr>
         <p:spPr>
           <a:xfrm>
-            <a:off x="969264" y="1938528"/>
-            <a:ext cx="5111496" cy="256032"/>
-          </a:xfrm>
-          <a:prstGeom prst="rect">
-            <a:avLst/>
-          </a:prstGeom>
-          <a:noFill/>
-          <a:ln/>
-        </p:spPr>
-        <p:txBody>
-          <a:bodyPr wrap="square" lIns="0" tIns="0" rIns="0" bIns="0" rtlCol="0" anchor="ctr"/>
-          <a:lstStyle/>
-          <a:p>
-            <a:pPr indent="0" marL="0">
-              <a:buNone/>
-            </a:pPr>
-            <a:r>
-              <a:rPr lang="en-US" sz="1300" b="1" dirty="0">
+            <a:off x="1078992" y="1719072"/>
+            <a:ext cx="1792224" cy="310896"/>
+          </a:xfrm>
+          <a:prstGeom prst="rect">
+            <a:avLst/>
+          </a:prstGeom>
+          <a:noFill/>
+          <a:ln/>
+        </p:spPr>
+        <p:txBody>
+          <a:bodyPr wrap="square" lIns="0" tIns="0" rIns="0" bIns="0" rtlCol="0" anchor="ctr"/>
+          <a:lstStyle/>
+          <a:p>
+            <a:pPr indent="0" marL="0">
+              <a:buNone/>
+            </a:pPr>
+            <a:r>
+              <a:rPr lang="en-US" sz="1400" b="1" dirty="0">
                 <a:solidFill>
                   <a:srgbClr val="0F5132"/>
                 </a:solidFill>
@@ -7300,9 +8764,9 @@
                 <a:ea typeface="Calibri" pitchFamily="34" charset="-122"/>
                 <a:cs typeface="Calibri" pitchFamily="34" charset="-120"/>
               </a:rPr>
-              <a:t>Account and profile</a:t>
-            </a:r>
-            <a:endParaRPr lang="en-US" sz="1300" dirty="0"/>
+              <a:t>Web browser</a:t>
+            </a:r>
+            <a:endParaRPr lang="en-US" sz="1400" dirty="0"/>
           </a:p>
         </p:txBody>
       </p:sp>
@@ -7314,8 +8778,8 @@
         </p:nvSpPr>
         <p:spPr>
           <a:xfrm>
-            <a:off x="969264" y="2194560"/>
-            <a:ext cx="5111496" cy="420624"/>
+            <a:off x="731520" y="2103120"/>
+            <a:ext cx="2139696" cy="548640"/>
           </a:xfrm>
           <a:prstGeom prst="rect">
             <a:avLst/>
@@ -7329,7 +8793,7 @@
           <a:p>
             <a:pPr indent="0" marL="0">
               <a:lnSpc>
-                <a:spcPct val="110000"/>
+                <a:spcPct val="112000"/>
               </a:lnSpc>
               <a:buNone/>
             </a:pPr>
@@ -7342,7 +8806,7 @@
                 <a:ea typeface="Calibri" pitchFamily="34" charset="-122"/>
                 <a:cs typeface="Calibri" pitchFamily="34" charset="-120"/>
               </a:rPr>
-              <a:t>Personal details, marks, subjects and family income</a:t>
+              <a:t>A student or a company</a:t>
             </a:r>
             <a:endParaRPr lang="en-US" sz="1150" dirty="0"/>
           </a:p>
@@ -7350,13 +8814,243 @@
       </p:sp>
       <p:sp>
         <p:nvSpPr>
-          <p:cNvPr id="8" name="Text 6"/>
-          <p:cNvSpPr txBox="1"/>
-          <p:nvPr/>
-        </p:nvSpPr>
-        <p:spPr>
-          <a:xfrm>
-            <a:off x="566928" y="2715768"/>
+          <p:cNvPr id="8" name="Shape 6"/>
+          <p:cNvSpPr/>
+          <p:nvPr/>
+        </p:nvSpPr>
+        <p:spPr>
+          <a:xfrm>
+            <a:off x="3108960" y="2093976"/>
+            <a:ext cx="237744" cy="182880"/>
+          </a:xfrm>
+          <a:prstGeom prst="rightArrow">
+            <a:avLst/>
+          </a:prstGeom>
+          <a:solidFill>
+            <a:srgbClr val="9DBFA8"/>
+          </a:solidFill>
+          <a:ln w="12700">
+            <a:solidFill>
+              <a:srgbClr val="9DBFA8"/>
+            </a:solidFill>
+            <a:prstDash val="solid"/>
+          </a:ln>
+        </p:spPr>
+      </p:sp>
+      <p:sp>
+        <p:nvSpPr>
+          <p:cNvPr id="9" name="Shape 7"/>
+          <p:cNvSpPr/>
+          <p:nvPr/>
+        </p:nvSpPr>
+        <p:spPr>
+          <a:xfrm>
+            <a:off x="3419856" y="1572768"/>
+            <a:ext cx="2468880" cy="1225296"/>
+          </a:xfrm>
+          <a:prstGeom prst="roundRect">
+            <a:avLst>
+              <a:gd name="adj" fmla="val 5970"/>
+            </a:avLst>
+          </a:prstGeom>
+          <a:solidFill>
+            <a:srgbClr val="0F5132"/>
+          </a:solidFill>
+          <a:ln w="12700">
+            <a:solidFill>
+              <a:srgbClr val="0F5132"/>
+            </a:solidFill>
+            <a:prstDash val="solid"/>
+          </a:ln>
+        </p:spPr>
+      </p:sp>
+      <p:sp>
+        <p:nvSpPr>
+          <p:cNvPr id="10" name="Text 8"/>
+          <p:cNvSpPr txBox="1"/>
+          <p:nvPr/>
+        </p:nvSpPr>
+        <p:spPr>
+          <a:xfrm>
+            <a:off x="3584448" y="1737360"/>
+            <a:ext cx="274320" cy="274320"/>
+          </a:xfrm>
+          <a:prstGeom prst="ellipse">
+            <a:avLst/>
+          </a:prstGeom>
+          <a:solidFill>
+            <a:srgbClr val="FFFFFF"/>
+          </a:solidFill>
+          <a:ln>
+            <a:solidFill>
+              <a:srgbClr val="FFFFFF"/>
+            </a:solidFill>
+          </a:ln>
+        </p:spPr>
+        <p:txBody>
+          <a:bodyPr wrap="square" lIns="0" tIns="0" rIns="0" bIns="0" rtlCol="0" anchor="ctr"/>
+          <a:lstStyle/>
+          <a:p>
+            <a:pPr algn="ctr" indent="0" marL="0">
+              <a:buNone/>
+            </a:pPr>
+            <a:r>
+              <a:rPr lang="en-US" sz="1100" b="1" dirty="0">
+                <a:solidFill>
+                  <a:srgbClr val="0F5132"/>
+                </a:solidFill>
+                <a:latin typeface="Calibri" pitchFamily="34" charset="0"/>
+                <a:ea typeface="Calibri" pitchFamily="34" charset="-122"/>
+                <a:cs typeface="Calibri" pitchFamily="34" charset="-120"/>
+              </a:rPr>
+              <a:t>2</a:t>
+            </a:r>
+            <a:endParaRPr lang="en-US" sz="1100" dirty="0"/>
+          </a:p>
+        </p:txBody>
+      </p:sp>
+      <p:sp>
+        <p:nvSpPr>
+          <p:cNvPr id="11" name="Text 9"/>
+          <p:cNvSpPr txBox="1"/>
+          <p:nvPr/>
+        </p:nvSpPr>
+        <p:spPr>
+          <a:xfrm>
+            <a:off x="3931920" y="1719072"/>
+            <a:ext cx="1792224" cy="310896"/>
+          </a:xfrm>
+          <a:prstGeom prst="rect">
+            <a:avLst/>
+          </a:prstGeom>
+          <a:noFill/>
+          <a:ln/>
+        </p:spPr>
+        <p:txBody>
+          <a:bodyPr wrap="square" lIns="0" tIns="0" rIns="0" bIns="0" rtlCol="0" anchor="ctr"/>
+          <a:lstStyle/>
+          <a:p>
+            <a:pPr indent="0" marL="0">
+              <a:buNone/>
+            </a:pPr>
+            <a:r>
+              <a:rPr lang="en-US" sz="1400" b="1" dirty="0">
+                <a:solidFill>
+                  <a:srgbClr val="FFFFFF"/>
+                </a:solidFill>
+                <a:latin typeface="Calibri" pitchFamily="34" charset="0"/>
+                <a:ea typeface="Calibri" pitchFamily="34" charset="-122"/>
+                <a:cs typeface="Calibri" pitchFamily="34" charset="-120"/>
+              </a:rPr>
+              <a:t>Security check</a:t>
+            </a:r>
+            <a:endParaRPr lang="en-US" sz="1400" dirty="0"/>
+          </a:p>
+        </p:txBody>
+      </p:sp>
+      <p:sp>
+        <p:nvSpPr>
+          <p:cNvPr id="12" name="Text 10"/>
+          <p:cNvSpPr txBox="1"/>
+          <p:nvPr/>
+        </p:nvSpPr>
+        <p:spPr>
+          <a:xfrm>
+            <a:off x="3584448" y="2103120"/>
+            <a:ext cx="2139696" cy="548640"/>
+          </a:xfrm>
+          <a:prstGeom prst="rect">
+            <a:avLst/>
+          </a:prstGeom>
+          <a:noFill/>
+          <a:ln/>
+        </p:spPr>
+        <p:txBody>
+          <a:bodyPr wrap="square" lIns="0" tIns="0" rIns="0" bIns="0" rtlCol="0" anchor="ctr"/>
+          <a:lstStyle/>
+          <a:p>
+            <a:pPr indent="0" marL="0">
+              <a:lnSpc>
+                <a:spcPct val="112000"/>
+              </a:lnSpc>
+              <a:buNone/>
+            </a:pPr>
+            <a:r>
+              <a:rPr lang="en-US" sz="1150" dirty="0">
+                <a:solidFill>
+                  <a:srgbClr val="9DBFA8"/>
+                </a:solidFill>
+                <a:latin typeface="Calibri" pitchFamily="34" charset="0"/>
+                <a:ea typeface="Calibri" pitchFamily="34" charset="-122"/>
+                <a:cs typeface="Calibri" pitchFamily="34" charset="-120"/>
+              </a:rPr>
+              <a:t>Who are you, and what may you see?</a:t>
+            </a:r>
+            <a:endParaRPr lang="en-US" sz="1150" dirty="0"/>
+          </a:p>
+        </p:txBody>
+      </p:sp>
+      <p:sp>
+        <p:nvSpPr>
+          <p:cNvPr id="13" name="Shape 11"/>
+          <p:cNvSpPr/>
+          <p:nvPr/>
+        </p:nvSpPr>
+        <p:spPr>
+          <a:xfrm>
+            <a:off x="5961888" y="2093976"/>
+            <a:ext cx="237744" cy="182880"/>
+          </a:xfrm>
+          <a:prstGeom prst="rightArrow">
+            <a:avLst/>
+          </a:prstGeom>
+          <a:solidFill>
+            <a:srgbClr val="9DBFA8"/>
+          </a:solidFill>
+          <a:ln w="12700">
+            <a:solidFill>
+              <a:srgbClr val="9DBFA8"/>
+            </a:solidFill>
+            <a:prstDash val="solid"/>
+          </a:ln>
+        </p:spPr>
+      </p:sp>
+      <p:sp>
+        <p:nvSpPr>
+          <p:cNvPr id="14" name="Shape 12"/>
+          <p:cNvSpPr/>
+          <p:nvPr/>
+        </p:nvSpPr>
+        <p:spPr>
+          <a:xfrm>
+            <a:off x="6272784" y="1572768"/>
+            <a:ext cx="2468880" cy="1225296"/>
+          </a:xfrm>
+          <a:prstGeom prst="roundRect">
+            <a:avLst>
+              <a:gd name="adj" fmla="val 5970"/>
+            </a:avLst>
+          </a:prstGeom>
+          <a:solidFill>
+            <a:srgbClr val="EDF3EF"/>
+          </a:solidFill>
+          <a:ln w="12700">
+            <a:solidFill>
+              <a:srgbClr val="EDF3EF"/>
+            </a:solidFill>
+            <a:prstDash val="solid"/>
+          </a:ln>
+        </p:spPr>
+      </p:sp>
+      <p:sp>
+        <p:nvSpPr>
+          <p:cNvPr id="15" name="Text 13"/>
+          <p:cNvSpPr txBox="1"/>
+          <p:nvPr/>
+        </p:nvSpPr>
+        <p:spPr>
+          <a:xfrm>
+            <a:off x="6437376" y="1737360"/>
             <a:ext cx="274320" cy="274320"/>
           </a:xfrm>
           <a:prstGeom prst="ellipse">
@@ -7379,7 +9073,7 @@
               <a:buNone/>
             </a:pPr>
             <a:r>
-              <a:rPr lang="en-US" sz="1200" b="1" dirty="0">
+              <a:rPr lang="en-US" sz="1100" b="1" dirty="0">
                 <a:solidFill>
                   <a:srgbClr val="FFFFFF"/>
                 </a:solidFill>
@@ -7387,38 +9081,38 @@
                 <a:ea typeface="Calibri" pitchFamily="34" charset="-122"/>
                 <a:cs typeface="Calibri" pitchFamily="34" charset="-120"/>
               </a:rPr>
-              <a:t>2</a:t>
-            </a:r>
-            <a:endParaRPr lang="en-US" sz="1200" dirty="0"/>
-          </a:p>
-        </p:txBody>
-      </p:sp>
-      <p:sp>
-        <p:nvSpPr>
-          <p:cNvPr id="9" name="Text 7"/>
-          <p:cNvSpPr txBox="1"/>
-          <p:nvPr/>
-        </p:nvSpPr>
-        <p:spPr>
-          <a:xfrm>
-            <a:off x="969264" y="2697480"/>
-            <a:ext cx="5111496" cy="256032"/>
-          </a:xfrm>
-          <a:prstGeom prst="rect">
-            <a:avLst/>
-          </a:prstGeom>
-          <a:noFill/>
-          <a:ln/>
-        </p:spPr>
-        <p:txBody>
-          <a:bodyPr wrap="square" lIns="0" tIns="0" rIns="0" bIns="0" rtlCol="0" anchor="ctr"/>
-          <a:lstStyle/>
-          <a:p>
-            <a:pPr indent="0" marL="0">
-              <a:buNone/>
-            </a:pPr>
-            <a:r>
-              <a:rPr lang="en-US" sz="1300" b="1" dirty="0">
+              <a:t>3</a:t>
+            </a:r>
+            <a:endParaRPr lang="en-US" sz="1100" dirty="0"/>
+          </a:p>
+        </p:txBody>
+      </p:sp>
+      <p:sp>
+        <p:nvSpPr>
+          <p:cNvPr id="16" name="Text 14"/>
+          <p:cNvSpPr txBox="1"/>
+          <p:nvPr/>
+        </p:nvSpPr>
+        <p:spPr>
+          <a:xfrm>
+            <a:off x="6784848" y="1719072"/>
+            <a:ext cx="1792224" cy="310896"/>
+          </a:xfrm>
+          <a:prstGeom prst="rect">
+            <a:avLst/>
+          </a:prstGeom>
+          <a:noFill/>
+          <a:ln/>
+        </p:spPr>
+        <p:txBody>
+          <a:bodyPr wrap="square" lIns="0" tIns="0" rIns="0" bIns="0" rtlCol="0" anchor="ctr"/>
+          <a:lstStyle/>
+          <a:p>
+            <a:pPr indent="0" marL="0">
+              <a:buNone/>
+            </a:pPr>
+            <a:r>
+              <a:rPr lang="en-US" sz="1400" b="1" dirty="0">
                 <a:solidFill>
                   <a:srgbClr val="0F5132"/>
                 </a:solidFill>
@@ -7426,22 +9120,22 @@
                 <a:ea typeface="Calibri" pitchFamily="34" charset="-122"/>
                 <a:cs typeface="Calibri" pitchFamily="34" charset="-120"/>
               </a:rPr>
-              <a:t>List of all bursaries</a:t>
-            </a:r>
-            <a:endParaRPr lang="en-US" sz="1300" dirty="0"/>
-          </a:p>
-        </p:txBody>
-      </p:sp>
-      <p:sp>
-        <p:nvSpPr>
-          <p:cNvPr id="10" name="Text 8"/>
-          <p:cNvSpPr txBox="1"/>
-          <p:nvPr/>
-        </p:nvSpPr>
-        <p:spPr>
-          <a:xfrm>
-            <a:off x="969264" y="2953512"/>
-            <a:ext cx="5111496" cy="420624"/>
+              <a:t>Working parts</a:t>
+            </a:r>
+            <a:endParaRPr lang="en-US" sz="1400" dirty="0"/>
+          </a:p>
+        </p:txBody>
+      </p:sp>
+      <p:sp>
+        <p:nvSpPr>
+          <p:cNvPr id="17" name="Text 15"/>
+          <p:cNvSpPr txBox="1"/>
+          <p:nvPr/>
+        </p:nvSpPr>
+        <p:spPr>
+          <a:xfrm>
+            <a:off x="6437376" y="2103120"/>
+            <a:ext cx="2139696" cy="548640"/>
           </a:xfrm>
           <a:prstGeom prst="rect">
             <a:avLst/>
@@ -7455,7 +9149,7 @@
           <a:p>
             <a:pPr indent="0" marL="0">
               <a:lnSpc>
-                <a:spcPct val="110000"/>
+                <a:spcPct val="112000"/>
               </a:lnSpc>
               <a:buNone/>
             </a:pPr>
@@ -7468,7 +9162,7 @@
                 <a:ea typeface="Calibri" pitchFamily="34" charset="-122"/>
                 <a:cs typeface="Calibri" pitchFamily="34" charset="-120"/>
               </a:rPr>
-              <a:t>Every bursary we hold, each showing where it came from</a:t>
+              <a:t>Fetches and saves the right data</a:t>
             </a:r>
             <a:endParaRPr lang="en-US" sz="1150" dirty="0"/>
           </a:p>
@@ -7476,13 +9170,65 @@
       </p:sp>
       <p:sp>
         <p:nvSpPr>
-          <p:cNvPr id="11" name="Text 9"/>
-          <p:cNvSpPr txBox="1"/>
-          <p:nvPr/>
-        </p:nvSpPr>
-        <p:spPr>
-          <a:xfrm>
-            <a:off x="566928" y="3474720"/>
+          <p:cNvPr id="18" name="Shape 16"/>
+          <p:cNvSpPr/>
+          <p:nvPr/>
+        </p:nvSpPr>
+        <p:spPr>
+          <a:xfrm>
+            <a:off x="8814816" y="2093976"/>
+            <a:ext cx="237744" cy="182880"/>
+          </a:xfrm>
+          <a:prstGeom prst="rightArrow">
+            <a:avLst/>
+          </a:prstGeom>
+          <a:solidFill>
+            <a:srgbClr val="9DBFA8"/>
+          </a:solidFill>
+          <a:ln w="12700">
+            <a:solidFill>
+              <a:srgbClr val="9DBFA8"/>
+            </a:solidFill>
+            <a:prstDash val="solid"/>
+          </a:ln>
+        </p:spPr>
+      </p:sp>
+      <p:sp>
+        <p:nvSpPr>
+          <p:cNvPr id="19" name="Shape 17"/>
+          <p:cNvSpPr/>
+          <p:nvPr/>
+        </p:nvSpPr>
+        <p:spPr>
+          <a:xfrm>
+            <a:off x="9125712" y="1572768"/>
+            <a:ext cx="2468880" cy="1225296"/>
+          </a:xfrm>
+          <a:prstGeom prst="roundRect">
+            <a:avLst>
+              <a:gd name="adj" fmla="val 5970"/>
+            </a:avLst>
+          </a:prstGeom>
+          <a:solidFill>
+            <a:srgbClr val="EDF3EF"/>
+          </a:solidFill>
+          <a:ln w="12700">
+            <a:solidFill>
+              <a:srgbClr val="EDF3EF"/>
+            </a:solidFill>
+            <a:prstDash val="solid"/>
+          </a:ln>
+        </p:spPr>
+      </p:sp>
+      <p:sp>
+        <p:nvSpPr>
+          <p:cNvPr id="20" name="Text 18"/>
+          <p:cNvSpPr txBox="1"/>
+          <p:nvPr/>
+        </p:nvSpPr>
+        <p:spPr>
+          <a:xfrm>
+            <a:off x="9290304" y="1737360"/>
             <a:ext cx="274320" cy="274320"/>
           </a:xfrm>
           <a:prstGeom prst="ellipse">
@@ -7505,7 +9251,7 @@
               <a:buNone/>
             </a:pPr>
             <a:r>
-              <a:rPr lang="en-US" sz="1200" b="1" dirty="0">
+              <a:rPr lang="en-US" sz="1100" b="1" dirty="0">
                 <a:solidFill>
                   <a:srgbClr val="FFFFFF"/>
                 </a:solidFill>
@@ -7513,38 +9259,38 @@
                 <a:ea typeface="Calibri" pitchFamily="34" charset="-122"/>
                 <a:cs typeface="Calibri" pitchFamily="34" charset="-120"/>
               </a:rPr>
-              <a:t>3</a:t>
-            </a:r>
-            <a:endParaRPr lang="en-US" sz="1200" dirty="0"/>
-          </a:p>
-        </p:txBody>
-      </p:sp>
-      <p:sp>
-        <p:nvSpPr>
-          <p:cNvPr id="12" name="Text 10"/>
-          <p:cNvSpPr txBox="1"/>
-          <p:nvPr/>
-        </p:nvSpPr>
-        <p:spPr>
-          <a:xfrm>
-            <a:off x="969264" y="3456432"/>
-            <a:ext cx="5111496" cy="256032"/>
-          </a:xfrm>
-          <a:prstGeom prst="rect">
-            <a:avLst/>
-          </a:prstGeom>
-          <a:noFill/>
-          <a:ln/>
-        </p:spPr>
-        <p:txBody>
-          <a:bodyPr wrap="square" lIns="0" tIns="0" rIns="0" bIns="0" rtlCol="0" anchor="ctr"/>
-          <a:lstStyle/>
-          <a:p>
-            <a:pPr indent="0" marL="0">
-              <a:buNone/>
-            </a:pPr>
-            <a:r>
-              <a:rPr lang="en-US" sz="1300" b="1" dirty="0">
+              <a:t>4</a:t>
+            </a:r>
+            <a:endParaRPr lang="en-US" sz="1100" dirty="0"/>
+          </a:p>
+        </p:txBody>
+      </p:sp>
+      <p:sp>
+        <p:nvSpPr>
+          <p:cNvPr id="21" name="Text 19"/>
+          <p:cNvSpPr txBox="1"/>
+          <p:nvPr/>
+        </p:nvSpPr>
+        <p:spPr>
+          <a:xfrm>
+            <a:off x="9637776" y="1719072"/>
+            <a:ext cx="1792224" cy="310896"/>
+          </a:xfrm>
+          <a:prstGeom prst="rect">
+            <a:avLst/>
+          </a:prstGeom>
+          <a:noFill/>
+          <a:ln/>
+        </p:spPr>
+        <p:txBody>
+          <a:bodyPr wrap="square" lIns="0" tIns="0" rIns="0" bIns="0" rtlCol="0" anchor="ctr"/>
+          <a:lstStyle/>
+          <a:p>
+            <a:pPr indent="0" marL="0">
+              <a:buNone/>
+            </a:pPr>
+            <a:r>
+              <a:rPr lang="en-US" sz="1400" b="1" dirty="0">
                 <a:solidFill>
                   <a:srgbClr val="0F5132"/>
                 </a:solidFill>
@@ -7552,22 +9298,408 @@
                 <a:ea typeface="Calibri" pitchFamily="34" charset="-122"/>
                 <a:cs typeface="Calibri" pitchFamily="34" charset="-120"/>
               </a:rPr>
-              <a:t>Matching</a:t>
-            </a:r>
-            <a:endParaRPr lang="en-US" sz="1300" dirty="0"/>
-          </a:p>
-        </p:txBody>
-      </p:sp>
-      <p:sp>
-        <p:nvSpPr>
-          <p:cNvPr id="13" name="Text 11"/>
-          <p:cNvSpPr txBox="1"/>
-          <p:nvPr/>
-        </p:nvSpPr>
-        <p:spPr>
-          <a:xfrm>
-            <a:off x="969264" y="3712464"/>
-            <a:ext cx="5111496" cy="420624"/>
+              <a:t>Database</a:t>
+            </a:r>
+            <a:endParaRPr lang="en-US" sz="1400" dirty="0"/>
+          </a:p>
+        </p:txBody>
+      </p:sp>
+      <p:sp>
+        <p:nvSpPr>
+          <p:cNvPr id="22" name="Text 20"/>
+          <p:cNvSpPr txBox="1"/>
+          <p:nvPr/>
+        </p:nvSpPr>
+        <p:spPr>
+          <a:xfrm>
+            <a:off x="9290304" y="2103120"/>
+            <a:ext cx="2139696" cy="548640"/>
+          </a:xfrm>
+          <a:prstGeom prst="rect">
+            <a:avLst/>
+          </a:prstGeom>
+          <a:noFill/>
+          <a:ln/>
+        </p:spPr>
+        <p:txBody>
+          <a:bodyPr wrap="square" lIns="0" tIns="0" rIns="0" bIns="0" rtlCol="0" anchor="ctr"/>
+          <a:lstStyle/>
+          <a:p>
+            <a:pPr indent="0" marL="0">
+              <a:lnSpc>
+                <a:spcPct val="112000"/>
+              </a:lnSpc>
+              <a:buNone/>
+            </a:pPr>
+            <a:r>
+              <a:rPr lang="en-US" sz="1150" dirty="0">
+                <a:solidFill>
+                  <a:srgbClr val="5E6B64"/>
+                </a:solidFill>
+                <a:latin typeface="Calibri" pitchFamily="34" charset="0"/>
+                <a:ea typeface="Calibri" pitchFamily="34" charset="-122"/>
+                <a:cs typeface="Calibri" pitchFamily="34" charset="-120"/>
+              </a:rPr>
+              <a:t>PostgreSQL  ·  Prisma</a:t>
+            </a:r>
+            <a:endParaRPr lang="en-US" sz="1150" dirty="0"/>
+          </a:p>
+        </p:txBody>
+      </p:sp>
+      <p:sp>
+        <p:nvSpPr>
+          <p:cNvPr id="23" name="Shape 21"/>
+          <p:cNvSpPr/>
+          <p:nvPr/>
+        </p:nvSpPr>
+        <p:spPr>
+          <a:xfrm>
+            <a:off x="7406640" y="2834640"/>
+            <a:ext cx="201168" cy="201168"/>
+          </a:xfrm>
+          <a:prstGeom prst="downArrow">
+            <a:avLst/>
+          </a:prstGeom>
+          <a:solidFill>
+            <a:srgbClr val="9DBFA8"/>
+          </a:solidFill>
+          <a:ln w="12700">
+            <a:solidFill>
+              <a:srgbClr val="9DBFA8"/>
+            </a:solidFill>
+            <a:prstDash val="solid"/>
+          </a:ln>
+        </p:spPr>
+      </p:sp>
+      <p:sp>
+        <p:nvSpPr>
+          <p:cNvPr id="24" name="Shape 22"/>
+          <p:cNvSpPr/>
+          <p:nvPr/>
+        </p:nvSpPr>
+        <p:spPr>
+          <a:xfrm>
+            <a:off x="5175504" y="3163824"/>
+            <a:ext cx="4663440" cy="1060704"/>
+          </a:xfrm>
+          <a:prstGeom prst="roundRect">
+            <a:avLst>
+              <a:gd name="adj" fmla="val 6897"/>
+            </a:avLst>
+          </a:prstGeom>
+          <a:solidFill>
+            <a:srgbClr val="C08A2E"/>
+          </a:solidFill>
+          <a:ln w="12700">
+            <a:solidFill>
+              <a:srgbClr val="C08A2E"/>
+            </a:solidFill>
+            <a:prstDash val="solid"/>
+          </a:ln>
+        </p:spPr>
+      </p:sp>
+      <p:sp>
+        <p:nvSpPr>
+          <p:cNvPr id="25" name="Text 23"/>
+          <p:cNvSpPr txBox="1"/>
+          <p:nvPr/>
+        </p:nvSpPr>
+        <p:spPr>
+          <a:xfrm>
+            <a:off x="5358384" y="3291840"/>
+            <a:ext cx="4297680" cy="292608"/>
+          </a:xfrm>
+          <a:prstGeom prst="rect">
+            <a:avLst/>
+          </a:prstGeom>
+          <a:noFill/>
+          <a:ln/>
+        </p:spPr>
+        <p:txBody>
+          <a:bodyPr wrap="square" lIns="0" tIns="0" rIns="0" bIns="0" rtlCol="0" anchor="ctr"/>
+          <a:lstStyle/>
+          <a:p>
+            <a:pPr indent="0" marL="0">
+              <a:buNone/>
+            </a:pPr>
+            <a:r>
+              <a:rPr lang="en-US" sz="1400" b="1" dirty="0">
+                <a:solidFill>
+                  <a:srgbClr val="2A1D05"/>
+                </a:solidFill>
+                <a:latin typeface="Calibri" pitchFamily="34" charset="0"/>
+                <a:ea typeface="Calibri" pitchFamily="34" charset="-122"/>
+                <a:cs typeface="Calibri" pitchFamily="34" charset="-120"/>
+              </a:rPr>
+              <a:t>The matching rules</a:t>
+            </a:r>
+            <a:endParaRPr lang="en-US" sz="1400" dirty="0"/>
+          </a:p>
+        </p:txBody>
+      </p:sp>
+      <p:sp>
+        <p:nvSpPr>
+          <p:cNvPr id="26" name="Text 24"/>
+          <p:cNvSpPr txBox="1"/>
+          <p:nvPr/>
+        </p:nvSpPr>
+        <p:spPr>
+          <a:xfrm>
+            <a:off x="5358384" y="3602736"/>
+            <a:ext cx="4297680" cy="457200"/>
+          </a:xfrm>
+          <a:prstGeom prst="rect">
+            <a:avLst/>
+          </a:prstGeom>
+          <a:noFill/>
+          <a:ln/>
+        </p:spPr>
+        <p:txBody>
+          <a:bodyPr wrap="square" lIns="0" tIns="0" rIns="0" bIns="0" rtlCol="0" anchor="ctr"/>
+          <a:lstStyle/>
+          <a:p>
+            <a:pPr indent="0" marL="0">
+              <a:buNone/>
+            </a:pPr>
+            <a:r>
+              <a:rPr lang="en-US" sz="1150" dirty="0">
+                <a:solidFill>
+                  <a:srgbClr val="4A3510"/>
+                </a:solidFill>
+                <a:latin typeface="Calibri" pitchFamily="34" charset="0"/>
+                <a:ea typeface="Calibri" pitchFamily="34" charset="-122"/>
+                <a:cs typeface="Calibri" pitchFamily="34" charset="-120"/>
+              </a:rPr>
+              <a:t>Kept away from the database, so we can test them on their own</a:t>
+            </a:r>
+            <a:endParaRPr lang="en-US" sz="1150" dirty="0"/>
+          </a:p>
+        </p:txBody>
+      </p:sp>
+      <p:sp>
+        <p:nvSpPr>
+          <p:cNvPr id="27" name="Shape 25"/>
+          <p:cNvSpPr/>
+          <p:nvPr/>
+        </p:nvSpPr>
+        <p:spPr>
+          <a:xfrm>
+            <a:off x="566928" y="3163824"/>
+            <a:ext cx="3291840" cy="1060704"/>
+          </a:xfrm>
+          <a:prstGeom prst="roundRect">
+            <a:avLst>
+              <a:gd name="adj" fmla="val 7759"/>
+            </a:avLst>
+          </a:prstGeom>
+          <a:solidFill>
+            <a:srgbClr val="EDF3EF"/>
+          </a:solidFill>
+          <a:ln w="12700">
+            <a:solidFill>
+              <a:srgbClr val="EDF3EF"/>
+            </a:solidFill>
+            <a:prstDash val="solid"/>
+          </a:ln>
+        </p:spPr>
+      </p:sp>
+      <p:sp>
+        <p:nvSpPr>
+          <p:cNvPr id="28" name="Text 26"/>
+          <p:cNvSpPr txBox="1"/>
+          <p:nvPr/>
+        </p:nvSpPr>
+        <p:spPr>
+          <a:xfrm>
+            <a:off x="804672" y="3328416"/>
+            <a:ext cx="2816352" cy="310896"/>
+          </a:xfrm>
+          <a:prstGeom prst="rect">
+            <a:avLst/>
+          </a:prstGeom>
+          <a:noFill/>
+          <a:ln/>
+        </p:spPr>
+        <p:txBody>
+          <a:bodyPr wrap="square" lIns="0" tIns="0" rIns="0" bIns="0" rtlCol="0" anchor="ctr"/>
+          <a:lstStyle/>
+          <a:p>
+            <a:pPr indent="0" marL="0">
+              <a:buNone/>
+            </a:pPr>
+            <a:r>
+              <a:rPr lang="en-US" sz="1450" b="1" dirty="0">
+                <a:solidFill>
+                  <a:srgbClr val="0F5132"/>
+                </a:solidFill>
+                <a:latin typeface="Calibri" pitchFamily="34" charset="0"/>
+                <a:ea typeface="Calibri" pitchFamily="34" charset="-122"/>
+                <a:cs typeface="Calibri" pitchFamily="34" charset="-120"/>
+              </a:rPr>
+              <a:t>Reading PDF forms</a:t>
+            </a:r>
+            <a:endParaRPr lang="en-US" sz="1450" dirty="0"/>
+          </a:p>
+        </p:txBody>
+      </p:sp>
+      <p:sp>
+        <p:nvSpPr>
+          <p:cNvPr id="29" name="Text 27"/>
+          <p:cNvSpPr txBox="1"/>
+          <p:nvPr/>
+        </p:nvSpPr>
+        <p:spPr>
+          <a:xfrm>
+            <a:off x="804672" y="3694176"/>
+            <a:ext cx="2816352" cy="365760"/>
+          </a:xfrm>
+          <a:prstGeom prst="rect">
+            <a:avLst/>
+          </a:prstGeom>
+          <a:noFill/>
+          <a:ln/>
+        </p:spPr>
+        <p:txBody>
+          <a:bodyPr wrap="square" lIns="0" tIns="0" rIns="0" bIns="0" rtlCol="0" anchor="t"/>
+          <a:lstStyle/>
+          <a:p>
+            <a:pPr marL="342900" indent="-342900">
+              <a:spcAft>
+                <a:spcPts val="500"/>
+              </a:spcAft>
+              <a:buSzPct val="100000"/>
+              <a:buChar char="•"/>
+            </a:pPr>
+            <a:r>
+              <a:rPr lang="en-US" sz="1150" dirty="0">
+                <a:solidFill>
+                  <a:srgbClr val="16211C"/>
+                </a:solidFill>
+                <a:latin typeface="Calibri" pitchFamily="34" charset="0"/>
+                <a:ea typeface="Calibri" pitchFamily="34" charset="-122"/>
+                <a:cs typeface="Calibri" pitchFamily="34" charset="-120"/>
+              </a:rPr>
+              <a:t>pdf-lib  ·  pdfjs-dist  ·  JSZip</a:t>
+            </a:r>
+            <a:endParaRPr lang="en-US" sz="1150" dirty="0"/>
+          </a:p>
+        </p:txBody>
+      </p:sp>
+      <p:sp>
+        <p:nvSpPr>
+          <p:cNvPr id="30" name="Shape 28"/>
+          <p:cNvSpPr/>
+          <p:nvPr/>
+        </p:nvSpPr>
+        <p:spPr>
+          <a:xfrm>
+            <a:off x="566928" y="4718304"/>
+            <a:ext cx="11027664" cy="1591056"/>
+          </a:xfrm>
+          <a:prstGeom prst="roundRect">
+            <a:avLst>
+              <a:gd name="adj" fmla="val 5172"/>
+            </a:avLst>
+          </a:prstGeom>
+          <a:solidFill>
+            <a:srgbClr val="EDF3EF"/>
+          </a:solidFill>
+          <a:ln w="12700">
+            <a:solidFill>
+              <a:srgbClr val="EDF3EF"/>
+            </a:solidFill>
+            <a:prstDash val="solid"/>
+          </a:ln>
+        </p:spPr>
+      </p:sp>
+      <p:sp>
+        <p:nvSpPr>
+          <p:cNvPr id="31" name="Text 29"/>
+          <p:cNvSpPr txBox="1"/>
+          <p:nvPr/>
+        </p:nvSpPr>
+        <p:spPr>
+          <a:xfrm>
+            <a:off x="841248" y="4882896"/>
+            <a:ext cx="1828800" cy="274320"/>
+          </a:xfrm>
+          <a:prstGeom prst="rect">
+            <a:avLst/>
+          </a:prstGeom>
+          <a:noFill/>
+          <a:ln/>
+        </p:spPr>
+        <p:txBody>
+          <a:bodyPr wrap="square" lIns="0" tIns="0" rIns="0" bIns="0" rtlCol="0" anchor="ctr"/>
+          <a:lstStyle/>
+          <a:p>
+            <a:pPr indent="0" marL="0">
+              <a:buNone/>
+            </a:pPr>
+            <a:r>
+              <a:rPr lang="en-US" sz="1150" b="1" spc="80" kern="0" dirty="0">
+                <a:solidFill>
+                  <a:srgbClr val="5E6B64"/>
+                </a:solidFill>
+                <a:latin typeface="Calibri" pitchFamily="34" charset="0"/>
+                <a:ea typeface="Calibri" pitchFamily="34" charset="-122"/>
+                <a:cs typeface="Calibri" pitchFamily="34" charset="-120"/>
+              </a:rPr>
+              <a:t>Built with</a:t>
+            </a:r>
+            <a:endParaRPr lang="en-US" sz="1150" dirty="0"/>
+          </a:p>
+        </p:txBody>
+      </p:sp>
+      <p:sp>
+        <p:nvSpPr>
+          <p:cNvPr id="32" name="Text 30"/>
+          <p:cNvSpPr txBox="1"/>
+          <p:nvPr/>
+        </p:nvSpPr>
+        <p:spPr>
+          <a:xfrm>
+            <a:off x="841248" y="5266944"/>
+            <a:ext cx="2436876" cy="256032"/>
+          </a:xfrm>
+          <a:prstGeom prst="rect">
+            <a:avLst/>
+          </a:prstGeom>
+          <a:noFill/>
+          <a:ln/>
+        </p:spPr>
+        <p:txBody>
+          <a:bodyPr wrap="square" lIns="0" tIns="0" rIns="0" bIns="0" rtlCol="0" anchor="ctr"/>
+          <a:lstStyle/>
+          <a:p>
+            <a:pPr indent="0" marL="0">
+              <a:buNone/>
+            </a:pPr>
+            <a:r>
+              <a:rPr lang="en-US" sz="1250" b="1" dirty="0">
+                <a:solidFill>
+                  <a:srgbClr val="0F5132"/>
+                </a:solidFill>
+                <a:latin typeface="Calibri" pitchFamily="34" charset="0"/>
+                <a:ea typeface="Calibri" pitchFamily="34" charset="-122"/>
+                <a:cs typeface="Calibri" pitchFamily="34" charset="-120"/>
+              </a:rPr>
+              <a:t>Screens</a:t>
+            </a:r>
+            <a:endParaRPr lang="en-US" sz="1250" dirty="0"/>
+          </a:p>
+        </p:txBody>
+      </p:sp>
+      <p:sp>
+        <p:nvSpPr>
+          <p:cNvPr id="33" name="Text 31"/>
+          <p:cNvSpPr txBox="1"/>
+          <p:nvPr/>
+        </p:nvSpPr>
+        <p:spPr>
+          <a:xfrm>
+            <a:off x="841248" y="5541264"/>
+            <a:ext cx="2436876" cy="603504"/>
           </a:xfrm>
           <a:prstGeom prst="rect">
             <a:avLst/>
@@ -7586,7 +9718,7 @@
               <a:buNone/>
             </a:pPr>
             <a:r>
-              <a:rPr lang="en-US" sz="1150" dirty="0">
+              <a:rPr lang="en-US" sz="1100" dirty="0">
                 <a:solidFill>
                   <a:srgbClr val="5E6B64"/>
                 </a:solidFill>
@@ -7594,83 +9726,38 @@
                 <a:ea typeface="Calibri" pitchFamily="34" charset="-122"/>
                 <a:cs typeface="Calibri" pitchFamily="34" charset="-120"/>
               </a:rPr>
-              <a:t>A ranked list, with the reason behind every score</a:t>
-            </a:r>
-            <a:endParaRPr lang="en-US" sz="1150" dirty="0"/>
-          </a:p>
-        </p:txBody>
-      </p:sp>
-      <p:sp>
-        <p:nvSpPr>
-          <p:cNvPr id="14" name="Text 12"/>
-          <p:cNvSpPr txBox="1"/>
-          <p:nvPr/>
-        </p:nvSpPr>
-        <p:spPr>
-          <a:xfrm>
-            <a:off x="566928" y="4233672"/>
-            <a:ext cx="274320" cy="274320"/>
-          </a:xfrm>
-          <a:prstGeom prst="ellipse">
-            <a:avLst/>
-          </a:prstGeom>
-          <a:solidFill>
-            <a:srgbClr val="0F5132"/>
-          </a:solidFill>
-          <a:ln>
-            <a:solidFill>
-              <a:srgbClr val="0F5132"/>
-            </a:solidFill>
-          </a:ln>
-        </p:spPr>
-        <p:txBody>
-          <a:bodyPr wrap="square" lIns="0" tIns="0" rIns="0" bIns="0" rtlCol="0" anchor="ctr"/>
-          <a:lstStyle/>
-          <a:p>
-            <a:pPr algn="ctr" indent="0" marL="0">
-              <a:buNone/>
-            </a:pPr>
-            <a:r>
-              <a:rPr lang="en-US" sz="1200" b="1" dirty="0">
-                <a:solidFill>
-                  <a:srgbClr val="FFFFFF"/>
-                </a:solidFill>
-                <a:latin typeface="Calibri" pitchFamily="34" charset="0"/>
-                <a:ea typeface="Calibri" pitchFamily="34" charset="-122"/>
-                <a:cs typeface="Calibri" pitchFamily="34" charset="-120"/>
-              </a:rPr>
-              <a:t>4</a:t>
-            </a:r>
-            <a:endParaRPr lang="en-US" sz="1200" dirty="0"/>
-          </a:p>
-        </p:txBody>
-      </p:sp>
-      <p:sp>
-        <p:nvSpPr>
-          <p:cNvPr id="15" name="Text 13"/>
-          <p:cNvSpPr txBox="1"/>
-          <p:nvPr/>
-        </p:nvSpPr>
-        <p:spPr>
-          <a:xfrm>
-            <a:off x="969264" y="4215384"/>
-            <a:ext cx="5111496" cy="256032"/>
-          </a:xfrm>
-          <a:prstGeom prst="rect">
-            <a:avLst/>
-          </a:prstGeom>
-          <a:noFill/>
-          <a:ln/>
-        </p:spPr>
-        <p:txBody>
-          <a:bodyPr wrap="square" lIns="0" tIns="0" rIns="0" bIns="0" rtlCol="0" anchor="ctr"/>
-          <a:lstStyle/>
-          <a:p>
-            <a:pPr indent="0" marL="0">
-              <a:buNone/>
-            </a:pPr>
-            <a:r>
-              <a:rPr lang="en-US" sz="1300" b="1" dirty="0">
+              <a:t>Next.js · React · TypeScript · Tailwind</a:t>
+            </a:r>
+            <a:endParaRPr lang="en-US" sz="1100" dirty="0"/>
+          </a:p>
+        </p:txBody>
+      </p:sp>
+      <p:sp>
+        <p:nvSpPr>
+          <p:cNvPr id="34" name="Text 32"/>
+          <p:cNvSpPr txBox="1"/>
+          <p:nvPr/>
+        </p:nvSpPr>
+        <p:spPr>
+          <a:xfrm>
+            <a:off x="3461004" y="5266944"/>
+            <a:ext cx="2436876" cy="256032"/>
+          </a:xfrm>
+          <a:prstGeom prst="rect">
+            <a:avLst/>
+          </a:prstGeom>
+          <a:noFill/>
+          <a:ln/>
+        </p:spPr>
+        <p:txBody>
+          <a:bodyPr wrap="square" lIns="0" tIns="0" rIns="0" bIns="0" rtlCol="0" anchor="ctr"/>
+          <a:lstStyle/>
+          <a:p>
+            <a:pPr indent="0" marL="0">
+              <a:buNone/>
+            </a:pPr>
+            <a:r>
+              <a:rPr lang="en-US" sz="1250" b="1" dirty="0">
                 <a:solidFill>
                   <a:srgbClr val="0F5132"/>
                 </a:solidFill>
@@ -7678,22 +9765,22 @@
                 <a:ea typeface="Calibri" pitchFamily="34" charset="-122"/>
                 <a:cs typeface="Calibri" pitchFamily="34" charset="-120"/>
               </a:rPr>
-              <a:t>Applying</a:t>
-            </a:r>
-            <a:endParaRPr lang="en-US" sz="1300" dirty="0"/>
-          </a:p>
-        </p:txBody>
-      </p:sp>
-      <p:sp>
-        <p:nvSpPr>
-          <p:cNvPr id="16" name="Text 14"/>
-          <p:cNvSpPr txBox="1"/>
-          <p:nvPr/>
-        </p:nvSpPr>
-        <p:spPr>
-          <a:xfrm>
-            <a:off x="969264" y="4471416"/>
-            <a:ext cx="5111496" cy="420624"/>
+              <a:t>Collecting bursaries</a:t>
+            </a:r>
+            <a:endParaRPr lang="en-US" sz="1250" dirty="0"/>
+          </a:p>
+        </p:txBody>
+      </p:sp>
+      <p:sp>
+        <p:nvSpPr>
+          <p:cNvPr id="35" name="Text 33"/>
+          <p:cNvSpPr txBox="1"/>
+          <p:nvPr/>
+        </p:nvSpPr>
+        <p:spPr>
+          <a:xfrm>
+            <a:off x="3461004" y="5541264"/>
+            <a:ext cx="2436876" cy="603504"/>
           </a:xfrm>
           <a:prstGeom prst="rect">
             <a:avLst/>
@@ -7712,7 +9799,7 @@
               <a:buNone/>
             </a:pPr>
             <a:r>
-              <a:rPr lang="en-US" sz="1150" dirty="0">
+              <a:rPr lang="en-US" sz="1100" dirty="0">
                 <a:solidFill>
                   <a:srgbClr val="5E6B64"/>
                 </a:solidFill>
@@ -7720,83 +9807,38 @@
                 <a:ea typeface="Calibri" pitchFamily="34" charset="-122"/>
                 <a:cs typeface="Calibri" pitchFamily="34" charset="-120"/>
               </a:rPr>
-              <a:t>Apply using saved details, attach documents once, then track progress</a:t>
-            </a:r>
-            <a:endParaRPr lang="en-US" sz="1150" dirty="0"/>
-          </a:p>
-        </p:txBody>
-      </p:sp>
-      <p:sp>
-        <p:nvSpPr>
-          <p:cNvPr id="17" name="Text 15"/>
-          <p:cNvSpPr txBox="1"/>
-          <p:nvPr/>
-        </p:nvSpPr>
-        <p:spPr>
-          <a:xfrm>
-            <a:off x="566928" y="4992624"/>
-            <a:ext cx="274320" cy="274320"/>
-          </a:xfrm>
-          <a:prstGeom prst="ellipse">
-            <a:avLst/>
-          </a:prstGeom>
-          <a:solidFill>
-            <a:srgbClr val="0F5132"/>
-          </a:solidFill>
-          <a:ln>
-            <a:solidFill>
-              <a:srgbClr val="0F5132"/>
-            </a:solidFill>
-          </a:ln>
-        </p:spPr>
-        <p:txBody>
-          <a:bodyPr wrap="square" lIns="0" tIns="0" rIns="0" bIns="0" rtlCol="0" anchor="ctr"/>
-          <a:lstStyle/>
-          <a:p>
-            <a:pPr algn="ctr" indent="0" marL="0">
-              <a:buNone/>
-            </a:pPr>
-            <a:r>
-              <a:rPr lang="en-US" sz="1200" b="1" dirty="0">
-                <a:solidFill>
-                  <a:srgbClr val="FFFFFF"/>
-                </a:solidFill>
-                <a:latin typeface="Calibri" pitchFamily="34" charset="0"/>
-                <a:ea typeface="Calibri" pitchFamily="34" charset="-122"/>
-                <a:cs typeface="Calibri" pitchFamily="34" charset="-120"/>
-              </a:rPr>
-              <a:t>5</a:t>
-            </a:r>
-            <a:endParaRPr lang="en-US" sz="1200" dirty="0"/>
-          </a:p>
-        </p:txBody>
-      </p:sp>
-      <p:sp>
-        <p:nvSpPr>
-          <p:cNvPr id="18" name="Text 16"/>
-          <p:cNvSpPr txBox="1"/>
-          <p:nvPr/>
-        </p:nvSpPr>
-        <p:spPr>
-          <a:xfrm>
-            <a:off x="969264" y="4974336"/>
-            <a:ext cx="5111496" cy="256032"/>
-          </a:xfrm>
-          <a:prstGeom prst="rect">
-            <a:avLst/>
-          </a:prstGeom>
-          <a:noFill/>
-          <a:ln/>
-        </p:spPr>
-        <p:txBody>
-          <a:bodyPr wrap="square" lIns="0" tIns="0" rIns="0" bIns="0" rtlCol="0" anchor="ctr"/>
-          <a:lstStyle/>
-          <a:p>
-            <a:pPr indent="0" marL="0">
-              <a:buNone/>
-            </a:pPr>
-            <a:r>
-              <a:rPr lang="en-US" sz="1300" b="1" dirty="0">
+              <a:t>Cheerio reads the websites we agreed on</a:t>
+            </a:r>
+            <a:endParaRPr lang="en-US" sz="1100" dirty="0"/>
+          </a:p>
+        </p:txBody>
+      </p:sp>
+      <p:sp>
+        <p:nvSpPr>
+          <p:cNvPr id="36" name="Text 34"/>
+          <p:cNvSpPr txBox="1"/>
+          <p:nvPr/>
+        </p:nvSpPr>
+        <p:spPr>
+          <a:xfrm>
+            <a:off x="6080760" y="5266944"/>
+            <a:ext cx="2436876" cy="256032"/>
+          </a:xfrm>
+          <a:prstGeom prst="rect">
+            <a:avLst/>
+          </a:prstGeom>
+          <a:noFill/>
+          <a:ln/>
+        </p:spPr>
+        <p:txBody>
+          <a:bodyPr wrap="square" lIns="0" tIns="0" rIns="0" bIns="0" rtlCol="0" anchor="ctr"/>
+          <a:lstStyle/>
+          <a:p>
+            <a:pPr indent="0" marL="0">
+              <a:buNone/>
+            </a:pPr>
+            <a:r>
+              <a:rPr lang="en-US" sz="1250" b="1" dirty="0">
                 <a:solidFill>
                   <a:srgbClr val="0F5132"/>
                 </a:solidFill>
@@ -7804,22 +9846,22 @@
                 <a:ea typeface="Calibri" pitchFamily="34" charset="-122"/>
                 <a:cs typeface="Calibri" pitchFamily="34" charset="-120"/>
               </a:rPr>
-              <a:t>Auto-Fill for PDF forms</a:t>
-            </a:r>
-            <a:endParaRPr lang="en-US" sz="1300" dirty="0"/>
-          </a:p>
-        </p:txBody>
-      </p:sp>
-      <p:sp>
-        <p:nvSpPr>
-          <p:cNvPr id="19" name="Text 17"/>
-          <p:cNvSpPr txBox="1"/>
-          <p:nvPr/>
-        </p:nvSpPr>
-        <p:spPr>
-          <a:xfrm>
-            <a:off x="969264" y="5230368"/>
-            <a:ext cx="5111496" cy="420624"/>
+              <a:t>Safety</a:t>
+            </a:r>
+            <a:endParaRPr lang="en-US" sz="1250" dirty="0"/>
+          </a:p>
+        </p:txBody>
+      </p:sp>
+      <p:sp>
+        <p:nvSpPr>
+          <p:cNvPr id="37" name="Text 35"/>
+          <p:cNvSpPr txBox="1"/>
+          <p:nvPr/>
+        </p:nvSpPr>
+        <p:spPr>
+          <a:xfrm>
+            <a:off x="6080760" y="5541264"/>
+            <a:ext cx="2436876" cy="603504"/>
           </a:xfrm>
           <a:prstGeom prst="rect">
             <a:avLst/>
@@ -7838,7 +9880,7 @@
               <a:buNone/>
             </a:pPr>
             <a:r>
-              <a:rPr lang="en-US" sz="1150" dirty="0">
+              <a:rPr lang="en-US" sz="1100" dirty="0">
                 <a:solidFill>
                   <a:srgbClr val="5E6B64"/>
                 </a:solidFill>
@@ -7846,83 +9888,38 @@
                 <a:ea typeface="Calibri" pitchFamily="34" charset="-122"/>
                 <a:cs typeface="Calibri" pitchFamily="34" charset="-120"/>
               </a:rPr>
-              <a:t>Fills a form from the profile, and says how sure it is each time</a:t>
-            </a:r>
-            <a:endParaRPr lang="en-US" sz="1150" dirty="0"/>
-          </a:p>
-        </p:txBody>
-      </p:sp>
-      <p:sp>
-        <p:nvSpPr>
-          <p:cNvPr id="20" name="Text 18"/>
-          <p:cNvSpPr txBox="1"/>
-          <p:nvPr/>
-        </p:nvSpPr>
-        <p:spPr>
-          <a:xfrm>
-            <a:off x="566928" y="5751576"/>
-            <a:ext cx="274320" cy="274320"/>
-          </a:xfrm>
-          <a:prstGeom prst="ellipse">
-            <a:avLst/>
-          </a:prstGeom>
-          <a:solidFill>
-            <a:srgbClr val="0F5132"/>
-          </a:solidFill>
-          <a:ln>
-            <a:solidFill>
-              <a:srgbClr val="0F5132"/>
-            </a:solidFill>
-          </a:ln>
-        </p:spPr>
-        <p:txBody>
-          <a:bodyPr wrap="square" lIns="0" tIns="0" rIns="0" bIns="0" rtlCol="0" anchor="ctr"/>
-          <a:lstStyle/>
-          <a:p>
-            <a:pPr algn="ctr" indent="0" marL="0">
-              <a:buNone/>
-            </a:pPr>
-            <a:r>
-              <a:rPr lang="en-US" sz="1200" b="1" dirty="0">
-                <a:solidFill>
-                  <a:srgbClr val="FFFFFF"/>
-                </a:solidFill>
-                <a:latin typeface="Calibri" pitchFamily="34" charset="0"/>
-                <a:ea typeface="Calibri" pitchFamily="34" charset="-122"/>
-                <a:cs typeface="Calibri" pitchFamily="34" charset="-120"/>
-              </a:rPr>
-              <a:t>6</a:t>
-            </a:r>
-            <a:endParaRPr lang="en-US" sz="1200" dirty="0"/>
-          </a:p>
-        </p:txBody>
-      </p:sp>
-      <p:sp>
-        <p:nvSpPr>
-          <p:cNvPr id="21" name="Text 19"/>
-          <p:cNvSpPr txBox="1"/>
-          <p:nvPr/>
-        </p:nvSpPr>
-        <p:spPr>
-          <a:xfrm>
-            <a:off x="969264" y="5733288"/>
-            <a:ext cx="5111496" cy="256032"/>
-          </a:xfrm>
-          <a:prstGeom prst="rect">
-            <a:avLst/>
-          </a:prstGeom>
-          <a:noFill/>
-          <a:ln/>
-        </p:spPr>
-        <p:txBody>
-          <a:bodyPr wrap="square" lIns="0" tIns="0" rIns="0" bIns="0" rtlCol="0" anchor="ctr"/>
-          <a:lstStyle/>
-          <a:p>
-            <a:pPr indent="0" marL="0">
-              <a:buNone/>
-            </a:pPr>
-            <a:r>
-              <a:rPr lang="en-US" sz="1300" b="1" dirty="0">
+              <a:t>Zod checks input · bcryptjs protects passwords</a:t>
+            </a:r>
+            <a:endParaRPr lang="en-US" sz="1100" dirty="0"/>
+          </a:p>
+        </p:txBody>
+      </p:sp>
+      <p:sp>
+        <p:nvSpPr>
+          <p:cNvPr id="38" name="Text 36"/>
+          <p:cNvSpPr txBox="1"/>
+          <p:nvPr/>
+        </p:nvSpPr>
+        <p:spPr>
+          <a:xfrm>
+            <a:off x="8700516" y="5266944"/>
+            <a:ext cx="2436876" cy="256032"/>
+          </a:xfrm>
+          <a:prstGeom prst="rect">
+            <a:avLst/>
+          </a:prstGeom>
+          <a:noFill/>
+          <a:ln/>
+        </p:spPr>
+        <p:txBody>
+          <a:bodyPr wrap="square" lIns="0" tIns="0" rIns="0" bIns="0" rtlCol="0" anchor="ctr"/>
+          <a:lstStyle/>
+          <a:p>
+            <a:pPr indent="0" marL="0">
+              <a:buNone/>
+            </a:pPr>
+            <a:r>
+              <a:rPr lang="en-US" sz="1250" b="1" dirty="0">
                 <a:solidFill>
                   <a:srgbClr val="0F5132"/>
                 </a:solidFill>
@@ -7930,22 +9927,22 @@
                 <a:ea typeface="Calibri" pitchFamily="34" charset="-122"/>
                 <a:cs typeface="Calibri" pitchFamily="34" charset="-120"/>
               </a:rPr>
-              <a:t>Motivation letter helper</a:t>
-            </a:r>
-            <a:endParaRPr lang="en-US" sz="1300" dirty="0"/>
-          </a:p>
-        </p:txBody>
-      </p:sp>
-      <p:sp>
-        <p:nvSpPr>
-          <p:cNvPr id="22" name="Text 20"/>
-          <p:cNvSpPr txBox="1"/>
-          <p:nvPr/>
-        </p:nvSpPr>
-        <p:spPr>
-          <a:xfrm>
-            <a:off x="969264" y="5989320"/>
-            <a:ext cx="5111496" cy="420624"/>
+              <a:t>Testing</a:t>
+            </a:r>
+            <a:endParaRPr lang="en-US" sz="1250" dirty="0"/>
+          </a:p>
+        </p:txBody>
+      </p:sp>
+      <p:sp>
+        <p:nvSpPr>
+          <p:cNvPr id="39" name="Text 37"/>
+          <p:cNvSpPr txBox="1"/>
+          <p:nvPr/>
+        </p:nvSpPr>
+        <p:spPr>
+          <a:xfrm>
+            <a:off x="8700516" y="5541264"/>
+            <a:ext cx="2436876" cy="603504"/>
           </a:xfrm>
           <a:prstGeom prst="rect">
             <a:avLst/>
@@ -7964,7 +9961,7 @@
               <a:buNone/>
             </a:pPr>
             <a:r>
-              <a:rPr lang="en-US" sz="1150" dirty="0">
+              <a:rPr lang="en-US" sz="1100" dirty="0">
                 <a:solidFill>
                   <a:srgbClr val="5E6B64"/>
                 </a:solidFill>
@@ -7972,804 +9969,9 @@
                 <a:ea typeface="Calibri" pitchFamily="34" charset="-122"/>
                 <a:cs typeface="Calibri" pitchFamily="34" charset="-120"/>
               </a:rPr>
-              <a:t>Built from what the student said — it never writes for them</a:t>
-            </a:r>
-            <a:endParaRPr lang="en-US" sz="1150" dirty="0"/>
-          </a:p>
-        </p:txBody>
-      </p:sp>
-      <p:sp>
-        <p:nvSpPr>
-          <p:cNvPr id="23" name="Text 21"/>
-          <p:cNvSpPr txBox="1"/>
-          <p:nvPr/>
-        </p:nvSpPr>
-        <p:spPr>
-          <a:xfrm>
-            <a:off x="6446520" y="1517904"/>
-            <a:ext cx="5513832" cy="292608"/>
-          </a:xfrm>
-          <a:prstGeom prst="rect">
-            <a:avLst/>
-          </a:prstGeom>
-          <a:noFill/>
-          <a:ln/>
-        </p:spPr>
-        <p:txBody>
-          <a:bodyPr wrap="square" lIns="0" tIns="0" rIns="0" bIns="0" rtlCol="0" anchor="ctr"/>
-          <a:lstStyle/>
-          <a:p>
-            <a:pPr indent="0" marL="0">
-              <a:buNone/>
-            </a:pPr>
-            <a:r>
-              <a:rPr lang="en-US" sz="1200" b="1" spc="120" kern="0" dirty="0">
-                <a:solidFill>
-                  <a:srgbClr val="5E6B64"/>
-                </a:solidFill>
-                <a:latin typeface="Calibri" pitchFamily="34" charset="0"/>
-                <a:ea typeface="Calibri" pitchFamily="34" charset="-122"/>
-                <a:cs typeface="Calibri" pitchFamily="34" charset="-120"/>
-              </a:rPr>
-              <a:t>THE COMPANY SIDE</a:t>
-            </a:r>
-            <a:endParaRPr lang="en-US" sz="1200" dirty="0"/>
-          </a:p>
-        </p:txBody>
-      </p:sp>
-      <p:sp>
-        <p:nvSpPr>
-          <p:cNvPr id="24" name="Text 22"/>
-          <p:cNvSpPr txBox="1"/>
-          <p:nvPr/>
-        </p:nvSpPr>
-        <p:spPr>
-          <a:xfrm>
-            <a:off x="6446520" y="1956816"/>
-            <a:ext cx="274320" cy="274320"/>
-          </a:xfrm>
-          <a:prstGeom prst="ellipse">
-            <a:avLst/>
-          </a:prstGeom>
-          <a:solidFill>
-            <a:srgbClr val="0F5132"/>
-          </a:solidFill>
-          <a:ln>
-            <a:solidFill>
-              <a:srgbClr val="0F5132"/>
-            </a:solidFill>
-          </a:ln>
-        </p:spPr>
-        <p:txBody>
-          <a:bodyPr wrap="square" lIns="0" tIns="0" rIns="0" bIns="0" rtlCol="0" anchor="ctr"/>
-          <a:lstStyle/>
-          <a:p>
-            <a:pPr algn="ctr" indent="0" marL="0">
-              <a:buNone/>
-            </a:pPr>
-            <a:r>
-              <a:rPr lang="en-US" sz="1200" b="1" dirty="0">
-                <a:solidFill>
-                  <a:srgbClr val="FFFFFF"/>
-                </a:solidFill>
-                <a:latin typeface="Calibri" pitchFamily="34" charset="0"/>
-                <a:ea typeface="Calibri" pitchFamily="34" charset="-122"/>
-                <a:cs typeface="Calibri" pitchFamily="34" charset="-120"/>
-              </a:rPr>
-              <a:t>1</a:t>
-            </a:r>
-            <a:endParaRPr lang="en-US" sz="1200" dirty="0"/>
-          </a:p>
-        </p:txBody>
-      </p:sp>
-      <p:sp>
-        <p:nvSpPr>
-          <p:cNvPr id="25" name="Text 23"/>
-          <p:cNvSpPr txBox="1"/>
-          <p:nvPr/>
-        </p:nvSpPr>
-        <p:spPr>
-          <a:xfrm>
-            <a:off x="6848856" y="1938528"/>
-            <a:ext cx="5111496" cy="256032"/>
-          </a:xfrm>
-          <a:prstGeom prst="rect">
-            <a:avLst/>
-          </a:prstGeom>
-          <a:noFill/>
-          <a:ln/>
-        </p:spPr>
-        <p:txBody>
-          <a:bodyPr wrap="square" lIns="0" tIns="0" rIns="0" bIns="0" rtlCol="0" anchor="ctr"/>
-          <a:lstStyle/>
-          <a:p>
-            <a:pPr indent="0" marL="0">
-              <a:buNone/>
-            </a:pPr>
-            <a:r>
-              <a:rPr lang="en-US" sz="1300" b="1" dirty="0">
-                <a:solidFill>
-                  <a:srgbClr val="0F5132"/>
-                </a:solidFill>
-                <a:latin typeface="Calibri" pitchFamily="34" charset="0"/>
-                <a:ea typeface="Calibri" pitchFamily="34" charset="-122"/>
-                <a:cs typeface="Calibri" pitchFamily="34" charset="-120"/>
-              </a:rPr>
-              <a:t>Company account</a:t>
-            </a:r>
-            <a:endParaRPr lang="en-US" sz="1300" dirty="0"/>
-          </a:p>
-        </p:txBody>
-      </p:sp>
-      <p:sp>
-        <p:nvSpPr>
-          <p:cNvPr id="26" name="Text 24"/>
-          <p:cNvSpPr txBox="1"/>
-          <p:nvPr/>
-        </p:nvSpPr>
-        <p:spPr>
-          <a:xfrm>
-            <a:off x="6848856" y="2194560"/>
-            <a:ext cx="5111496" cy="420624"/>
-          </a:xfrm>
-          <a:prstGeom prst="rect">
-            <a:avLst/>
-          </a:prstGeom>
-          <a:noFill/>
-          <a:ln/>
-        </p:spPr>
-        <p:txBody>
-          <a:bodyPr wrap="square" lIns="0" tIns="0" rIns="0" bIns="0" rtlCol="0" anchor="ctr"/>
-          <a:lstStyle/>
-          <a:p>
-            <a:pPr indent="0" marL="0">
-              <a:lnSpc>
-                <a:spcPct val="110000"/>
-              </a:lnSpc>
-              <a:buNone/>
-            </a:pPr>
-            <a:r>
-              <a:rPr lang="en-US" sz="1150" dirty="0">
-                <a:solidFill>
-                  <a:srgbClr val="5E6B64"/>
-                </a:solidFill>
-                <a:latin typeface="Calibri" pitchFamily="34" charset="0"/>
-                <a:ea typeface="Calibri" pitchFamily="34" charset="-122"/>
-                <a:cs typeface="Calibri" pitchFamily="34" charset="-120"/>
-              </a:rPr>
-              <a:t>Signing up, and the company details</a:t>
-            </a:r>
-            <a:endParaRPr lang="en-US" sz="1150" dirty="0"/>
-          </a:p>
-        </p:txBody>
-      </p:sp>
-      <p:sp>
-        <p:nvSpPr>
-          <p:cNvPr id="27" name="Text 25"/>
-          <p:cNvSpPr txBox="1"/>
-          <p:nvPr/>
-        </p:nvSpPr>
-        <p:spPr>
-          <a:xfrm>
-            <a:off x="6446520" y="2715768"/>
-            <a:ext cx="274320" cy="274320"/>
-          </a:xfrm>
-          <a:prstGeom prst="ellipse">
-            <a:avLst/>
-          </a:prstGeom>
-          <a:solidFill>
-            <a:srgbClr val="0F5132"/>
-          </a:solidFill>
-          <a:ln>
-            <a:solidFill>
-              <a:srgbClr val="0F5132"/>
-            </a:solidFill>
-          </a:ln>
-        </p:spPr>
-        <p:txBody>
-          <a:bodyPr wrap="square" lIns="0" tIns="0" rIns="0" bIns="0" rtlCol="0" anchor="ctr"/>
-          <a:lstStyle/>
-          <a:p>
-            <a:pPr algn="ctr" indent="0" marL="0">
-              <a:buNone/>
-            </a:pPr>
-            <a:r>
-              <a:rPr lang="en-US" sz="1200" b="1" dirty="0">
-                <a:solidFill>
-                  <a:srgbClr val="FFFFFF"/>
-                </a:solidFill>
-                <a:latin typeface="Calibri" pitchFamily="34" charset="0"/>
-                <a:ea typeface="Calibri" pitchFamily="34" charset="-122"/>
-                <a:cs typeface="Calibri" pitchFamily="34" charset="-120"/>
-              </a:rPr>
-              <a:t>2</a:t>
-            </a:r>
-            <a:endParaRPr lang="en-US" sz="1200" dirty="0"/>
-          </a:p>
-        </p:txBody>
-      </p:sp>
-      <p:sp>
-        <p:nvSpPr>
-          <p:cNvPr id="28" name="Text 26"/>
-          <p:cNvSpPr txBox="1"/>
-          <p:nvPr/>
-        </p:nvSpPr>
-        <p:spPr>
-          <a:xfrm>
-            <a:off x="6848856" y="2697480"/>
-            <a:ext cx="5111496" cy="256032"/>
-          </a:xfrm>
-          <a:prstGeom prst="rect">
-            <a:avLst/>
-          </a:prstGeom>
-          <a:noFill/>
-          <a:ln/>
-        </p:spPr>
-        <p:txBody>
-          <a:bodyPr wrap="square" lIns="0" tIns="0" rIns="0" bIns="0" rtlCol="0" anchor="ctr"/>
-          <a:lstStyle/>
-          <a:p>
-            <a:pPr indent="0" marL="0">
-              <a:buNone/>
-            </a:pPr>
-            <a:r>
-              <a:rPr lang="en-US" sz="1300" b="1" dirty="0">
-                <a:solidFill>
-                  <a:srgbClr val="0F5132"/>
-                </a:solidFill>
-                <a:latin typeface="Calibri" pitchFamily="34" charset="0"/>
-                <a:ea typeface="Calibri" pitchFamily="34" charset="-122"/>
-                <a:cs typeface="Calibri" pitchFamily="34" charset="-120"/>
-              </a:rPr>
-              <a:t>Advertise a bursary</a:t>
-            </a:r>
-            <a:endParaRPr lang="en-US" sz="1300" dirty="0"/>
-          </a:p>
-        </p:txBody>
-      </p:sp>
-      <p:sp>
-        <p:nvSpPr>
-          <p:cNvPr id="29" name="Text 27"/>
-          <p:cNvSpPr txBox="1"/>
-          <p:nvPr/>
-        </p:nvSpPr>
-        <p:spPr>
-          <a:xfrm>
-            <a:off x="6848856" y="2953512"/>
-            <a:ext cx="5111496" cy="420624"/>
-          </a:xfrm>
-          <a:prstGeom prst="rect">
-            <a:avLst/>
-          </a:prstGeom>
-          <a:noFill/>
-          <a:ln/>
-        </p:spPr>
-        <p:txBody>
-          <a:bodyPr wrap="square" lIns="0" tIns="0" rIns="0" bIns="0" rtlCol="0" anchor="ctr"/>
-          <a:lstStyle/>
-          <a:p>
-            <a:pPr indent="0" marL="0">
-              <a:lnSpc>
-                <a:spcPct val="110000"/>
-              </a:lnSpc>
-              <a:buNone/>
-            </a:pPr>
-            <a:r>
-              <a:rPr lang="en-US" sz="1150" dirty="0">
-                <a:solidFill>
-                  <a:srgbClr val="5E6B64"/>
-                </a:solidFill>
-                <a:latin typeface="Calibri" pitchFamily="34" charset="0"/>
-                <a:ea typeface="Calibri" pitchFamily="34" charset="-122"/>
-                <a:cs typeface="Calibri" pitchFamily="34" charset="-120"/>
-              </a:rPr>
-              <a:t>The rules are typed into boxes, not written as sentences</a:t>
-            </a:r>
-            <a:endParaRPr lang="en-US" sz="1150" dirty="0"/>
-          </a:p>
-        </p:txBody>
-      </p:sp>
-      <p:sp>
-        <p:nvSpPr>
-          <p:cNvPr id="30" name="Text 28"/>
-          <p:cNvSpPr txBox="1"/>
-          <p:nvPr/>
-        </p:nvSpPr>
-        <p:spPr>
-          <a:xfrm>
-            <a:off x="6446520" y="3474720"/>
-            <a:ext cx="274320" cy="274320"/>
-          </a:xfrm>
-          <a:prstGeom prst="ellipse">
-            <a:avLst/>
-          </a:prstGeom>
-          <a:solidFill>
-            <a:srgbClr val="0F5132"/>
-          </a:solidFill>
-          <a:ln>
-            <a:solidFill>
-              <a:srgbClr val="0F5132"/>
-            </a:solidFill>
-          </a:ln>
-        </p:spPr>
-        <p:txBody>
-          <a:bodyPr wrap="square" lIns="0" tIns="0" rIns="0" bIns="0" rtlCol="0" anchor="ctr"/>
-          <a:lstStyle/>
-          <a:p>
-            <a:pPr algn="ctr" indent="0" marL="0">
-              <a:buNone/>
-            </a:pPr>
-            <a:r>
-              <a:rPr lang="en-US" sz="1200" b="1" dirty="0">
-                <a:solidFill>
-                  <a:srgbClr val="FFFFFF"/>
-                </a:solidFill>
-                <a:latin typeface="Calibri" pitchFamily="34" charset="0"/>
-                <a:ea typeface="Calibri" pitchFamily="34" charset="-122"/>
-                <a:cs typeface="Calibri" pitchFamily="34" charset="-120"/>
-              </a:rPr>
-              <a:t>3</a:t>
-            </a:r>
-            <a:endParaRPr lang="en-US" sz="1200" dirty="0"/>
-          </a:p>
-        </p:txBody>
-      </p:sp>
-      <p:sp>
-        <p:nvSpPr>
-          <p:cNvPr id="31" name="Text 29"/>
-          <p:cNvSpPr txBox="1"/>
-          <p:nvPr/>
-        </p:nvSpPr>
-        <p:spPr>
-          <a:xfrm>
-            <a:off x="6848856" y="3456432"/>
-            <a:ext cx="5111496" cy="256032"/>
-          </a:xfrm>
-          <a:prstGeom prst="rect">
-            <a:avLst/>
-          </a:prstGeom>
-          <a:noFill/>
-          <a:ln/>
-        </p:spPr>
-        <p:txBody>
-          <a:bodyPr wrap="square" lIns="0" tIns="0" rIns="0" bIns="0" rtlCol="0" anchor="ctr"/>
-          <a:lstStyle/>
-          <a:p>
-            <a:pPr indent="0" marL="0">
-              <a:buNone/>
-            </a:pPr>
-            <a:r>
-              <a:rPr lang="en-US" sz="1300" b="1" dirty="0">
-                <a:solidFill>
-                  <a:srgbClr val="0F5132"/>
-                </a:solidFill>
-                <a:latin typeface="Calibri" pitchFamily="34" charset="0"/>
-                <a:ea typeface="Calibri" pitchFamily="34" charset="-122"/>
-                <a:cs typeface="Calibri" pitchFamily="34" charset="-120"/>
-              </a:rPr>
-              <a:t>Review applicants</a:t>
-            </a:r>
-            <a:endParaRPr lang="en-US" sz="1300" dirty="0"/>
-          </a:p>
-        </p:txBody>
-      </p:sp>
-      <p:sp>
-        <p:nvSpPr>
-          <p:cNvPr id="32" name="Text 30"/>
-          <p:cNvSpPr txBox="1"/>
-          <p:nvPr/>
-        </p:nvSpPr>
-        <p:spPr>
-          <a:xfrm>
-            <a:off x="6848856" y="3712464"/>
-            <a:ext cx="5111496" cy="420624"/>
-          </a:xfrm>
-          <a:prstGeom prst="rect">
-            <a:avLst/>
-          </a:prstGeom>
-          <a:noFill/>
-          <a:ln/>
-        </p:spPr>
-        <p:txBody>
-          <a:bodyPr wrap="square" lIns="0" tIns="0" rIns="0" bIns="0" rtlCol="0" anchor="ctr"/>
-          <a:lstStyle/>
-          <a:p>
-            <a:pPr indent="0" marL="0">
-              <a:lnSpc>
-                <a:spcPct val="110000"/>
-              </a:lnSpc>
-              <a:buNone/>
-            </a:pPr>
-            <a:r>
-              <a:rPr lang="en-US" sz="1150" dirty="0">
-                <a:solidFill>
-                  <a:srgbClr val="5E6B64"/>
-                </a:solidFill>
-                <a:latin typeface="Calibri" pitchFamily="34" charset="0"/>
-                <a:ea typeface="Calibri" pitchFamily="34" charset="-122"/>
-                <a:cs typeface="Calibri" pitchFamily="34" charset="-120"/>
-              </a:rPr>
-              <a:t>Applications arrive organised, already checked against their rules</a:t>
-            </a:r>
-            <a:endParaRPr lang="en-US" sz="1150" dirty="0"/>
-          </a:p>
-        </p:txBody>
-      </p:sp>
-      <p:sp>
-        <p:nvSpPr>
-          <p:cNvPr id="33" name="Text 31"/>
-          <p:cNvSpPr txBox="1"/>
-          <p:nvPr/>
-        </p:nvSpPr>
-        <p:spPr>
-          <a:xfrm>
-            <a:off x="6446520" y="4233672"/>
-            <a:ext cx="274320" cy="274320"/>
-          </a:xfrm>
-          <a:prstGeom prst="ellipse">
-            <a:avLst/>
-          </a:prstGeom>
-          <a:solidFill>
-            <a:srgbClr val="0F5132"/>
-          </a:solidFill>
-          <a:ln>
-            <a:solidFill>
-              <a:srgbClr val="0F5132"/>
-            </a:solidFill>
-          </a:ln>
-        </p:spPr>
-        <p:txBody>
-          <a:bodyPr wrap="square" lIns="0" tIns="0" rIns="0" bIns="0" rtlCol="0" anchor="ctr"/>
-          <a:lstStyle/>
-          <a:p>
-            <a:pPr algn="ctr" indent="0" marL="0">
-              <a:buNone/>
-            </a:pPr>
-            <a:r>
-              <a:rPr lang="en-US" sz="1200" b="1" dirty="0">
-                <a:solidFill>
-                  <a:srgbClr val="FFFFFF"/>
-                </a:solidFill>
-                <a:latin typeface="Calibri" pitchFamily="34" charset="0"/>
-                <a:ea typeface="Calibri" pitchFamily="34" charset="-122"/>
-                <a:cs typeface="Calibri" pitchFamily="34" charset="-120"/>
-              </a:rPr>
-              <a:t>4</a:t>
-            </a:r>
-            <a:endParaRPr lang="en-US" sz="1200" dirty="0"/>
-          </a:p>
-        </p:txBody>
-      </p:sp>
-      <p:sp>
-        <p:nvSpPr>
-          <p:cNvPr id="34" name="Text 32"/>
-          <p:cNvSpPr txBox="1"/>
-          <p:nvPr/>
-        </p:nvSpPr>
-        <p:spPr>
-          <a:xfrm>
-            <a:off x="6848856" y="4215384"/>
-            <a:ext cx="5111496" cy="256032"/>
-          </a:xfrm>
-          <a:prstGeom prst="rect">
-            <a:avLst/>
-          </a:prstGeom>
-          <a:noFill/>
-          <a:ln/>
-        </p:spPr>
-        <p:txBody>
-          <a:bodyPr wrap="square" lIns="0" tIns="0" rIns="0" bIns="0" rtlCol="0" anchor="ctr"/>
-          <a:lstStyle/>
-          <a:p>
-            <a:pPr indent="0" marL="0">
-              <a:buNone/>
-            </a:pPr>
-            <a:r>
-              <a:rPr lang="en-US" sz="1300" b="1" dirty="0">
-                <a:solidFill>
-                  <a:srgbClr val="0F5132"/>
-                </a:solidFill>
-                <a:latin typeface="Calibri" pitchFamily="34" charset="0"/>
-                <a:ea typeface="Calibri" pitchFamily="34" charset="-122"/>
-                <a:cs typeface="Calibri" pitchFamily="34" charset="-120"/>
-              </a:rPr>
-              <a:t>Shortlist and choose</a:t>
-            </a:r>
-            <a:endParaRPr lang="en-US" sz="1300" dirty="0"/>
-          </a:p>
-        </p:txBody>
-      </p:sp>
-      <p:sp>
-        <p:nvSpPr>
-          <p:cNvPr id="35" name="Text 33"/>
-          <p:cNvSpPr txBox="1"/>
-          <p:nvPr/>
-        </p:nvSpPr>
-        <p:spPr>
-          <a:xfrm>
-            <a:off x="6848856" y="4471416"/>
-            <a:ext cx="5111496" cy="420624"/>
-          </a:xfrm>
-          <a:prstGeom prst="rect">
-            <a:avLst/>
-          </a:prstGeom>
-          <a:noFill/>
-          <a:ln/>
-        </p:spPr>
-        <p:txBody>
-          <a:bodyPr wrap="square" lIns="0" tIns="0" rIns="0" bIns="0" rtlCol="0" anchor="ctr"/>
-          <a:lstStyle/>
-          <a:p>
-            <a:pPr indent="0" marL="0">
-              <a:lnSpc>
-                <a:spcPct val="110000"/>
-              </a:lnSpc>
-              <a:buNone/>
-            </a:pPr>
-            <a:r>
-              <a:rPr lang="en-US" sz="1150" dirty="0">
-                <a:solidFill>
-                  <a:srgbClr val="5E6B64"/>
-                </a:solidFill>
-                <a:latin typeface="Calibri" pitchFamily="34" charset="0"/>
-                <a:ea typeface="Calibri" pitchFamily="34" charset="-122"/>
-                <a:cs typeface="Calibri" pitchFamily="34" charset="-120"/>
-              </a:rPr>
-              <a:t>Every step is recorded</a:t>
-            </a:r>
-            <a:endParaRPr lang="en-US" sz="1150" dirty="0"/>
-          </a:p>
-        </p:txBody>
-      </p:sp>
-      <p:sp>
-        <p:nvSpPr>
-          <p:cNvPr id="36" name="Text 34"/>
-          <p:cNvSpPr txBox="1"/>
-          <p:nvPr/>
-        </p:nvSpPr>
-        <p:spPr>
-          <a:xfrm>
-            <a:off x="6446520" y="4992624"/>
-            <a:ext cx="274320" cy="274320"/>
-          </a:xfrm>
-          <a:prstGeom prst="ellipse">
-            <a:avLst/>
-          </a:prstGeom>
-          <a:solidFill>
-            <a:srgbClr val="0F5132"/>
-          </a:solidFill>
-          <a:ln>
-            <a:solidFill>
-              <a:srgbClr val="0F5132"/>
-            </a:solidFill>
-          </a:ln>
-        </p:spPr>
-        <p:txBody>
-          <a:bodyPr wrap="square" lIns="0" tIns="0" rIns="0" bIns="0" rtlCol="0" anchor="ctr"/>
-          <a:lstStyle/>
-          <a:p>
-            <a:pPr algn="ctr" indent="0" marL="0">
-              <a:buNone/>
-            </a:pPr>
-            <a:r>
-              <a:rPr lang="en-US" sz="1200" b="1" dirty="0">
-                <a:solidFill>
-                  <a:srgbClr val="FFFFFF"/>
-                </a:solidFill>
-                <a:latin typeface="Calibri" pitchFamily="34" charset="0"/>
-                <a:ea typeface="Calibri" pitchFamily="34" charset="-122"/>
-                <a:cs typeface="Calibri" pitchFamily="34" charset="-120"/>
-              </a:rPr>
-              <a:t>5</a:t>
-            </a:r>
-            <a:endParaRPr lang="en-US" sz="1200" dirty="0"/>
-          </a:p>
-        </p:txBody>
-      </p:sp>
-      <p:sp>
-        <p:nvSpPr>
-          <p:cNvPr id="37" name="Text 35"/>
-          <p:cNvSpPr txBox="1"/>
-          <p:nvPr/>
-        </p:nvSpPr>
-        <p:spPr>
-          <a:xfrm>
-            <a:off x="6848856" y="4974336"/>
-            <a:ext cx="5111496" cy="256032"/>
-          </a:xfrm>
-          <a:prstGeom prst="rect">
-            <a:avLst/>
-          </a:prstGeom>
-          <a:noFill/>
-          <a:ln/>
-        </p:spPr>
-        <p:txBody>
-          <a:bodyPr wrap="square" lIns="0" tIns="0" rIns="0" bIns="0" rtlCol="0" anchor="ctr"/>
-          <a:lstStyle/>
-          <a:p>
-            <a:pPr indent="0" marL="0">
-              <a:buNone/>
-            </a:pPr>
-            <a:r>
-              <a:rPr lang="en-US" sz="1300" b="1" dirty="0">
-                <a:solidFill>
-                  <a:srgbClr val="0F5132"/>
-                </a:solidFill>
-                <a:latin typeface="Calibri" pitchFamily="34" charset="0"/>
-                <a:ea typeface="Calibri" pitchFamily="34" charset="-122"/>
-                <a:cs typeface="Calibri" pitchFamily="34" charset="-120"/>
-              </a:rPr>
-              <a:t>Upload many forms at once</a:t>
-            </a:r>
-            <a:endParaRPr lang="en-US" sz="1300" dirty="0"/>
-          </a:p>
-        </p:txBody>
-      </p:sp>
-      <p:sp>
-        <p:nvSpPr>
-          <p:cNvPr id="38" name="Text 36"/>
-          <p:cNvSpPr txBox="1"/>
-          <p:nvPr/>
-        </p:nvSpPr>
-        <p:spPr>
-          <a:xfrm>
-            <a:off x="6848856" y="5230368"/>
-            <a:ext cx="5111496" cy="420624"/>
-          </a:xfrm>
-          <a:prstGeom prst="rect">
-            <a:avLst/>
-          </a:prstGeom>
-          <a:noFill/>
-          <a:ln/>
-        </p:spPr>
-        <p:txBody>
-          <a:bodyPr wrap="square" lIns="0" tIns="0" rIns="0" bIns="0" rtlCol="0" anchor="ctr"/>
-          <a:lstStyle/>
-          <a:p>
-            <a:pPr indent="0" marL="0">
-              <a:lnSpc>
-                <a:spcPct val="110000"/>
-              </a:lnSpc>
-              <a:buNone/>
-            </a:pPr>
-            <a:r>
-              <a:rPr lang="en-US" sz="1150" dirty="0">
-                <a:solidFill>
-                  <a:srgbClr val="5E6B64"/>
-                </a:solidFill>
-                <a:latin typeface="Calibri" pitchFamily="34" charset="0"/>
-                <a:ea typeface="Calibri" pitchFamily="34" charset="-122"/>
-                <a:cs typeface="Calibri" pitchFamily="34" charset="-120"/>
-              </a:rPr>
-              <a:t>Forms sent by email are read in, then checked before saving</a:t>
-            </a:r>
-            <a:endParaRPr lang="en-US" sz="1150" dirty="0"/>
-          </a:p>
-        </p:txBody>
-      </p:sp>
-      <p:sp>
-        <p:nvSpPr>
-          <p:cNvPr id="39" name="Text 37"/>
-          <p:cNvSpPr txBox="1"/>
-          <p:nvPr/>
-        </p:nvSpPr>
-        <p:spPr>
-          <a:xfrm>
-            <a:off x="6446520" y="5751576"/>
-            <a:ext cx="274320" cy="274320"/>
-          </a:xfrm>
-          <a:prstGeom prst="ellipse">
-            <a:avLst/>
-          </a:prstGeom>
-          <a:solidFill>
-            <a:srgbClr val="0F5132"/>
-          </a:solidFill>
-          <a:ln>
-            <a:solidFill>
-              <a:srgbClr val="0F5132"/>
-            </a:solidFill>
-          </a:ln>
-        </p:spPr>
-        <p:txBody>
-          <a:bodyPr wrap="square" lIns="0" tIns="0" rIns="0" bIns="0" rtlCol="0" anchor="ctr"/>
-          <a:lstStyle/>
-          <a:p>
-            <a:pPr algn="ctr" indent="0" marL="0">
-              <a:buNone/>
-            </a:pPr>
-            <a:r>
-              <a:rPr lang="en-US" sz="1200" b="1" dirty="0">
-                <a:solidFill>
-                  <a:srgbClr val="FFFFFF"/>
-                </a:solidFill>
-                <a:latin typeface="Calibri" pitchFamily="34" charset="0"/>
-                <a:ea typeface="Calibri" pitchFamily="34" charset="-122"/>
-                <a:cs typeface="Calibri" pitchFamily="34" charset="-120"/>
-              </a:rPr>
-              <a:t>6</a:t>
-            </a:r>
-            <a:endParaRPr lang="en-US" sz="1200" dirty="0"/>
-          </a:p>
-        </p:txBody>
-      </p:sp>
-      <p:sp>
-        <p:nvSpPr>
-          <p:cNvPr id="40" name="Text 38"/>
-          <p:cNvSpPr txBox="1"/>
-          <p:nvPr/>
-        </p:nvSpPr>
-        <p:spPr>
-          <a:xfrm>
-            <a:off x="6848856" y="5733288"/>
-            <a:ext cx="5111496" cy="256032"/>
-          </a:xfrm>
-          <a:prstGeom prst="rect">
-            <a:avLst/>
-          </a:prstGeom>
-          <a:noFill/>
-          <a:ln/>
-        </p:spPr>
-        <p:txBody>
-          <a:bodyPr wrap="square" lIns="0" tIns="0" rIns="0" bIns="0" rtlCol="0" anchor="ctr"/>
-          <a:lstStyle/>
-          <a:p>
-            <a:pPr indent="0" marL="0">
-              <a:buNone/>
-            </a:pPr>
-            <a:r>
-              <a:rPr lang="en-US" sz="1300" b="1" dirty="0">
-                <a:solidFill>
-                  <a:srgbClr val="0F5132"/>
-                </a:solidFill>
-                <a:latin typeface="Calibri" pitchFamily="34" charset="0"/>
-                <a:ea typeface="Calibri" pitchFamily="34" charset="-122"/>
-                <a:cs typeface="Calibri" pitchFamily="34" charset="-120"/>
-              </a:rPr>
-              <a:t>Spot duplicates</a:t>
-            </a:r>
-            <a:endParaRPr lang="en-US" sz="1300" dirty="0"/>
-          </a:p>
-        </p:txBody>
-      </p:sp>
-      <p:sp>
-        <p:nvSpPr>
-          <p:cNvPr id="41" name="Text 39"/>
-          <p:cNvSpPr txBox="1"/>
-          <p:nvPr/>
-        </p:nvSpPr>
-        <p:spPr>
-          <a:xfrm>
-            <a:off x="6848856" y="5989320"/>
-            <a:ext cx="5111496" cy="420624"/>
-          </a:xfrm>
-          <a:prstGeom prst="rect">
-            <a:avLst/>
-          </a:prstGeom>
-          <a:noFill/>
-          <a:ln/>
-        </p:spPr>
-        <p:txBody>
-          <a:bodyPr wrap="square" lIns="0" tIns="0" rIns="0" bIns="0" rtlCol="0" anchor="ctr"/>
-          <a:lstStyle/>
-          <a:p>
-            <a:pPr indent="0" marL="0">
-              <a:lnSpc>
-                <a:spcPct val="110000"/>
-              </a:lnSpc>
-              <a:buNone/>
-            </a:pPr>
-            <a:r>
-              <a:rPr lang="en-US" sz="1150" dirty="0">
-                <a:solidFill>
-                  <a:srgbClr val="5E6B64"/>
-                </a:solidFill>
-                <a:latin typeface="Calibri" pitchFamily="34" charset="0"/>
-                <a:ea typeface="Calibri" pitchFamily="34" charset="-122"/>
-                <a:cs typeface="Calibri" pitchFamily="34" charset="-120"/>
-              </a:rPr>
-              <a:t>Possible duplicates are flagged for a person to decide on</a:t>
-            </a:r>
-            <a:endParaRPr lang="en-US" sz="1150" dirty="0"/>
+              <a:t>Playwright · Git</a:t>
+            </a:r>
+            <a:endParaRPr lang="en-US" sz="1100" dirty="0"/>
           </a:p>
         </p:txBody>
       </p:sp>
@@ -8831,7 +10033,7 @@
                 <a:ea typeface="Cambria" pitchFamily="34" charset="-122"/>
                 <a:cs typeface="Cambria" pitchFamily="34" charset="-120"/>
               </a:rPr>
-              <a:t>Matching and Qualifying</a:t>
+              <a:t>Key System Functionality</a:t>
             </a:r>
             <a:endParaRPr lang="en-US" sz="3100" dirty="0"/>
           </a:p>
@@ -8870,7 +10072,7 @@
                 <a:ea typeface="Calibri" pitchFamily="34" charset="-122"/>
                 <a:cs typeface="Calibri" pitchFamily="34" charset="-120"/>
               </a:rPr>
-              <a:t>Two different questions, kept apart on purpose</a:t>
+              <a:t>Both sides, in one system</a:t>
             </a:r>
             <a:endParaRPr lang="en-US" sz="1250" dirty="0"/>
           </a:p>
@@ -8878,48 +10080,66 @@
       </p:sp>
       <p:sp>
         <p:nvSpPr>
-          <p:cNvPr id="4" name="Shape 2"/>
-          <p:cNvSpPr/>
-          <p:nvPr/>
-        </p:nvSpPr>
-        <p:spPr>
-          <a:xfrm>
-            <a:off x="4160520" y="1481328"/>
-            <a:ext cx="3840480" cy="566928"/>
-          </a:xfrm>
-          <a:prstGeom prst="roundRect">
-            <a:avLst>
-              <a:gd name="adj" fmla="val 12903"/>
-            </a:avLst>
+          <p:cNvPr id="4" name="Text 2"/>
+          <p:cNvSpPr txBox="1"/>
+          <p:nvPr/>
+        </p:nvSpPr>
+        <p:spPr>
+          <a:xfrm>
+            <a:off x="566928" y="1517904"/>
+            <a:ext cx="5513832" cy="292608"/>
+          </a:xfrm>
+          <a:prstGeom prst="rect">
+            <a:avLst/>
+          </a:prstGeom>
+          <a:noFill/>
+          <a:ln/>
+        </p:spPr>
+        <p:txBody>
+          <a:bodyPr wrap="square" lIns="0" tIns="0" rIns="0" bIns="0" rtlCol="0" anchor="ctr"/>
+          <a:lstStyle/>
+          <a:p>
+            <a:pPr indent="0" marL="0">
+              <a:buNone/>
+            </a:pPr>
+            <a:r>
+              <a:rPr lang="en-US" sz="1200" b="1" spc="120" kern="0" dirty="0">
+                <a:solidFill>
+                  <a:srgbClr val="5E6B64"/>
+                </a:solidFill>
+                <a:latin typeface="Calibri" pitchFamily="34" charset="0"/>
+                <a:ea typeface="Calibri" pitchFamily="34" charset="-122"/>
+                <a:cs typeface="Calibri" pitchFamily="34" charset="-120"/>
+              </a:rPr>
+              <a:t>THE STUDENT SIDE</a:t>
+            </a:r>
+            <a:endParaRPr lang="en-US" sz="1200" dirty="0"/>
+          </a:p>
+        </p:txBody>
+      </p:sp>
+      <p:sp>
+        <p:nvSpPr>
+          <p:cNvPr id="5" name="Text 3"/>
+          <p:cNvSpPr txBox="1"/>
+          <p:nvPr/>
+        </p:nvSpPr>
+        <p:spPr>
+          <a:xfrm>
+            <a:off x="566928" y="1956816"/>
+            <a:ext cx="274320" cy="274320"/>
+          </a:xfrm>
+          <a:prstGeom prst="ellipse">
+            <a:avLst/>
           </a:prstGeom>
           <a:solidFill>
             <a:srgbClr val="0F5132"/>
           </a:solidFill>
-          <a:ln w="12700">
+          <a:ln>
             <a:solidFill>
               <a:srgbClr val="0F5132"/>
             </a:solidFill>
-            <a:prstDash val="solid"/>
           </a:ln>
         </p:spPr>
-      </p:sp>
-      <p:sp>
-        <p:nvSpPr>
-          <p:cNvPr id="5" name="Text 3"/>
-          <p:cNvSpPr txBox="1"/>
-          <p:nvPr/>
-        </p:nvSpPr>
-        <p:spPr>
-          <a:xfrm>
-            <a:off x="4160520" y="1481328"/>
-            <a:ext cx="3840480" cy="566928"/>
-          </a:xfrm>
-          <a:prstGeom prst="rect">
-            <a:avLst/>
-          </a:prstGeom>
-          <a:noFill/>
-          <a:ln/>
-        </p:spPr>
         <p:txBody>
           <a:bodyPr wrap="square" lIns="0" tIns="0" rIns="0" bIns="0" rtlCol="0" anchor="ctr"/>
           <a:lstStyle/>
@@ -8928,7 +10148,7 @@
               <a:buNone/>
             </a:pPr>
             <a:r>
-              <a:rPr lang="en-US" sz="1400" b="1" spc="120" kern="0" dirty="0">
+              <a:rPr lang="en-US" sz="1200" b="1" dirty="0">
                 <a:solidFill>
                   <a:srgbClr val="FFFFFF"/>
                 </a:solidFill>
@@ -8936,96 +10156,164 @@
                 <a:ea typeface="Calibri" pitchFamily="34" charset="-122"/>
                 <a:cs typeface="Calibri" pitchFamily="34" charset="-120"/>
               </a:rPr>
-              <a:t>STUDENT PROFILE</a:t>
-            </a:r>
-            <a:endParaRPr lang="en-US" sz="1400" dirty="0"/>
-          </a:p>
-        </p:txBody>
-      </p:sp>
-      <p:sp>
-        <p:nvSpPr>
-          <p:cNvPr id="6" name="Shape 4"/>
-          <p:cNvSpPr/>
-          <p:nvPr/>
-        </p:nvSpPr>
-        <p:spPr>
-          <a:xfrm>
-            <a:off x="3223260" y="2157984"/>
-            <a:ext cx="201168" cy="201168"/>
-          </a:xfrm>
-          <a:prstGeom prst="downArrow">
-            <a:avLst/>
-          </a:prstGeom>
-          <a:solidFill>
-            <a:srgbClr val="9DBFA8"/>
-          </a:solidFill>
-          <a:ln w="12700">
+              <a:t>1</a:t>
+            </a:r>
+            <a:endParaRPr lang="en-US" sz="1200" dirty="0"/>
+          </a:p>
+        </p:txBody>
+      </p:sp>
+      <p:sp>
+        <p:nvSpPr>
+          <p:cNvPr id="6" name="Text 4"/>
+          <p:cNvSpPr txBox="1"/>
+          <p:nvPr/>
+        </p:nvSpPr>
+        <p:spPr>
+          <a:xfrm>
+            <a:off x="969264" y="1938528"/>
+            <a:ext cx="5111496" cy="256032"/>
+          </a:xfrm>
+          <a:prstGeom prst="rect">
+            <a:avLst/>
+          </a:prstGeom>
+          <a:noFill/>
+          <a:ln/>
+        </p:spPr>
+        <p:txBody>
+          <a:bodyPr wrap="square" lIns="0" tIns="0" rIns="0" bIns="0" rtlCol="0" anchor="ctr"/>
+          <a:lstStyle/>
+          <a:p>
+            <a:pPr indent="0" marL="0">
+              <a:buNone/>
+            </a:pPr>
+            <a:r>
+              <a:rPr lang="en-US" sz="1300" b="1" dirty="0">
+                <a:solidFill>
+                  <a:srgbClr val="0F5132"/>
+                </a:solidFill>
+                <a:latin typeface="Calibri" pitchFamily="34" charset="0"/>
+                <a:ea typeface="Calibri" pitchFamily="34" charset="-122"/>
+                <a:cs typeface="Calibri" pitchFamily="34" charset="-120"/>
+              </a:rPr>
+              <a:t>Account and profile</a:t>
+            </a:r>
+            <a:endParaRPr lang="en-US" sz="1300" dirty="0"/>
+          </a:p>
+        </p:txBody>
+      </p:sp>
+      <p:sp>
+        <p:nvSpPr>
+          <p:cNvPr id="7" name="Text 5"/>
+          <p:cNvSpPr txBox="1"/>
+          <p:nvPr/>
+        </p:nvSpPr>
+        <p:spPr>
+          <a:xfrm>
+            <a:off x="969264" y="2194560"/>
+            <a:ext cx="5111496" cy="420624"/>
+          </a:xfrm>
+          <a:prstGeom prst="rect">
+            <a:avLst/>
+          </a:prstGeom>
+          <a:noFill/>
+          <a:ln/>
+        </p:spPr>
+        <p:txBody>
+          <a:bodyPr wrap="square" lIns="0" tIns="0" rIns="0" bIns="0" rtlCol="0" anchor="ctr"/>
+          <a:lstStyle/>
+          <a:p>
+            <a:pPr indent="0" marL="0">
+              <a:lnSpc>
+                <a:spcPct val="110000"/>
+              </a:lnSpc>
+              <a:buNone/>
+            </a:pPr>
+            <a:r>
+              <a:rPr lang="en-US" sz="1150" dirty="0">
+                <a:solidFill>
+                  <a:srgbClr val="5E6B64"/>
+                </a:solidFill>
+                <a:latin typeface="Calibri" pitchFamily="34" charset="0"/>
+                <a:ea typeface="Calibri" pitchFamily="34" charset="-122"/>
+                <a:cs typeface="Calibri" pitchFamily="34" charset="-120"/>
+              </a:rPr>
+              <a:t>Personal details, marks, subjects and family income</a:t>
+            </a:r>
+            <a:endParaRPr lang="en-US" sz="1150" dirty="0"/>
+          </a:p>
+        </p:txBody>
+      </p:sp>
+      <p:sp>
+        <p:nvSpPr>
+          <p:cNvPr id="8" name="Text 6"/>
+          <p:cNvSpPr txBox="1"/>
+          <p:nvPr/>
+        </p:nvSpPr>
+        <p:spPr>
+          <a:xfrm>
+            <a:off x="566928" y="2715768"/>
+            <a:ext cx="274320" cy="274320"/>
+          </a:xfrm>
+          <a:prstGeom prst="ellipse">
+            <a:avLst/>
+          </a:prstGeom>
+          <a:solidFill>
+            <a:srgbClr val="0F5132"/>
+          </a:solidFill>
+          <a:ln>
             <a:solidFill>
-              <a:srgbClr val="9DBFA8"/>
-            </a:solidFill>
-            <a:prstDash val="solid"/>
-          </a:ln>
-        </p:spPr>
-      </p:sp>
-      <p:sp>
-        <p:nvSpPr>
-          <p:cNvPr id="7" name="Shape 5"/>
-          <p:cNvSpPr/>
-          <p:nvPr/>
-        </p:nvSpPr>
-        <p:spPr>
-          <a:xfrm>
-            <a:off x="9102852" y="2157984"/>
-            <a:ext cx="201168" cy="201168"/>
-          </a:xfrm>
-          <a:prstGeom prst="downArrow">
-            <a:avLst/>
-          </a:prstGeom>
-          <a:solidFill>
-            <a:srgbClr val="9DBFA8"/>
-          </a:solidFill>
-          <a:ln w="12700">
-            <a:solidFill>
-              <a:srgbClr val="9DBFA8"/>
-            </a:solidFill>
-            <a:prstDash val="solid"/>
-          </a:ln>
-        </p:spPr>
-      </p:sp>
-      <p:sp>
-        <p:nvSpPr>
-          <p:cNvPr id="8" name="Text 6"/>
-          <p:cNvSpPr txBox="1"/>
-          <p:nvPr/>
-        </p:nvSpPr>
-        <p:spPr>
-          <a:xfrm>
-            <a:off x="566928" y="2487168"/>
-            <a:ext cx="5513832" cy="566928"/>
-          </a:xfrm>
-          <a:prstGeom prst="roundRect">
-            <a:avLst>
-              <a:gd name="adj" fmla="val 12903"/>
-            </a:avLst>
-          </a:prstGeom>
-          <a:solidFill>
-            <a:srgbClr val="EDF3EF"/>
-          </a:solidFill>
-          <a:ln w="12700">
-            <a:solidFill>
-              <a:srgbClr val="9DBFA8"/>
+              <a:srgbClr val="0F5132"/>
             </a:solidFill>
           </a:ln>
         </p:spPr>
         <p:txBody>
-          <a:bodyPr wrap="square" lIns="508" tIns="508" rIns="508" bIns="508" rtlCol="0" anchor="ctr"/>
+          <a:bodyPr wrap="square" lIns="0" tIns="0" rIns="0" bIns="0" rtlCol="0" anchor="ctr"/>
           <a:lstStyle/>
           <a:p>
             <a:pPr algn="ctr" indent="0" marL="0">
               <a:buNone/>
             </a:pPr>
             <a:r>
-              <a:rPr lang="en-US" sz="1450" b="1" dirty="0">
+              <a:rPr lang="en-US" sz="1200" b="1" dirty="0">
+                <a:solidFill>
+                  <a:srgbClr val="FFFFFF"/>
+                </a:solidFill>
+                <a:latin typeface="Calibri" pitchFamily="34" charset="0"/>
+                <a:ea typeface="Calibri" pitchFamily="34" charset="-122"/>
+                <a:cs typeface="Calibri" pitchFamily="34" charset="-120"/>
+              </a:rPr>
+              <a:t>2</a:t>
+            </a:r>
+            <a:endParaRPr lang="en-US" sz="1200" dirty="0"/>
+          </a:p>
+        </p:txBody>
+      </p:sp>
+      <p:sp>
+        <p:nvSpPr>
+          <p:cNvPr id="9" name="Text 7"/>
+          <p:cNvSpPr txBox="1"/>
+          <p:nvPr/>
+        </p:nvSpPr>
+        <p:spPr>
+          <a:xfrm>
+            <a:off x="969264" y="2697480"/>
+            <a:ext cx="5111496" cy="256032"/>
+          </a:xfrm>
+          <a:prstGeom prst="rect">
+            <a:avLst/>
+          </a:prstGeom>
+          <a:noFill/>
+          <a:ln/>
+        </p:spPr>
+        <p:txBody>
+          <a:bodyPr wrap="square" lIns="0" tIns="0" rIns="0" bIns="0" rtlCol="0" anchor="ctr"/>
+          <a:lstStyle/>
+          <a:p>
+            <a:pPr indent="0" marL="0">
+              <a:buNone/>
+            </a:pPr>
+            <a:r>
+              <a:rPr lang="en-US" sz="1300" b="1" dirty="0">
                 <a:solidFill>
                   <a:srgbClr val="0F5132"/>
                 </a:solidFill>
@@ -9033,46 +10321,125 @@
                 <a:ea typeface="Calibri" pitchFamily="34" charset="-122"/>
                 <a:cs typeface="Calibri" pitchFamily="34" charset="-120"/>
               </a:rPr>
-              <a:t>Do they qualify?</a:t>
-            </a:r>
-            <a:endParaRPr lang="en-US" sz="1450" dirty="0"/>
-          </a:p>
-        </p:txBody>
-      </p:sp>
-      <p:sp>
-        <p:nvSpPr>
-          <p:cNvPr id="9" name="Text 7"/>
-          <p:cNvSpPr txBox="1"/>
-          <p:nvPr/>
-        </p:nvSpPr>
-        <p:spPr>
-          <a:xfrm>
-            <a:off x="6446520" y="2487168"/>
-            <a:ext cx="5513832" cy="566928"/>
-          </a:xfrm>
-          <a:prstGeom prst="roundRect">
-            <a:avLst>
-              <a:gd name="adj" fmla="val 12903"/>
-            </a:avLst>
-          </a:prstGeom>
-          <a:solidFill>
-            <a:srgbClr val="EDF3EF"/>
-          </a:solidFill>
-          <a:ln w="12700">
+              <a:t>List of all bursaries</a:t>
+            </a:r>
+            <a:endParaRPr lang="en-US" sz="1300" dirty="0"/>
+          </a:p>
+        </p:txBody>
+      </p:sp>
+      <p:sp>
+        <p:nvSpPr>
+          <p:cNvPr id="10" name="Text 8"/>
+          <p:cNvSpPr txBox="1"/>
+          <p:nvPr/>
+        </p:nvSpPr>
+        <p:spPr>
+          <a:xfrm>
+            <a:off x="969264" y="2953512"/>
+            <a:ext cx="5111496" cy="420624"/>
+          </a:xfrm>
+          <a:prstGeom prst="rect">
+            <a:avLst/>
+          </a:prstGeom>
+          <a:noFill/>
+          <a:ln/>
+        </p:spPr>
+        <p:txBody>
+          <a:bodyPr wrap="square" lIns="0" tIns="0" rIns="0" bIns="0" rtlCol="0" anchor="ctr"/>
+          <a:lstStyle/>
+          <a:p>
+            <a:pPr indent="0" marL="0">
+              <a:lnSpc>
+                <a:spcPct val="110000"/>
+              </a:lnSpc>
+              <a:buNone/>
+            </a:pPr>
+            <a:r>
+              <a:rPr lang="en-US" sz="1150" dirty="0">
+                <a:solidFill>
+                  <a:srgbClr val="5E6B64"/>
+                </a:solidFill>
+                <a:latin typeface="Calibri" pitchFamily="34" charset="0"/>
+                <a:ea typeface="Calibri" pitchFamily="34" charset="-122"/>
+                <a:cs typeface="Calibri" pitchFamily="34" charset="-120"/>
+              </a:rPr>
+              <a:t>Every bursary we hold, each showing where it came from</a:t>
+            </a:r>
+            <a:endParaRPr lang="en-US" sz="1150" dirty="0"/>
+          </a:p>
+        </p:txBody>
+      </p:sp>
+      <p:sp>
+        <p:nvSpPr>
+          <p:cNvPr id="11" name="Text 9"/>
+          <p:cNvSpPr txBox="1"/>
+          <p:nvPr/>
+        </p:nvSpPr>
+        <p:spPr>
+          <a:xfrm>
+            <a:off x="566928" y="3474720"/>
+            <a:ext cx="274320" cy="274320"/>
+          </a:xfrm>
+          <a:prstGeom prst="ellipse">
+            <a:avLst/>
+          </a:prstGeom>
+          <a:solidFill>
+            <a:srgbClr val="0F5132"/>
+          </a:solidFill>
+          <a:ln>
             <a:solidFill>
-              <a:srgbClr val="9DBFA8"/>
+              <a:srgbClr val="0F5132"/>
             </a:solidFill>
           </a:ln>
         </p:spPr>
         <p:txBody>
-          <a:bodyPr wrap="square" lIns="508" tIns="508" rIns="508" bIns="508" rtlCol="0" anchor="ctr"/>
+          <a:bodyPr wrap="square" lIns="0" tIns="0" rIns="0" bIns="0" rtlCol="0" anchor="ctr"/>
           <a:lstStyle/>
           <a:p>
             <a:pPr algn="ctr" indent="0" marL="0">
               <a:buNone/>
             </a:pPr>
             <a:r>
-              <a:rPr lang="en-US" sz="1450" b="1" dirty="0">
+              <a:rPr lang="en-US" sz="1200" b="1" dirty="0">
+                <a:solidFill>
+                  <a:srgbClr val="FFFFFF"/>
+                </a:solidFill>
+                <a:latin typeface="Calibri" pitchFamily="34" charset="0"/>
+                <a:ea typeface="Calibri" pitchFamily="34" charset="-122"/>
+                <a:cs typeface="Calibri" pitchFamily="34" charset="-120"/>
+              </a:rPr>
+              <a:t>3</a:t>
+            </a:r>
+            <a:endParaRPr lang="en-US" sz="1200" dirty="0"/>
+          </a:p>
+        </p:txBody>
+      </p:sp>
+      <p:sp>
+        <p:nvSpPr>
+          <p:cNvPr id="12" name="Text 10"/>
+          <p:cNvSpPr txBox="1"/>
+          <p:nvPr/>
+        </p:nvSpPr>
+        <p:spPr>
+          <a:xfrm>
+            <a:off x="969264" y="3456432"/>
+            <a:ext cx="5111496" cy="256032"/>
+          </a:xfrm>
+          <a:prstGeom prst="rect">
+            <a:avLst/>
+          </a:prstGeom>
+          <a:noFill/>
+          <a:ln/>
+        </p:spPr>
+        <p:txBody>
+          <a:bodyPr wrap="square" lIns="0" tIns="0" rIns="0" bIns="0" rtlCol="0" anchor="ctr"/>
+          <a:lstStyle/>
+          <a:p>
+            <a:pPr indent="0" marL="0">
+              <a:buNone/>
+            </a:pPr>
+            <a:r>
+              <a:rPr lang="en-US" sz="1300" b="1" dirty="0">
                 <a:solidFill>
                   <a:srgbClr val="0F5132"/>
                 </a:solidFill>
@@ -9080,96 +10447,125 @@
                 <a:ea typeface="Calibri" pitchFamily="34" charset="-122"/>
                 <a:cs typeface="Calibri" pitchFamily="34" charset="-120"/>
               </a:rPr>
-              <a:t>How well do they fit?</a:t>
-            </a:r>
-            <a:endParaRPr lang="en-US" sz="1450" dirty="0"/>
-          </a:p>
-        </p:txBody>
-      </p:sp>
-      <p:sp>
-        <p:nvSpPr>
-          <p:cNvPr id="10" name="Shape 8"/>
-          <p:cNvSpPr/>
-          <p:nvPr/>
-        </p:nvSpPr>
-        <p:spPr>
-          <a:xfrm>
-            <a:off x="3223260" y="3127248"/>
-            <a:ext cx="201168" cy="201168"/>
-          </a:xfrm>
-          <a:prstGeom prst="downArrow">
-            <a:avLst/>
-          </a:prstGeom>
-          <a:solidFill>
-            <a:srgbClr val="9DBFA8"/>
-          </a:solidFill>
-          <a:ln w="12700">
+              <a:t>Matching</a:t>
+            </a:r>
+            <a:endParaRPr lang="en-US" sz="1300" dirty="0"/>
+          </a:p>
+        </p:txBody>
+      </p:sp>
+      <p:sp>
+        <p:nvSpPr>
+          <p:cNvPr id="13" name="Text 11"/>
+          <p:cNvSpPr txBox="1"/>
+          <p:nvPr/>
+        </p:nvSpPr>
+        <p:spPr>
+          <a:xfrm>
+            <a:off x="969264" y="3712464"/>
+            <a:ext cx="5111496" cy="420624"/>
+          </a:xfrm>
+          <a:prstGeom prst="rect">
+            <a:avLst/>
+          </a:prstGeom>
+          <a:noFill/>
+          <a:ln/>
+        </p:spPr>
+        <p:txBody>
+          <a:bodyPr wrap="square" lIns="0" tIns="0" rIns="0" bIns="0" rtlCol="0" anchor="ctr"/>
+          <a:lstStyle/>
+          <a:p>
+            <a:pPr indent="0" marL="0">
+              <a:lnSpc>
+                <a:spcPct val="110000"/>
+              </a:lnSpc>
+              <a:buNone/>
+            </a:pPr>
+            <a:r>
+              <a:rPr lang="en-US" sz="1150" dirty="0">
+                <a:solidFill>
+                  <a:srgbClr val="5E6B64"/>
+                </a:solidFill>
+                <a:latin typeface="Calibri" pitchFamily="34" charset="0"/>
+                <a:ea typeface="Calibri" pitchFamily="34" charset="-122"/>
+                <a:cs typeface="Calibri" pitchFamily="34" charset="-120"/>
+              </a:rPr>
+              <a:t>A ranked list, with the reason behind every score</a:t>
+            </a:r>
+            <a:endParaRPr lang="en-US" sz="1150" dirty="0"/>
+          </a:p>
+        </p:txBody>
+      </p:sp>
+      <p:sp>
+        <p:nvSpPr>
+          <p:cNvPr id="14" name="Text 12"/>
+          <p:cNvSpPr txBox="1"/>
+          <p:nvPr/>
+        </p:nvSpPr>
+        <p:spPr>
+          <a:xfrm>
+            <a:off x="566928" y="4233672"/>
+            <a:ext cx="274320" cy="274320"/>
+          </a:xfrm>
+          <a:prstGeom prst="ellipse">
+            <a:avLst/>
+          </a:prstGeom>
+          <a:solidFill>
+            <a:srgbClr val="0F5132"/>
+          </a:solidFill>
+          <a:ln>
             <a:solidFill>
-              <a:srgbClr val="9DBFA8"/>
-            </a:solidFill>
-            <a:prstDash val="solid"/>
-          </a:ln>
-        </p:spPr>
-      </p:sp>
-      <p:sp>
-        <p:nvSpPr>
-          <p:cNvPr id="11" name="Shape 9"/>
-          <p:cNvSpPr/>
-          <p:nvPr/>
-        </p:nvSpPr>
-        <p:spPr>
-          <a:xfrm>
-            <a:off x="9102852" y="3127248"/>
-            <a:ext cx="201168" cy="201168"/>
-          </a:xfrm>
-          <a:prstGeom prst="downArrow">
-            <a:avLst/>
-          </a:prstGeom>
-          <a:solidFill>
-            <a:srgbClr val="9DBFA8"/>
-          </a:solidFill>
-          <a:ln w="12700">
-            <a:solidFill>
-              <a:srgbClr val="9DBFA8"/>
-            </a:solidFill>
-            <a:prstDash val="solid"/>
-          </a:ln>
-        </p:spPr>
-      </p:sp>
-      <p:sp>
-        <p:nvSpPr>
-          <p:cNvPr id="12" name="Text 10"/>
-          <p:cNvSpPr txBox="1"/>
-          <p:nvPr/>
-        </p:nvSpPr>
-        <p:spPr>
-          <a:xfrm>
-            <a:off x="566928" y="3456432"/>
-            <a:ext cx="1746504" cy="603504"/>
-          </a:xfrm>
-          <a:prstGeom prst="roundRect">
-            <a:avLst>
-              <a:gd name="adj" fmla="val 12121"/>
-            </a:avLst>
-          </a:prstGeom>
-          <a:solidFill>
-            <a:srgbClr val="FFFFFF"/>
-          </a:solidFill>
-          <a:ln w="12700">
-            <a:solidFill>
-              <a:srgbClr val="9DBFA8"/>
+              <a:srgbClr val="0F5132"/>
             </a:solidFill>
           </a:ln>
         </p:spPr>
         <p:txBody>
-          <a:bodyPr wrap="square" lIns="508" tIns="508" rIns="508" bIns="508" rtlCol="0" anchor="ctr"/>
+          <a:bodyPr wrap="square" lIns="0" tIns="0" rIns="0" bIns="0" rtlCol="0" anchor="ctr"/>
           <a:lstStyle/>
           <a:p>
             <a:pPr algn="ctr" indent="0" marL="0">
               <a:buNone/>
             </a:pPr>
             <a:r>
-              <a:rPr lang="en-US" sz="1150" b="1" dirty="0">
+              <a:rPr lang="en-US" sz="1200" b="1" dirty="0">
+                <a:solidFill>
+                  <a:srgbClr val="FFFFFF"/>
+                </a:solidFill>
+                <a:latin typeface="Calibri" pitchFamily="34" charset="0"/>
+                <a:ea typeface="Calibri" pitchFamily="34" charset="-122"/>
+                <a:cs typeface="Calibri" pitchFamily="34" charset="-120"/>
+              </a:rPr>
+              <a:t>4</a:t>
+            </a:r>
+            <a:endParaRPr lang="en-US" sz="1200" dirty="0"/>
+          </a:p>
+        </p:txBody>
+      </p:sp>
+      <p:sp>
+        <p:nvSpPr>
+          <p:cNvPr id="15" name="Text 13"/>
+          <p:cNvSpPr txBox="1"/>
+          <p:nvPr/>
+        </p:nvSpPr>
+        <p:spPr>
+          <a:xfrm>
+            <a:off x="969264" y="4215384"/>
+            <a:ext cx="5111496" cy="256032"/>
+          </a:xfrm>
+          <a:prstGeom prst="rect">
+            <a:avLst/>
+          </a:prstGeom>
+          <a:noFill/>
+          <a:ln/>
+        </p:spPr>
+        <p:txBody>
+          <a:bodyPr wrap="square" lIns="0" tIns="0" rIns="0" bIns="0" rtlCol="0" anchor="ctr"/>
+          <a:lstStyle/>
+          <a:p>
+            <a:pPr indent="0" marL="0">
+              <a:buNone/>
+            </a:pPr>
+            <a:r>
+              <a:rPr lang="en-US" sz="1300" b="1" dirty="0">
                 <a:solidFill>
                   <a:srgbClr val="0F5132"/>
                 </a:solidFill>
@@ -9177,7 +10573,49 @@
                 <a:ea typeface="Calibri" pitchFamily="34" charset="-122"/>
                 <a:cs typeface="Calibri" pitchFamily="34" charset="-120"/>
               </a:rPr>
-              <a:t>Qualifies</a:t>
+              <a:t>Applying</a:t>
+            </a:r>
+            <a:endParaRPr lang="en-US" sz="1300" dirty="0"/>
+          </a:p>
+        </p:txBody>
+      </p:sp>
+      <p:sp>
+        <p:nvSpPr>
+          <p:cNvPr id="16" name="Text 14"/>
+          <p:cNvSpPr txBox="1"/>
+          <p:nvPr/>
+        </p:nvSpPr>
+        <p:spPr>
+          <a:xfrm>
+            <a:off x="969264" y="4471416"/>
+            <a:ext cx="5111496" cy="420624"/>
+          </a:xfrm>
+          <a:prstGeom prst="rect">
+            <a:avLst/>
+          </a:prstGeom>
+          <a:noFill/>
+          <a:ln/>
+        </p:spPr>
+        <p:txBody>
+          <a:bodyPr wrap="square" lIns="0" tIns="0" rIns="0" bIns="0" rtlCol="0" anchor="ctr"/>
+          <a:lstStyle/>
+          <a:p>
+            <a:pPr indent="0" marL="0">
+              <a:lnSpc>
+                <a:spcPct val="110000"/>
+              </a:lnSpc>
+              <a:buNone/>
+            </a:pPr>
+            <a:r>
+              <a:rPr lang="en-US" sz="1150" dirty="0">
+                <a:solidFill>
+                  <a:srgbClr val="5E6B64"/>
+                </a:solidFill>
+                <a:latin typeface="Calibri" pitchFamily="34" charset="0"/>
+                <a:ea typeface="Calibri" pitchFamily="34" charset="-122"/>
+                <a:cs typeface="Calibri" pitchFamily="34" charset="-120"/>
+              </a:rPr>
+              <a:t>Apply using saved details, attach documents once, then track progress</a:t>
             </a:r>
             <a:endParaRPr lang="en-US" sz="1150" dirty="0"/>
           </a:p>
@@ -9185,38 +10623,75 @@
       </p:sp>
       <p:sp>
         <p:nvSpPr>
-          <p:cNvPr id="13" name="Text 11"/>
-          <p:cNvSpPr txBox="1"/>
-          <p:nvPr/>
-        </p:nvSpPr>
-        <p:spPr>
-          <a:xfrm>
-            <a:off x="2450592" y="3456432"/>
-            <a:ext cx="1746504" cy="603504"/>
-          </a:xfrm>
-          <a:prstGeom prst="roundRect">
-            <a:avLst>
-              <a:gd name="adj" fmla="val 12121"/>
-            </a:avLst>
-          </a:prstGeom>
-          <a:solidFill>
-            <a:srgbClr val="FFFFFF"/>
-          </a:solidFill>
-          <a:ln w="12700">
+          <p:cNvPr id="17" name="Text 15"/>
+          <p:cNvSpPr txBox="1"/>
+          <p:nvPr/>
+        </p:nvSpPr>
+        <p:spPr>
+          <a:xfrm>
+            <a:off x="566928" y="4992624"/>
+            <a:ext cx="274320" cy="274320"/>
+          </a:xfrm>
+          <a:prstGeom prst="ellipse">
+            <a:avLst/>
+          </a:prstGeom>
+          <a:solidFill>
+            <a:srgbClr val="0F5132"/>
+          </a:solidFill>
+          <a:ln>
             <a:solidFill>
-              <a:srgbClr val="9DBFA8"/>
+              <a:srgbClr val="0F5132"/>
             </a:solidFill>
           </a:ln>
         </p:spPr>
         <p:txBody>
-          <a:bodyPr wrap="square" lIns="508" tIns="508" rIns="508" bIns="508" rtlCol="0" anchor="ctr"/>
+          <a:bodyPr wrap="square" lIns="0" tIns="0" rIns="0" bIns="0" rtlCol="0" anchor="ctr"/>
           <a:lstStyle/>
           <a:p>
             <a:pPr algn="ctr" indent="0" marL="0">
               <a:buNone/>
             </a:pPr>
             <a:r>
-              <a:rPr lang="en-US" sz="1150" b="1" dirty="0">
+              <a:rPr lang="en-US" sz="1200" b="1" dirty="0">
+                <a:solidFill>
+                  <a:srgbClr val="FFFFFF"/>
+                </a:solidFill>
+                <a:latin typeface="Calibri" pitchFamily="34" charset="0"/>
+                <a:ea typeface="Calibri" pitchFamily="34" charset="-122"/>
+                <a:cs typeface="Calibri" pitchFamily="34" charset="-120"/>
+              </a:rPr>
+              <a:t>5</a:t>
+            </a:r>
+            <a:endParaRPr lang="en-US" sz="1200" dirty="0"/>
+          </a:p>
+        </p:txBody>
+      </p:sp>
+      <p:sp>
+        <p:nvSpPr>
+          <p:cNvPr id="18" name="Text 16"/>
+          <p:cNvSpPr txBox="1"/>
+          <p:nvPr/>
+        </p:nvSpPr>
+        <p:spPr>
+          <a:xfrm>
+            <a:off x="969264" y="4974336"/>
+            <a:ext cx="5111496" cy="256032"/>
+          </a:xfrm>
+          <a:prstGeom prst="rect">
+            <a:avLst/>
+          </a:prstGeom>
+          <a:noFill/>
+          <a:ln/>
+        </p:spPr>
+        <p:txBody>
+          <a:bodyPr wrap="square" lIns="0" tIns="0" rIns="0" bIns="0" rtlCol="0" anchor="ctr"/>
+          <a:lstStyle/>
+          <a:p>
+            <a:pPr indent="0" marL="0">
+              <a:buNone/>
+            </a:pPr>
+            <a:r>
+              <a:rPr lang="en-US" sz="1300" b="1" dirty="0">
                 <a:solidFill>
                   <a:srgbClr val="0F5132"/>
                 </a:solidFill>
@@ -9224,7 +10699,49 @@
                 <a:ea typeface="Calibri" pitchFamily="34" charset="-122"/>
                 <a:cs typeface="Calibri" pitchFamily="34" charset="-120"/>
               </a:rPr>
-              <a:t>Does not qualify</a:t>
+              <a:t>Auto-Fill for PDF forms</a:t>
+            </a:r>
+            <a:endParaRPr lang="en-US" sz="1300" dirty="0"/>
+          </a:p>
+        </p:txBody>
+      </p:sp>
+      <p:sp>
+        <p:nvSpPr>
+          <p:cNvPr id="19" name="Text 17"/>
+          <p:cNvSpPr txBox="1"/>
+          <p:nvPr/>
+        </p:nvSpPr>
+        <p:spPr>
+          <a:xfrm>
+            <a:off x="969264" y="5230368"/>
+            <a:ext cx="5111496" cy="420624"/>
+          </a:xfrm>
+          <a:prstGeom prst="rect">
+            <a:avLst/>
+          </a:prstGeom>
+          <a:noFill/>
+          <a:ln/>
+        </p:spPr>
+        <p:txBody>
+          <a:bodyPr wrap="square" lIns="0" tIns="0" rIns="0" bIns="0" rtlCol="0" anchor="ctr"/>
+          <a:lstStyle/>
+          <a:p>
+            <a:pPr indent="0" marL="0">
+              <a:lnSpc>
+                <a:spcPct val="110000"/>
+              </a:lnSpc>
+              <a:buNone/>
+            </a:pPr>
+            <a:r>
+              <a:rPr lang="en-US" sz="1150" dirty="0">
+                <a:solidFill>
+                  <a:srgbClr val="5E6B64"/>
+                </a:solidFill>
+                <a:latin typeface="Calibri" pitchFamily="34" charset="0"/>
+                <a:ea typeface="Calibri" pitchFamily="34" charset="-122"/>
+                <a:cs typeface="Calibri" pitchFamily="34" charset="-120"/>
+              </a:rPr>
+              <a:t>Fills a form from the profile, and says how sure it is each time</a:t>
             </a:r>
             <a:endParaRPr lang="en-US" sz="1150" dirty="0"/>
           </a:p>
@@ -9232,38 +10749,75 @@
       </p:sp>
       <p:sp>
         <p:nvSpPr>
-          <p:cNvPr id="14" name="Text 12"/>
-          <p:cNvSpPr txBox="1"/>
-          <p:nvPr/>
-        </p:nvSpPr>
-        <p:spPr>
-          <a:xfrm>
-            <a:off x="4334256" y="3456432"/>
-            <a:ext cx="1746504" cy="603504"/>
-          </a:xfrm>
-          <a:prstGeom prst="roundRect">
-            <a:avLst>
-              <a:gd name="adj" fmla="val 12121"/>
-            </a:avLst>
-          </a:prstGeom>
-          <a:solidFill>
-            <a:srgbClr val="FFFFFF"/>
-          </a:solidFill>
-          <a:ln w="12700">
+          <p:cNvPr id="20" name="Text 18"/>
+          <p:cNvSpPr txBox="1"/>
+          <p:nvPr/>
+        </p:nvSpPr>
+        <p:spPr>
+          <a:xfrm>
+            <a:off x="566928" y="5751576"/>
+            <a:ext cx="274320" cy="274320"/>
+          </a:xfrm>
+          <a:prstGeom prst="ellipse">
+            <a:avLst/>
+          </a:prstGeom>
+          <a:solidFill>
+            <a:srgbClr val="0F5132"/>
+          </a:solidFill>
+          <a:ln>
             <a:solidFill>
-              <a:srgbClr val="9DBFA8"/>
+              <a:srgbClr val="0F5132"/>
             </a:solidFill>
           </a:ln>
         </p:spPr>
         <p:txBody>
-          <a:bodyPr wrap="square" lIns="508" tIns="508" rIns="508" bIns="508" rtlCol="0" anchor="ctr"/>
+          <a:bodyPr wrap="square" lIns="0" tIns="0" rIns="0" bIns="0" rtlCol="0" anchor="ctr"/>
           <a:lstStyle/>
           <a:p>
             <a:pPr algn="ctr" indent="0" marL="0">
               <a:buNone/>
             </a:pPr>
             <a:r>
-              <a:rPr lang="en-US" sz="1150" b="1" dirty="0">
+              <a:rPr lang="en-US" sz="1200" b="1" dirty="0">
+                <a:solidFill>
+                  <a:srgbClr val="FFFFFF"/>
+                </a:solidFill>
+                <a:latin typeface="Calibri" pitchFamily="34" charset="0"/>
+                <a:ea typeface="Calibri" pitchFamily="34" charset="-122"/>
+                <a:cs typeface="Calibri" pitchFamily="34" charset="-120"/>
+              </a:rPr>
+              <a:t>6</a:t>
+            </a:r>
+            <a:endParaRPr lang="en-US" sz="1200" dirty="0"/>
+          </a:p>
+        </p:txBody>
+      </p:sp>
+      <p:sp>
+        <p:nvSpPr>
+          <p:cNvPr id="21" name="Text 19"/>
+          <p:cNvSpPr txBox="1"/>
+          <p:nvPr/>
+        </p:nvSpPr>
+        <p:spPr>
+          <a:xfrm>
+            <a:off x="969264" y="5733288"/>
+            <a:ext cx="5111496" cy="256032"/>
+          </a:xfrm>
+          <a:prstGeom prst="rect">
+            <a:avLst/>
+          </a:prstGeom>
+          <a:noFill/>
+          <a:ln/>
+        </p:spPr>
+        <p:txBody>
+          <a:bodyPr wrap="square" lIns="0" tIns="0" rIns="0" bIns="0" rtlCol="0" anchor="ctr"/>
+          <a:lstStyle/>
+          <a:p>
+            <a:pPr indent="0" marL="0">
+              <a:buNone/>
+            </a:pPr>
+            <a:r>
+              <a:rPr lang="en-US" sz="1300" b="1" dirty="0">
                 <a:solidFill>
                   <a:srgbClr val="0F5132"/>
                 </a:solidFill>
@@ -9271,7 +10825,49 @@
                 <a:ea typeface="Calibri" pitchFamily="34" charset="-122"/>
                 <a:cs typeface="Calibri" pitchFamily="34" charset="-120"/>
               </a:rPr>
-              <a:t>Need more info</a:t>
+              <a:t>Motivation letter helper</a:t>
+            </a:r>
+            <a:endParaRPr lang="en-US" sz="1300" dirty="0"/>
+          </a:p>
+        </p:txBody>
+      </p:sp>
+      <p:sp>
+        <p:nvSpPr>
+          <p:cNvPr id="22" name="Text 20"/>
+          <p:cNvSpPr txBox="1"/>
+          <p:nvPr/>
+        </p:nvSpPr>
+        <p:spPr>
+          <a:xfrm>
+            <a:off x="969264" y="5989320"/>
+            <a:ext cx="5111496" cy="420624"/>
+          </a:xfrm>
+          <a:prstGeom prst="rect">
+            <a:avLst/>
+          </a:prstGeom>
+          <a:noFill/>
+          <a:ln/>
+        </p:spPr>
+        <p:txBody>
+          <a:bodyPr wrap="square" lIns="0" tIns="0" rIns="0" bIns="0" rtlCol="0" anchor="ctr"/>
+          <a:lstStyle/>
+          <a:p>
+            <a:pPr indent="0" marL="0">
+              <a:lnSpc>
+                <a:spcPct val="110000"/>
+              </a:lnSpc>
+              <a:buNone/>
+            </a:pPr>
+            <a:r>
+              <a:rPr lang="en-US" sz="1150" dirty="0">
+                <a:solidFill>
+                  <a:srgbClr val="5E6B64"/>
+                </a:solidFill>
+                <a:latin typeface="Calibri" pitchFamily="34" charset="0"/>
+                <a:ea typeface="Calibri" pitchFamily="34" charset="-122"/>
+                <a:cs typeface="Calibri" pitchFamily="34" charset="-120"/>
+              </a:rPr>
+              <a:t>Built from what the student said — it never writes for them</a:t>
             </a:r>
             <a:endParaRPr lang="en-US" sz="1150" dirty="0"/>
           </a:p>
@@ -9279,123 +10875,240 @@
       </p:sp>
       <p:sp>
         <p:nvSpPr>
-          <p:cNvPr id="15" name="Shape 13"/>
-          <p:cNvSpPr/>
-          <p:nvPr/>
-        </p:nvSpPr>
-        <p:spPr>
-          <a:xfrm>
-            <a:off x="6446520" y="3456432"/>
-            <a:ext cx="5513832" cy="603504"/>
-          </a:xfrm>
-          <a:prstGeom prst="roundRect">
-            <a:avLst>
-              <a:gd name="adj" fmla="val 12121"/>
-            </a:avLst>
-          </a:prstGeom>
-          <a:solidFill>
-            <a:srgbClr val="C08A2E"/>
-          </a:solidFill>
-          <a:ln w="12700">
+          <p:cNvPr id="23" name="Text 21"/>
+          <p:cNvSpPr txBox="1"/>
+          <p:nvPr/>
+        </p:nvSpPr>
+        <p:spPr>
+          <a:xfrm>
+            <a:off x="6446520" y="1517904"/>
+            <a:ext cx="5513832" cy="292608"/>
+          </a:xfrm>
+          <a:prstGeom prst="rect">
+            <a:avLst/>
+          </a:prstGeom>
+          <a:noFill/>
+          <a:ln/>
+        </p:spPr>
+        <p:txBody>
+          <a:bodyPr wrap="square" lIns="0" tIns="0" rIns="0" bIns="0" rtlCol="0" anchor="ctr"/>
+          <a:lstStyle/>
+          <a:p>
+            <a:pPr indent="0" marL="0">
+              <a:buNone/>
+            </a:pPr>
+            <a:r>
+              <a:rPr lang="en-US" sz="1200" b="1" spc="120" kern="0" dirty="0">
+                <a:solidFill>
+                  <a:srgbClr val="5E6B64"/>
+                </a:solidFill>
+                <a:latin typeface="Calibri" pitchFamily="34" charset="0"/>
+                <a:ea typeface="Calibri" pitchFamily="34" charset="-122"/>
+                <a:cs typeface="Calibri" pitchFamily="34" charset="-120"/>
+              </a:rPr>
+              <a:t>THE COMPANY SIDE</a:t>
+            </a:r>
+            <a:endParaRPr lang="en-US" sz="1200" dirty="0"/>
+          </a:p>
+        </p:txBody>
+      </p:sp>
+      <p:sp>
+        <p:nvSpPr>
+          <p:cNvPr id="24" name="Text 22"/>
+          <p:cNvSpPr txBox="1"/>
+          <p:nvPr/>
+        </p:nvSpPr>
+        <p:spPr>
+          <a:xfrm>
+            <a:off x="6446520" y="1956816"/>
+            <a:ext cx="274320" cy="274320"/>
+          </a:xfrm>
+          <a:prstGeom prst="ellipse">
+            <a:avLst/>
+          </a:prstGeom>
+          <a:solidFill>
+            <a:srgbClr val="0F5132"/>
+          </a:solidFill>
+          <a:ln>
             <a:solidFill>
-              <a:srgbClr val="C08A2E"/>
+              <a:srgbClr val="0F5132"/>
             </a:solidFill>
-            <a:prstDash val="solid"/>
           </a:ln>
         </p:spPr>
-      </p:sp>
-      <p:sp>
-        <p:nvSpPr>
-          <p:cNvPr id="16" name="Text 14"/>
-          <p:cNvSpPr txBox="1"/>
-          <p:nvPr/>
-        </p:nvSpPr>
-        <p:spPr>
-          <a:xfrm>
-            <a:off x="6446520" y="3456432"/>
-            <a:ext cx="5513832" cy="603504"/>
-          </a:xfrm>
-          <a:prstGeom prst="rect">
-            <a:avLst/>
-          </a:prstGeom>
-          <a:noFill/>
-          <a:ln/>
-        </p:spPr>
-        <p:txBody>
-          <a:bodyPr wrap="square" lIns="508" tIns="508" rIns="508" bIns="508" rtlCol="0" anchor="ctr"/>
+        <p:txBody>
+          <a:bodyPr wrap="square" lIns="0" tIns="0" rIns="0" bIns="0" rtlCol="0" anchor="ctr"/>
           <a:lstStyle/>
           <a:p>
             <a:pPr algn="ctr" indent="0" marL="0">
               <a:buNone/>
             </a:pPr>
             <a:r>
-              <a:rPr lang="en-US" sz="1250" b="1" dirty="0">
-                <a:solidFill>
-                  <a:srgbClr val="2A1D05"/>
-                </a:solidFill>
-                <a:latin typeface="Calibri" pitchFamily="34" charset="0"/>
-                <a:ea typeface="Calibri" pitchFamily="34" charset="-122"/>
-                <a:cs typeface="Calibri" pitchFamily="34" charset="-120"/>
-              </a:rPr>
-              <a:t>A match score out of 100, with a reason for every rule</a:t>
-            </a:r>
-            <a:endParaRPr lang="en-US" sz="1250" dirty="0"/>
-          </a:p>
-        </p:txBody>
-      </p:sp>
-      <p:sp>
-        <p:nvSpPr>
-          <p:cNvPr id="17" name="Shape 15"/>
-          <p:cNvSpPr/>
-          <p:nvPr/>
-        </p:nvSpPr>
-        <p:spPr>
-          <a:xfrm>
-            <a:off x="566928" y="4261104"/>
-            <a:ext cx="5513832" cy="1371600"/>
-          </a:xfrm>
-          <a:prstGeom prst="roundRect">
-            <a:avLst>
-              <a:gd name="adj" fmla="val 6000"/>
-            </a:avLst>
-          </a:prstGeom>
-          <a:solidFill>
-            <a:srgbClr val="EDF3EF"/>
-          </a:solidFill>
-          <a:ln w="12700">
+              <a:rPr lang="en-US" sz="1200" b="1" dirty="0">
+                <a:solidFill>
+                  <a:srgbClr val="FFFFFF"/>
+                </a:solidFill>
+                <a:latin typeface="Calibri" pitchFamily="34" charset="0"/>
+                <a:ea typeface="Calibri" pitchFamily="34" charset="-122"/>
+                <a:cs typeface="Calibri" pitchFamily="34" charset="-120"/>
+              </a:rPr>
+              <a:t>1</a:t>
+            </a:r>
+            <a:endParaRPr lang="en-US" sz="1200" dirty="0"/>
+          </a:p>
+        </p:txBody>
+      </p:sp>
+      <p:sp>
+        <p:nvSpPr>
+          <p:cNvPr id="25" name="Text 23"/>
+          <p:cNvSpPr txBox="1"/>
+          <p:nvPr/>
+        </p:nvSpPr>
+        <p:spPr>
+          <a:xfrm>
+            <a:off x="6848856" y="1938528"/>
+            <a:ext cx="5111496" cy="256032"/>
+          </a:xfrm>
+          <a:prstGeom prst="rect">
+            <a:avLst/>
+          </a:prstGeom>
+          <a:noFill/>
+          <a:ln/>
+        </p:spPr>
+        <p:txBody>
+          <a:bodyPr wrap="square" lIns="0" tIns="0" rIns="0" bIns="0" rtlCol="0" anchor="ctr"/>
+          <a:lstStyle/>
+          <a:p>
+            <a:pPr indent="0" marL="0">
+              <a:buNone/>
+            </a:pPr>
+            <a:r>
+              <a:rPr lang="en-US" sz="1300" b="1" dirty="0">
+                <a:solidFill>
+                  <a:srgbClr val="0F5132"/>
+                </a:solidFill>
+                <a:latin typeface="Calibri" pitchFamily="34" charset="0"/>
+                <a:ea typeface="Calibri" pitchFamily="34" charset="-122"/>
+                <a:cs typeface="Calibri" pitchFamily="34" charset="-120"/>
+              </a:rPr>
+              <a:t>Company account</a:t>
+            </a:r>
+            <a:endParaRPr lang="en-US" sz="1300" dirty="0"/>
+          </a:p>
+        </p:txBody>
+      </p:sp>
+      <p:sp>
+        <p:nvSpPr>
+          <p:cNvPr id="26" name="Text 24"/>
+          <p:cNvSpPr txBox="1"/>
+          <p:nvPr/>
+        </p:nvSpPr>
+        <p:spPr>
+          <a:xfrm>
+            <a:off x="6848856" y="2194560"/>
+            <a:ext cx="5111496" cy="420624"/>
+          </a:xfrm>
+          <a:prstGeom prst="rect">
+            <a:avLst/>
+          </a:prstGeom>
+          <a:noFill/>
+          <a:ln/>
+        </p:spPr>
+        <p:txBody>
+          <a:bodyPr wrap="square" lIns="0" tIns="0" rIns="0" bIns="0" rtlCol="0" anchor="ctr"/>
+          <a:lstStyle/>
+          <a:p>
+            <a:pPr indent="0" marL="0">
+              <a:lnSpc>
+                <a:spcPct val="110000"/>
+              </a:lnSpc>
+              <a:buNone/>
+            </a:pPr>
+            <a:r>
+              <a:rPr lang="en-US" sz="1150" dirty="0">
+                <a:solidFill>
+                  <a:srgbClr val="5E6B64"/>
+                </a:solidFill>
+                <a:latin typeface="Calibri" pitchFamily="34" charset="0"/>
+                <a:ea typeface="Calibri" pitchFamily="34" charset="-122"/>
+                <a:cs typeface="Calibri" pitchFamily="34" charset="-120"/>
+              </a:rPr>
+              <a:t>Signing up, and the company details</a:t>
+            </a:r>
+            <a:endParaRPr lang="en-US" sz="1150" dirty="0"/>
+          </a:p>
+        </p:txBody>
+      </p:sp>
+      <p:sp>
+        <p:nvSpPr>
+          <p:cNvPr id="27" name="Text 25"/>
+          <p:cNvSpPr txBox="1"/>
+          <p:nvPr/>
+        </p:nvSpPr>
+        <p:spPr>
+          <a:xfrm>
+            <a:off x="6446520" y="2715768"/>
+            <a:ext cx="274320" cy="274320"/>
+          </a:xfrm>
+          <a:prstGeom prst="ellipse">
+            <a:avLst/>
+          </a:prstGeom>
+          <a:solidFill>
+            <a:srgbClr val="0F5132"/>
+          </a:solidFill>
+          <a:ln>
             <a:solidFill>
-              <a:srgbClr val="EDF3EF"/>
+              <a:srgbClr val="0F5132"/>
             </a:solidFill>
-            <a:prstDash val="solid"/>
           </a:ln>
         </p:spPr>
-      </p:sp>
-      <p:sp>
-        <p:nvSpPr>
-          <p:cNvPr id="18" name="Text 16"/>
-          <p:cNvSpPr txBox="1"/>
-          <p:nvPr/>
-        </p:nvSpPr>
-        <p:spPr>
-          <a:xfrm>
-            <a:off x="804672" y="4425696"/>
-            <a:ext cx="5038344" cy="310896"/>
-          </a:xfrm>
-          <a:prstGeom prst="rect">
-            <a:avLst/>
-          </a:prstGeom>
-          <a:noFill/>
-          <a:ln/>
-        </p:spPr>
-        <p:txBody>
-          <a:bodyPr wrap="square" lIns="0" tIns="0" rIns="0" bIns="0" rtlCol="0" anchor="ctr"/>
-          <a:lstStyle/>
-          <a:p>
-            <a:pPr indent="0" marL="0">
-              <a:buNone/>
-            </a:pPr>
-            <a:r>
-              <a:rPr lang="en-US" sz="1450" b="1" dirty="0">
+        <p:txBody>
+          <a:bodyPr wrap="square" lIns="0" tIns="0" rIns="0" bIns="0" rtlCol="0" anchor="ctr"/>
+          <a:lstStyle/>
+          <a:p>
+            <a:pPr algn="ctr" indent="0" marL="0">
+              <a:buNone/>
+            </a:pPr>
+            <a:r>
+              <a:rPr lang="en-US" sz="1200" b="1" dirty="0">
+                <a:solidFill>
+                  <a:srgbClr val="FFFFFF"/>
+                </a:solidFill>
+                <a:latin typeface="Calibri" pitchFamily="34" charset="0"/>
+                <a:ea typeface="Calibri" pitchFamily="34" charset="-122"/>
+                <a:cs typeface="Calibri" pitchFamily="34" charset="-120"/>
+              </a:rPr>
+              <a:t>2</a:t>
+            </a:r>
+            <a:endParaRPr lang="en-US" sz="1200" dirty="0"/>
+          </a:p>
+        </p:txBody>
+      </p:sp>
+      <p:sp>
+        <p:nvSpPr>
+          <p:cNvPr id="28" name="Text 26"/>
+          <p:cNvSpPr txBox="1"/>
+          <p:nvPr/>
+        </p:nvSpPr>
+        <p:spPr>
+          <a:xfrm>
+            <a:off x="6848856" y="2697480"/>
+            <a:ext cx="5111496" cy="256032"/>
+          </a:xfrm>
+          <a:prstGeom prst="rect">
+            <a:avLst/>
+          </a:prstGeom>
+          <a:noFill/>
+          <a:ln/>
+        </p:spPr>
+        <p:txBody>
+          <a:bodyPr wrap="square" lIns="0" tIns="0" rIns="0" bIns="0" rtlCol="0" anchor="ctr"/>
+          <a:lstStyle/>
+          <a:p>
+            <a:pPr indent="0" marL="0">
+              <a:buNone/>
+            </a:pPr>
+            <a:r>
+              <a:rPr lang="en-US" sz="1300" b="1" dirty="0">
                 <a:solidFill>
                   <a:srgbClr val="0F5132"/>
                 </a:solidFill>
@@ -9403,129 +11116,125 @@
                 <a:ea typeface="Calibri" pitchFamily="34" charset="-122"/>
                 <a:cs typeface="Calibri" pitchFamily="34" charset="-120"/>
               </a:rPr>
-              <a:t>When we cannot check a rule</a:t>
-            </a:r>
-            <a:endParaRPr lang="en-US" sz="1450" dirty="0"/>
-          </a:p>
-        </p:txBody>
-      </p:sp>
-      <p:sp>
-        <p:nvSpPr>
-          <p:cNvPr id="19" name="Text 17"/>
-          <p:cNvSpPr txBox="1"/>
-          <p:nvPr/>
-        </p:nvSpPr>
-        <p:spPr>
-          <a:xfrm>
-            <a:off x="804672" y="4791456"/>
-            <a:ext cx="5038344" cy="676656"/>
-          </a:xfrm>
-          <a:prstGeom prst="rect">
-            <a:avLst/>
-          </a:prstGeom>
-          <a:noFill/>
-          <a:ln/>
-        </p:spPr>
-        <p:txBody>
-          <a:bodyPr wrap="square" lIns="0" tIns="0" rIns="0" bIns="0" rtlCol="0" anchor="t"/>
-          <a:lstStyle/>
-          <a:p>
-            <a:pPr marL="342900" indent="-342900">
-              <a:spcAft>
-                <a:spcPts val="500"/>
-              </a:spcAft>
-              <a:buSzPct val="100000"/>
-              <a:buChar char="•"/>
-            </a:pPr>
-            <a:r>
-              <a:rPr lang="en-US" sz="1250" dirty="0">
-                <a:solidFill>
-                  <a:srgbClr val="16211C"/>
-                </a:solidFill>
-                <a:latin typeface="Calibri" pitchFamily="34" charset="0"/>
-                <a:ea typeface="Calibri" pitchFamily="34" charset="-122"/>
-                <a:cs typeface="Calibri" pitchFamily="34" charset="-120"/>
-              </a:rPr>
-              <a:t>It still counts towards the score, but only partly</a:t>
-            </a:r>
-            <a:endParaRPr lang="en-US" sz="1250" dirty="0"/>
-          </a:p>
-          <a:p>
-            <a:pPr marL="342900" indent="-342900">
-              <a:spcAft>
-                <a:spcPts val="500"/>
-              </a:spcAft>
-              <a:buSzPct val="100000"/>
-              <a:buChar char="•"/>
-            </a:pPr>
-            <a:r>
-              <a:rPr lang="en-US" sz="1250" dirty="0">
-                <a:solidFill>
-                  <a:srgbClr val="16211C"/>
-                </a:solidFill>
-                <a:latin typeface="Calibri" pitchFamily="34" charset="0"/>
-                <a:ea typeface="Calibri" pitchFamily="34" charset="-122"/>
-                <a:cs typeface="Calibri" pitchFamily="34" charset="-120"/>
-              </a:rPr>
-              <a:t>We say so clearly. We never just mark it as failed</a:t>
-            </a:r>
-            <a:endParaRPr lang="en-US" sz="1250" dirty="0"/>
-          </a:p>
-        </p:txBody>
-      </p:sp>
-      <p:sp>
-        <p:nvSpPr>
-          <p:cNvPr id="20" name="Shape 18"/>
-          <p:cNvSpPr/>
-          <p:nvPr/>
-        </p:nvSpPr>
-        <p:spPr>
-          <a:xfrm>
-            <a:off x="6446520" y="4261104"/>
-            <a:ext cx="5513832" cy="1371600"/>
-          </a:xfrm>
-          <a:prstGeom prst="roundRect">
-            <a:avLst>
-              <a:gd name="adj" fmla="val 6000"/>
-            </a:avLst>
-          </a:prstGeom>
-          <a:solidFill>
-            <a:srgbClr val="EDF3EF"/>
-          </a:solidFill>
-          <a:ln w="12700">
+              <a:t>Advertise a bursary</a:t>
+            </a:r>
+            <a:endParaRPr lang="en-US" sz="1300" dirty="0"/>
+          </a:p>
+        </p:txBody>
+      </p:sp>
+      <p:sp>
+        <p:nvSpPr>
+          <p:cNvPr id="29" name="Text 27"/>
+          <p:cNvSpPr txBox="1"/>
+          <p:nvPr/>
+        </p:nvSpPr>
+        <p:spPr>
+          <a:xfrm>
+            <a:off x="6848856" y="2953512"/>
+            <a:ext cx="5111496" cy="420624"/>
+          </a:xfrm>
+          <a:prstGeom prst="rect">
+            <a:avLst/>
+          </a:prstGeom>
+          <a:noFill/>
+          <a:ln/>
+        </p:spPr>
+        <p:txBody>
+          <a:bodyPr wrap="square" lIns="0" tIns="0" rIns="0" bIns="0" rtlCol="0" anchor="ctr"/>
+          <a:lstStyle/>
+          <a:p>
+            <a:pPr indent="0" marL="0">
+              <a:lnSpc>
+                <a:spcPct val="110000"/>
+              </a:lnSpc>
+              <a:buNone/>
+            </a:pPr>
+            <a:r>
+              <a:rPr lang="en-US" sz="1150" dirty="0">
+                <a:solidFill>
+                  <a:srgbClr val="5E6B64"/>
+                </a:solidFill>
+                <a:latin typeface="Calibri" pitchFamily="34" charset="0"/>
+                <a:ea typeface="Calibri" pitchFamily="34" charset="-122"/>
+                <a:cs typeface="Calibri" pitchFamily="34" charset="-120"/>
+              </a:rPr>
+              <a:t>The rules are typed into boxes, not written as sentences</a:t>
+            </a:r>
+            <a:endParaRPr lang="en-US" sz="1150" dirty="0"/>
+          </a:p>
+        </p:txBody>
+      </p:sp>
+      <p:sp>
+        <p:nvSpPr>
+          <p:cNvPr id="30" name="Text 28"/>
+          <p:cNvSpPr txBox="1"/>
+          <p:nvPr/>
+        </p:nvSpPr>
+        <p:spPr>
+          <a:xfrm>
+            <a:off x="6446520" y="3474720"/>
+            <a:ext cx="274320" cy="274320"/>
+          </a:xfrm>
+          <a:prstGeom prst="ellipse">
+            <a:avLst/>
+          </a:prstGeom>
+          <a:solidFill>
+            <a:srgbClr val="0F5132"/>
+          </a:solidFill>
+          <a:ln>
             <a:solidFill>
-              <a:srgbClr val="EDF3EF"/>
+              <a:srgbClr val="0F5132"/>
             </a:solidFill>
-            <a:prstDash val="solid"/>
           </a:ln>
         </p:spPr>
-      </p:sp>
-      <p:sp>
-        <p:nvSpPr>
-          <p:cNvPr id="21" name="Text 19"/>
-          <p:cNvSpPr txBox="1"/>
-          <p:nvPr/>
-        </p:nvSpPr>
-        <p:spPr>
-          <a:xfrm>
-            <a:off x="6684264" y="4425696"/>
-            <a:ext cx="5038344" cy="310896"/>
-          </a:xfrm>
-          <a:prstGeom prst="rect">
-            <a:avLst/>
-          </a:prstGeom>
-          <a:noFill/>
-          <a:ln/>
-        </p:spPr>
-        <p:txBody>
-          <a:bodyPr wrap="square" lIns="0" tIns="0" rIns="0" bIns="0" rtlCol="0" anchor="ctr"/>
-          <a:lstStyle/>
-          <a:p>
-            <a:pPr indent="0" marL="0">
-              <a:buNone/>
-            </a:pPr>
-            <a:r>
-              <a:rPr lang="en-US" sz="1450" b="1" dirty="0">
+        <p:txBody>
+          <a:bodyPr wrap="square" lIns="0" tIns="0" rIns="0" bIns="0" rtlCol="0" anchor="ctr"/>
+          <a:lstStyle/>
+          <a:p>
+            <a:pPr algn="ctr" indent="0" marL="0">
+              <a:buNone/>
+            </a:pPr>
+            <a:r>
+              <a:rPr lang="en-US" sz="1200" b="1" dirty="0">
+                <a:solidFill>
+                  <a:srgbClr val="FFFFFF"/>
+                </a:solidFill>
+                <a:latin typeface="Calibri" pitchFamily="34" charset="0"/>
+                <a:ea typeface="Calibri" pitchFamily="34" charset="-122"/>
+                <a:cs typeface="Calibri" pitchFamily="34" charset="-120"/>
+              </a:rPr>
+              <a:t>3</a:t>
+            </a:r>
+            <a:endParaRPr lang="en-US" sz="1200" dirty="0"/>
+          </a:p>
+        </p:txBody>
+      </p:sp>
+      <p:sp>
+        <p:nvSpPr>
+          <p:cNvPr id="31" name="Text 29"/>
+          <p:cNvSpPr txBox="1"/>
+          <p:nvPr/>
+        </p:nvSpPr>
+        <p:spPr>
+          <a:xfrm>
+            <a:off x="6848856" y="3456432"/>
+            <a:ext cx="5111496" cy="256032"/>
+          </a:xfrm>
+          <a:prstGeom prst="rect">
+            <a:avLst/>
+          </a:prstGeom>
+          <a:noFill/>
+          <a:ln/>
+        </p:spPr>
+        <p:txBody>
+          <a:bodyPr wrap="square" lIns="0" tIns="0" rIns="0" bIns="0" rtlCol="0" anchor="ctr"/>
+          <a:lstStyle/>
+          <a:p>
+            <a:pPr indent="0" marL="0">
+              <a:buNone/>
+            </a:pPr>
+            <a:r>
+              <a:rPr lang="en-US" sz="1300" b="1" dirty="0">
                 <a:solidFill>
                   <a:srgbClr val="0F5132"/>
                 </a:solidFill>
@@ -9533,120 +11242,77 @@
                 <a:ea typeface="Calibri" pitchFamily="34" charset="-122"/>
                 <a:cs typeface="Calibri" pitchFamily="34" charset="-120"/>
               </a:rPr>
-              <a:t>What we compare</a:t>
-            </a:r>
-            <a:endParaRPr lang="en-US" sz="1450" dirty="0"/>
-          </a:p>
-        </p:txBody>
-      </p:sp>
-      <p:sp>
-        <p:nvSpPr>
-          <p:cNvPr id="22" name="Text 20"/>
-          <p:cNvSpPr txBox="1"/>
-          <p:nvPr/>
-        </p:nvSpPr>
-        <p:spPr>
-          <a:xfrm>
-            <a:off x="6684264" y="4791456"/>
-            <a:ext cx="5038344" cy="676656"/>
-          </a:xfrm>
-          <a:prstGeom prst="rect">
-            <a:avLst/>
-          </a:prstGeom>
-          <a:noFill/>
-          <a:ln/>
-        </p:spPr>
-        <p:txBody>
-          <a:bodyPr wrap="square" lIns="0" tIns="0" rIns="0" bIns="0" rtlCol="0" anchor="t"/>
-          <a:lstStyle/>
-          <a:p>
-            <a:pPr marL="342900" indent="-342900">
-              <a:spcAft>
-                <a:spcPts val="500"/>
-              </a:spcAft>
-              <a:buSzPct val="100000"/>
-              <a:buChar char="•"/>
-            </a:pPr>
-            <a:r>
-              <a:rPr lang="en-US" sz="1250" dirty="0">
-                <a:solidFill>
-                  <a:srgbClr val="16211C"/>
-                </a:solidFill>
-                <a:latin typeface="Calibri" pitchFamily="34" charset="0"/>
-                <a:ea typeface="Calibri" pitchFamily="34" charset="-122"/>
-                <a:cs typeface="Calibri" pitchFamily="34" charset="-120"/>
-              </a:rPr>
-              <a:t>Course · University · Marks</a:t>
-            </a:r>
-            <a:endParaRPr lang="en-US" sz="1250" dirty="0"/>
-          </a:p>
-          <a:p>
-            <a:pPr marL="342900" indent="-342900">
-              <a:spcAft>
-                <a:spcPts val="500"/>
-              </a:spcAft>
-              <a:buSzPct val="100000"/>
-              <a:buChar char="•"/>
-            </a:pPr>
-            <a:r>
-              <a:rPr lang="en-US" sz="1250" dirty="0">
-                <a:solidFill>
-                  <a:srgbClr val="16211C"/>
-                </a:solidFill>
-                <a:latin typeface="Calibri" pitchFamily="34" charset="0"/>
-                <a:ea typeface="Calibri" pitchFamily="34" charset="-122"/>
-                <a:cs typeface="Calibri" pitchFamily="34" charset="-120"/>
-              </a:rPr>
-              <a:t>Subjects needed · Family income · Background</a:t>
-            </a:r>
-            <a:endParaRPr lang="en-US" sz="1250" dirty="0"/>
-          </a:p>
-        </p:txBody>
-      </p:sp>
-      <p:sp>
-        <p:nvSpPr>
-          <p:cNvPr id="23" name="Shape 21"/>
-          <p:cNvSpPr/>
-          <p:nvPr/>
-        </p:nvSpPr>
-        <p:spPr>
-          <a:xfrm>
-            <a:off x="566928" y="5815584"/>
-            <a:ext cx="11027664" cy="566928"/>
-          </a:xfrm>
-          <a:prstGeom prst="roundRect">
-            <a:avLst>
-              <a:gd name="adj" fmla="val 12903"/>
-            </a:avLst>
-          </a:prstGeom>
-          <a:solidFill>
-            <a:srgbClr val="0B2E24"/>
-          </a:solidFill>
-          <a:ln w="12700">
+              <a:t>Review applicants</a:t>
+            </a:r>
+            <a:endParaRPr lang="en-US" sz="1300" dirty="0"/>
+          </a:p>
+        </p:txBody>
+      </p:sp>
+      <p:sp>
+        <p:nvSpPr>
+          <p:cNvPr id="32" name="Text 30"/>
+          <p:cNvSpPr txBox="1"/>
+          <p:nvPr/>
+        </p:nvSpPr>
+        <p:spPr>
+          <a:xfrm>
+            <a:off x="6848856" y="3712464"/>
+            <a:ext cx="5111496" cy="420624"/>
+          </a:xfrm>
+          <a:prstGeom prst="rect">
+            <a:avLst/>
+          </a:prstGeom>
+          <a:noFill/>
+          <a:ln/>
+        </p:spPr>
+        <p:txBody>
+          <a:bodyPr wrap="square" lIns="0" tIns="0" rIns="0" bIns="0" rtlCol="0" anchor="ctr"/>
+          <a:lstStyle/>
+          <a:p>
+            <a:pPr indent="0" marL="0">
+              <a:lnSpc>
+                <a:spcPct val="110000"/>
+              </a:lnSpc>
+              <a:buNone/>
+            </a:pPr>
+            <a:r>
+              <a:rPr lang="en-US" sz="1150" dirty="0">
+                <a:solidFill>
+                  <a:srgbClr val="5E6B64"/>
+                </a:solidFill>
+                <a:latin typeface="Calibri" pitchFamily="34" charset="0"/>
+                <a:ea typeface="Calibri" pitchFamily="34" charset="-122"/>
+                <a:cs typeface="Calibri" pitchFamily="34" charset="-120"/>
+              </a:rPr>
+              <a:t>Applications arrive organised, already checked against their rules</a:t>
+            </a:r>
+            <a:endParaRPr lang="en-US" sz="1150" dirty="0"/>
+          </a:p>
+        </p:txBody>
+      </p:sp>
+      <p:sp>
+        <p:nvSpPr>
+          <p:cNvPr id="33" name="Text 31"/>
+          <p:cNvSpPr txBox="1"/>
+          <p:nvPr/>
+        </p:nvSpPr>
+        <p:spPr>
+          <a:xfrm>
+            <a:off x="6446520" y="4233672"/>
+            <a:ext cx="274320" cy="274320"/>
+          </a:xfrm>
+          <a:prstGeom prst="ellipse">
+            <a:avLst/>
+          </a:prstGeom>
+          <a:solidFill>
+            <a:srgbClr val="0F5132"/>
+          </a:solidFill>
+          <a:ln>
             <a:solidFill>
-              <a:srgbClr val="0B2E24"/>
+              <a:srgbClr val="0F5132"/>
             </a:solidFill>
-            <a:prstDash val="solid"/>
           </a:ln>
         </p:spPr>
-      </p:sp>
-      <p:sp>
-        <p:nvSpPr>
-          <p:cNvPr id="24" name="Text 22"/>
-          <p:cNvSpPr txBox="1"/>
-          <p:nvPr/>
-        </p:nvSpPr>
-        <p:spPr>
-          <a:xfrm>
-            <a:off x="566928" y="5815584"/>
-            <a:ext cx="11027664" cy="566928"/>
-          </a:xfrm>
-          <a:prstGeom prst="rect">
-            <a:avLst/>
-          </a:prstGeom>
-          <a:noFill/>
-          <a:ln/>
-        </p:spPr>
         <p:txBody>
           <a:bodyPr wrap="square" lIns="0" tIns="0" rIns="0" bIns="0" rtlCol="0" anchor="ctr"/>
           <a:lstStyle/>
@@ -9655,7 +11321,7 @@
               <a:buNone/>
             </a:pPr>
             <a:r>
-              <a:rPr lang="en-US" sz="1350" b="1" dirty="0">
+              <a:rPr lang="en-US" sz="1200" b="1" dirty="0">
                 <a:solidFill>
                   <a:srgbClr val="FFFFFF"/>
                 </a:solidFill>
@@ -9663,9 +11329,342 @@
                 <a:ea typeface="Calibri" pitchFamily="34" charset="-122"/>
                 <a:cs typeface="Calibri" pitchFamily="34" charset="-120"/>
               </a:rPr>
-              <a:t>A high score does not mean they qualify. We check that separately.</a:t>
-            </a:r>
-            <a:endParaRPr lang="en-US" sz="1350" dirty="0"/>
+              <a:t>4</a:t>
+            </a:r>
+            <a:endParaRPr lang="en-US" sz="1200" dirty="0"/>
+          </a:p>
+        </p:txBody>
+      </p:sp>
+      <p:sp>
+        <p:nvSpPr>
+          <p:cNvPr id="34" name="Text 32"/>
+          <p:cNvSpPr txBox="1"/>
+          <p:nvPr/>
+        </p:nvSpPr>
+        <p:spPr>
+          <a:xfrm>
+            <a:off x="6848856" y="4215384"/>
+            <a:ext cx="5111496" cy="256032"/>
+          </a:xfrm>
+          <a:prstGeom prst="rect">
+            <a:avLst/>
+          </a:prstGeom>
+          <a:noFill/>
+          <a:ln/>
+        </p:spPr>
+        <p:txBody>
+          <a:bodyPr wrap="square" lIns="0" tIns="0" rIns="0" bIns="0" rtlCol="0" anchor="ctr"/>
+          <a:lstStyle/>
+          <a:p>
+            <a:pPr indent="0" marL="0">
+              <a:buNone/>
+            </a:pPr>
+            <a:r>
+              <a:rPr lang="en-US" sz="1300" b="1" dirty="0">
+                <a:solidFill>
+                  <a:srgbClr val="0F5132"/>
+                </a:solidFill>
+                <a:latin typeface="Calibri" pitchFamily="34" charset="0"/>
+                <a:ea typeface="Calibri" pitchFamily="34" charset="-122"/>
+                <a:cs typeface="Calibri" pitchFamily="34" charset="-120"/>
+              </a:rPr>
+              <a:t>Shortlist and choose</a:t>
+            </a:r>
+            <a:endParaRPr lang="en-US" sz="1300" dirty="0"/>
+          </a:p>
+        </p:txBody>
+      </p:sp>
+      <p:sp>
+        <p:nvSpPr>
+          <p:cNvPr id="35" name="Text 33"/>
+          <p:cNvSpPr txBox="1"/>
+          <p:nvPr/>
+        </p:nvSpPr>
+        <p:spPr>
+          <a:xfrm>
+            <a:off x="6848856" y="4471416"/>
+            <a:ext cx="5111496" cy="420624"/>
+          </a:xfrm>
+          <a:prstGeom prst="rect">
+            <a:avLst/>
+          </a:prstGeom>
+          <a:noFill/>
+          <a:ln/>
+        </p:spPr>
+        <p:txBody>
+          <a:bodyPr wrap="square" lIns="0" tIns="0" rIns="0" bIns="0" rtlCol="0" anchor="ctr"/>
+          <a:lstStyle/>
+          <a:p>
+            <a:pPr indent="0" marL="0">
+              <a:lnSpc>
+                <a:spcPct val="110000"/>
+              </a:lnSpc>
+              <a:buNone/>
+            </a:pPr>
+            <a:r>
+              <a:rPr lang="en-US" sz="1150" dirty="0">
+                <a:solidFill>
+                  <a:srgbClr val="5E6B64"/>
+                </a:solidFill>
+                <a:latin typeface="Calibri" pitchFamily="34" charset="0"/>
+                <a:ea typeface="Calibri" pitchFamily="34" charset="-122"/>
+                <a:cs typeface="Calibri" pitchFamily="34" charset="-120"/>
+              </a:rPr>
+              <a:t>Every step is recorded</a:t>
+            </a:r>
+            <a:endParaRPr lang="en-US" sz="1150" dirty="0"/>
+          </a:p>
+        </p:txBody>
+      </p:sp>
+      <p:sp>
+        <p:nvSpPr>
+          <p:cNvPr id="36" name="Text 34"/>
+          <p:cNvSpPr txBox="1"/>
+          <p:nvPr/>
+        </p:nvSpPr>
+        <p:spPr>
+          <a:xfrm>
+            <a:off x="6446520" y="4992624"/>
+            <a:ext cx="274320" cy="274320"/>
+          </a:xfrm>
+          <a:prstGeom prst="ellipse">
+            <a:avLst/>
+          </a:prstGeom>
+          <a:solidFill>
+            <a:srgbClr val="0F5132"/>
+          </a:solidFill>
+          <a:ln>
+            <a:solidFill>
+              <a:srgbClr val="0F5132"/>
+            </a:solidFill>
+          </a:ln>
+        </p:spPr>
+        <p:txBody>
+          <a:bodyPr wrap="square" lIns="0" tIns="0" rIns="0" bIns="0" rtlCol="0" anchor="ctr"/>
+          <a:lstStyle/>
+          <a:p>
+            <a:pPr algn="ctr" indent="0" marL="0">
+              <a:buNone/>
+            </a:pPr>
+            <a:r>
+              <a:rPr lang="en-US" sz="1200" b="1" dirty="0">
+                <a:solidFill>
+                  <a:srgbClr val="FFFFFF"/>
+                </a:solidFill>
+                <a:latin typeface="Calibri" pitchFamily="34" charset="0"/>
+                <a:ea typeface="Calibri" pitchFamily="34" charset="-122"/>
+                <a:cs typeface="Calibri" pitchFamily="34" charset="-120"/>
+              </a:rPr>
+              <a:t>5</a:t>
+            </a:r>
+            <a:endParaRPr lang="en-US" sz="1200" dirty="0"/>
+          </a:p>
+        </p:txBody>
+      </p:sp>
+      <p:sp>
+        <p:nvSpPr>
+          <p:cNvPr id="37" name="Text 35"/>
+          <p:cNvSpPr txBox="1"/>
+          <p:nvPr/>
+        </p:nvSpPr>
+        <p:spPr>
+          <a:xfrm>
+            <a:off x="6848856" y="4974336"/>
+            <a:ext cx="5111496" cy="256032"/>
+          </a:xfrm>
+          <a:prstGeom prst="rect">
+            <a:avLst/>
+          </a:prstGeom>
+          <a:noFill/>
+          <a:ln/>
+        </p:spPr>
+        <p:txBody>
+          <a:bodyPr wrap="square" lIns="0" tIns="0" rIns="0" bIns="0" rtlCol="0" anchor="ctr"/>
+          <a:lstStyle/>
+          <a:p>
+            <a:pPr indent="0" marL="0">
+              <a:buNone/>
+            </a:pPr>
+            <a:r>
+              <a:rPr lang="en-US" sz="1300" b="1" dirty="0">
+                <a:solidFill>
+                  <a:srgbClr val="0F5132"/>
+                </a:solidFill>
+                <a:latin typeface="Calibri" pitchFamily="34" charset="0"/>
+                <a:ea typeface="Calibri" pitchFamily="34" charset="-122"/>
+                <a:cs typeface="Calibri" pitchFamily="34" charset="-120"/>
+              </a:rPr>
+              <a:t>Upload many forms at once</a:t>
+            </a:r>
+            <a:endParaRPr lang="en-US" sz="1300" dirty="0"/>
+          </a:p>
+        </p:txBody>
+      </p:sp>
+      <p:sp>
+        <p:nvSpPr>
+          <p:cNvPr id="38" name="Text 36"/>
+          <p:cNvSpPr txBox="1"/>
+          <p:nvPr/>
+        </p:nvSpPr>
+        <p:spPr>
+          <a:xfrm>
+            <a:off x="6848856" y="5230368"/>
+            <a:ext cx="5111496" cy="420624"/>
+          </a:xfrm>
+          <a:prstGeom prst="rect">
+            <a:avLst/>
+          </a:prstGeom>
+          <a:noFill/>
+          <a:ln/>
+        </p:spPr>
+        <p:txBody>
+          <a:bodyPr wrap="square" lIns="0" tIns="0" rIns="0" bIns="0" rtlCol="0" anchor="ctr"/>
+          <a:lstStyle/>
+          <a:p>
+            <a:pPr indent="0" marL="0">
+              <a:lnSpc>
+                <a:spcPct val="110000"/>
+              </a:lnSpc>
+              <a:buNone/>
+            </a:pPr>
+            <a:r>
+              <a:rPr lang="en-US" sz="1150" dirty="0">
+                <a:solidFill>
+                  <a:srgbClr val="5E6B64"/>
+                </a:solidFill>
+                <a:latin typeface="Calibri" pitchFamily="34" charset="0"/>
+                <a:ea typeface="Calibri" pitchFamily="34" charset="-122"/>
+                <a:cs typeface="Calibri" pitchFamily="34" charset="-120"/>
+              </a:rPr>
+              <a:t>Forms sent by email are read in, then checked before saving</a:t>
+            </a:r>
+            <a:endParaRPr lang="en-US" sz="1150" dirty="0"/>
+          </a:p>
+        </p:txBody>
+      </p:sp>
+      <p:sp>
+        <p:nvSpPr>
+          <p:cNvPr id="39" name="Text 37"/>
+          <p:cNvSpPr txBox="1"/>
+          <p:nvPr/>
+        </p:nvSpPr>
+        <p:spPr>
+          <a:xfrm>
+            <a:off x="6446520" y="5751576"/>
+            <a:ext cx="274320" cy="274320"/>
+          </a:xfrm>
+          <a:prstGeom prst="ellipse">
+            <a:avLst/>
+          </a:prstGeom>
+          <a:solidFill>
+            <a:srgbClr val="0F5132"/>
+          </a:solidFill>
+          <a:ln>
+            <a:solidFill>
+              <a:srgbClr val="0F5132"/>
+            </a:solidFill>
+          </a:ln>
+        </p:spPr>
+        <p:txBody>
+          <a:bodyPr wrap="square" lIns="0" tIns="0" rIns="0" bIns="0" rtlCol="0" anchor="ctr"/>
+          <a:lstStyle/>
+          <a:p>
+            <a:pPr algn="ctr" indent="0" marL="0">
+              <a:buNone/>
+            </a:pPr>
+            <a:r>
+              <a:rPr lang="en-US" sz="1200" b="1" dirty="0">
+                <a:solidFill>
+                  <a:srgbClr val="FFFFFF"/>
+                </a:solidFill>
+                <a:latin typeface="Calibri" pitchFamily="34" charset="0"/>
+                <a:ea typeface="Calibri" pitchFamily="34" charset="-122"/>
+                <a:cs typeface="Calibri" pitchFamily="34" charset="-120"/>
+              </a:rPr>
+              <a:t>6</a:t>
+            </a:r>
+            <a:endParaRPr lang="en-US" sz="1200" dirty="0"/>
+          </a:p>
+        </p:txBody>
+      </p:sp>
+      <p:sp>
+        <p:nvSpPr>
+          <p:cNvPr id="40" name="Text 38"/>
+          <p:cNvSpPr txBox="1"/>
+          <p:nvPr/>
+        </p:nvSpPr>
+        <p:spPr>
+          <a:xfrm>
+            <a:off x="6848856" y="5733288"/>
+            <a:ext cx="5111496" cy="256032"/>
+          </a:xfrm>
+          <a:prstGeom prst="rect">
+            <a:avLst/>
+          </a:prstGeom>
+          <a:noFill/>
+          <a:ln/>
+        </p:spPr>
+        <p:txBody>
+          <a:bodyPr wrap="square" lIns="0" tIns="0" rIns="0" bIns="0" rtlCol="0" anchor="ctr"/>
+          <a:lstStyle/>
+          <a:p>
+            <a:pPr indent="0" marL="0">
+              <a:buNone/>
+            </a:pPr>
+            <a:r>
+              <a:rPr lang="en-US" sz="1300" b="1" dirty="0">
+                <a:solidFill>
+                  <a:srgbClr val="0F5132"/>
+                </a:solidFill>
+                <a:latin typeface="Calibri" pitchFamily="34" charset="0"/>
+                <a:ea typeface="Calibri" pitchFamily="34" charset="-122"/>
+                <a:cs typeface="Calibri" pitchFamily="34" charset="-120"/>
+              </a:rPr>
+              <a:t>Spot duplicates</a:t>
+            </a:r>
+            <a:endParaRPr lang="en-US" sz="1300" dirty="0"/>
+          </a:p>
+        </p:txBody>
+      </p:sp>
+      <p:sp>
+        <p:nvSpPr>
+          <p:cNvPr id="41" name="Text 39"/>
+          <p:cNvSpPr txBox="1"/>
+          <p:nvPr/>
+        </p:nvSpPr>
+        <p:spPr>
+          <a:xfrm>
+            <a:off x="6848856" y="5989320"/>
+            <a:ext cx="5111496" cy="420624"/>
+          </a:xfrm>
+          <a:prstGeom prst="rect">
+            <a:avLst/>
+          </a:prstGeom>
+          <a:noFill/>
+          <a:ln/>
+        </p:spPr>
+        <p:txBody>
+          <a:bodyPr wrap="square" lIns="0" tIns="0" rIns="0" bIns="0" rtlCol="0" anchor="ctr"/>
+          <a:lstStyle/>
+          <a:p>
+            <a:pPr indent="0" marL="0">
+              <a:lnSpc>
+                <a:spcPct val="110000"/>
+              </a:lnSpc>
+              <a:buNone/>
+            </a:pPr>
+            <a:r>
+              <a:rPr lang="en-US" sz="1150" dirty="0">
+                <a:solidFill>
+                  <a:srgbClr val="5E6B64"/>
+                </a:solidFill>
+                <a:latin typeface="Calibri" pitchFamily="34" charset="0"/>
+                <a:ea typeface="Calibri" pitchFamily="34" charset="-122"/>
+                <a:cs typeface="Calibri" pitchFamily="34" charset="-120"/>
+              </a:rPr>
+              <a:t>Possible duplicates are flagged for a person to decide on</a:t>
+            </a:r>
+            <a:endParaRPr lang="en-US" sz="1150" dirty="0"/>
           </a:p>
         </p:txBody>
       </p:sp>
@@ -9727,7 +11726,7 @@
                 <a:ea typeface="Cambria" pitchFamily="34" charset="-122"/>
                 <a:cs typeface="Cambria" pitchFamily="34" charset="-120"/>
               </a:rPr>
-              <a:t>Methodology and Project Value</a:t>
+              <a:t>Matching and Qualifying</a:t>
             </a:r>
             <a:endParaRPr lang="en-US" sz="3100" dirty="0"/>
           </a:p>
@@ -9735,18 +11734,57 @@
       </p:sp>
       <p:sp>
         <p:nvSpPr>
-          <p:cNvPr id="3" name="Shape 1"/>
+          <p:cNvPr id="3" name="Text 1"/>
+          <p:cNvSpPr txBox="1"/>
+          <p:nvPr/>
+        </p:nvSpPr>
+        <p:spPr>
+          <a:xfrm>
+            <a:off x="566928" y="987552"/>
+            <a:ext cx="11027664" cy="292608"/>
+          </a:xfrm>
+          <a:prstGeom prst="rect">
+            <a:avLst/>
+          </a:prstGeom>
+          <a:noFill/>
+          <a:ln/>
+        </p:spPr>
+        <p:txBody>
+          <a:bodyPr wrap="square" lIns="0" tIns="0" rIns="0" bIns="0" rtlCol="0" anchor="ctr"/>
+          <a:lstStyle/>
+          <a:p>
+            <a:pPr indent="0" marL="0">
+              <a:buNone/>
+            </a:pPr>
+            <a:r>
+              <a:rPr lang="en-US" sz="1250" spc="60" kern="0" dirty="0">
+                <a:solidFill>
+                  <a:srgbClr val="5E6B64"/>
+                </a:solidFill>
+                <a:latin typeface="Calibri" pitchFamily="34" charset="0"/>
+                <a:ea typeface="Calibri" pitchFamily="34" charset="-122"/>
+                <a:cs typeface="Calibri" pitchFamily="34" charset="-120"/>
+              </a:rPr>
+              <a:t>Two different questions, kept apart on purpose</a:t>
+            </a:r>
+            <a:endParaRPr lang="en-US" sz="1250" dirty="0"/>
+          </a:p>
+        </p:txBody>
+      </p:sp>
+      <p:sp>
+        <p:nvSpPr>
+          <p:cNvPr id="4" name="Shape 2"/>
           <p:cNvSpPr/>
           <p:nvPr/>
         </p:nvSpPr>
         <p:spPr>
           <a:xfrm>
-            <a:off x="566928" y="1207008"/>
-            <a:ext cx="5513832" cy="603504"/>
+            <a:off x="4160520" y="1481328"/>
+            <a:ext cx="3840480" cy="566928"/>
           </a:xfrm>
           <a:prstGeom prst="roundRect">
             <a:avLst>
-              <a:gd name="adj" fmla="val 12121"/>
+              <a:gd name="adj" fmla="val 12903"/>
             </a:avLst>
           </a:prstGeom>
           <a:solidFill>
@@ -9762,14 +11800,14 @@
       </p:sp>
       <p:sp>
         <p:nvSpPr>
-          <p:cNvPr id="4" name="Text 2"/>
-          <p:cNvSpPr txBox="1"/>
-          <p:nvPr/>
-        </p:nvSpPr>
-        <p:spPr>
-          <a:xfrm>
-            <a:off x="566928" y="1207008"/>
-            <a:ext cx="5513832" cy="603504"/>
+          <p:cNvPr id="5" name="Text 3"/>
+          <p:cNvSpPr txBox="1"/>
+          <p:nvPr/>
+        </p:nvSpPr>
+        <p:spPr>
+          <a:xfrm>
+            <a:off x="4160520" y="1481328"/>
+            <a:ext cx="3840480" cy="566928"/>
           </a:xfrm>
           <a:prstGeom prst="rect">
             <a:avLst/>
@@ -9793,7 +11831,7 @@
                 <a:ea typeface="Calibri" pitchFamily="34" charset="-122"/>
                 <a:cs typeface="Calibri" pitchFamily="34" charset="-120"/>
               </a:rPr>
-              <a:t>AGILE — SCRUM</a:t>
+              <a:t>STUDENT PROFILE</a:t>
             </a:r>
             <a:endParaRPr lang="en-US" sz="1400" dirty="0"/>
           </a:p>
@@ -9801,75 +11839,88 @@
       </p:sp>
       <p:sp>
         <p:nvSpPr>
-          <p:cNvPr id="5" name="Text 3"/>
-          <p:cNvSpPr txBox="1"/>
-          <p:nvPr/>
-        </p:nvSpPr>
-        <p:spPr>
-          <a:xfrm>
-            <a:off x="566928" y="2048256"/>
-            <a:ext cx="274320" cy="274320"/>
-          </a:xfrm>
-          <a:prstGeom prst="ellipse">
-            <a:avLst/>
-          </a:prstGeom>
-          <a:solidFill>
-            <a:srgbClr val="0F5132"/>
-          </a:solidFill>
-          <a:ln>
+          <p:cNvPr id="6" name="Shape 4"/>
+          <p:cNvSpPr/>
+          <p:nvPr/>
+        </p:nvSpPr>
+        <p:spPr>
+          <a:xfrm>
+            <a:off x="3223260" y="2157984"/>
+            <a:ext cx="201168" cy="201168"/>
+          </a:xfrm>
+          <a:prstGeom prst="downArrow">
+            <a:avLst/>
+          </a:prstGeom>
+          <a:solidFill>
+            <a:srgbClr val="9DBFA8"/>
+          </a:solidFill>
+          <a:ln w="12700">
             <a:solidFill>
-              <a:srgbClr val="0F5132"/>
+              <a:srgbClr val="9DBFA8"/>
+            </a:solidFill>
+            <a:prstDash val="solid"/>
+          </a:ln>
+        </p:spPr>
+      </p:sp>
+      <p:sp>
+        <p:nvSpPr>
+          <p:cNvPr id="7" name="Shape 5"/>
+          <p:cNvSpPr/>
+          <p:nvPr/>
+        </p:nvSpPr>
+        <p:spPr>
+          <a:xfrm>
+            <a:off x="9102852" y="2157984"/>
+            <a:ext cx="201168" cy="201168"/>
+          </a:xfrm>
+          <a:prstGeom prst="downArrow">
+            <a:avLst/>
+          </a:prstGeom>
+          <a:solidFill>
+            <a:srgbClr val="9DBFA8"/>
+          </a:solidFill>
+          <a:ln w="12700">
+            <a:solidFill>
+              <a:srgbClr val="9DBFA8"/>
+            </a:solidFill>
+            <a:prstDash val="solid"/>
+          </a:ln>
+        </p:spPr>
+      </p:sp>
+      <p:sp>
+        <p:nvSpPr>
+          <p:cNvPr id="8" name="Text 6"/>
+          <p:cNvSpPr txBox="1"/>
+          <p:nvPr/>
+        </p:nvSpPr>
+        <p:spPr>
+          <a:xfrm>
+            <a:off x="566928" y="2487168"/>
+            <a:ext cx="5513832" cy="566928"/>
+          </a:xfrm>
+          <a:prstGeom prst="roundRect">
+            <a:avLst>
+              <a:gd name="adj" fmla="val 12903"/>
+            </a:avLst>
+          </a:prstGeom>
+          <a:solidFill>
+            <a:srgbClr val="EDF3EF"/>
+          </a:solidFill>
+          <a:ln w="12700">
+            <a:solidFill>
+              <a:srgbClr val="9DBFA8"/>
             </a:solidFill>
           </a:ln>
         </p:spPr>
         <p:txBody>
-          <a:bodyPr wrap="square" lIns="0" tIns="0" rIns="0" bIns="0" rtlCol="0" anchor="ctr"/>
+          <a:bodyPr wrap="square" lIns="508" tIns="508" rIns="508" bIns="508" rtlCol="0" anchor="ctr"/>
           <a:lstStyle/>
           <a:p>
             <a:pPr algn="ctr" indent="0" marL="0">
               <a:buNone/>
             </a:pPr>
             <a:r>
-              <a:rPr lang="en-US" sz="1200" b="1" dirty="0">
-                <a:solidFill>
-                  <a:srgbClr val="FFFFFF"/>
-                </a:solidFill>
-                <a:latin typeface="Calibri" pitchFamily="34" charset="0"/>
-                <a:ea typeface="Calibri" pitchFamily="34" charset="-122"/>
-                <a:cs typeface="Calibri" pitchFamily="34" charset="-120"/>
-              </a:rPr>
-              <a:t>1</a:t>
-            </a:r>
-            <a:endParaRPr lang="en-US" sz="1200" dirty="0"/>
-          </a:p>
-        </p:txBody>
-      </p:sp>
-      <p:sp>
-        <p:nvSpPr>
-          <p:cNvPr id="6" name="Text 4"/>
-          <p:cNvSpPr txBox="1"/>
-          <p:nvPr/>
-        </p:nvSpPr>
-        <p:spPr>
-          <a:xfrm>
-            <a:off x="969264" y="2029968"/>
-            <a:ext cx="5111496" cy="256032"/>
-          </a:xfrm>
-          <a:prstGeom prst="rect">
-            <a:avLst/>
-          </a:prstGeom>
-          <a:noFill/>
-          <a:ln/>
-        </p:spPr>
-        <p:txBody>
-          <a:bodyPr wrap="square" lIns="0" tIns="0" rIns="0" bIns="0" rtlCol="0" anchor="ctr"/>
-          <a:lstStyle/>
-          <a:p>
-            <a:pPr indent="0" marL="0">
-              <a:buNone/>
-            </a:pPr>
-            <a:r>
-              <a:rPr lang="en-US" sz="1300" b="1" dirty="0">
+              <a:rPr lang="en-US" sz="1450" b="1" dirty="0">
                 <a:solidFill>
                   <a:srgbClr val="0F5132"/>
                 </a:solidFill>
@@ -9877,122 +11928,46 @@
                 <a:ea typeface="Calibri" pitchFamily="34" charset="-122"/>
                 <a:cs typeface="Calibri" pitchFamily="34" charset="-120"/>
               </a:rPr>
-              <a:t>A list of work</a:t>
-            </a:r>
-            <a:endParaRPr lang="en-US" sz="1300" dirty="0"/>
-          </a:p>
-        </p:txBody>
-      </p:sp>
-      <p:sp>
-        <p:nvSpPr>
-          <p:cNvPr id="7" name="Text 5"/>
-          <p:cNvSpPr txBox="1"/>
-          <p:nvPr/>
-        </p:nvSpPr>
-        <p:spPr>
-          <a:xfrm>
-            <a:off x="969264" y="2286000"/>
-            <a:ext cx="5111496" cy="384048"/>
-          </a:xfrm>
-          <a:prstGeom prst="rect">
-            <a:avLst/>
-          </a:prstGeom>
-          <a:noFill/>
-          <a:ln/>
-        </p:spPr>
-        <p:txBody>
-          <a:bodyPr wrap="square" lIns="0" tIns="0" rIns="0" bIns="0" rtlCol="0" anchor="ctr"/>
-          <a:lstStyle/>
-          <a:p>
-            <a:pPr indent="0" marL="0">
-              <a:buNone/>
-            </a:pPr>
-            <a:r>
-              <a:rPr lang="en-US" sz="1150" dirty="0">
-                <a:solidFill>
-                  <a:srgbClr val="5E6B64"/>
-                </a:solidFill>
-                <a:latin typeface="Calibri" pitchFamily="34" charset="0"/>
-                <a:ea typeface="Calibri" pitchFamily="34" charset="-122"/>
-                <a:cs typeface="Calibri" pitchFamily="34" charset="-120"/>
-              </a:rPr>
-              <a:t>We put the most important things first before each sprint</a:t>
-            </a:r>
-            <a:endParaRPr lang="en-US" sz="1150" dirty="0"/>
-          </a:p>
-        </p:txBody>
-      </p:sp>
-      <p:sp>
-        <p:nvSpPr>
-          <p:cNvPr id="8" name="Text 6"/>
-          <p:cNvSpPr txBox="1"/>
-          <p:nvPr/>
-        </p:nvSpPr>
-        <p:spPr>
-          <a:xfrm>
-            <a:off x="566928" y="2761488"/>
-            <a:ext cx="274320" cy="274320"/>
-          </a:xfrm>
-          <a:prstGeom prst="ellipse">
-            <a:avLst/>
-          </a:prstGeom>
-          <a:solidFill>
-            <a:srgbClr val="0F5132"/>
-          </a:solidFill>
-          <a:ln>
+              <a:t>Do they qualify?</a:t>
+            </a:r>
+            <a:endParaRPr lang="en-US" sz="1450" dirty="0"/>
+          </a:p>
+        </p:txBody>
+      </p:sp>
+      <p:sp>
+        <p:nvSpPr>
+          <p:cNvPr id="9" name="Text 7"/>
+          <p:cNvSpPr txBox="1"/>
+          <p:nvPr/>
+        </p:nvSpPr>
+        <p:spPr>
+          <a:xfrm>
+            <a:off x="6446520" y="2487168"/>
+            <a:ext cx="5513832" cy="566928"/>
+          </a:xfrm>
+          <a:prstGeom prst="roundRect">
+            <a:avLst>
+              <a:gd name="adj" fmla="val 12903"/>
+            </a:avLst>
+          </a:prstGeom>
+          <a:solidFill>
+            <a:srgbClr val="EDF3EF"/>
+          </a:solidFill>
+          <a:ln w="12700">
             <a:solidFill>
-              <a:srgbClr val="0F5132"/>
+              <a:srgbClr val="9DBFA8"/>
             </a:solidFill>
           </a:ln>
         </p:spPr>
         <p:txBody>
-          <a:bodyPr wrap="square" lIns="0" tIns="0" rIns="0" bIns="0" rtlCol="0" anchor="ctr"/>
+          <a:bodyPr wrap="square" lIns="508" tIns="508" rIns="508" bIns="508" rtlCol="0" anchor="ctr"/>
           <a:lstStyle/>
           <a:p>
             <a:pPr algn="ctr" indent="0" marL="0">
               <a:buNone/>
             </a:pPr>
             <a:r>
-              <a:rPr lang="en-US" sz="1200" b="1" dirty="0">
-                <a:solidFill>
-                  <a:srgbClr val="FFFFFF"/>
-                </a:solidFill>
-                <a:latin typeface="Calibri" pitchFamily="34" charset="0"/>
-                <a:ea typeface="Calibri" pitchFamily="34" charset="-122"/>
-                <a:cs typeface="Calibri" pitchFamily="34" charset="-120"/>
-              </a:rPr>
-              <a:t>2</a:t>
-            </a:r>
-            <a:endParaRPr lang="en-US" sz="1200" dirty="0"/>
-          </a:p>
-        </p:txBody>
-      </p:sp>
-      <p:sp>
-        <p:nvSpPr>
-          <p:cNvPr id="9" name="Text 7"/>
-          <p:cNvSpPr txBox="1"/>
-          <p:nvPr/>
-        </p:nvSpPr>
-        <p:spPr>
-          <a:xfrm>
-            <a:off x="969264" y="2743200"/>
-            <a:ext cx="5111496" cy="256032"/>
-          </a:xfrm>
-          <a:prstGeom prst="rect">
-            <a:avLst/>
-          </a:prstGeom>
-          <a:noFill/>
-          <a:ln/>
-        </p:spPr>
-        <p:txBody>
-          <a:bodyPr wrap="square" lIns="0" tIns="0" rIns="0" bIns="0" rtlCol="0" anchor="ctr"/>
-          <a:lstStyle/>
-          <a:p>
-            <a:pPr indent="0" marL="0">
-              <a:buNone/>
-            </a:pPr>
-            <a:r>
-              <a:rPr lang="en-US" sz="1300" b="1" dirty="0">
+              <a:rPr lang="en-US" sz="1450" b="1" dirty="0">
                 <a:solidFill>
                   <a:srgbClr val="0F5132"/>
                 </a:solidFill>
@@ -10000,122 +11975,96 @@
                 <a:ea typeface="Calibri" pitchFamily="34" charset="-122"/>
                 <a:cs typeface="Calibri" pitchFamily="34" charset="-120"/>
               </a:rPr>
-              <a:t>Short sprints</a:t>
-            </a:r>
-            <a:endParaRPr lang="en-US" sz="1300" dirty="0"/>
-          </a:p>
-        </p:txBody>
-      </p:sp>
-      <p:sp>
-        <p:nvSpPr>
-          <p:cNvPr id="10" name="Text 8"/>
-          <p:cNvSpPr txBox="1"/>
-          <p:nvPr/>
-        </p:nvSpPr>
-        <p:spPr>
-          <a:xfrm>
-            <a:off x="969264" y="2999232"/>
-            <a:ext cx="5111496" cy="384048"/>
-          </a:xfrm>
-          <a:prstGeom prst="rect">
-            <a:avLst/>
-          </a:prstGeom>
-          <a:noFill/>
-          <a:ln/>
-        </p:spPr>
-        <p:txBody>
-          <a:bodyPr wrap="square" lIns="0" tIns="0" rIns="0" bIns="0" rtlCol="0" anchor="ctr"/>
-          <a:lstStyle/>
-          <a:p>
-            <a:pPr indent="0" marL="0">
-              <a:buNone/>
-            </a:pPr>
-            <a:r>
-              <a:rPr lang="en-US" sz="1150" dirty="0">
-                <a:solidFill>
-                  <a:srgbClr val="5E6B64"/>
-                </a:solidFill>
-                <a:latin typeface="Calibri" pitchFamily="34" charset="0"/>
-                <a:ea typeface="Calibri" pitchFamily="34" charset="-122"/>
-                <a:cs typeface="Calibri" pitchFamily="34" charset="-120"/>
-              </a:rPr>
-              <a:t>Each one ends with a working part of the system</a:t>
-            </a:r>
-            <a:endParaRPr lang="en-US" sz="1150" dirty="0"/>
-          </a:p>
-        </p:txBody>
-      </p:sp>
-      <p:sp>
-        <p:nvSpPr>
-          <p:cNvPr id="11" name="Text 9"/>
-          <p:cNvSpPr txBox="1"/>
-          <p:nvPr/>
-        </p:nvSpPr>
-        <p:spPr>
-          <a:xfrm>
-            <a:off x="566928" y="3474720"/>
-            <a:ext cx="274320" cy="274320"/>
-          </a:xfrm>
-          <a:prstGeom prst="ellipse">
-            <a:avLst/>
-          </a:prstGeom>
-          <a:solidFill>
-            <a:srgbClr val="0F5132"/>
-          </a:solidFill>
-          <a:ln>
+              <a:t>How well do they fit?</a:t>
+            </a:r>
+            <a:endParaRPr lang="en-US" sz="1450" dirty="0"/>
+          </a:p>
+        </p:txBody>
+      </p:sp>
+      <p:sp>
+        <p:nvSpPr>
+          <p:cNvPr id="10" name="Shape 8"/>
+          <p:cNvSpPr/>
+          <p:nvPr/>
+        </p:nvSpPr>
+        <p:spPr>
+          <a:xfrm>
+            <a:off x="3223260" y="3127248"/>
+            <a:ext cx="201168" cy="201168"/>
+          </a:xfrm>
+          <a:prstGeom prst="downArrow">
+            <a:avLst/>
+          </a:prstGeom>
+          <a:solidFill>
+            <a:srgbClr val="9DBFA8"/>
+          </a:solidFill>
+          <a:ln w="12700">
             <a:solidFill>
-              <a:srgbClr val="0F5132"/>
+              <a:srgbClr val="9DBFA8"/>
+            </a:solidFill>
+            <a:prstDash val="solid"/>
+          </a:ln>
+        </p:spPr>
+      </p:sp>
+      <p:sp>
+        <p:nvSpPr>
+          <p:cNvPr id="11" name="Shape 9"/>
+          <p:cNvSpPr/>
+          <p:nvPr/>
+        </p:nvSpPr>
+        <p:spPr>
+          <a:xfrm>
+            <a:off x="9102852" y="3127248"/>
+            <a:ext cx="201168" cy="201168"/>
+          </a:xfrm>
+          <a:prstGeom prst="downArrow">
+            <a:avLst/>
+          </a:prstGeom>
+          <a:solidFill>
+            <a:srgbClr val="9DBFA8"/>
+          </a:solidFill>
+          <a:ln w="12700">
+            <a:solidFill>
+              <a:srgbClr val="9DBFA8"/>
+            </a:solidFill>
+            <a:prstDash val="solid"/>
+          </a:ln>
+        </p:spPr>
+      </p:sp>
+      <p:sp>
+        <p:nvSpPr>
+          <p:cNvPr id="12" name="Text 10"/>
+          <p:cNvSpPr txBox="1"/>
+          <p:nvPr/>
+        </p:nvSpPr>
+        <p:spPr>
+          <a:xfrm>
+            <a:off x="566928" y="3456432"/>
+            <a:ext cx="1746504" cy="603504"/>
+          </a:xfrm>
+          <a:prstGeom prst="roundRect">
+            <a:avLst>
+              <a:gd name="adj" fmla="val 12121"/>
+            </a:avLst>
+          </a:prstGeom>
+          <a:solidFill>
+            <a:srgbClr val="FFFFFF"/>
+          </a:solidFill>
+          <a:ln w="12700">
+            <a:solidFill>
+              <a:srgbClr val="9DBFA8"/>
             </a:solidFill>
           </a:ln>
         </p:spPr>
         <p:txBody>
-          <a:bodyPr wrap="square" lIns="0" tIns="0" rIns="0" bIns="0" rtlCol="0" anchor="ctr"/>
+          <a:bodyPr wrap="square" lIns="508" tIns="508" rIns="508" bIns="508" rtlCol="0" anchor="ctr"/>
           <a:lstStyle/>
           <a:p>
             <a:pPr algn="ctr" indent="0" marL="0">
               <a:buNone/>
             </a:pPr>
             <a:r>
-              <a:rPr lang="en-US" sz="1200" b="1" dirty="0">
-                <a:solidFill>
-                  <a:srgbClr val="FFFFFF"/>
-                </a:solidFill>
-                <a:latin typeface="Calibri" pitchFamily="34" charset="0"/>
-                <a:ea typeface="Calibri" pitchFamily="34" charset="-122"/>
-                <a:cs typeface="Calibri" pitchFamily="34" charset="-120"/>
-              </a:rPr>
-              <a:t>3</a:t>
-            </a:r>
-            <a:endParaRPr lang="en-US" sz="1200" dirty="0"/>
-          </a:p>
-        </p:txBody>
-      </p:sp>
-      <p:sp>
-        <p:nvSpPr>
-          <p:cNvPr id="12" name="Text 10"/>
-          <p:cNvSpPr txBox="1"/>
-          <p:nvPr/>
-        </p:nvSpPr>
-        <p:spPr>
-          <a:xfrm>
-            <a:off x="969264" y="3456432"/>
-            <a:ext cx="5111496" cy="256032"/>
-          </a:xfrm>
-          <a:prstGeom prst="rect">
-            <a:avLst/>
-          </a:prstGeom>
-          <a:noFill/>
-          <a:ln/>
-        </p:spPr>
-        <p:txBody>
-          <a:bodyPr wrap="square" lIns="0" tIns="0" rIns="0" bIns="0" rtlCol="0" anchor="ctr"/>
-          <a:lstStyle/>
-          <a:p>
-            <a:pPr indent="0" marL="0">
-              <a:buNone/>
-            </a:pPr>
-            <a:r>
-              <a:rPr lang="en-US" sz="1300" b="1" dirty="0">
+              <a:rPr lang="en-US" sz="1150" b="1" dirty="0">
                 <a:solidFill>
                   <a:srgbClr val="0F5132"/>
                 </a:solidFill>
@@ -10123,9 +12072,9 @@
                 <a:ea typeface="Calibri" pitchFamily="34" charset="-122"/>
                 <a:cs typeface="Calibri" pitchFamily="34" charset="-120"/>
               </a:rPr>
-              <a:t>Sprint reviews</a:t>
-            </a:r>
-            <a:endParaRPr lang="en-US" sz="1300" dirty="0"/>
+              <a:t>Qualifies</a:t>
+            </a:r>
+            <a:endParaRPr lang="en-US" sz="1150" dirty="0"/>
           </a:p>
         </p:txBody>
       </p:sp>
@@ -10137,108 +12086,32 @@
         </p:nvSpPr>
         <p:spPr>
           <a:xfrm>
-            <a:off x="969264" y="3712464"/>
-            <a:ext cx="5111496" cy="384048"/>
-          </a:xfrm>
-          <a:prstGeom prst="rect">
-            <a:avLst/>
-          </a:prstGeom>
-          <a:noFill/>
-          <a:ln/>
-        </p:spPr>
-        <p:txBody>
-          <a:bodyPr wrap="square" lIns="0" tIns="0" rIns="0" bIns="0" rtlCol="0" anchor="ctr"/>
-          <a:lstStyle/>
-          <a:p>
-            <a:pPr indent="0" marL="0">
-              <a:buNone/>
-            </a:pPr>
-            <a:r>
-              <a:rPr lang="en-US" sz="1150" dirty="0">
-                <a:solidFill>
-                  <a:srgbClr val="5E6B64"/>
-                </a:solidFill>
-                <a:latin typeface="Calibri" pitchFamily="34" charset="0"/>
-                <a:ea typeface="Calibri" pitchFamily="34" charset="-122"/>
-                <a:cs typeface="Calibri" pitchFamily="34" charset="-120"/>
-              </a:rPr>
-              <a:t>Our supervisor checks the work and says what to build next</a:t>
-            </a:r>
-            <a:endParaRPr lang="en-US" sz="1150" dirty="0"/>
-          </a:p>
-        </p:txBody>
-      </p:sp>
-      <p:sp>
-        <p:nvSpPr>
-          <p:cNvPr id="14" name="Text 12"/>
-          <p:cNvSpPr txBox="1"/>
-          <p:nvPr/>
-        </p:nvSpPr>
-        <p:spPr>
-          <a:xfrm>
-            <a:off x="566928" y="4187952"/>
-            <a:ext cx="274320" cy="274320"/>
-          </a:xfrm>
-          <a:prstGeom prst="ellipse">
-            <a:avLst/>
-          </a:prstGeom>
-          <a:solidFill>
-            <a:srgbClr val="0F5132"/>
-          </a:solidFill>
-          <a:ln>
+            <a:off x="2450592" y="3456432"/>
+            <a:ext cx="1746504" cy="603504"/>
+          </a:xfrm>
+          <a:prstGeom prst="roundRect">
+            <a:avLst>
+              <a:gd name="adj" fmla="val 12121"/>
+            </a:avLst>
+          </a:prstGeom>
+          <a:solidFill>
+            <a:srgbClr val="FFFFFF"/>
+          </a:solidFill>
+          <a:ln w="12700">
             <a:solidFill>
-              <a:srgbClr val="0F5132"/>
+              <a:srgbClr val="9DBFA8"/>
             </a:solidFill>
           </a:ln>
         </p:spPr>
         <p:txBody>
-          <a:bodyPr wrap="square" lIns="0" tIns="0" rIns="0" bIns="0" rtlCol="0" anchor="ctr"/>
+          <a:bodyPr wrap="square" lIns="508" tIns="508" rIns="508" bIns="508" rtlCol="0" anchor="ctr"/>
           <a:lstStyle/>
           <a:p>
             <a:pPr algn="ctr" indent="0" marL="0">
               <a:buNone/>
             </a:pPr>
             <a:r>
-              <a:rPr lang="en-US" sz="1200" b="1" dirty="0">
-                <a:solidFill>
-                  <a:srgbClr val="FFFFFF"/>
-                </a:solidFill>
-                <a:latin typeface="Calibri" pitchFamily="34" charset="0"/>
-                <a:ea typeface="Calibri" pitchFamily="34" charset="-122"/>
-                <a:cs typeface="Calibri" pitchFamily="34" charset="-120"/>
-              </a:rPr>
-              <a:t>4</a:t>
-            </a:r>
-            <a:endParaRPr lang="en-US" sz="1200" dirty="0"/>
-          </a:p>
-        </p:txBody>
-      </p:sp>
-      <p:sp>
-        <p:nvSpPr>
-          <p:cNvPr id="15" name="Text 13"/>
-          <p:cNvSpPr txBox="1"/>
-          <p:nvPr/>
-        </p:nvSpPr>
-        <p:spPr>
-          <a:xfrm>
-            <a:off x="969264" y="4169664"/>
-            <a:ext cx="5111496" cy="256032"/>
-          </a:xfrm>
-          <a:prstGeom prst="rect">
-            <a:avLst/>
-          </a:prstGeom>
-          <a:noFill/>
-          <a:ln/>
-        </p:spPr>
-        <p:txBody>
-          <a:bodyPr wrap="square" lIns="0" tIns="0" rIns="0" bIns="0" rtlCol="0" anchor="ctr"/>
-          <a:lstStyle/>
-          <a:p>
-            <a:pPr indent="0" marL="0">
-              <a:buNone/>
-            </a:pPr>
-            <a:r>
-              <a:rPr lang="en-US" sz="1300" b="1" dirty="0">
+              <a:rPr lang="en-US" sz="1150" b="1" dirty="0">
                 <a:solidFill>
                   <a:srgbClr val="0F5132"/>
                 </a:solidFill>
@@ -10246,11 +12119,85 @@
                 <a:ea typeface="Calibri" pitchFamily="34" charset="-122"/>
                 <a:cs typeface="Calibri" pitchFamily="34" charset="-120"/>
               </a:rPr>
-              <a:t>Looking back</a:t>
-            </a:r>
-            <a:endParaRPr lang="en-US" sz="1300" dirty="0"/>
-          </a:p>
-        </p:txBody>
+              <a:t>Does not qualify</a:t>
+            </a:r>
+            <a:endParaRPr lang="en-US" sz="1150" dirty="0"/>
+          </a:p>
+        </p:txBody>
+      </p:sp>
+      <p:sp>
+        <p:nvSpPr>
+          <p:cNvPr id="14" name="Text 12"/>
+          <p:cNvSpPr txBox="1"/>
+          <p:nvPr/>
+        </p:nvSpPr>
+        <p:spPr>
+          <a:xfrm>
+            <a:off x="4334256" y="3456432"/>
+            <a:ext cx="1746504" cy="603504"/>
+          </a:xfrm>
+          <a:prstGeom prst="roundRect">
+            <a:avLst>
+              <a:gd name="adj" fmla="val 12121"/>
+            </a:avLst>
+          </a:prstGeom>
+          <a:solidFill>
+            <a:srgbClr val="FFFFFF"/>
+          </a:solidFill>
+          <a:ln w="12700">
+            <a:solidFill>
+              <a:srgbClr val="9DBFA8"/>
+            </a:solidFill>
+          </a:ln>
+        </p:spPr>
+        <p:txBody>
+          <a:bodyPr wrap="square" lIns="508" tIns="508" rIns="508" bIns="508" rtlCol="0" anchor="ctr"/>
+          <a:lstStyle/>
+          <a:p>
+            <a:pPr algn="ctr" indent="0" marL="0">
+              <a:buNone/>
+            </a:pPr>
+            <a:r>
+              <a:rPr lang="en-US" sz="1150" b="1" dirty="0">
+                <a:solidFill>
+                  <a:srgbClr val="0F5132"/>
+                </a:solidFill>
+                <a:latin typeface="Calibri" pitchFamily="34" charset="0"/>
+                <a:ea typeface="Calibri" pitchFamily="34" charset="-122"/>
+                <a:cs typeface="Calibri" pitchFamily="34" charset="-120"/>
+              </a:rPr>
+              <a:t>Need more info</a:t>
+            </a:r>
+            <a:endParaRPr lang="en-US" sz="1150" dirty="0"/>
+          </a:p>
+        </p:txBody>
+      </p:sp>
+      <p:sp>
+        <p:nvSpPr>
+          <p:cNvPr id="15" name="Shape 13"/>
+          <p:cNvSpPr/>
+          <p:nvPr/>
+        </p:nvSpPr>
+        <p:spPr>
+          <a:xfrm>
+            <a:off x="6446520" y="3456432"/>
+            <a:ext cx="5513832" cy="603504"/>
+          </a:xfrm>
+          <a:prstGeom prst="roundRect">
+            <a:avLst>
+              <a:gd name="adj" fmla="val 12121"/>
+            </a:avLst>
+          </a:prstGeom>
+          <a:solidFill>
+            <a:srgbClr val="C08A2E"/>
+          </a:solidFill>
+          <a:ln w="12700">
+            <a:solidFill>
+              <a:srgbClr val="C08A2E"/>
+            </a:solidFill>
+            <a:prstDash val="solid"/>
+          </a:ln>
+        </p:spPr>
       </p:sp>
       <p:sp>
         <p:nvSpPr>
@@ -10260,34 +12207,34 @@
         </p:nvSpPr>
         <p:spPr>
           <a:xfrm>
-            <a:off x="969264" y="4425696"/>
-            <a:ext cx="5111496" cy="384048"/>
-          </a:xfrm>
-          <a:prstGeom prst="rect">
-            <a:avLst/>
-          </a:prstGeom>
-          <a:noFill/>
-          <a:ln/>
-        </p:spPr>
-        <p:txBody>
-          <a:bodyPr wrap="square" lIns="0" tIns="0" rIns="0" bIns="0" rtlCol="0" anchor="ctr"/>
-          <a:lstStyle/>
-          <a:p>
-            <a:pPr indent="0" marL="0">
-              <a:buNone/>
-            </a:pPr>
-            <a:r>
-              <a:rPr lang="en-US" sz="1150" dirty="0">
-                <a:solidFill>
-                  <a:srgbClr val="5E6B64"/>
-                </a:solidFill>
-                <a:latin typeface="Calibri" pitchFamily="34" charset="0"/>
-                <a:ea typeface="Calibri" pitchFamily="34" charset="-122"/>
-                <a:cs typeface="Calibri" pitchFamily="34" charset="-120"/>
-              </a:rPr>
-              <a:t>After each sprint we agree how to work better</a:t>
-            </a:r>
-            <a:endParaRPr lang="en-US" sz="1150" dirty="0"/>
+            <a:off x="6446520" y="3456432"/>
+            <a:ext cx="5513832" cy="603504"/>
+          </a:xfrm>
+          <a:prstGeom prst="rect">
+            <a:avLst/>
+          </a:prstGeom>
+          <a:noFill/>
+          <a:ln/>
+        </p:spPr>
+        <p:txBody>
+          <a:bodyPr wrap="square" lIns="508" tIns="508" rIns="508" bIns="508" rtlCol="0" anchor="ctr"/>
+          <a:lstStyle/>
+          <a:p>
+            <a:pPr algn="ctr" indent="0" marL="0">
+              <a:buNone/>
+            </a:pPr>
+            <a:r>
+              <a:rPr lang="en-US" sz="1250" b="1" dirty="0">
+                <a:solidFill>
+                  <a:srgbClr val="2A1D05"/>
+                </a:solidFill>
+                <a:latin typeface="Calibri" pitchFamily="34" charset="0"/>
+                <a:ea typeface="Calibri" pitchFamily="34" charset="-122"/>
+                <a:cs typeface="Calibri" pitchFamily="34" charset="-120"/>
+              </a:rPr>
+              <a:t>A match score out of 100, with a reason for every rule</a:t>
+            </a:r>
+            <a:endParaRPr lang="en-US" sz="1250" dirty="0"/>
           </a:p>
         </p:txBody>
       </p:sp>
@@ -10299,12 +12246,12 @@
         </p:nvSpPr>
         <p:spPr>
           <a:xfrm>
-            <a:off x="566928" y="5029200"/>
-            <a:ext cx="5513832" cy="1024128"/>
+            <a:off x="566928" y="4261104"/>
+            <a:ext cx="5513832" cy="1371600"/>
           </a:xfrm>
           <a:prstGeom prst="roundRect">
             <a:avLst>
-              <a:gd name="adj" fmla="val 8036"/>
+              <a:gd name="adj" fmla="val 6000"/>
             </a:avLst>
           </a:prstGeom>
           <a:solidFill>
@@ -10326,7 +12273,7 @@
         </p:nvSpPr>
         <p:spPr>
           <a:xfrm>
-            <a:off x="804672" y="5193792"/>
+            <a:off x="804672" y="4425696"/>
             <a:ext cx="5038344" cy="310896"/>
           </a:xfrm>
           <a:prstGeom prst="rect">
@@ -10351,7 +12298,7 @@
                 <a:ea typeface="Calibri" pitchFamily="34" charset="-122"/>
                 <a:cs typeface="Calibri" pitchFamily="34" charset="-120"/>
               </a:rPr>
-              <a:t>Why Scrum</a:t>
+              <a:t>When we cannot check a rule</a:t>
             </a:r>
             <a:endParaRPr lang="en-US" sz="1450" dirty="0"/>
           </a:p>
@@ -10365,8 +12312,8 @@
         </p:nvSpPr>
         <p:spPr>
           <a:xfrm>
-            <a:off x="804672" y="5559552"/>
-            <a:ext cx="5038344" cy="329184"/>
+            <a:off x="804672" y="4791456"/>
+            <a:ext cx="5038344" cy="676656"/>
           </a:xfrm>
           <a:prstGeom prst="rect">
             <a:avLst/>
@@ -10386,7 +12333,7 @@
               <a:buChar char="•"/>
             </a:pPr>
             <a:r>
-              <a:rPr lang="en-US" sz="1200" dirty="0">
+              <a:rPr lang="en-US" sz="1250" dirty="0">
                 <a:solidFill>
                   <a:srgbClr val="16211C"/>
                 </a:solidFill>
@@ -10394,9 +12341,30 @@
                 <a:ea typeface="Calibri" pitchFamily="34" charset="-122"/>
                 <a:cs typeface="Calibri" pitchFamily="34" charset="-120"/>
               </a:rPr>
-              <a:t>We did not know what rules companies use until we looked, so the design kept changing</a:t>
-            </a:r>
-            <a:endParaRPr lang="en-US" sz="1200" dirty="0"/>
+              <a:t>It still counts towards the score, but only partly</a:t>
+            </a:r>
+            <a:endParaRPr lang="en-US" sz="1250" dirty="0"/>
+          </a:p>
+          <a:p>
+            <a:pPr marL="342900" indent="-342900">
+              <a:spcAft>
+                <a:spcPts val="500"/>
+              </a:spcAft>
+              <a:buSzPct val="100000"/>
+              <a:buChar char="•"/>
+            </a:pPr>
+            <a:r>
+              <a:rPr lang="en-US" sz="1250" dirty="0">
+                <a:solidFill>
+                  <a:srgbClr val="16211C"/>
+                </a:solidFill>
+                <a:latin typeface="Calibri" pitchFamily="34" charset="0"/>
+                <a:ea typeface="Calibri" pitchFamily="34" charset="-122"/>
+                <a:cs typeface="Calibri" pitchFamily="34" charset="-120"/>
+              </a:rPr>
+              <a:t>We say so clearly. We never just mark it as failed</a:t>
+            </a:r>
+            <a:endParaRPr lang="en-US" sz="1250" dirty="0"/>
           </a:p>
         </p:txBody>
       </p:sp>
@@ -10408,78 +12376,12 @@
         </p:nvSpPr>
         <p:spPr>
           <a:xfrm>
-            <a:off x="6446520" y="1207008"/>
-            <a:ext cx="5513832" cy="603504"/>
+            <a:off x="6446520" y="4261104"/>
+            <a:ext cx="5513832" cy="1371600"/>
           </a:xfrm>
           <a:prstGeom prst="roundRect">
             <a:avLst>
-              <a:gd name="adj" fmla="val 12121"/>
-            </a:avLst>
-          </a:prstGeom>
-          <a:solidFill>
-            <a:srgbClr val="C08A2E"/>
-          </a:solidFill>
-          <a:ln w="12700">
-            <a:solidFill>
-              <a:srgbClr val="C08A2E"/>
-            </a:solidFill>
-            <a:prstDash val="solid"/>
-          </a:ln>
-        </p:spPr>
-      </p:sp>
-      <p:sp>
-        <p:nvSpPr>
-          <p:cNvPr id="21" name="Text 19"/>
-          <p:cNvSpPr txBox="1"/>
-          <p:nvPr/>
-        </p:nvSpPr>
-        <p:spPr>
-          <a:xfrm>
-            <a:off x="6446520" y="1207008"/>
-            <a:ext cx="5513832" cy="603504"/>
-          </a:xfrm>
-          <a:prstGeom prst="rect">
-            <a:avLst/>
-          </a:prstGeom>
-          <a:noFill/>
-          <a:ln/>
-        </p:spPr>
-        <p:txBody>
-          <a:bodyPr wrap="square" lIns="0" tIns="0" rIns="0" bIns="0" rtlCol="0" anchor="ctr"/>
-          <a:lstStyle/>
-          <a:p>
-            <a:pPr algn="ctr" indent="0" marL="0">
-              <a:buNone/>
-            </a:pPr>
-            <a:r>
-              <a:rPr lang="en-US" sz="1400" b="1" spc="120" kern="0" dirty="0">
-                <a:solidFill>
-                  <a:srgbClr val="2A1D05"/>
-                </a:solidFill>
-                <a:latin typeface="Calibri" pitchFamily="34" charset="0"/>
-                <a:ea typeface="Calibri" pitchFamily="34" charset="-122"/>
-                <a:cs typeface="Calibri" pitchFamily="34" charset="-120"/>
-              </a:rPr>
-              <a:t>PROJECT VALUE</a:t>
-            </a:r>
-            <a:endParaRPr lang="en-US" sz="1400" dirty="0"/>
-          </a:p>
-        </p:txBody>
-      </p:sp>
-      <p:sp>
-        <p:nvSpPr>
-          <p:cNvPr id="22" name="Shape 20"/>
-          <p:cNvSpPr/>
-          <p:nvPr/>
-        </p:nvSpPr>
-        <p:spPr>
-          <a:xfrm>
-            <a:off x="6446520" y="2029968"/>
-            <a:ext cx="5513832" cy="1920240"/>
-          </a:xfrm>
-          <a:prstGeom prst="roundRect">
-            <a:avLst>
-              <a:gd name="adj" fmla="val 4286"/>
+              <a:gd name="adj" fmla="val 6000"/>
             </a:avLst>
           </a:prstGeom>
           <a:solidFill>
@@ -10495,13 +12397,13 @@
       </p:sp>
       <p:sp>
         <p:nvSpPr>
-          <p:cNvPr id="23" name="Text 21"/>
-          <p:cNvSpPr txBox="1"/>
-          <p:nvPr/>
-        </p:nvSpPr>
-        <p:spPr>
-          <a:xfrm>
-            <a:off x="6684264" y="2194560"/>
+          <p:cNvPr id="21" name="Text 19"/>
+          <p:cNvSpPr txBox="1"/>
+          <p:nvPr/>
+        </p:nvSpPr>
+        <p:spPr>
+          <a:xfrm>
+            <a:off x="6684264" y="4425696"/>
             <a:ext cx="5038344" cy="310896"/>
           </a:xfrm>
           <a:prstGeom prst="rect">
@@ -10526,7 +12428,7 @@
                 <a:ea typeface="Calibri" pitchFamily="34" charset="-122"/>
                 <a:cs typeface="Calibri" pitchFamily="34" charset="-120"/>
               </a:rPr>
-              <a:t>For students</a:t>
+              <a:t>What we compare</a:t>
             </a:r>
             <a:endParaRPr lang="en-US" sz="1450" dirty="0"/>
           </a:p>
@@ -10534,14 +12436,14 @@
       </p:sp>
       <p:sp>
         <p:nvSpPr>
-          <p:cNvPr id="24" name="Text 22"/>
-          <p:cNvSpPr txBox="1"/>
-          <p:nvPr/>
-        </p:nvSpPr>
-        <p:spPr>
-          <a:xfrm>
-            <a:off x="6684264" y="2560320"/>
-            <a:ext cx="5038344" cy="1225296"/>
+          <p:cNvPr id="22" name="Text 20"/>
+          <p:cNvSpPr txBox="1"/>
+          <p:nvPr/>
+        </p:nvSpPr>
+        <p:spPr>
+          <a:xfrm>
+            <a:off x="6684264" y="4791456"/>
+            <a:ext cx="5038344" cy="676656"/>
           </a:xfrm>
           <a:prstGeom prst="rect">
             <a:avLst/>
@@ -10569,7 +12471,7 @@
                 <a:ea typeface="Calibri" pitchFamily="34" charset="-122"/>
                 <a:cs typeface="Calibri" pitchFamily="34" charset="-120"/>
               </a:rPr>
-              <a:t>No more searching. The system finds the matches</a:t>
+              <a:t>Course · University · Marks</a:t>
             </a:r>
             <a:endParaRPr lang="en-US" sz="1250" dirty="0"/>
           </a:p>
@@ -10590,55 +12492,34 @@
                 <a:ea typeface="Calibri" pitchFamily="34" charset="-122"/>
                 <a:cs typeface="Calibri" pitchFamily="34" charset="-120"/>
               </a:rPr>
-              <a:t>Details typed once, not on every form</a:t>
+              <a:t>Subjects needed · Family income · Background</a:t>
             </a:r>
             <a:endParaRPr lang="en-US" sz="1250" dirty="0"/>
           </a:p>
-          <a:p>
-            <a:pPr marL="342900" indent="-342900">
-              <a:spcAft>
-                <a:spcPts val="500"/>
-              </a:spcAft>
-              <a:buSzPct val="100000"/>
-              <a:buChar char="•"/>
-            </a:pPr>
-            <a:r>
-              <a:rPr lang="en-US" sz="1250" dirty="0">
-                <a:solidFill>
-                  <a:srgbClr val="16211C"/>
-                </a:solidFill>
-                <a:latin typeface="Calibri" pitchFamily="34" charset="0"/>
-                <a:ea typeface="Calibri" pitchFamily="34" charset="-122"/>
-                <a:cs typeface="Calibri" pitchFamily="34" charset="-120"/>
-              </a:rPr>
-              <a:t>They see why they scored what they did, and how to improve</a:t>
-            </a:r>
-            <a:endParaRPr lang="en-US" sz="1250" dirty="0"/>
-          </a:p>
-        </p:txBody>
-      </p:sp>
-      <p:sp>
-        <p:nvSpPr>
-          <p:cNvPr id="25" name="Shape 23"/>
+        </p:txBody>
+      </p:sp>
+      <p:sp>
+        <p:nvSpPr>
+          <p:cNvPr id="23" name="Shape 21"/>
           <p:cNvSpPr/>
           <p:nvPr/>
         </p:nvSpPr>
         <p:spPr>
           <a:xfrm>
-            <a:off x="6446520" y="4114800"/>
-            <a:ext cx="5513832" cy="1938528"/>
+            <a:off x="566928" y="5815584"/>
+            <a:ext cx="11027664" cy="566928"/>
           </a:xfrm>
           <a:prstGeom prst="roundRect">
             <a:avLst>
-              <a:gd name="adj" fmla="val 4245"/>
+              <a:gd name="adj" fmla="val 12903"/>
             </a:avLst>
           </a:prstGeom>
           <a:solidFill>
-            <a:srgbClr val="EDF3EF"/>
+            <a:srgbClr val="0B2E24"/>
           </a:solidFill>
           <a:ln w="12700">
             <a:solidFill>
-              <a:srgbClr val="EDF3EF"/>
+              <a:srgbClr val="0B2E24"/>
             </a:solidFill>
             <a:prstDash val="solid"/>
           </a:ln>
@@ -10646,125 +12527,40 @@
       </p:sp>
       <p:sp>
         <p:nvSpPr>
-          <p:cNvPr id="26" name="Text 24"/>
-          <p:cNvSpPr txBox="1"/>
-          <p:nvPr/>
-        </p:nvSpPr>
-        <p:spPr>
-          <a:xfrm>
-            <a:off x="6684264" y="4279392"/>
-            <a:ext cx="5038344" cy="310896"/>
-          </a:xfrm>
-          <a:prstGeom prst="rect">
-            <a:avLst/>
-          </a:prstGeom>
-          <a:noFill/>
-          <a:ln/>
-        </p:spPr>
-        <p:txBody>
-          <a:bodyPr wrap="square" lIns="0" tIns="0" rIns="0" bIns="0" rtlCol="0" anchor="ctr"/>
-          <a:lstStyle/>
-          <a:p>
-            <a:pPr indent="0" marL="0">
-              <a:buNone/>
-            </a:pPr>
-            <a:r>
-              <a:rPr lang="en-US" sz="1450" b="1" dirty="0">
-                <a:solidFill>
-                  <a:srgbClr val="0F5132"/>
-                </a:solidFill>
-                <a:latin typeface="Calibri" pitchFamily="34" charset="0"/>
-                <a:ea typeface="Calibri" pitchFamily="34" charset="-122"/>
-                <a:cs typeface="Calibri" pitchFamily="34" charset="-120"/>
-              </a:rPr>
-              <a:t>For companies that give bursaries</a:t>
-            </a:r>
-            <a:endParaRPr lang="en-US" sz="1450" dirty="0"/>
-          </a:p>
-        </p:txBody>
-      </p:sp>
-      <p:sp>
-        <p:nvSpPr>
-          <p:cNvPr id="27" name="Text 25"/>
-          <p:cNvSpPr txBox="1"/>
-          <p:nvPr/>
-        </p:nvSpPr>
-        <p:spPr>
-          <a:xfrm>
-            <a:off x="6684264" y="4645152"/>
-            <a:ext cx="5038344" cy="1243584"/>
-          </a:xfrm>
-          <a:prstGeom prst="rect">
-            <a:avLst/>
-          </a:prstGeom>
-          <a:noFill/>
-          <a:ln/>
-        </p:spPr>
-        <p:txBody>
-          <a:bodyPr wrap="square" lIns="0" tIns="0" rIns="0" bIns="0" rtlCol="0" anchor="t"/>
-          <a:lstStyle/>
-          <a:p>
-            <a:pPr marL="342900" indent="-342900">
-              <a:spcAft>
-                <a:spcPts val="500"/>
-              </a:spcAft>
-              <a:buSzPct val="100000"/>
-              <a:buChar char="•"/>
-            </a:pPr>
-            <a:r>
-              <a:rPr lang="en-US" sz="1250" dirty="0">
-                <a:solidFill>
-                  <a:srgbClr val="16211C"/>
-                </a:solidFill>
-                <a:latin typeface="Calibri" pitchFamily="34" charset="0"/>
-                <a:ea typeface="Calibri" pitchFamily="34" charset="-122"/>
-                <a:cs typeface="Calibri" pitchFamily="34" charset="-120"/>
-              </a:rPr>
-              <a:t>Advertise a bursary with clear rules</a:t>
-            </a:r>
-            <a:endParaRPr lang="en-US" sz="1250" dirty="0"/>
-          </a:p>
-          <a:p>
-            <a:pPr marL="342900" indent="-342900">
-              <a:spcAft>
-                <a:spcPts val="500"/>
-              </a:spcAft>
-              <a:buSzPct val="100000"/>
-              <a:buChar char="•"/>
-            </a:pPr>
-            <a:r>
-              <a:rPr lang="en-US" sz="1250" dirty="0">
-                <a:solidFill>
-                  <a:srgbClr val="16211C"/>
-                </a:solidFill>
-                <a:latin typeface="Calibri" pitchFamily="34" charset="0"/>
-                <a:ea typeface="Calibri" pitchFamily="34" charset="-122"/>
-                <a:cs typeface="Calibri" pitchFamily="34" charset="-120"/>
-              </a:rPr>
-              <a:t>Applications arrive organised and already checked</a:t>
-            </a:r>
-            <a:endParaRPr lang="en-US" sz="1250" dirty="0"/>
-          </a:p>
-          <a:p>
-            <a:pPr marL="342900" indent="-342900">
-              <a:spcAft>
-                <a:spcPts val="500"/>
-              </a:spcAft>
-              <a:buSzPct val="100000"/>
-              <a:buChar char="•"/>
-            </a:pPr>
-            <a:r>
-              <a:rPr lang="en-US" sz="1250" dirty="0">
-                <a:solidFill>
-                  <a:srgbClr val="16211C"/>
-                </a:solidFill>
-                <a:latin typeface="Calibri" pitchFamily="34" charset="0"/>
-                <a:ea typeface="Calibri" pitchFamily="34" charset="-122"/>
-                <a:cs typeface="Calibri" pitchFamily="34" charset="-120"/>
-              </a:rPr>
-              <a:t>Review, shortlist and choose, with every step recorded</a:t>
-            </a:r>
-            <a:endParaRPr lang="en-US" sz="1250" dirty="0"/>
+          <p:cNvPr id="24" name="Text 22"/>
+          <p:cNvSpPr txBox="1"/>
+          <p:nvPr/>
+        </p:nvSpPr>
+        <p:spPr>
+          <a:xfrm>
+            <a:off x="566928" y="5815584"/>
+            <a:ext cx="11027664" cy="566928"/>
+          </a:xfrm>
+          <a:prstGeom prst="rect">
+            <a:avLst/>
+          </a:prstGeom>
+          <a:noFill/>
+          <a:ln/>
+        </p:spPr>
+        <p:txBody>
+          <a:bodyPr wrap="square" lIns="0" tIns="0" rIns="0" bIns="0" rtlCol="0" anchor="ctr"/>
+          <a:lstStyle/>
+          <a:p>
+            <a:pPr algn="ctr" indent="0" marL="0">
+              <a:buNone/>
+            </a:pPr>
+            <a:r>
+              <a:rPr lang="en-US" sz="1350" b="1" dirty="0">
+                <a:solidFill>
+                  <a:srgbClr val="FFFFFF"/>
+                </a:solidFill>
+                <a:latin typeface="Calibri" pitchFamily="34" charset="0"/>
+                <a:ea typeface="Calibri" pitchFamily="34" charset="-122"/>
+                <a:cs typeface="Calibri" pitchFamily="34" charset="-120"/>
+              </a:rPr>
+              <a:t>A high score does not mean they qualify. We check that separately.</a:t>
+            </a:r>
+            <a:endParaRPr lang="en-US" sz="1350" dirty="0"/>
           </a:p>
         </p:txBody>
       </p:sp>
